--- a/reports/Presentation.pptx
+++ b/reports/Presentation.pptx
@@ -6,7 +6,7 @@
   </p:sldMasterIdLst>
   <p:sldIdLst>
     <p:sldId id="256" r:id="rId7"/>
-    <p:sldId id="257" r:id="rId8"/>
+    <p:sldId id="257" r:id="rId9"/>
     <p:sldId id="258" r:id="rId10"/>
     <p:sldId id="259" r:id="rId11"/>
     <p:sldId id="260" r:id="rId12"/>
@@ -17,7 +17,6 @@
     <p:sldId id="265" r:id="rId17"/>
     <p:sldId id="266" r:id="rId18"/>
     <p:sldId id="267" r:id="rId19"/>
-    <p:sldId id="268" r:id="rId20"/>
   </p:sldIdLst>
   <p:sldSz cx="12188952" cy="6858000" type="screen4x3"/>
   <p:notesSz cx="6858000" cy="9144000"/>
@@ -514,7 +513,7 @@
           <a:lstStyle/>
           <a:p>
             <a:r>
-              <a:t>** Good morning/afternoon. Today I am presenting our Mutual Fund Analytics and Risk Platform. This platform serves as an end-to-end quantitative tool that moves data from raw records to clean relational database tables, calculates complex risk-adjusted ratios, and presents actionable insights in an interactive Power BI dashboard.</a:t>
+              <a:t>Welcome to the presentation of our Mutual Fund Analytics and Risk Platform. This platform represents an end-to-end data pipeline, from raw AMFI file ingestion to quantitative risk calculation and Power BI visualization.</a:t>
             </a:r>
           </a:p>
         </p:txBody>
@@ -584,7 +583,7 @@
           <a:lstStyle/>
           <a:p>
             <a:r>
-              <a:t>** The custom theme file ensures consistent branding. Conditional formatting helps users identify top performers, while dynamic benchmarking charts compare returns against Nifty benchmarks.</a:t>
+              <a:t>Our behavior analysis shows that systematic investment plans (SIP) encourage more disciplined retail behavior, showing significantly higher continuity rates than lumpsum products.</a:t>
             </a:r>
           </a:p>
         </p:txBody>
@@ -654,7 +653,7 @@
           <a:lstStyle/>
           <a:p>
             <a:r>
-              <a:t>** We recommend that asset managers adjust sectoral allocations to manage concentration risk, emphasize SIP products to stabilize inflows, and utilize the weighted scorecard to identify top-performing funds.</a:t>
+              <a:t>The Power BI dashboard is designed for high visual contrast, featuring a geographical heatmap of transactions, risk bubbles, and dynamic benchmark comparisons.</a:t>
             </a:r>
           </a:p>
         </p:txBody>
@@ -724,7 +723,7 @@
           <a:lstStyle/>
           <a:p>
             <a:r>
-              <a:t>** Thank you for your time. The code, notebooks, and reports are available in the repository. I would be happy to take any questions.</a:t>
+              <a:t>We recommend implementing sector concentration limits when HHIs exceed 2,500, focusing on systematic plans to stabilize inflows, and anchoring conservative clients in large-cap funds.</a:t>
             </a:r>
           </a:p>
         </p:txBody>
@@ -794,7 +793,7 @@
           <a:lstStyle/>
           <a:p>
             <a:r>
-              <a:t>** Many investment managers struggle with fragmented data. Real-time updates are slow, and calculating downside tail risk or sector concentrations remains a manual process. This dashboard addresses these challenges by automating quantitative analytics.</a:t>
+              <a:t>Advisors and portfolio managers struggle with scattered data. Calculating real-time risk-adjusted returns or monitoring retail inflows typically requires manual effort, which lags volatile market movements.</a:t>
             </a:r>
           </a:p>
         </p:txBody>
@@ -864,7 +863,7 @@
           <a:lstStyle/>
           <a:p>
             <a:r>
-              <a:t>** We integrate daily NAV records, retail transaction histories, Nifty benchmarks, and portfolio holdings. This provides a unified data model to evaluate returns, costs, and risk profiles.</a:t>
+              <a:t>We consolidated daily NAV records, retail transaction histories, Nifty benchmarks, and portfolio holdings to establish a single, unified dataset for calculations.</a:t>
             </a:r>
           </a:p>
         </p:txBody>
@@ -934,7 +933,7 @@
           <a:lstStyle/>
           <a:p>
             <a:r>
-              <a:t>** Our pipeline is fully automated. The master orchestrator runs data cleaning, downloads benchmarks, and populates the SQLite database. The star schema is optimized for analytical query performance.</a:t>
+              <a:t>Our pipeline processes raw files, checks schema columns, and loads data into a star schema in SQLite. This database is optimized for analytical queries.</a:t>
             </a:r>
           </a:p>
         </p:txBody>
@@ -1004,7 +1003,7 @@
           <a:lstStyle/>
           <a:p>
             <a:r>
-              <a:t>** Our EDA revealed strong outperformance in mid and small cap segments. The returns data shows fat-tail distributions, while correlation analysis highlights how sectoral funds can help diversify a portfolio.</a:t>
+              <a:t>We resolved several key production challenges, including handling MultiIndex columns from yfinance, Kaleido export freezes on Windows, and invalid transaction dates.</a:t>
             </a:r>
           </a:p>
         </p:txBody>
@@ -1074,7 +1073,7 @@
           <a:lstStyle/>
           <a:p>
             <a:r>
-              <a:t>** We found that higher expense ratios drag down net returns. At the same time, systematic investment plan (SIP) inflows grew steadily, showing rising retail investor participation.</a:t>
+              <a:t>Exploratory analysis shows large-cap funds correlate closely, while the Tech fund acts as a good diversifier. We also confirmed that higher expense ratios drag down long-term compounding returns.</a:t>
             </a:r>
           </a:p>
         </p:txBody>
@@ -1144,7 +1143,7 @@
           <a:lstStyle/>
           <a:p>
             <a:r>
-              <a:t>** The weighted scorecard ranks funds based on five factors. DSP Top 100 ranked first due to high Sharpe and Alpha, while Mirae Asset ranked second due to its strong drawdown control.</a:t>
+              <a:t>The scorecard ranks the 10 mutual funds based on both risk and returns. DSP Top 100 ranked first due to active alpha, while Mirae Asset ranked second due to low drawdown.</a:t>
             </a:r>
           </a:p>
         </p:txBody>
@@ -1214,7 +1213,7 @@
           <a:lstStyle/>
           <a:p>
             <a:r>
-              <a:t>** Advanced risk analytics confirm that sectoral concentration increases tail risk. HHI analysis highlights that the Tech Fund has higher downside risk compared to diversified large-cap options.</a:t>
+              <a:t>We calculated the Herfindahl-Hirschman Index (HHI). High HHI values indicate sector concentration, which is typical for specialized sectoral funds.</a:t>
             </a:r>
           </a:p>
         </p:txBody>
@@ -1284,7 +1283,7 @@
           <a:lstStyle/>
           <a:p>
             <a:r>
-              <a:t>** The dashboard uses a 4-page dark-mode layout. It features a geographical map of inflows, custom hover tooltips for risk metrics, and interactive drill-through pages for transaction-level histories.</a:t>
+              <a:t>Tail risk analysis confirms that specialized sector exposure leads to larger daily Value at Risk (VaR) and Conditional VaR (CVaR) thresholds.</a:t>
             </a:r>
           </a:p>
         </p:txBody>
@@ -4321,7 +4320,7 @@
           <a:lstStyle/>
           <a:p>
             <a:pPr>
-              <a:defRPr sz="3600" b="1">
+              <a:defRPr sz="3200" b="1">
                 <a:solidFill>
                   <a:srgbClr val="00E5FF"/>
                 </a:solidFill>
@@ -4329,7 +4328,7 @@
               </a:defRPr>
             </a:pPr>
             <a:r>
-              <a:t>Bluestock Capstone</a:t>
+              <a:t>Mutual Fund Analytics &amp; Risk Platform</a:t>
             </a:r>
           </a:p>
         </p:txBody>
@@ -4355,7 +4354,70 @@
             <a:spAutoFit/>
           </a:bodyPr>
           <a:lstStyle/>
-          <a:p/>
+          <a:p>
+            <a:pPr>
+              <a:spcAft>
+                <a:spcPts val="2000"/>
+              </a:spcAft>
+              <a:defRPr sz="1800" i="1">
+                <a:solidFill>
+                  <a:srgbClr val="00E5FF"/>
+                </a:solidFill>
+                <a:latin typeface="Arial"/>
+              </a:defRPr>
+            </a:pPr>
+            <a:r>
+              <a:t>Quantitative Risk Modeling, Inflow Cohorts, &amp; Power BI Dashboard Specs</a:t>
+            </a:r>
+          </a:p>
+          <a:p>
+            <a:pPr>
+              <a:spcAft>
+                <a:spcPts val="1200"/>
+              </a:spcAft>
+              <a:defRPr sz="1600">
+                <a:solidFill>
+                  <a:srgbClr val="DCDCDC"/>
+                </a:solidFill>
+                <a:latin typeface="Arial"/>
+              </a:defRPr>
+            </a:pPr>
+            <a:r>
+              <a:t>• Developer: Lead Data Analytics Consultant / Senior Quantitative Analyst</a:t>
+            </a:r>
+          </a:p>
+          <a:p>
+            <a:pPr>
+              <a:spcAft>
+                <a:spcPts val="1200"/>
+              </a:spcAft>
+              <a:defRPr sz="1600">
+                <a:solidFill>
+                  <a:srgbClr val="DCDCDC"/>
+                </a:solidFill>
+                <a:latin typeface="Arial"/>
+              </a:defRPr>
+            </a:pPr>
+            <a:r>
+              <a:t>• Technology Stack: Python, SQLite, yfinance API, and Power BI</a:t>
+            </a:r>
+          </a:p>
+          <a:p>
+            <a:pPr>
+              <a:spcAft>
+                <a:spcPts val="1200"/>
+              </a:spcAft>
+              <a:defRPr sz="1600">
+                <a:solidFill>
+                  <a:srgbClr val="DCDCDC"/>
+                </a:solidFill>
+                <a:latin typeface="Arial"/>
+              </a:defRPr>
+            </a:pPr>
+            <a:r>
+              <a:t>• Scope: Analysis of 10 mutual funds across returns, costs, and retail inflows</a:t>
+            </a:r>
+          </a:p>
         </p:txBody>
       </p:sp>
     </p:spTree>
@@ -4407,7 +4469,7 @@
           <a:lstStyle/>
           <a:p>
             <a:pPr>
-              <a:defRPr sz="3600" b="1">
+              <a:defRPr sz="3200" b="1">
                 <a:solidFill>
                   <a:srgbClr val="00E5FF"/>
                 </a:solidFill>
@@ -4415,7 +4477,7 @@
               </a:defRPr>
             </a:pPr>
             <a:r>
-              <a:t> Power BI Dashboard: Visual Infrastructure</a:t>
+              <a:t>Retail Cohorts &amp; SIP continuity</a:t>
             </a:r>
           </a:p>
         </p:txBody>
@@ -4444,25 +4506,25 @@
           <a:p>
             <a:pPr>
               <a:spcAft>
-                <a:spcPts val="800"/>
+                <a:spcPts val="2000"/>
               </a:spcAft>
-              <a:defRPr sz="1800">
-                <a:solidFill>
-                  <a:srgbClr val="DCDCDC"/>
+              <a:defRPr sz="1800" i="1">
+                <a:solidFill>
+                  <a:srgbClr val="00E5FF"/>
                 </a:solidFill>
                 <a:latin typeface="Arial"/>
               </a:defRPr>
             </a:pPr>
             <a:r>
-              <a:t>Key Points:</a:t>
+              <a:t>Analyzing investor behavior</a:t>
             </a:r>
           </a:p>
           <a:p>
             <a:pPr>
               <a:spcAft>
-                <a:spcPts val="800"/>
+                <a:spcPts val="1200"/>
               </a:spcAft>
-              <a:defRPr sz="1800">
+              <a:defRPr sz="1600">
                 <a:solidFill>
                   <a:srgbClr val="DCDCDC"/>
                 </a:solidFill>
@@ -4470,15 +4532,15 @@
               </a:defRPr>
             </a:pPr>
             <a:r>
-              <a:t>Executive Layout: 4 pages designed with a dark-mode theme to prioritize visual readability.</a:t>
+              <a:t>• SIP accounts: Active accounts show strong continuity (87.2% active rate)</a:t>
             </a:r>
           </a:p>
           <a:p>
             <a:pPr>
               <a:spcAft>
-                <a:spcPts val="800"/>
+                <a:spcPts val="1200"/>
               </a:spcAft>
-              <a:defRPr sz="1800">
+              <a:defRPr sz="1600">
                 <a:solidFill>
                   <a:srgbClr val="DCDCDC"/>
                 </a:solidFill>
@@ -4486,15 +4548,15 @@
               </a:defRPr>
             </a:pPr>
             <a:r>
-              <a:t>Indian State Map: Displays retail transaction volumes by geographical state.</a:t>
+              <a:t>• Inactive accounts: Show lower continuity and short streaks before churning</a:t>
             </a:r>
           </a:p>
           <a:p>
             <a:pPr>
               <a:spcAft>
-                <a:spcPts val="800"/>
+                <a:spcPts val="1200"/>
               </a:spcAft>
-              <a:defRPr sz="1800">
+              <a:defRPr sz="1600">
                 <a:solidFill>
                   <a:srgbClr val="DCDCDC"/>
                 </a:solidFill>
@@ -4502,39 +4564,7 @@
               </a:defRPr>
             </a:pPr>
             <a:r>
-              <a:t>Fund Detail Drill-Through: Interactive drill-through to view transaction-level histories for selected funds.</a:t>
-            </a:r>
-          </a:p>
-          <a:p>
-            <a:pPr>
-              <a:spcAft>
-                <a:spcPts val="800"/>
-              </a:spcAft>
-              <a:defRPr sz="1800">
-                <a:solidFill>
-                  <a:srgbClr val="DCDCDC"/>
-                </a:solidFill>
-                <a:latin typeface="Arial"/>
-              </a:defRPr>
-            </a:pPr>
-            <a:r>
-              <a:t>Custom Tooltips: Hover cards display Sharpe, Sortino, and Beta statistics.</a:t>
-            </a:r>
-          </a:p>
-          <a:p>
-            <a:pPr>
-              <a:spcAft>
-                <a:spcPts val="800"/>
-              </a:spcAft>
-              <a:defRPr sz="1800">
-                <a:solidFill>
-                  <a:srgbClr val="DCDCDC"/>
-                </a:solidFill>
-                <a:latin typeface="Arial"/>
-              </a:defRPr>
-            </a:pPr>
-            <a:r>
-              <a:t>Visual Guidelines: Left side: List of dashboard pages. Right side: Graphic wireframe representation of the dashboard layout.</a:t>
+              <a:t>• Vintage cohorts: Capital retention is higher among aggressive risk-profile investors during dips</a:t>
             </a:r>
           </a:p>
         </p:txBody>
@@ -4588,7 +4618,7 @@
           <a:lstStyle/>
           <a:p>
             <a:pPr>
-              <a:defRPr sz="3600" b="1">
+              <a:defRPr sz="3200" b="1">
                 <a:solidFill>
                   <a:srgbClr val="00E5FF"/>
                 </a:solidFill>
@@ -4596,7 +4626,7 @@
               </a:defRPr>
             </a:pPr>
             <a:r>
-              <a:t> Dashboard Visual Specifications &amp; Assets</a:t>
+              <a:t>Executive BI Dashboard Blueprint</a:t>
             </a:r>
           </a:p>
         </p:txBody>
@@ -4625,25 +4655,25 @@
           <a:p>
             <a:pPr>
               <a:spcAft>
-                <a:spcPts val="800"/>
+                <a:spcPts val="2000"/>
               </a:spcAft>
-              <a:defRPr sz="1800">
-                <a:solidFill>
-                  <a:srgbClr val="DCDCDC"/>
+              <a:defRPr sz="1800" i="1">
+                <a:solidFill>
+                  <a:srgbClr val="00E5FF"/>
                 </a:solidFill>
                 <a:latin typeface="Arial"/>
               </a:defRPr>
             </a:pPr>
             <a:r>
-              <a:t>Key Points:</a:t>
+              <a:t>4-Page Power BI layout specification</a:t>
             </a:r>
           </a:p>
           <a:p>
             <a:pPr>
               <a:spcAft>
-                <a:spcPts val="800"/>
+                <a:spcPts val="1200"/>
               </a:spcAft>
-              <a:defRPr sz="1800">
+              <a:defRPr sz="1600">
                 <a:solidFill>
                   <a:srgbClr val="DCDCDC"/>
                 </a:solidFill>
@@ -4651,15 +4681,15 @@
               </a:defRPr>
             </a:pPr>
             <a:r>
-              <a:t>Branding Palette: Custom theme file (`bluestock_theme.json`) sets the visual colors to deep navy and cyan.</a:t>
+              <a:t>• Branding Theme: Custom dark-mode json palette (deep carbon background and cyan text)</a:t>
             </a:r>
           </a:p>
           <a:p>
             <a:pPr>
               <a:spcAft>
-                <a:spcPts val="800"/>
+                <a:spcPts val="1200"/>
               </a:spcAft>
-              <a:defRPr sz="1800">
+              <a:defRPr sz="1600">
                 <a:solidFill>
                   <a:srgbClr val="DCDCDC"/>
                 </a:solidFill>
@@ -4667,15 +4697,15 @@
               </a:defRPr>
             </a:pPr>
             <a:r>
-              <a:t>Conditional Formatting: Data bars highlight Sharpe ratios, while color scales highlight maximum drawdowns.</a:t>
+              <a:t>• Interactive features: Custom hover tooltip canvas for metrics and drill-through links</a:t>
             </a:r>
           </a:p>
           <a:p>
             <a:pPr>
               <a:spcAft>
-                <a:spcPts val="800"/>
+                <a:spcPts val="1200"/>
               </a:spcAft>
-              <a:defRPr sz="1800">
+              <a:defRPr sz="1600">
                 <a:solidFill>
                   <a:srgbClr val="DCDCDC"/>
                 </a:solidFill>
@@ -4683,23 +4713,7 @@
               </a:defRPr>
             </a:pPr>
             <a:r>
-              <a:t>Dynamic Comparison: Dynamic growth charts compare cumulative returns to the Nifty 100 benchmark.</a:t>
-            </a:r>
-          </a:p>
-          <a:p>
-            <a:pPr>
-              <a:spcAft>
-                <a:spcPts val="800"/>
-              </a:spcAft>
-              <a:defRPr sz="1800">
-                <a:solidFill>
-                  <a:srgbClr val="DCDCDC"/>
-                </a:solidFill>
-                <a:latin typeface="Arial"/>
-              </a:defRPr>
-            </a:pPr>
-            <a:r>
-              <a:t>Visual Guidelines: Dashboard visual components and color palette swatches.</a:t>
+              <a:t>• Visual specs: Inflows mapped by state, risk bubbles, and dynamic growth curves</a:t>
             </a:r>
           </a:p>
         </p:txBody>
@@ -4753,7 +4767,7 @@
           <a:lstStyle/>
           <a:p>
             <a:pPr>
-              <a:defRPr sz="3600" b="1">
+              <a:defRPr sz="3200" b="1">
                 <a:solidFill>
                   <a:srgbClr val="00E5FF"/>
                 </a:solidFill>
@@ -4761,7 +4775,7 @@
               </a:defRPr>
             </a:pPr>
             <a:r>
-              <a:t> Strategic Insights for Asset Managers</a:t>
+              <a:t>Analyst Recommendations</a:t>
             </a:r>
           </a:p>
         </p:txBody>
@@ -4790,25 +4804,25 @@
           <a:p>
             <a:pPr>
               <a:spcAft>
-                <a:spcPts val="800"/>
+                <a:spcPts val="2000"/>
               </a:spcAft>
-              <a:defRPr sz="1800">
-                <a:solidFill>
-                  <a:srgbClr val="DCDCDC"/>
+              <a:defRPr sz="1800" i="1">
+                <a:solidFill>
+                  <a:srgbClr val="00E5FF"/>
                 </a:solidFill>
                 <a:latin typeface="Arial"/>
               </a:defRPr>
             </a:pPr>
             <a:r>
-              <a:t>Key Points:</a:t>
+              <a:t>Actionable insights for advisors and managers</a:t>
             </a:r>
           </a:p>
           <a:p>
             <a:pPr>
               <a:spcAft>
-                <a:spcPts val="800"/>
+                <a:spcPts val="1200"/>
               </a:spcAft>
-              <a:defRPr sz="1800">
+              <a:defRPr sz="1600">
                 <a:solidFill>
                   <a:srgbClr val="DCDCDC"/>
                 </a:solidFill>
@@ -4816,15 +4830,15 @@
               </a:defRPr>
             </a:pPr>
             <a:r>
-              <a:t>Monitor Concentration: Adjust sectoral allocations when the HHI rises above 2,500 to mitigate tail risk.</a:t>
+              <a:t>• Sector Concentration: Monitor sector weights and rebalance when the HHI exceeds 2,500</a:t>
             </a:r>
           </a:p>
           <a:p>
             <a:pPr>
               <a:spcAft>
-                <a:spcPts val="800"/>
+                <a:spcPts val="1200"/>
               </a:spcAft>
-              <a:defRPr sz="1800">
+              <a:defRPr sz="1600">
                 <a:solidFill>
                   <a:srgbClr val="DCDCDC"/>
                 </a:solidFill>
@@ -4832,15 +4846,15 @@
               </a:defRPr>
             </a:pPr>
             <a:r>
-              <a:t>Promote Systematic Inflows: Emphasize SIP products to extend investor holding periods and stabilize fund AUM.</a:t>
+              <a:t>• Systematic Products: Emphasize SIP plans in retail marketing to build steady, sticky AUM</a:t>
             </a:r>
           </a:p>
           <a:p>
             <a:pPr>
               <a:spcAft>
-                <a:spcPts val="800"/>
+                <a:spcPts val="1200"/>
               </a:spcAft>
-              <a:defRPr sz="1800">
+              <a:defRPr sz="1600">
                 <a:solidFill>
                   <a:srgbClr val="DCDCDC"/>
                 </a:solidFill>
@@ -4848,188 +4862,7 @@
               </a:defRPr>
             </a:pPr>
             <a:r>
-              <a:t>Leverage Scorecard: Use the multi-factor scorecard to identify top-performing funds on a risk-adjusted basis.</a:t>
-            </a:r>
-          </a:p>
-          <a:p>
-            <a:pPr>
-              <a:spcAft>
-                <a:spcPts val="800"/>
-              </a:spcAft>
-              <a:defRPr sz="1800">
-                <a:solidFill>
-                  <a:srgbClr val="DCDCDC"/>
-                </a:solidFill>
-                <a:latin typeface="Arial"/>
-              </a:defRPr>
-            </a:pPr>
-            <a:r>
-              <a:t>Visual Guidelines: Summary layout showing recommendations for Risk, Returns, and Business Development.</a:t>
-            </a:r>
-          </a:p>
-        </p:txBody>
-      </p:sp>
-    </p:spTree>
-  </p:cSld>
-  <p:clrMapOvr>
-    <a:masterClrMapping/>
-  </p:clrMapOvr>
-</p:sld>
-</file>
-
-<file path=ppt/slides/slide13.xml><?xml version="1.0" encoding="utf-8"?>
-<p:sld xmlns:a="http://schemas.openxmlformats.org/drawingml/2006/main" xmlns:p="http://schemas.openxmlformats.org/presentationml/2006/main" xmlns:r="http://schemas.openxmlformats.org/officeDocument/2006/relationships">
-  <p:cSld>
-    <p:bg>
-      <p:bgPr>
-        <a:solidFill>
-          <a:srgbClr val="0F111A"/>
-        </a:solidFill>
-        <a:effectLst/>
-      </p:bgPr>
-    </p:bg>
-    <p:spTree>
-      <p:nvGrpSpPr>
-        <p:cNvPr id="1" name=""/>
-        <p:cNvGrpSpPr/>
-        <p:nvPr/>
-      </p:nvGrpSpPr>
-      <p:grpSpPr/>
-      <p:sp>
-        <p:nvSpPr>
-          <p:cNvPr id="2" name="TextBox 1"/>
-          <p:cNvSpPr txBox="1"/>
-          <p:nvPr/>
-        </p:nvSpPr>
-        <p:spPr>
-          <a:xfrm>
-            <a:off x="457200" y="457200"/>
-            <a:ext cx="11274552" cy="1097280"/>
-          </a:xfrm>
-          <a:prstGeom prst="rect">
-            <a:avLst/>
-          </a:prstGeom>
-          <a:noFill/>
-        </p:spPr>
-        <p:txBody>
-          <a:bodyPr wrap="square">
-            <a:spAutoFit/>
-          </a:bodyPr>
-          <a:lstStyle/>
-          <a:p>
-            <a:pPr>
-              <a:defRPr sz="3600" b="1">
-                <a:solidFill>
-                  <a:srgbClr val="00E5FF"/>
-                </a:solidFill>
-                <a:latin typeface="Arial"/>
-              </a:defRPr>
-            </a:pPr>
-            <a:r>
-              <a:t> Thank You &amp; Q&amp;A</a:t>
-            </a:r>
-          </a:p>
-        </p:txBody>
-      </p:sp>
-      <p:sp>
-        <p:nvSpPr>
-          <p:cNvPr id="3" name="TextBox 2"/>
-          <p:cNvSpPr txBox="1"/>
-          <p:nvPr/>
-        </p:nvSpPr>
-        <p:spPr>
-          <a:xfrm>
-            <a:off x="457200" y="1645920"/>
-            <a:ext cx="11274552" cy="4572000"/>
-          </a:xfrm>
-          <a:prstGeom prst="rect">
-            <a:avLst/>
-          </a:prstGeom>
-          <a:noFill/>
-        </p:spPr>
-        <p:txBody>
-          <a:bodyPr wrap="square">
-            <a:spAutoFit/>
-          </a:bodyPr>
-          <a:lstStyle/>
-          <a:p>
-            <a:pPr>
-              <a:spcAft>
-                <a:spcPts val="800"/>
-              </a:spcAft>
-              <a:defRPr sz="1800">
-                <a:solidFill>
-                  <a:srgbClr val="DCDCDC"/>
-                </a:solidFill>
-                <a:latin typeface="Arial"/>
-              </a:defRPr>
-            </a:pPr>
-            <a:r>
-              <a:t>Content:</a:t>
-            </a:r>
-          </a:p>
-          <a:p>
-            <a:pPr>
-              <a:spcAft>
-                <a:spcPts val="800"/>
-              </a:spcAft>
-              <a:defRPr sz="1800">
-                <a:solidFill>
-                  <a:srgbClr val="DCDCDC"/>
-                </a:solidFill>
-                <a:latin typeface="Arial"/>
-              </a:defRPr>
-            </a:pPr>
-            <a:r>
-              <a:t>Mutual Fund Analytics Capstone Project</a:t>
-            </a:r>
-          </a:p>
-          <a:p>
-            <a:pPr>
-              <a:spcAft>
-                <a:spcPts val="800"/>
-              </a:spcAft>
-              <a:defRPr sz="1800">
-                <a:solidFill>
-                  <a:srgbClr val="DCDCDC"/>
-                </a:solidFill>
-                <a:latin typeface="Arial"/>
-              </a:defRPr>
-            </a:pPr>
-            <a:r>
-              <a:t>Documentation &amp; Codebase: `README.md`, `run_pipeline.py`, `notebooks/`, `reports/`</a:t>
-            </a:r>
-          </a:p>
-          <a:p>
-            <a:pPr>
-              <a:spcAft>
-                <a:spcPts val="800"/>
-              </a:spcAft>
-              <a:defRPr sz="1800">
-                <a:solidFill>
-                  <a:srgbClr val="DCDCDC"/>
-                </a:solidFill>
-                <a:latin typeface="Arial"/>
-              </a:defRPr>
-            </a:pPr>
-            <a:r>
-              <a:t>Q&amp;A Session</a:t>
-            </a:r>
-          </a:p>
-          <a:p>
-            <a:pPr>
-              <a:spcAft>
-                <a:spcPts val="800"/>
-              </a:spcAft>
-              <a:defRPr sz="1800">
-                <a:solidFill>
-                  <a:srgbClr val="DCDCDC"/>
-                </a:solidFill>
-                <a:latin typeface="Arial"/>
-              </a:defRPr>
-            </a:pPr>
-            <a:r>
-              <a:t>Visual Guidelines: Widescreen clean dark template.</a:t>
+              <a:t>• Conservative Folios: Anchor conservative client portfolios in Large Cap allocations</a:t>
             </a:r>
           </a:p>
         </p:txBody>
@@ -5083,7 +4916,7 @@
           <a:lstStyle/>
           <a:p>
             <a:pPr>
-              <a:defRPr sz="3600" b="1">
+              <a:defRPr sz="3200" b="1">
                 <a:solidFill>
                   <a:srgbClr val="00E5FF"/>
                 </a:solidFill>
@@ -5091,7 +4924,7 @@
               </a:defRPr>
             </a:pPr>
             <a:r>
-              <a:t> Mutual Fund Analytics &amp; Quantitative Risk Platform</a:t>
+              <a:t>The Problem: Data Fragmentation</a:t>
             </a:r>
           </a:p>
         </p:txBody>
@@ -5120,25 +4953,25 @@
           <a:p>
             <a:pPr>
               <a:spcAft>
-                <a:spcPts val="800"/>
+                <a:spcPts val="2000"/>
               </a:spcAft>
-              <a:defRPr sz="1800">
-                <a:solidFill>
-                  <a:srgbClr val="DCDCDC"/>
+              <a:defRPr sz="1800" i="1">
+                <a:solidFill>
+                  <a:srgbClr val="00E5FF"/>
                 </a:solidFill>
                 <a:latin typeface="Arial"/>
               </a:defRPr>
             </a:pPr>
             <a:r>
-              <a:t>   Subtitle: Portfolio Risk Modeling, Segment Analytics, &amp; BI Dashboard Orchestration</a:t>
+              <a:t>Challenges in mutual fund analysis</a:t>
             </a:r>
           </a:p>
           <a:p>
             <a:pPr>
               <a:spcAft>
-                <a:spcPts val="800"/>
+                <a:spcPts val="1200"/>
               </a:spcAft>
-              <a:defRPr sz="1800">
+              <a:defRPr sz="1600">
                 <a:solidFill>
                   <a:srgbClr val="DCDCDC"/>
                 </a:solidFill>
@@ -5146,15 +4979,15 @@
               </a:defRPr>
             </a:pPr>
             <a:r>
-              <a:t>   Presenter: Lead Data Analytics Consultant / Quantitative Analyst</a:t>
+              <a:t>• Fragmented data: Daily NAV sheets, retail ledger transactions, and indices are scattered</a:t>
             </a:r>
           </a:p>
           <a:p>
             <a:pPr>
               <a:spcAft>
-                <a:spcPts val="800"/>
+                <a:spcPts val="1200"/>
               </a:spcAft>
-              <a:defRPr sz="1800">
+              <a:defRPr sz="1600">
                 <a:solidFill>
                   <a:srgbClr val="DCDCDC"/>
                 </a:solidFill>
@@ -5162,7 +4995,23 @@
               </a:defRPr>
             </a:pPr>
             <a:r>
-              <a:t>Visual Guidelines: Centered, premium charcoal background (`#0F111A`), high-contrast electric cyan text (`#00E5FF`), subtle geometric background shapes.</a:t>
+              <a:t>• Reporting lags: Standard quarterly performance ratios lack the latency needed for rapid decisions</a:t>
+            </a:r>
+          </a:p>
+          <a:p>
+            <a:pPr>
+              <a:spcAft>
+                <a:spcPts val="1200"/>
+              </a:spcAft>
+              <a:defRPr sz="1600">
+                <a:solidFill>
+                  <a:srgbClr val="DCDCDC"/>
+                </a:solidFill>
+                <a:latin typeface="Arial"/>
+              </a:defRPr>
+            </a:pPr>
+            <a:r>
+              <a:t>• Undefined risk exposure: Advisors lack simple metrics to evaluate sector concentration and tail risk</a:t>
             </a:r>
           </a:p>
         </p:txBody>
@@ -5216,7 +5065,7 @@
           <a:lstStyle/>
           <a:p>
             <a:pPr>
-              <a:defRPr sz="3600" b="1">
+              <a:defRPr sz="3200" b="1">
                 <a:solidFill>
                   <a:srgbClr val="00E5FF"/>
                 </a:solidFill>
@@ -5224,7 +5073,7 @@
               </a:defRPr>
             </a:pPr>
             <a:r>
-              <a:t> The Problem: Data Fragmentation &amp; Risk Ambiguity</a:t>
+              <a:t>Unified Data Assets Ingested</a:t>
             </a:r>
           </a:p>
         </p:txBody>
@@ -5253,25 +5102,25 @@
           <a:p>
             <a:pPr>
               <a:spcAft>
-                <a:spcPts val="800"/>
+                <a:spcPts val="2000"/>
               </a:spcAft>
-              <a:defRPr sz="1800">
-                <a:solidFill>
-                  <a:srgbClr val="DCDCDC"/>
+              <a:defRPr sz="1800" i="1">
+                <a:solidFill>
+                  <a:srgbClr val="00E5FF"/>
                 </a:solidFill>
                 <a:latin typeface="Arial"/>
               </a:defRPr>
             </a:pPr>
             <a:r>
-              <a:t>Key Points:</a:t>
+              <a:t>Platform inputs</a:t>
             </a:r>
           </a:p>
           <a:p>
             <a:pPr>
               <a:spcAft>
-                <a:spcPts val="800"/>
+                <a:spcPts val="1200"/>
               </a:spcAft>
-              <a:defRPr sz="1800">
+              <a:defRPr sz="1600">
                 <a:solidFill>
                   <a:srgbClr val="DCDCDC"/>
                 </a:solidFill>
@@ -5279,15 +5128,15 @@
               </a:defRPr>
             </a:pPr>
             <a:r>
-              <a:t>Data Silos: Historical NAVs, transactional sheets, and benchmark indices are fragmented across different formats.</a:t>
+              <a:t>• Daily NAV Histories: Ingested 7,798 AMFI daily NAV rows (2022–2024)</a:t>
             </a:r>
           </a:p>
           <a:p>
             <a:pPr>
               <a:spcAft>
-                <a:spcPts val="800"/>
+                <a:spcPts val="1200"/>
               </a:spcAft>
-              <a:defRPr sz="1800">
+              <a:defRPr sz="1600">
                 <a:solidFill>
                   <a:srgbClr val="DCDCDC"/>
                 </a:solidFill>
@@ -5295,15 +5144,15 @@
               </a:defRPr>
             </a:pPr>
             <a:r>
-              <a:t>Performance Lag: Standard quarterly reports fail to provide the real-time insights needed for volatile market environments.</a:t>
+              <a:t>• Retail Transaction Logs: 1,985 granular buy/sell records across 200 distinct investor profiles</a:t>
             </a:r>
           </a:p>
           <a:p>
             <a:pPr>
               <a:spcAft>
-                <a:spcPts val="800"/>
+                <a:spcPts val="1200"/>
               </a:spcAft>
-              <a:defRPr sz="1800">
+              <a:defRPr sz="1600">
                 <a:solidFill>
                   <a:srgbClr val="DCDCDC"/>
                 </a:solidFill>
@@ -5311,15 +5160,15 @@
               </a:defRPr>
             </a:pPr>
             <a:r>
-              <a:t>Ambiguity in Risk Management: Portfolio managers lack unified metrics (such as VaR, CVaR, HHI, and Beta) to identify sectoral concentration and manage downside risk.</a:t>
+              <a:t>• Benchmark Indices: Daily Nifty 50 and Nifty 100 prices fetched from yfinance API</a:t>
             </a:r>
           </a:p>
           <a:p>
             <a:pPr>
               <a:spcAft>
-                <a:spcPts val="800"/>
+                <a:spcPts val="1200"/>
               </a:spcAft>
-              <a:defRPr sz="1800">
+              <a:defRPr sz="1600">
                 <a:solidFill>
                   <a:srgbClr val="DCDCDC"/>
                 </a:solidFill>
@@ -5327,7 +5176,7 @@
               </a:defRPr>
             </a:pPr>
             <a:r>
-              <a:t>Visual Guidelines: Left side: Bullet list of issues. Right side: Split screen showing a workflow comparison (e.g. Traditional manual reporting vs. Automated analytical pipelines).</a:t>
+              <a:t>• Holdings Allocations: Stock-level allocations mapped across schemes to evaluate sector weights</a:t>
             </a:r>
           </a:p>
         </p:txBody>
@@ -5381,7 +5230,7 @@
           <a:lstStyle/>
           <a:p>
             <a:pPr>
-              <a:defRPr sz="3600" b="1">
+              <a:defRPr sz="3200" b="1">
                 <a:solidFill>
                   <a:srgbClr val="00E5FF"/>
                 </a:solidFill>
@@ -5389,7 +5238,7 @@
               </a:defRPr>
             </a:pPr>
             <a:r>
-              <a:t> Ingesting Market Data &amp; Transaction Records</a:t>
+              <a:t>ETL Ingestion &amp; Database STAR Schema</a:t>
             </a:r>
           </a:p>
         </p:txBody>
@@ -5418,25 +5267,25 @@
           <a:p>
             <a:pPr>
               <a:spcAft>
-                <a:spcPts val="800"/>
+                <a:spcPts val="2000"/>
               </a:spcAft>
-              <a:defRPr sz="1800">
-                <a:solidFill>
-                  <a:srgbClr val="DCDCDC"/>
+              <a:defRPr sz="1800" i="1">
+                <a:solidFill>
+                  <a:srgbClr val="00E5FF"/>
                 </a:solidFill>
                 <a:latin typeface="Arial"/>
               </a:defRPr>
             </a:pPr>
             <a:r>
-              <a:t>Key Points:</a:t>
+              <a:t>Engineered data pipeline</a:t>
             </a:r>
           </a:p>
           <a:p>
             <a:pPr>
               <a:spcAft>
-                <a:spcPts val="800"/>
+                <a:spcPts val="1200"/>
               </a:spcAft>
-              <a:defRPr sz="1800">
+              <a:defRPr sz="1600">
                 <a:solidFill>
                   <a:srgbClr val="DCDCDC"/>
                 </a:solidFill>
@@ -5444,15 +5293,15 @@
               </a:defRPr>
             </a:pPr>
             <a:r>
-              <a:t>Daily NAV History: Ingested 7,798 raw AMFI NAV records (2022–2024) across 10 mutual funds.</a:t>
+              <a:t>• Modular pipeline: run scripts/etl_pipeline.py to process and clean files</a:t>
             </a:r>
           </a:p>
           <a:p>
             <a:pPr>
               <a:spcAft>
-                <a:spcPts val="800"/>
+                <a:spcPts val="1200"/>
               </a:spcAft>
-              <a:defRPr sz="1800">
+              <a:defRPr sz="1600">
                 <a:solidFill>
                   <a:srgbClr val="DCDCDC"/>
                 </a:solidFill>
@@ -5460,15 +5309,15 @@
               </a:defRPr>
             </a:pPr>
             <a:r>
-              <a:t>Retail Transactions: Cleaned 1,985 granular transaction rows for 200 distinct folios.</a:t>
+              <a:t>• SQLite STAR Schema: Loads dimensions (AMC, Scheme, Date, Investor) and facts (NAV, Transact, Performance)</a:t>
             </a:r>
           </a:p>
           <a:p>
             <a:pPr>
               <a:spcAft>
-                <a:spcPts val="800"/>
+                <a:spcPts val="1200"/>
               </a:spcAft>
-              <a:defRPr sz="1800">
+              <a:defRPr sz="1600">
                 <a:solidFill>
                   <a:srgbClr val="DCDCDC"/>
                 </a:solidFill>
@@ -5476,39 +5325,7 @@
               </a:defRPr>
             </a:pPr>
             <a:r>
-              <a:t>Benchmark Feeds: Ingested Nifty 50 and Nifty 100 historical prices via Yahoo Finance API.</a:t>
-            </a:r>
-          </a:p>
-          <a:p>
-            <a:pPr>
-              <a:spcAft>
-                <a:spcPts val="800"/>
-              </a:spcAft>
-              <a:defRPr sz="1800">
-                <a:solidFill>
-                  <a:srgbClr val="DCDCDC"/>
-                </a:solidFill>
-                <a:latin typeface="Arial"/>
-              </a:defRPr>
-            </a:pPr>
-            <a:r>
-              <a:t>Portfolio Holdings: Mapped stock-level allocations to evaluate portfolio concentration.</a:t>
-            </a:r>
-          </a:p>
-          <a:p>
-            <a:pPr>
-              <a:spcAft>
-                <a:spcPts val="800"/>
-              </a:spcAft>
-              <a:defRPr sz="1800">
-                <a:solidFill>
-                  <a:srgbClr val="DCDCDC"/>
-                </a:solidFill>
-                <a:latin typeface="Arial"/>
-              </a:defRPr>
-            </a:pPr>
-            <a:r>
-              <a:t>Visual Guidelines: Clean data dictionary table showing datasets, record counts, and formats.</a:t>
+              <a:t>• Referential integrity: Foreign key mapping and indexes implemented to optimize query performance</a:t>
             </a:r>
           </a:p>
         </p:txBody>
@@ -5562,7 +5379,7 @@
           <a:lstStyle/>
           <a:p>
             <a:pPr>
-              <a:defRPr sz="3600" b="1">
+              <a:defRPr sz="3200" b="1">
                 <a:solidFill>
                   <a:srgbClr val="00E5FF"/>
                 </a:solidFill>
@@ -5570,7 +5387,7 @@
               </a:defRPr>
             </a:pPr>
             <a:r>
-              <a:t> The Data Orchestrator &amp; Star Schema</a:t>
+              <a:t>Engineering Challenges &amp; Resolutions</a:t>
             </a:r>
           </a:p>
         </p:txBody>
@@ -5599,25 +5416,25 @@
           <a:p>
             <a:pPr>
               <a:spcAft>
-                <a:spcPts val="800"/>
+                <a:spcPts val="2000"/>
               </a:spcAft>
-              <a:defRPr sz="1800">
-                <a:solidFill>
-                  <a:srgbClr val="DCDCDC"/>
+              <a:defRPr sz="1800" i="1">
+                <a:solidFill>
+                  <a:srgbClr val="00E5FF"/>
                 </a:solidFill>
                 <a:latin typeface="Arial"/>
               </a:defRPr>
             </a:pPr>
             <a:r>
-              <a:t>Key Points:</a:t>
+              <a:t>Handling raw data anomalies in production</a:t>
             </a:r>
           </a:p>
           <a:p>
             <a:pPr>
               <a:spcAft>
-                <a:spcPts val="800"/>
+                <a:spcPts val="1200"/>
               </a:spcAft>
-              <a:defRPr sz="1800">
+              <a:defRPr sz="1600">
                 <a:solidFill>
                   <a:srgbClr val="DCDCDC"/>
                 </a:solidFill>
@@ -5625,15 +5442,15 @@
               </a:defRPr>
             </a:pPr>
             <a:r>
-              <a:t>Automated Pipeline: Centralized orchestrator `run_pipeline.py` executes data cleaning and updates the SQLite database.</a:t>
+              <a:t>• Plotly Static Export: Windows Kaleido hangs resolved by Matplotlib visualization fallback</a:t>
             </a:r>
           </a:p>
           <a:p>
             <a:pPr>
               <a:spcAft>
-                <a:spcPts val="800"/>
+                <a:spcPts val="1200"/>
               </a:spcAft>
-              <a:defRPr sz="1800">
+              <a:defRPr sz="1600">
                 <a:solidFill>
                   <a:srgbClr val="DCDCDC"/>
                 </a:solidFill>
@@ -5641,15 +5458,15 @@
               </a:defRPr>
             </a:pPr>
             <a:r>
-              <a:t>Star Schema: Built 4 dimension tables and 3 fact tables in SQLite to support analytical queries.</a:t>
+              <a:t>• yfinance API Column Shifting: Solved yfinance MultiIndex column headers programmatically</a:t>
             </a:r>
           </a:p>
           <a:p>
             <a:pPr>
               <a:spcAft>
-                <a:spcPts val="800"/>
+                <a:spcPts val="1200"/>
               </a:spcAft>
-              <a:defRPr sz="1800">
+              <a:defRPr sz="1600">
                 <a:solidFill>
                   <a:srgbClr val="DCDCDC"/>
                 </a:solidFill>
@@ -5657,23 +5474,7 @@
               </a:defRPr>
             </a:pPr>
             <a:r>
-              <a:t>Referential Integrity: Implemented strict primary/foreign key constraints and SQL indexes.</a:t>
-            </a:r>
-          </a:p>
-          <a:p>
-            <a:pPr>
-              <a:spcAft>
-                <a:spcPts val="800"/>
-              </a:spcAft>
-              <a:defRPr sz="1800">
-                <a:solidFill>
-                  <a:srgbClr val="DCDCDC"/>
-                </a:solidFill>
-                <a:latin typeface="Arial"/>
-              </a:defRPr>
-            </a:pPr>
-            <a:r>
-              <a:t>Visual Guidelines: Relational schema diagram linking dimensions to fact tables.</a:t>
+              <a:t>• Dirty Raw Inputs: Coerced invalid dates ('INVALID' string) to NaT and purged them</a:t>
             </a:r>
           </a:p>
         </p:txBody>
@@ -5727,7 +5528,7 @@
           <a:lstStyle/>
           <a:p>
             <a:pPr>
-              <a:defRPr sz="3600" b="1">
+              <a:defRPr sz="3200" b="1">
                 <a:solidFill>
                   <a:srgbClr val="00E5FF"/>
                 </a:solidFill>
@@ -5735,7 +5536,7 @@
               </a:defRPr>
             </a:pPr>
             <a:r>
-              <a:t> Exploratory Data Analysis: NAV &amp; Returns Dynamics</a:t>
+              <a:t>Statistical EDA Insights</a:t>
             </a:r>
           </a:p>
         </p:txBody>
@@ -5764,25 +5565,25 @@
           <a:p>
             <a:pPr>
               <a:spcAft>
-                <a:spcPts val="800"/>
+                <a:spcPts val="2000"/>
               </a:spcAft>
-              <a:defRPr sz="1800">
-                <a:solidFill>
-                  <a:srgbClr val="DCDCDC"/>
+              <a:defRPr sz="1800" i="1">
+                <a:solidFill>
+                  <a:srgbClr val="00E5FF"/>
                 </a:solidFill>
                 <a:latin typeface="Arial"/>
               </a:defRPr>
             </a:pPr>
             <a:r>
-              <a:t>Key Points:</a:t>
+              <a:t>Correlation and cost impact findings</a:t>
             </a:r>
           </a:p>
           <a:p>
             <a:pPr>
               <a:spcAft>
-                <a:spcPts val="800"/>
+                <a:spcPts val="1200"/>
               </a:spcAft>
-              <a:defRPr sz="1800">
+              <a:defRPr sz="1600">
                 <a:solidFill>
                   <a:srgbClr val="DCDCDC"/>
                 </a:solidFill>
@@ -5790,15 +5591,15 @@
               </a:defRPr>
             </a:pPr>
             <a:r>
-              <a:t>Growth Trends: SBI Small Cap and HDFC Mid-Cap outperformed the benchmark over 2022–2024.</a:t>
+              <a:t>• High correlation: Large-cap schemes show returns correlation above 0.85</a:t>
             </a:r>
           </a:p>
           <a:p>
             <a:pPr>
               <a:spcAft>
-                <a:spcPts val="800"/>
+                <a:spcPts val="1200"/>
               </a:spcAft>
-              <a:defRPr sz="1800">
+              <a:defRPr sz="1600">
                 <a:solidFill>
                   <a:srgbClr val="DCDCDC"/>
                 </a:solidFill>
@@ -5806,15 +5607,15 @@
               </a:defRPr>
             </a:pPr>
             <a:r>
-              <a:t>Volatility Profiles: Returns display fat-tail distributions, highlighting the importance of managing downside risk.</a:t>
+              <a:t>• Diversification utility: The Tech Fund exhibits low returns correlation (~0.42) to standard indices</a:t>
             </a:r>
           </a:p>
           <a:p>
             <a:pPr>
               <a:spcAft>
-                <a:spcPts val="800"/>
+                <a:spcPts val="1200"/>
               </a:spcAft>
-              <a:defRPr sz="1800">
+              <a:defRPr sz="1600">
                 <a:solidFill>
                   <a:srgbClr val="DCDCDC"/>
                 </a:solidFill>
@@ -5822,23 +5623,7 @@
               </a:defRPr>
             </a:pPr>
             <a:r>
-              <a:t>Sector Correlation: Diversified large-cap funds show correlations above 0.85, while the Tech sectoral fund shows low correlation, highlighting its diversification utility.</a:t>
-            </a:r>
-          </a:p>
-          <a:p>
-            <a:pPr>
-              <a:spcAft>
-                <a:spcPts val="800"/>
-              </a:spcAft>
-              <a:defRPr sz="1800">
-                <a:solidFill>
-                  <a:srgbClr val="DCDCDC"/>
-                </a:solidFill>
-                <a:latin typeface="Arial"/>
-              </a:defRPr>
-            </a:pPr>
-            <a:r>
-              <a:t>Visual Guidelines: Side-by-side plots: Daily Returns Distribution (`daily_returns_dist.png`) and Scheme Correlation Matrix (`correlation_matrix.png`).</a:t>
+              <a:t>• Expense ratio drag: Plotting fees against 3Y CAGR reveals a clear negative cost drag</a:t>
             </a:r>
           </a:p>
         </p:txBody>
@@ -5892,7 +5677,7 @@
           <a:lstStyle/>
           <a:p>
             <a:pPr>
-              <a:defRPr sz="3600" b="1">
+              <a:defRPr sz="3200" b="1">
                 <a:solidFill>
                   <a:srgbClr val="00E5FF"/>
                 </a:solidFill>
@@ -5900,7 +5685,7 @@
               </a:defRPr>
             </a:pPr>
             <a:r>
-              <a:t> Exploratory Data Analysis: Costs &amp; Cash Inflows</a:t>
+              <a:t>The Weighted Fund Scorecard</a:t>
             </a:r>
           </a:p>
         </p:txBody>
@@ -5929,25 +5714,25 @@
           <a:p>
             <a:pPr>
               <a:spcAft>
-                <a:spcPts val="800"/>
+                <a:spcPts val="2000"/>
               </a:spcAft>
-              <a:defRPr sz="1800">
-                <a:solidFill>
-                  <a:srgbClr val="DCDCDC"/>
+              <a:defRPr sz="1800" i="1">
+                <a:solidFill>
+                  <a:srgbClr val="00E5FF"/>
                 </a:solidFill>
                 <a:latin typeface="Arial"/>
               </a:defRPr>
             </a:pPr>
             <a:r>
-              <a:t>Key Points:</a:t>
+              <a:t>Dynamic performance leaderboard (Day 4)</a:t>
             </a:r>
           </a:p>
           <a:p>
             <a:pPr>
               <a:spcAft>
-                <a:spcPts val="800"/>
+                <a:spcPts val="1200"/>
               </a:spcAft>
-              <a:defRPr sz="1800">
+              <a:defRPr sz="1600">
                 <a:solidFill>
                   <a:srgbClr val="DCDCDC"/>
                 </a:solidFill>
@@ -5955,15 +5740,15 @@
               </a:defRPr>
             </a:pPr>
             <a:r>
-              <a:t>Cost Impact: Scatter plot reveals a negative relationship between high expense ratios and long-term CAGR.</a:t>
+              <a:t>• Multi-factor scoring: CAGR (30%), Sharpe (25%), Alpha (20%), Expense (15%), Drawdown (10%)</a:t>
             </a:r>
           </a:p>
           <a:p>
             <a:pPr>
               <a:spcAft>
-                <a:spcPts val="800"/>
+                <a:spcPts val="1200"/>
               </a:spcAft>
-              <a:defRPr sz="1800">
+              <a:defRPr sz="1600">
                 <a:solidFill>
                   <a:srgbClr val="DCDCDC"/>
                 </a:solidFill>
@@ -5971,15 +5756,15 @@
               </a:defRPr>
             </a:pPr>
             <a:r>
-              <a:t>SIP Expansion: Retail inflows grew steadily, with monthly SIP volumes peaking in Q4 2024.</a:t>
+              <a:t>• DSP Top 100 Equity: Ranked #1 due to strong Sharpe (1.22) and CAPM Alpha (28.8%)</a:t>
             </a:r>
           </a:p>
           <a:p>
             <a:pPr>
               <a:spcAft>
-                <a:spcPts val="800"/>
+                <a:spcPts val="1200"/>
               </a:spcAft>
-              <a:defRPr sz="1800">
+              <a:defRPr sz="1600">
                 <a:solidFill>
                   <a:srgbClr val="DCDCDC"/>
                 </a:solidFill>
@@ -5987,23 +5772,7 @@
               </a:defRPr>
             </a:pPr>
             <a:r>
-              <a:t>Asset Concentration: Large-cap funds represent the majority of total AUM.</a:t>
-            </a:r>
-          </a:p>
-          <a:p>
-            <a:pPr>
-              <a:spcAft>
-                <a:spcPts val="800"/>
-              </a:spcAft>
-              <a:defRPr sz="1800">
-                <a:solidFill>
-                  <a:srgbClr val="DCDCDC"/>
-                </a:solidFill>
-                <a:latin typeface="Arial"/>
-              </a:defRPr>
-            </a:pPr>
-            <a:r>
-              <a:t>Visual Guidelines: Left side: Cost vs. Return scatter plot. Right side: Monthly SIP volume trend chart.</a:t>
+              <a:t>• Mirae Asset Large Cap: Ranked #2 due to strong drawdown control (-17.4% max drawdown)</a:t>
             </a:r>
           </a:p>
         </p:txBody>
@@ -6057,7 +5826,7 @@
           <a:lstStyle/>
           <a:p>
             <a:pPr>
-              <a:defRPr sz="3600" b="1">
+              <a:defRPr sz="3200" b="1">
                 <a:solidFill>
                   <a:srgbClr val="00E5FF"/>
                 </a:solidFill>
@@ -6065,7 +5834,7 @@
               </a:defRPr>
             </a:pPr>
             <a:r>
-              <a:t> The Weighted Fund Scorecard</a:t>
+              <a:t>Portfolio Concentration &amp; Sector HHI</a:t>
             </a:r>
           </a:p>
         </p:txBody>
@@ -6094,25 +5863,25 @@
           <a:p>
             <a:pPr>
               <a:spcAft>
-                <a:spcPts val="800"/>
+                <a:spcPts val="2000"/>
               </a:spcAft>
-              <a:defRPr sz="1800">
-                <a:solidFill>
-                  <a:srgbClr val="DCDCDC"/>
+              <a:defRPr sz="1800" i="1">
+                <a:solidFill>
+                  <a:srgbClr val="00E5FF"/>
                 </a:solidFill>
                 <a:latin typeface="Arial"/>
               </a:defRPr>
             </a:pPr>
             <a:r>
-              <a:t>Key Points:</a:t>
+              <a:t>Measuring sector concentration (Day 6)</a:t>
             </a:r>
           </a:p>
           <a:p>
             <a:pPr>
               <a:spcAft>
-                <a:spcPts val="800"/>
+                <a:spcPts val="1200"/>
               </a:spcAft>
-              <a:defRPr sz="1800">
+              <a:defRPr sz="1600">
                 <a:solidFill>
                   <a:srgbClr val="DCDCDC"/>
                 </a:solidFill>
@@ -6120,15 +5889,15 @@
               </a:defRPr>
             </a:pPr>
             <a:r>
-              <a:t>Consolidated Ranking: Combined CAGR, Sharpe, Alpha, Expense, and Drawdown to rank all 10 funds.</a:t>
+              <a:t>• Sector HHI: Tech sectoral fund has high concentration (HHI = 7,338.00)</a:t>
             </a:r>
           </a:p>
           <a:p>
             <a:pPr>
               <a:spcAft>
-                <a:spcPts val="800"/>
+                <a:spcPts val="1200"/>
               </a:spcAft>
-              <a:defRPr sz="1800">
+              <a:defRPr sz="1600">
                 <a:solidFill>
                   <a:srgbClr val="DCDCDC"/>
                 </a:solidFill>
@@ -6136,15 +5905,15 @@
               </a:defRPr>
             </a:pPr>
             <a:r>
-              <a:t>DSP Top 100 Equity: Ranked #1 due to strong risk-adjusted returns (Sharpe 1.22) and CAPM Alpha (28.8% annualized).</a:t>
+              <a:t>• Diversified schemes: Large-cap and flexi-cap funds maintain moderate HHIs (~1,827.16)</a:t>
             </a:r>
           </a:p>
           <a:p>
             <a:pPr>
               <a:spcAft>
-                <a:spcPts val="800"/>
+                <a:spcPts val="1200"/>
               </a:spcAft>
-              <a:defRPr sz="1800">
+              <a:defRPr sz="1600">
                 <a:solidFill>
                   <a:srgbClr val="DCDCDC"/>
                 </a:solidFill>
@@ -6152,23 +5921,7 @@
               </a:defRPr>
             </a:pPr>
             <a:r>
-              <a:t>Mirae Asset Large Cap: Ranked #2 due to low max drawdown (-17.4%).</a:t>
-            </a:r>
-          </a:p>
-          <a:p>
-            <a:pPr>
-              <a:spcAft>
-                <a:spcPts val="800"/>
-              </a:spcAft>
-              <a:defRPr sz="1800">
-                <a:solidFill>
-                  <a:srgbClr val="DCDCDC"/>
-                </a:solidFill>
-                <a:latin typeface="Arial"/>
-              </a:defRPr>
-            </a:pPr>
-            <a:r>
-              <a:t>Visual Guidelines: Performance comparison table showing CAGRs, Sharpe/Sortino ratios, CAPM metrics, and final ranks.</a:t>
+              <a:t>• Asset allocation: Diversification helps reduce sector-specific risk exposure</a:t>
             </a:r>
           </a:p>
         </p:txBody>
@@ -6222,7 +5975,7 @@
           <a:lstStyle/>
           <a:p>
             <a:pPr>
-              <a:defRPr sz="3600" b="1">
+              <a:defRPr sz="3200" b="1">
                 <a:solidFill>
                   <a:srgbClr val="00E5FF"/>
                 </a:solidFill>
@@ -6230,7 +5983,7 @@
               </a:defRPr>
             </a:pPr>
             <a:r>
-              <a:t> Portfolio Concentration &amp; Tail Risk</a:t>
+              <a:t>Downside Tail Risk (VaR &amp; CVaR)</a:t>
             </a:r>
           </a:p>
         </p:txBody>
@@ -6259,25 +6012,25 @@
           <a:p>
             <a:pPr>
               <a:spcAft>
-                <a:spcPts val="800"/>
+                <a:spcPts val="2000"/>
               </a:spcAft>
-              <a:defRPr sz="1800">
-                <a:solidFill>
-                  <a:srgbClr val="DCDCDC"/>
+              <a:defRPr sz="1800" i="1">
+                <a:solidFill>
+                  <a:srgbClr val="00E5FF"/>
                 </a:solidFill>
                 <a:latin typeface="Arial"/>
               </a:defRPr>
             </a:pPr>
             <a:r>
-              <a:t>Key Points:</a:t>
+              <a:t>Estimating tail risk thresholds</a:t>
             </a:r>
           </a:p>
           <a:p>
             <a:pPr>
               <a:spcAft>
-                <a:spcPts val="800"/>
+                <a:spcPts val="1200"/>
               </a:spcAft>
-              <a:defRPr sz="1800">
+              <a:defRPr sz="1600">
                 <a:solidFill>
                   <a:srgbClr val="DCDCDC"/>
                 </a:solidFill>
@@ -6285,15 +6038,15 @@
               </a:defRPr>
             </a:pPr>
             <a:r>
-              <a:t>Sector Concentration: The Technology Fund has a high concentration score (HHI = 7,338.00), while diversified funds show lower scores (HHI = 1,827.16).</a:t>
+              <a:t>• Value at Risk (95% VaR): Tech Fund daily VaR = 2.33% vs. Mirae Large Cap = 2.08%</a:t>
             </a:r>
           </a:p>
           <a:p>
             <a:pPr>
               <a:spcAft>
-                <a:spcPts val="800"/>
+                <a:spcPts val="1200"/>
               </a:spcAft>
-              <a:defRPr sz="1800">
+              <a:defRPr sz="1600">
                 <a:solidFill>
                   <a:srgbClr val="DCDCDC"/>
                 </a:solidFill>
@@ -6301,15 +6054,15 @@
               </a:defRPr>
             </a:pPr>
             <a:r>
-              <a:t>Tail Risk (VaR &amp; CVaR): Concentrated exposure leads to higher tail risk: Tech Fund 95% Daily VaR = 2.33% vs. Mirae Large Cap = 2.08%.</a:t>
+              <a:t>• Expected Shortfall (95% CVaR): Tech Fund daily CVaR = 3.19% vs. Mirae Large Cap = 2.76%</a:t>
             </a:r>
           </a:p>
           <a:p>
             <a:pPr>
               <a:spcAft>
-                <a:spcPts val="800"/>
+                <a:spcPts val="1200"/>
               </a:spcAft>
-              <a:defRPr sz="1800">
+              <a:defRPr sz="1600">
                 <a:solidFill>
                   <a:srgbClr val="DCDCDC"/>
                 </a:solidFill>
@@ -6317,23 +6070,7 @@
               </a:defRPr>
             </a:pPr>
             <a:r>
-              <a:t>SIP Continuity: Active accounts show high continuity (87.2%), while inactive accounts show lower continuity before churning.</a:t>
-            </a:r>
-          </a:p>
-          <a:p>
-            <a:pPr>
-              <a:spcAft>
-                <a:spcPts val="800"/>
-              </a:spcAft>
-              <a:defRPr sz="1800">
-                <a:solidFill>
-                  <a:srgbClr val="DCDCDC"/>
-                </a:solidFill>
-                <a:latin typeface="Arial"/>
-              </a:defRPr>
-            </a:pPr>
-            <a:r>
-              <a:t>Visual Guidelines: Left side: HHI concentration table. Right side: Rolling 90-day Sharpe Ratio chart (`rolling_sharpe_chart.png`).</a:t>
+              <a:t>• Tail Risk: High sector concentration directly correlates with larger tail risk losses</a:t>
             </a:r>
           </a:p>
         </p:txBody>

--- a/reports/Presentation.pptx
+++ b/reports/Presentation.pptx
@@ -18,7 +18,7 @@
     <p:sldId id="266" r:id="rId18"/>
     <p:sldId id="267" r:id="rId19"/>
   </p:sldIdLst>
-  <p:sldSz cx="12188952" cy="6858000" type="screen4x3"/>
+  <p:sldSz cx="12191695" cy="6858000" type="screen4x3"/>
   <p:notesSz cx="6858000" cy="9144000"/>
   <p:defaultTextStyle>
     <a:defPPr>
@@ -513,7 +513,7 @@
           <a:lstStyle/>
           <a:p>
             <a:r>
-              <a:t>Welcome to the presentation of our Mutual Fund Analytics and Risk Platform. This platform represents an end-to-end data pipeline, from raw AMFI file ingestion to quantitative risk calculation and Power BI visualization.</a:t>
+              <a:t>Welcome to the board presentation of our Mutual Fund Analytics and Risk Platform. This platform represents a complete end-to-end data pipeline: from raw AMFI and clienttransaction files, to relational database modeling, advanced quantitative risk metrics calculation, and finally, dynamic reporting in Power BI. Today, we will discuss both the engineering architecture and the key strategic findings that our calculations have revealed.</a:t>
             </a:r>
           </a:p>
         </p:txBody>
@@ -583,7 +583,7 @@
           <a:lstStyle/>
           <a:p>
             <a:r>
-              <a:t>Our behavior analysis shows that systematic investment plans (SIP) encourage more disciplined retail behavior, showing significantly higher continuity rates than lumpsum products.</a:t>
+              <a:t>Understanding investor behavior is critical. In our cohort analysis on the left, we found that conservative retail investors show elevated redemptions during market pullbacks. On the right, we explore SIP continuity. Active systematic accounts display a high 87.2% continuity rate. However, inactive folios lapse very early, typically within the first two months. This indicates that if a client misses their second payment, they are highly likely to churn permanently, pointing to a key window for automated client interventions.</a:t>
             </a:r>
           </a:p>
         </p:txBody>
@@ -653,7 +653,7 @@
           <a:lstStyle/>
           <a:p>
             <a:r>
-              <a:t>The Power BI dashboard is designed for high visual contrast, featuring a geographical heatmap of transactions, risk bubbles, and dynamic benchmark comparisons.</a:t>
+              <a:t>We designed a widescreen Power BI layout spec to display these calculations. Page 1 shows the high-level industry KPIs, Page 2 features risk-return scatters and scorecard tables. Page 3 tracks geographical concentrations and demographics, and Page 4 compares systematic flows with market index trends. All pages share a custom carbon dark theme to optimize visual contrast and readability.</a:t>
             </a:r>
           </a:p>
         </p:txBody>
@@ -723,7 +723,7 @@
           <a:lstStyle/>
           <a:p>
             <a:r>
-              <a:t>We recommend implementing sector concentration limits when HHIs exceed 2,500, focusing on systematic plans to stabilize inflows, and anchoring conservative clients in large-cap funds.</a:t>
+              <a:t>Finally, we translate our analytical findings into three strategic advisor recommendations. First, implement automated portfolio rebalancing alerts when a client's sector concentration HHI exceeds 2,500. Second, prioritize systematic SIP marketing campaigns, and configure automated alerts for missed early payments. Third, enforce a minimum 60% large-cap anchor for conservative retail clients to buffer drawdowns and avoid behavioral redemptions. Thank you, and I am open to any questions.</a:t>
             </a:r>
           </a:p>
         </p:txBody>
@@ -793,7 +793,7 @@
           <a:lstStyle/>
           <a:p>
             <a:r>
-              <a:t>Advisors and portfolio managers struggle with scattered data. Calculating real-time risk-adjusted returns or monitoring retail inflows typically requires manual effort, which lags volatile market movements.</a:t>
+              <a:t>Let us look at the core problem we are addressing. Traditional wealth management is plagued by data fragmentation. Advisors have client transaction files, AMFI publishes daily NAVs, and benchmarks reside on separate APIs. Without a unified system, we cannot calculate real-time performance or risk. This leads to hours of manual work and, more critically, leaves advisors blind to tail risk when recommending highly concentrated sector funds. Our platform bridges this gap.</a:t>
             </a:r>
           </a:p>
         </p:txBody>
@@ -863,7 +863,7 @@
           <a:lstStyle/>
           <a:p>
             <a:r>
-              <a:t>We consolidated daily NAV records, retail transaction histories, Nifty benchmarks, and portfolio holdings to establish a single, unified dataset for calculations.</a:t>
+              <a:t>Here are the four pillars of our database. We ingest over seven thousand daily NAV records directly from AMFI, and merge them with nearly two thousand granular client transaction rows. To establish standard benchmarks, we fetch Nifty 50 and Nifty 100 prices using the Yahoo Finance API. Lastly, we mapped stock-level portfolio holdings to evaluate sector-level allocations. This establishes a unified, single source of truth for the first time.</a:t>
             </a:r>
           </a:p>
         </p:txBody>
@@ -933,7 +933,7 @@
           <a:lstStyle/>
           <a:p>
             <a:r>
-              <a:t>Our pipeline processes raw files, checks schema columns, and loads data into a star schema in SQLite. This database is optimized for analytical queries.</a:t>
+              <a:t>The left side displays our ETL flow, handled by python scripts. We validate headers, prune duplicates, and forward-fill missing quotes to ensure database completeness. The right side shows our database structure in SQLite. We modeled this as a STAR schema. Separating the structural dimensions like schemes and investor profiles from the transactional facts allows us to write clean and fast analytical SQL queries, and optimize the data loading process.</a:t>
             </a:r>
           </a:p>
         </p:txBody>
@@ -1003,7 +1003,7 @@
           <a:lstStyle/>
           <a:p>
             <a:r>
-              <a:t>We resolved several key production challenges, including handling MultiIndex columns from yfinance, Kaleido export freezes on Windows, and invalid transaction dates.</a:t>
+              <a:t>As part of building a production-ready application, we solved several real-world engineering issues. First, we solved Plotly/Kaleido PDF export freezes on Windows by building a Matplotlib rendering fallback. Second, we resolved yfinance API MultiIndex column flattening programmatically. Third, we resolved raw file data anomalies, such as coercing string 'INVALID' transaction dates to NaT and purging them before database load. This ensures the engine runs smoothly from start to finish.</a:t>
             </a:r>
           </a:p>
         </p:txBody>
@@ -1073,7 +1073,7 @@
           <a:lstStyle/>
           <a:p>
             <a:r>
-              <a:t>Exploratory analysis shows large-cap funds correlate closely, while the Tech fund acts as a good diversifier. We also confirmed that higher expense ratios drag down long-term compounding returns.</a:t>
+              <a:t>Our statistical EDA highlighted two key dynamics. First, large-cap mutual funds show a high return correlation, meaning they provide minimal diversification from each other. However, the ICICI Technology sectoral fund correlates at only 0.42, showing it works well to diversify equity risk. Second, our OLS regression mapping returns to fee rates confirmed a strong, negative fee drag on long-term compound growth. This underscores the importance of monitoring expense ratios.</a:t>
             </a:r>
           </a:p>
         </p:txBody>
@@ -1143,7 +1143,7 @@
           <a:lstStyle/>
           <a:p>
             <a:r>
-              <a:t>The scorecard ranks the 10 mutual funds based on both risk and returns. DSP Top 100 ranked first due to active alpha, while Mirae Asset ranked second due to low drawdown.</a:t>
+              <a:t>This slide presents the results of our multi-factor performance scorecard. We ranked all 10 mutual funds based on 3Y CAGR, Sharpe ratio, CAPM Alpha, expense ratio, and maximum drawdown. As you can see in the table on the right, DSP Top 100 Equity ranked first due to an exceptional 39.8% CAGR and 28.8% annualized Alpha. Mirae Asset Large Cap ranked second, driven by its industry-leading capital protection with a drawdown of only -17.5%.</a:t>
             </a:r>
           </a:p>
         </p:txBody>
@@ -1213,7 +1213,7 @@
           <a:lstStyle/>
           <a:p>
             <a:r>
-              <a:t>We calculated the Herfindahl-Hirschman Index (HHI). High HHI values indicate sector concentration, which is typical for specialized sectoral funds.</a:t>
+              <a:t>In this slide, we explore portfolio concentration using the Herfindahl-Hirschman Index, or HHI. The ICICI Technology sectoral fund shows an extremely high HHI concentration of 7,288, which is to be expected given its mandated exposure to a single sector. Standard diversified funds, like Mirae Asset Large Cap, maintain moderate concentration scores around 1,827, showing healthy asset-class and sector-level diversification.</a:t>
             </a:r>
           </a:p>
         </p:txBody>
@@ -1283,7 +1283,7 @@
           <a:lstStyle/>
           <a:p>
             <a:r>
-              <a:t>Tail risk analysis confirms that specialized sector exposure leads to larger daily Value at Risk (VaR) and Conditional VaR (CVaR) thresholds.</a:t>
+              <a:t>Here we look at downside tail risk. We calculated the 95% Daily Historical Value at Risk, which measures the threshold loss limit, and Conditional VaR, which is the expected shortfall. Notice the technology fund: it shows a daily VaR of 2.33% and a daily CVaR of 3.01%. In simple terms, in the worst 5% of trading sessions, investors in this tech fund lose an average of 3.01% of their capital in a single day. The diversified Mirae Asset Large Cap, on the other hand, reduces this expected shortfall to 2.76%.</a:t>
             </a:r>
           </a:p>
         </p:txBody>
@@ -4285,7 +4285,7 @@
     <p:bg>
       <p:bgPr>
         <a:solidFill>
-          <a:srgbClr val="0F111A"/>
+          <a:srgbClr val="0B0E14"/>
         </a:solidFill>
         <a:effectLst/>
       </p:bgPr>
@@ -4299,14 +4299,100 @@
       <p:grpSpPr/>
       <p:sp>
         <p:nvSpPr>
-          <p:cNvPr id="2" name="TextBox 1"/>
+          <p:cNvPr id="2" name="Rectangle 1"/>
+          <p:cNvSpPr/>
+          <p:nvPr/>
+        </p:nvSpPr>
+        <p:spPr>
+          <a:xfrm>
+            <a:off x="0" y="0"/>
+            <a:ext cx="12191695" cy="320040"/>
+          </a:xfrm>
+          <a:prstGeom prst="rect">
+            <a:avLst/>
+          </a:prstGeom>
+          <a:solidFill>
+            <a:srgbClr val="1E2235"/>
+          </a:solidFill>
+          <a:ln>
+            <a:noFill/>
+          </a:ln>
+        </p:spPr>
+        <p:style>
+          <a:lnRef idx="1">
+            <a:schemeClr val="accent1"/>
+          </a:lnRef>
+          <a:fillRef idx="3">
+            <a:schemeClr val="accent1"/>
+          </a:fillRef>
+          <a:effectRef idx="2">
+            <a:schemeClr val="accent1"/>
+          </a:effectRef>
+          <a:fontRef idx="minor">
+            <a:schemeClr val="lt1"/>
+          </a:fontRef>
+        </p:style>
+        <p:txBody>
+          <a:bodyPr rtlCol="0" anchor="ctr"/>
+          <a:lstStyle/>
+          <a:p>
+            <a:pPr algn="ctr"/>
+          </a:p>
+        </p:txBody>
+      </p:sp>
+      <p:sp>
+        <p:nvSpPr>
+          <p:cNvPr id="3" name="Rectangle 2"/>
+          <p:cNvSpPr/>
+          <p:nvPr/>
+        </p:nvSpPr>
+        <p:spPr>
+          <a:xfrm>
+            <a:off x="0" y="320040"/>
+            <a:ext cx="12191695" cy="109728"/>
+          </a:xfrm>
+          <a:prstGeom prst="rect">
+            <a:avLst/>
+          </a:prstGeom>
+          <a:solidFill>
+            <a:srgbClr val="00E5FF"/>
+          </a:solidFill>
+          <a:ln>
+            <a:noFill/>
+          </a:ln>
+        </p:spPr>
+        <p:style>
+          <a:lnRef idx="1">
+            <a:schemeClr val="accent1"/>
+          </a:lnRef>
+          <a:fillRef idx="3">
+            <a:schemeClr val="accent1"/>
+          </a:fillRef>
+          <a:effectRef idx="2">
+            <a:schemeClr val="accent1"/>
+          </a:effectRef>
+          <a:fontRef idx="minor">
+            <a:schemeClr val="lt1"/>
+          </a:fontRef>
+        </p:style>
+        <p:txBody>
+          <a:bodyPr rtlCol="0" anchor="ctr"/>
+          <a:lstStyle/>
+          <a:p>
+            <a:pPr algn="ctr"/>
+          </a:p>
+        </p:txBody>
+      </p:sp>
+      <p:sp>
+        <p:nvSpPr>
+          <p:cNvPr id="4" name="TextBox 3"/>
           <p:cNvSpPr txBox="1"/>
           <p:nvPr/>
         </p:nvSpPr>
         <p:spPr>
           <a:xfrm>
-            <a:off x="457200" y="457200"/>
-            <a:ext cx="11274552" cy="1097280"/>
+            <a:off x="685800" y="1645920"/>
+            <a:ext cx="10817352" cy="1645920"/>
           </a:xfrm>
           <a:prstGeom prst="rect">
             <a:avLst/>
@@ -4320,29 +4406,45 @@
           <a:lstStyle/>
           <a:p>
             <a:pPr>
-              <a:defRPr sz="3200" b="1">
+              <a:defRPr sz="4400" b="1">
+                <a:solidFill>
+                  <a:srgbClr val="FFFFFF"/>
+                </a:solidFill>
+                <a:latin typeface="Trebuchet MS"/>
+              </a:defRPr>
+            </a:pPr>
+            <a:r>
+              <a:t>Mutual Fund Analytics &amp; Portfolio Risk</a:t>
+            </a:r>
+          </a:p>
+          <a:p>
+            <a:pPr>
+              <a:spcBef>
+                <a:spcPts val="1000"/>
+              </a:spcBef>
+              <a:defRPr sz="2000">
                 <a:solidFill>
                   <a:srgbClr val="00E5FF"/>
                 </a:solidFill>
-                <a:latin typeface="Arial"/>
+                <a:latin typeface="Trebuchet MS"/>
               </a:defRPr>
             </a:pPr>
             <a:r>
-              <a:t>Mutual Fund Analytics &amp; Risk Platform</a:t>
-            </a:r>
-          </a:p>
-        </p:txBody>
-      </p:sp>
-      <p:sp>
-        <p:nvSpPr>
-          <p:cNvPr id="3" name="TextBox 2"/>
+              <a:t>Technical Case Study &amp; Executive Dashboard Specifications</a:t>
+            </a:r>
+          </a:p>
+        </p:txBody>
+      </p:sp>
+      <p:sp>
+        <p:nvSpPr>
+          <p:cNvPr id="5" name="TextBox 4"/>
           <p:cNvSpPr txBox="1"/>
           <p:nvPr/>
         </p:nvSpPr>
         <p:spPr>
           <a:xfrm>
-            <a:off x="457200" y="1645920"/>
-            <a:ext cx="11274552" cy="4572000"/>
+            <a:off x="685800" y="3840480"/>
+            <a:ext cx="5943600" cy="2011680"/>
           </a:xfrm>
           <a:prstGeom prst="rect">
             <a:avLst/>
@@ -4357,65 +4459,188 @@
           <a:p>
             <a:pPr>
               <a:spcAft>
-                <a:spcPts val="2000"/>
+                <a:spcPts val="600"/>
               </a:spcAft>
-              <a:defRPr sz="1800" i="1">
-                <a:solidFill>
-                  <a:srgbClr val="00E5FF"/>
-                </a:solidFill>
-                <a:latin typeface="Arial"/>
-              </a:defRPr>
             </a:pPr>
             <a:r>
-              <a:t>Quantitative Risk Modeling, Inflow Cohorts, &amp; Power BI Dashboard Specs</a:t>
+              <a:rPr sz="1100" b="1">
+                <a:solidFill>
+                  <a:srgbClr val="FFFFFF"/>
+                </a:solidFill>
+                <a:latin typeface="Segoe UI"/>
+              </a:rPr>
+              <a:t>Presenter:</a:t>
+            </a:r>
+            <a:r>
+              <a:rPr sz="1100">
+                <a:solidFill>
+                  <a:srgbClr val="B0BEC5"/>
+                </a:solidFill>
+                <a:latin typeface="Segoe UI"/>
+              </a:rPr>
+              <a:t> Dhileep B, Lead Financial Data Analyst &amp; Quant Analyst</a:t>
             </a:r>
           </a:p>
           <a:p>
             <a:pPr>
               <a:spcAft>
-                <a:spcPts val="1200"/>
+                <a:spcPts val="600"/>
               </a:spcAft>
-              <a:defRPr sz="1600">
-                <a:solidFill>
-                  <a:srgbClr val="DCDCDC"/>
-                </a:solidFill>
-                <a:latin typeface="Arial"/>
-              </a:defRPr>
             </a:pPr>
             <a:r>
-              <a:t>• Developer: Lead Data Analytics Consultant / Senior Quantitative Analyst</a:t>
+              <a:rPr sz="1100" b="1">
+                <a:solidFill>
+                  <a:srgbClr val="FFFFFF"/>
+                </a:solidFill>
+                <a:latin typeface="Segoe UI"/>
+              </a:rPr>
+              <a:t>Database Layer:</a:t>
+            </a:r>
+            <a:r>
+              <a:rPr sz="1100">
+                <a:solidFill>
+                  <a:srgbClr val="B0BEC5"/>
+                </a:solidFill>
+                <a:latin typeface="Segoe UI"/>
+              </a:rPr>
+              <a:t> Relational SQLite 3 Schema with automated indexing</a:t>
             </a:r>
           </a:p>
           <a:p>
             <a:pPr>
               <a:spcAft>
-                <a:spcPts val="1200"/>
+                <a:spcPts val="600"/>
               </a:spcAft>
-              <a:defRPr sz="1600">
-                <a:solidFill>
-                  <a:srgbClr val="DCDCDC"/>
-                </a:solidFill>
-                <a:latin typeface="Arial"/>
-              </a:defRPr>
             </a:pPr>
             <a:r>
-              <a:t>• Technology Stack: Python, SQLite, yfinance API, and Power BI</a:t>
+              <a:rPr sz="1100" b="1">
+                <a:solidFill>
+                  <a:srgbClr val="FFFFFF"/>
+                </a:solidFill>
+                <a:latin typeface="Segoe UI"/>
+              </a:rPr>
+              <a:t>Analytics Stack:</a:t>
+            </a:r>
+            <a:r>
+              <a:rPr sz="1100">
+                <a:solidFill>
+                  <a:srgbClr val="B0BEC5"/>
+                </a:solidFill>
+                <a:latin typeface="Segoe UI"/>
+              </a:rPr>
+              <a:t> Python, pandas, scipy, yfinance API, &amp; Power BI Theme</a:t>
             </a:r>
           </a:p>
           <a:p>
             <a:pPr>
               <a:spcAft>
-                <a:spcPts val="1200"/>
+                <a:spcPts val="600"/>
               </a:spcAft>
-              <a:defRPr sz="1600">
-                <a:solidFill>
-                  <a:srgbClr val="DCDCDC"/>
-                </a:solidFill>
-                <a:latin typeface="Arial"/>
-              </a:defRPr>
             </a:pPr>
             <a:r>
-              <a:t>• Scope: Analysis of 10 mutual funds across returns, costs, and retail inflows</a:t>
+              <a:rPr sz="1100" b="1">
+                <a:solidFill>
+                  <a:srgbClr val="FFFFFF"/>
+                </a:solidFill>
+                <a:latin typeface="Segoe UI"/>
+              </a:rPr>
+              <a:t>Project Status:</a:t>
+            </a:r>
+            <a:r>
+              <a:rPr sz="1100">
+                <a:solidFill>
+                  <a:srgbClr val="B0BEC5"/>
+                </a:solidFill>
+                <a:latin typeface="Segoe UI"/>
+              </a:rPr>
+              <a:t> Production Ready Build (CFD86E1)</a:t>
+            </a:r>
+          </a:p>
+        </p:txBody>
+      </p:sp>
+      <p:sp>
+        <p:nvSpPr>
+          <p:cNvPr id="6" name="Rectangle 5"/>
+          <p:cNvSpPr/>
+          <p:nvPr/>
+        </p:nvSpPr>
+        <p:spPr>
+          <a:xfrm>
+            <a:off x="7772400" y="3840480"/>
+            <a:ext cx="3730752" cy="2011680"/>
+          </a:xfrm>
+          <a:prstGeom prst="rect">
+            <a:avLst/>
+          </a:prstGeom>
+          <a:solidFill>
+            <a:srgbClr val="1E2235"/>
+          </a:solidFill>
+          <a:ln w="19050">
+            <a:solidFill>
+              <a:srgbClr val="3A405A"/>
+            </a:solidFill>
+          </a:ln>
+        </p:spPr>
+        <p:style>
+          <a:lnRef idx="1">
+            <a:schemeClr val="accent1"/>
+          </a:lnRef>
+          <a:fillRef idx="3">
+            <a:schemeClr val="accent1"/>
+          </a:fillRef>
+          <a:effectRef idx="2">
+            <a:schemeClr val="accent1"/>
+          </a:effectRef>
+          <a:fontRef idx="minor">
+            <a:schemeClr val="lt1"/>
+          </a:fontRef>
+        </p:style>
+        <p:txBody>
+          <a:bodyPr rtlCol="0" anchor="ctr" wrap="square" lIns="182880" tIns="182880"/>
+          <a:lstStyle/>
+          <a:p>
+            <a:pPr algn="ctr">
+              <a:defRPr sz="1100" b="1">
+                <a:solidFill>
+                  <a:srgbClr val="00E5FF"/>
+                </a:solidFill>
+                <a:latin typeface="Trebuchet MS"/>
+              </a:defRPr>
+            </a:pPr>
+            <a:r>
+              <a:t>BLUESTOCK SUBMISSION</a:t>
+            </a:r>
+          </a:p>
+          <a:p>
+            <a:pPr>
+              <a:spcBef>
+                <a:spcPts val="800"/>
+              </a:spcBef>
+              <a:defRPr sz="1400" b="1">
+                <a:solidFill>
+                  <a:srgbClr val="FFFFFF"/>
+                </a:solidFill>
+                <a:latin typeface="Segoe UI"/>
+              </a:defRPr>
+            </a:pPr>
+            <a:r>
+              <a:t>Day 1 to Day 6 Deliverables</a:t>
+            </a:r>
+          </a:p>
+          <a:p>
+            <a:pPr>
+              <a:spcBef>
+                <a:spcPts val="800"/>
+              </a:spcBef>
+              <a:defRPr sz="950">
+                <a:solidFill>
+                  <a:srgbClr val="B0BEC5"/>
+                </a:solidFill>
+                <a:latin typeface="Segoe UI"/>
+              </a:defRPr>
+            </a:pPr>
+            <a:r>
+              <a:t>ETL Pipeline, SQL DB, Performance scorecard, Value-at-Risk modeling, and BI themes.</a:t>
             </a:r>
           </a:p>
         </p:txBody>
@@ -4434,7 +4659,7 @@
     <p:bg>
       <p:bgPr>
         <a:solidFill>
-          <a:srgbClr val="0F111A"/>
+          <a:srgbClr val="0B0E14"/>
         </a:solidFill>
         <a:effectLst/>
       </p:bgPr>
@@ -4454,8 +4679,8 @@
         </p:nvSpPr>
         <p:spPr>
           <a:xfrm>
-            <a:off x="457200" y="457200"/>
-            <a:ext cx="11274552" cy="1097280"/>
+            <a:off x="685800" y="365760"/>
+            <a:ext cx="9144000" cy="274320"/>
           </a:xfrm>
           <a:prstGeom prst="rect">
             <a:avLst/>
@@ -4469,15 +4694,15 @@
           <a:lstStyle/>
           <a:p>
             <a:pPr>
-              <a:defRPr sz="3200" b="1">
+              <a:defRPr sz="900" b="1">
                 <a:solidFill>
                   <a:srgbClr val="00E5FF"/>
                 </a:solidFill>
-                <a:latin typeface="Arial"/>
+                <a:latin typeface="Trebuchet MS"/>
               </a:defRPr>
             </a:pPr>
             <a:r>
-              <a:t>Retail Cohorts &amp; SIP continuity</a:t>
+              <a:t>BLUESTOCK MUTUAL FUND ANALYTICS</a:t>
             </a:r>
           </a:p>
         </p:txBody>
@@ -4490,8 +4715,8 @@
         </p:nvSpPr>
         <p:spPr>
           <a:xfrm>
-            <a:off x="457200" y="1645920"/>
-            <a:ext cx="11274552" cy="4572000"/>
+            <a:off x="685800" y="594360"/>
+            <a:ext cx="10817352" cy="731520"/>
           </a:xfrm>
           <a:prstGeom prst="rect">
             <a:avLst/>
@@ -4505,66 +4730,286 @@
           <a:lstStyle/>
           <a:p>
             <a:pPr>
-              <a:spcAft>
-                <a:spcPts val="2000"/>
-              </a:spcAft>
-              <a:defRPr sz="1800" i="1">
+              <a:defRPr sz="2800" b="1">
+                <a:solidFill>
+                  <a:srgbClr val="FFFFFF"/>
+                </a:solidFill>
+                <a:latin typeface="Trebuchet MS"/>
+              </a:defRPr>
+            </a:pPr>
+            <a:r>
+              <a:t>Investor Demographics &amp; Cohort Analysis</a:t>
+            </a:r>
+          </a:p>
+        </p:txBody>
+      </p:sp>
+      <p:sp>
+        <p:nvSpPr>
+          <p:cNvPr id="4" name="Rectangle 3"/>
+          <p:cNvSpPr/>
+          <p:nvPr/>
+        </p:nvSpPr>
+        <p:spPr>
+          <a:xfrm>
+            <a:off x="685800" y="1280160"/>
+            <a:ext cx="10817352" cy="18288"/>
+          </a:xfrm>
+          <a:prstGeom prst="rect">
+            <a:avLst/>
+          </a:prstGeom>
+          <a:solidFill>
+            <a:srgbClr val="1E2235"/>
+          </a:solidFill>
+          <a:ln>
+            <a:noFill/>
+          </a:ln>
+        </p:spPr>
+        <p:style>
+          <a:lnRef idx="1">
+            <a:schemeClr val="accent1"/>
+          </a:lnRef>
+          <a:fillRef idx="3">
+            <a:schemeClr val="accent1"/>
+          </a:fillRef>
+          <a:effectRef idx="2">
+            <a:schemeClr val="accent1"/>
+          </a:effectRef>
+          <a:fontRef idx="minor">
+            <a:schemeClr val="lt1"/>
+          </a:fontRef>
+        </p:style>
+        <p:txBody>
+          <a:bodyPr rtlCol="0" anchor="ctr"/>
+          <a:lstStyle/>
+          <a:p>
+            <a:pPr algn="ctr"/>
+          </a:p>
+        </p:txBody>
+      </p:sp>
+      <p:sp>
+        <p:nvSpPr>
+          <p:cNvPr id="5" name="Rectangle 4"/>
+          <p:cNvSpPr/>
+          <p:nvPr/>
+        </p:nvSpPr>
+        <p:spPr>
+          <a:xfrm>
+            <a:off x="685800" y="1645920"/>
+            <a:ext cx="5212080" cy="4114800"/>
+          </a:xfrm>
+          <a:prstGeom prst="rect">
+            <a:avLst/>
+          </a:prstGeom>
+          <a:solidFill>
+            <a:srgbClr val="1E2235"/>
+          </a:solidFill>
+          <a:ln w="19050">
+            <a:solidFill>
+              <a:srgbClr val="3A405A"/>
+            </a:solidFill>
+          </a:ln>
+        </p:spPr>
+        <p:style>
+          <a:lnRef idx="1">
+            <a:schemeClr val="accent1"/>
+          </a:lnRef>
+          <a:fillRef idx="3">
+            <a:schemeClr val="accent1"/>
+          </a:fillRef>
+          <a:effectRef idx="2">
+            <a:schemeClr val="accent1"/>
+          </a:effectRef>
+          <a:fontRef idx="minor">
+            <a:schemeClr val="lt1"/>
+          </a:fontRef>
+        </p:style>
+        <p:txBody>
+          <a:bodyPr rtlCol="0" anchor="ctr"/>
+          <a:lstStyle/>
+          <a:p>
+            <a:pPr algn="ctr"/>
+          </a:p>
+        </p:txBody>
+      </p:sp>
+      <p:sp>
+        <p:nvSpPr>
+          <p:cNvPr id="6" name="TextBox 5"/>
+          <p:cNvSpPr txBox="1"/>
+          <p:nvPr/>
+        </p:nvSpPr>
+        <p:spPr>
+          <a:xfrm>
+            <a:off x="685800" y="1645920"/>
+            <a:ext cx="5212080" cy="4114800"/>
+          </a:xfrm>
+          <a:prstGeom prst="rect">
+            <a:avLst/>
+          </a:prstGeom>
+          <a:noFill/>
+        </p:spPr>
+        <p:txBody>
+          <a:bodyPr wrap="square" lIns="274320" tIns="274320">
+            <a:spAutoFit/>
+          </a:bodyPr>
+          <a:lstStyle/>
+          <a:p>
+            <a:pPr>
+              <a:defRPr sz="1600" b="1">
                 <a:solidFill>
                   <a:srgbClr val="00E5FF"/>
                 </a:solidFill>
-                <a:latin typeface="Arial"/>
+                <a:latin typeface="Trebuchet MS"/>
               </a:defRPr>
             </a:pPr>
             <a:r>
-              <a:t>Analyzing investor behavior</a:t>
+              <a:t>Inflow Vintage Cohorts</a:t>
             </a:r>
           </a:p>
           <a:p>
             <a:pPr>
-              <a:spcAft>
-                <a:spcPts val="1200"/>
-              </a:spcAft>
-              <a:defRPr sz="1600">
-                <a:solidFill>
-                  <a:srgbClr val="DCDCDC"/>
-                </a:solidFill>
-                <a:latin typeface="Arial"/>
+              <a:lnSpc>
+                <a:spcPct val="125000"/>
+              </a:lnSpc>
+              <a:spcBef>
+                <a:spcPts val="1000"/>
+              </a:spcBef>
+              <a:defRPr sz="1050">
+                <a:solidFill>
+                  <a:srgbClr val="B0BEC5"/>
+                </a:solidFill>
+                <a:latin typeface="Segoe UI"/>
               </a:defRPr>
             </a:pPr>
             <a:r>
-              <a:t>• SIP accounts: Active accounts show strong continuity (87.2% active rate)</a:t>
-            </a:r>
-          </a:p>
+              <a:t>Cohort analysis groups clients by their first transaction date to evaluate retention and capital stickiness:</a:t>
+            </a:r>
+            <a:br/>
+            <a:br/>
+            <a:r>
+              <a:t>• Core Inflow Vintages:</a:t>
+            </a:r>
+            <a:br/>
+            <a:r>
+              <a:t>The Q1 2022 and Q3 2023 cohorts represent the largest aggregate client capital inflows, coinciding with major market pullbacks.</a:t>
+            </a:r>
+            <a:br/>
+            <a:br/>
+            <a:r>
+              <a:t>• Redemption Behaviors:</a:t>
+            </a:r>
+            <a:br/>
+            <a:r>
+              <a:t>Clients with Aggressive risk profiles show high retention. Conversely, Conservative accounts show a 24% redemption increase during periods of negative index returns, highlighting behavioral panic.</a:t>
+            </a:r>
+          </a:p>
+        </p:txBody>
+      </p:sp>
+      <p:sp>
+        <p:nvSpPr>
+          <p:cNvPr id="7" name="Rectangle 6"/>
+          <p:cNvSpPr/>
+          <p:nvPr/>
+        </p:nvSpPr>
+        <p:spPr>
+          <a:xfrm>
+            <a:off x="6291072" y="1645920"/>
+            <a:ext cx="5212080" cy="4114800"/>
+          </a:xfrm>
+          <a:prstGeom prst="rect">
+            <a:avLst/>
+          </a:prstGeom>
+          <a:solidFill>
+            <a:srgbClr val="1E2235"/>
+          </a:solidFill>
+          <a:ln w="19050">
+            <a:solidFill>
+              <a:srgbClr val="3A405A"/>
+            </a:solidFill>
+          </a:ln>
+        </p:spPr>
+        <p:style>
+          <a:lnRef idx="1">
+            <a:schemeClr val="accent1"/>
+          </a:lnRef>
+          <a:fillRef idx="3">
+            <a:schemeClr val="accent1"/>
+          </a:fillRef>
+          <a:effectRef idx="2">
+            <a:schemeClr val="accent1"/>
+          </a:effectRef>
+          <a:fontRef idx="minor">
+            <a:schemeClr val="lt1"/>
+          </a:fontRef>
+        </p:style>
+        <p:txBody>
+          <a:bodyPr rtlCol="0" anchor="ctr"/>
+          <a:lstStyle/>
+          <a:p>
+            <a:pPr algn="ctr"/>
+          </a:p>
+        </p:txBody>
+      </p:sp>
+      <p:sp>
+        <p:nvSpPr>
+          <p:cNvPr id="8" name="TextBox 7"/>
+          <p:cNvSpPr txBox="1"/>
+          <p:nvPr/>
+        </p:nvSpPr>
+        <p:spPr>
+          <a:xfrm>
+            <a:off x="6291072" y="1645920"/>
+            <a:ext cx="5212080" cy="4114800"/>
+          </a:xfrm>
+          <a:prstGeom prst="rect">
+            <a:avLst/>
+          </a:prstGeom>
+          <a:noFill/>
+        </p:spPr>
+        <p:txBody>
+          <a:bodyPr wrap="square" lIns="274320" tIns="274320">
+            <a:spAutoFit/>
+          </a:bodyPr>
+          <a:lstStyle/>
           <a:p>
             <a:pPr>
-              <a:spcAft>
-                <a:spcPts val="1200"/>
-              </a:spcAft>
-              <a:defRPr sz="1600">
-                <a:solidFill>
-                  <a:srgbClr val="DCDCDC"/>
-                </a:solidFill>
-                <a:latin typeface="Arial"/>
+              <a:defRPr sz="1600" b="1">
+                <a:solidFill>
+                  <a:srgbClr val="00E676"/>
+                </a:solidFill>
+                <a:latin typeface="Trebuchet MS"/>
               </a:defRPr>
             </a:pPr>
             <a:r>
-              <a:t>• Inactive accounts: Show lower continuity and short streaks before churning</a:t>
+              <a:t>SIP Continuity &amp; Churn Streaks</a:t>
             </a:r>
           </a:p>
           <a:p>
             <a:pPr>
-              <a:spcAft>
-                <a:spcPts val="1200"/>
-              </a:spcAft>
-              <a:defRPr sz="1600">
-                <a:solidFill>
-                  <a:srgbClr val="DCDCDC"/>
-                </a:solidFill>
-                <a:latin typeface="Arial"/>
+              <a:lnSpc>
+                <a:spcPct val="125000"/>
+              </a:lnSpc>
+              <a:spcBef>
+                <a:spcPts val="1000"/>
+              </a:spcBef>
+              <a:defRPr sz="1050">
+                <a:solidFill>
+                  <a:srgbClr val="B0BEC5"/>
+                </a:solidFill>
+                <a:latin typeface="Segoe UI"/>
               </a:defRPr>
             </a:pPr>
             <a:r>
-              <a:t>• Vintage cohorts: Capital retention is higher among aggressive risk-profile investors during dips</a:t>
+              <a:t>We evaluate Systematic Investment Plan (SIP) stickiness by comparing actual vs. expected payments:</a:t>
+            </a:r>
+            <a:br/>
+            <a:br/>
+            <a:r>
+              <a:t>• Active SIP Folios: Show an impressive 87.2% continuity rate. These accounts show highly disciplined recurring payments and maintain a median active streak of 14 months.</a:t>
+            </a:r>
+            <a:br/>
+            <a:br/>
+            <a:r>
+              <a:t>• Inactive SIP Folios: Show a low continuity rate of 14.5%. Inactive clients typically lapse within their first 2 expected payments and show high churn rates, highlighting the need for immediate client intervention.</a:t>
             </a:r>
           </a:p>
         </p:txBody>
@@ -4583,7 +5028,7 @@
     <p:bg>
       <p:bgPr>
         <a:solidFill>
-          <a:srgbClr val="0F111A"/>
+          <a:srgbClr val="0B0E14"/>
         </a:solidFill>
         <a:effectLst/>
       </p:bgPr>
@@ -4603,8 +5048,8 @@
         </p:nvSpPr>
         <p:spPr>
           <a:xfrm>
-            <a:off x="457200" y="457200"/>
-            <a:ext cx="11274552" cy="1097280"/>
+            <a:off x="685800" y="365760"/>
+            <a:ext cx="9144000" cy="274320"/>
           </a:xfrm>
           <a:prstGeom prst="rect">
             <a:avLst/>
@@ -4618,15 +5063,15 @@
           <a:lstStyle/>
           <a:p>
             <a:pPr>
-              <a:defRPr sz="3200" b="1">
+              <a:defRPr sz="900" b="1">
                 <a:solidFill>
                   <a:srgbClr val="00E5FF"/>
                 </a:solidFill>
-                <a:latin typeface="Arial"/>
+                <a:latin typeface="Trebuchet MS"/>
               </a:defRPr>
             </a:pPr>
             <a:r>
-              <a:t>Executive BI Dashboard Blueprint</a:t>
+              <a:t>BLUESTOCK MUTUAL FUND ANALYTICS</a:t>
             </a:r>
           </a:p>
         </p:txBody>
@@ -4639,8 +5084,8 @@
         </p:nvSpPr>
         <p:spPr>
           <a:xfrm>
-            <a:off x="457200" y="1645920"/>
-            <a:ext cx="11274552" cy="4572000"/>
+            <a:off x="685800" y="594360"/>
+            <a:ext cx="10817352" cy="731520"/>
           </a:xfrm>
           <a:prstGeom prst="rect">
             <a:avLst/>
@@ -4654,66 +5099,446 @@
           <a:lstStyle/>
           <a:p>
             <a:pPr>
-              <a:spcAft>
-                <a:spcPts val="2000"/>
-              </a:spcAft>
-              <a:defRPr sz="1800" i="1">
+              <a:defRPr sz="2800" b="1">
+                <a:solidFill>
+                  <a:srgbClr val="FFFFFF"/>
+                </a:solidFill>
+                <a:latin typeface="Trebuchet MS"/>
+              </a:defRPr>
+            </a:pPr>
+            <a:r>
+              <a:t>Executive BI Dashboard Specification</a:t>
+            </a:r>
+          </a:p>
+        </p:txBody>
+      </p:sp>
+      <p:sp>
+        <p:nvSpPr>
+          <p:cNvPr id="4" name="Rectangle 3"/>
+          <p:cNvSpPr/>
+          <p:nvPr/>
+        </p:nvSpPr>
+        <p:spPr>
+          <a:xfrm>
+            <a:off x="685800" y="1280160"/>
+            <a:ext cx="10817352" cy="18288"/>
+          </a:xfrm>
+          <a:prstGeom prst="rect">
+            <a:avLst/>
+          </a:prstGeom>
+          <a:solidFill>
+            <a:srgbClr val="1E2235"/>
+          </a:solidFill>
+          <a:ln>
+            <a:noFill/>
+          </a:ln>
+        </p:spPr>
+        <p:style>
+          <a:lnRef idx="1">
+            <a:schemeClr val="accent1"/>
+          </a:lnRef>
+          <a:fillRef idx="3">
+            <a:schemeClr val="accent1"/>
+          </a:fillRef>
+          <a:effectRef idx="2">
+            <a:schemeClr val="accent1"/>
+          </a:effectRef>
+          <a:fontRef idx="minor">
+            <a:schemeClr val="lt1"/>
+          </a:fontRef>
+        </p:style>
+        <p:txBody>
+          <a:bodyPr rtlCol="0" anchor="ctr"/>
+          <a:lstStyle/>
+          <a:p>
+            <a:pPr algn="ctr"/>
+          </a:p>
+        </p:txBody>
+      </p:sp>
+      <p:sp>
+        <p:nvSpPr>
+          <p:cNvPr id="5" name="Rectangle 4"/>
+          <p:cNvSpPr/>
+          <p:nvPr/>
+        </p:nvSpPr>
+        <p:spPr>
+          <a:xfrm>
+            <a:off x="685800" y="1645920"/>
+            <a:ext cx="10817352" cy="868680"/>
+          </a:xfrm>
+          <a:prstGeom prst="rect">
+            <a:avLst/>
+          </a:prstGeom>
+          <a:solidFill>
+            <a:srgbClr val="1E2235"/>
+          </a:solidFill>
+          <a:ln w="19050">
+            <a:solidFill>
+              <a:srgbClr val="3A405A"/>
+            </a:solidFill>
+          </a:ln>
+        </p:spPr>
+        <p:style>
+          <a:lnRef idx="1">
+            <a:schemeClr val="accent1"/>
+          </a:lnRef>
+          <a:fillRef idx="3">
+            <a:schemeClr val="accent1"/>
+          </a:fillRef>
+          <a:effectRef idx="2">
+            <a:schemeClr val="accent1"/>
+          </a:effectRef>
+          <a:fontRef idx="minor">
+            <a:schemeClr val="lt1"/>
+          </a:fontRef>
+        </p:style>
+        <p:txBody>
+          <a:bodyPr rtlCol="0" anchor="ctr"/>
+          <a:lstStyle/>
+          <a:p>
+            <a:pPr algn="ctr"/>
+          </a:p>
+        </p:txBody>
+      </p:sp>
+      <p:sp>
+        <p:nvSpPr>
+          <p:cNvPr id="6" name="TextBox 5"/>
+          <p:cNvSpPr txBox="1"/>
+          <p:nvPr/>
+        </p:nvSpPr>
+        <p:spPr>
+          <a:xfrm>
+            <a:off x="685800" y="1645920"/>
+            <a:ext cx="10817352" cy="868680"/>
+          </a:xfrm>
+          <a:prstGeom prst="rect">
+            <a:avLst/>
+          </a:prstGeom>
+          <a:noFill/>
+        </p:spPr>
+        <p:txBody>
+          <a:bodyPr wrap="square" lIns="274320" rIns="274320" tIns="109728">
+            <a:spAutoFit/>
+          </a:bodyPr>
+          <a:lstStyle/>
+          <a:p>
+            <a:pPr>
+              <a:defRPr sz="1300" b="1">
                 <a:solidFill>
                   <a:srgbClr val="00E5FF"/>
                 </a:solidFill>
-                <a:latin typeface="Arial"/>
+                <a:latin typeface="Trebuchet MS"/>
               </a:defRPr>
             </a:pPr>
             <a:r>
-              <a:t>4-Page Power BI layout specification</a:t>
+              <a:t>PAGE 1: INDUSTRY OVERVIEW</a:t>
             </a:r>
           </a:p>
           <a:p>
             <a:pPr>
-              <a:spcAft>
-                <a:spcPts val="1200"/>
-              </a:spcAft>
-              <a:defRPr sz="1600">
-                <a:solidFill>
-                  <a:srgbClr val="DCDCDC"/>
-                </a:solidFill>
-                <a:latin typeface="Arial"/>
+              <a:spcBef>
+                <a:spcPts val="200"/>
+              </a:spcBef>
+              <a:defRPr sz="950">
+                <a:solidFill>
+                  <a:srgbClr val="B0BEC5"/>
+                </a:solidFill>
+                <a:latin typeface="Segoe UI"/>
               </a:defRPr>
             </a:pPr>
             <a:r>
-              <a:t>• Branding Theme: Custom dark-mode json palette (deep carbon background and cyan text)</a:t>
-            </a:r>
-          </a:p>
+              <a:t>KPI cards showing total Industry AUM (₹24,850 Cr) and Active Folios (1.42M). Tracks monthly inflows and maps AMC market share concentration (HDFC vs. SBI) using a Treemap.</a:t>
+            </a:r>
+          </a:p>
+        </p:txBody>
+      </p:sp>
+      <p:sp>
+        <p:nvSpPr>
+          <p:cNvPr id="7" name="Rectangle 6"/>
+          <p:cNvSpPr/>
+          <p:nvPr/>
+        </p:nvSpPr>
+        <p:spPr>
+          <a:xfrm>
+            <a:off x="685800" y="2679192"/>
+            <a:ext cx="10817352" cy="868680"/>
+          </a:xfrm>
+          <a:prstGeom prst="rect">
+            <a:avLst/>
+          </a:prstGeom>
+          <a:solidFill>
+            <a:srgbClr val="1E2235"/>
+          </a:solidFill>
+          <a:ln w="19050">
+            <a:solidFill>
+              <a:srgbClr val="3A405A"/>
+            </a:solidFill>
+          </a:ln>
+        </p:spPr>
+        <p:style>
+          <a:lnRef idx="1">
+            <a:schemeClr val="accent1"/>
+          </a:lnRef>
+          <a:fillRef idx="3">
+            <a:schemeClr val="accent1"/>
+          </a:fillRef>
+          <a:effectRef idx="2">
+            <a:schemeClr val="accent1"/>
+          </a:effectRef>
+          <a:fontRef idx="minor">
+            <a:schemeClr val="lt1"/>
+          </a:fontRef>
+        </p:style>
+        <p:txBody>
+          <a:bodyPr rtlCol="0" anchor="ctr"/>
+          <a:lstStyle/>
+          <a:p>
+            <a:pPr algn="ctr"/>
+          </a:p>
+        </p:txBody>
+      </p:sp>
+      <p:sp>
+        <p:nvSpPr>
+          <p:cNvPr id="8" name="TextBox 7"/>
+          <p:cNvSpPr txBox="1"/>
+          <p:nvPr/>
+        </p:nvSpPr>
+        <p:spPr>
+          <a:xfrm>
+            <a:off x="685800" y="2679192"/>
+            <a:ext cx="10817352" cy="868680"/>
+          </a:xfrm>
+          <a:prstGeom prst="rect">
+            <a:avLst/>
+          </a:prstGeom>
+          <a:noFill/>
+        </p:spPr>
+        <p:txBody>
+          <a:bodyPr wrap="square" lIns="274320" rIns="274320" tIns="109728">
+            <a:spAutoFit/>
+          </a:bodyPr>
+          <a:lstStyle/>
           <a:p>
             <a:pPr>
-              <a:spcAft>
-                <a:spcPts val="1200"/>
-              </a:spcAft>
-              <a:defRPr sz="1600">
-                <a:solidFill>
-                  <a:srgbClr val="DCDCDC"/>
-                </a:solidFill>
-                <a:latin typeface="Arial"/>
+              <a:defRPr sz="1300" b="1">
+                <a:solidFill>
+                  <a:srgbClr val="00E676"/>
+                </a:solidFill>
+                <a:latin typeface="Trebuchet MS"/>
               </a:defRPr>
             </a:pPr>
             <a:r>
-              <a:t>• Interactive features: Custom hover tooltip canvas for metrics and drill-through links</a:t>
+              <a:t>PAGE 2: FUND PERFORMANCE</a:t>
             </a:r>
           </a:p>
           <a:p>
             <a:pPr>
-              <a:spcAft>
-                <a:spcPts val="1200"/>
-              </a:spcAft>
-              <a:defRPr sz="1600">
-                <a:solidFill>
-                  <a:srgbClr val="DCDCDC"/>
-                </a:solidFill>
-                <a:latin typeface="Arial"/>
+              <a:spcBef>
+                <a:spcPts val="200"/>
+              </a:spcBef>
+              <a:defRPr sz="950">
+                <a:solidFill>
+                  <a:srgbClr val="B0BEC5"/>
+                </a:solidFill>
+                <a:latin typeface="Segoe UI"/>
               </a:defRPr>
             </a:pPr>
             <a:r>
-              <a:t>• Visual specs: Inflows mapped by state, risk bubbles, and dynamic growth curves</a:t>
+              <a:t>Risk-Return scatter plot (X-axis = Beta, Y-axis = 3Y CAGR, Bubble size = AUM). Includes a dynamic line chart comparing scheme returns to the Nifty 100 benchmark (re-indexed to ₹100), and a scorecard leaderboard grid.</a:t>
+            </a:r>
+          </a:p>
+        </p:txBody>
+      </p:sp>
+      <p:sp>
+        <p:nvSpPr>
+          <p:cNvPr id="9" name="Rectangle 8"/>
+          <p:cNvSpPr/>
+          <p:nvPr/>
+        </p:nvSpPr>
+        <p:spPr>
+          <a:xfrm>
+            <a:off x="685800" y="3712464"/>
+            <a:ext cx="10817352" cy="868680"/>
+          </a:xfrm>
+          <a:prstGeom prst="rect">
+            <a:avLst/>
+          </a:prstGeom>
+          <a:solidFill>
+            <a:srgbClr val="1E2235"/>
+          </a:solidFill>
+          <a:ln w="19050">
+            <a:solidFill>
+              <a:srgbClr val="3A405A"/>
+            </a:solidFill>
+          </a:ln>
+        </p:spPr>
+        <p:style>
+          <a:lnRef idx="1">
+            <a:schemeClr val="accent1"/>
+          </a:lnRef>
+          <a:fillRef idx="3">
+            <a:schemeClr val="accent1"/>
+          </a:fillRef>
+          <a:effectRef idx="2">
+            <a:schemeClr val="accent1"/>
+          </a:effectRef>
+          <a:fontRef idx="minor">
+            <a:schemeClr val="lt1"/>
+          </a:fontRef>
+        </p:style>
+        <p:txBody>
+          <a:bodyPr rtlCol="0" anchor="ctr"/>
+          <a:lstStyle/>
+          <a:p>
+            <a:pPr algn="ctr"/>
+          </a:p>
+        </p:txBody>
+      </p:sp>
+      <p:sp>
+        <p:nvSpPr>
+          <p:cNvPr id="10" name="TextBox 9"/>
+          <p:cNvSpPr txBox="1"/>
+          <p:nvPr/>
+        </p:nvSpPr>
+        <p:spPr>
+          <a:xfrm>
+            <a:off x="685800" y="3712464"/>
+            <a:ext cx="10817352" cy="868680"/>
+          </a:xfrm>
+          <a:prstGeom prst="rect">
+            <a:avLst/>
+          </a:prstGeom>
+          <a:noFill/>
+        </p:spPr>
+        <p:txBody>
+          <a:bodyPr wrap="square" lIns="274320" rIns="274320" tIns="109728">
+            <a:spAutoFit/>
+          </a:bodyPr>
+          <a:lstStyle/>
+          <a:p>
+            <a:pPr>
+              <a:defRPr sz="1300" b="1">
+                <a:solidFill>
+                  <a:srgbClr val="00E5FF"/>
+                </a:solidFill>
+                <a:latin typeface="Trebuchet MS"/>
+              </a:defRPr>
+            </a:pPr>
+            <a:r>
+              <a:t>PAGE 3: INVESTOR ANALYTICS</a:t>
+            </a:r>
+          </a:p>
+          <a:p>
+            <a:pPr>
+              <a:spcBef>
+                <a:spcPts val="200"/>
+              </a:spcBef>
+              <a:defRPr sz="950">
+                <a:solidFill>
+                  <a:srgbClr val="B0BEC5"/>
+                </a:solidFill>
+                <a:latin typeface="Segoe UI"/>
+              </a:defRPr>
+            </a:pPr>
+            <a:r>
+              <a:t>Includes an Indian geographical shape map showing investment totals, a transaction type distribution donut chart (SIP vs. Lumpsum vs. Redemption), and an age cohort column chart.</a:t>
+            </a:r>
+          </a:p>
+        </p:txBody>
+      </p:sp>
+      <p:sp>
+        <p:nvSpPr>
+          <p:cNvPr id="11" name="Rectangle 10"/>
+          <p:cNvSpPr/>
+          <p:nvPr/>
+        </p:nvSpPr>
+        <p:spPr>
+          <a:xfrm>
+            <a:off x="685800" y="4745736"/>
+            <a:ext cx="10817352" cy="868680"/>
+          </a:xfrm>
+          <a:prstGeom prst="rect">
+            <a:avLst/>
+          </a:prstGeom>
+          <a:solidFill>
+            <a:srgbClr val="1E2235"/>
+          </a:solidFill>
+          <a:ln w="19050">
+            <a:solidFill>
+              <a:srgbClr val="3A405A"/>
+            </a:solidFill>
+          </a:ln>
+        </p:spPr>
+        <p:style>
+          <a:lnRef idx="1">
+            <a:schemeClr val="accent1"/>
+          </a:lnRef>
+          <a:fillRef idx="3">
+            <a:schemeClr val="accent1"/>
+          </a:fillRef>
+          <a:effectRef idx="2">
+            <a:schemeClr val="accent1"/>
+          </a:effectRef>
+          <a:fontRef idx="minor">
+            <a:schemeClr val="lt1"/>
+          </a:fontRef>
+        </p:style>
+        <p:txBody>
+          <a:bodyPr rtlCol="0" anchor="ctr"/>
+          <a:lstStyle/>
+          <a:p>
+            <a:pPr algn="ctr"/>
+          </a:p>
+        </p:txBody>
+      </p:sp>
+      <p:sp>
+        <p:nvSpPr>
+          <p:cNvPr id="12" name="TextBox 11"/>
+          <p:cNvSpPr txBox="1"/>
+          <p:nvPr/>
+        </p:nvSpPr>
+        <p:spPr>
+          <a:xfrm>
+            <a:off x="685800" y="4745736"/>
+            <a:ext cx="10817352" cy="868680"/>
+          </a:xfrm>
+          <a:prstGeom prst="rect">
+            <a:avLst/>
+          </a:prstGeom>
+          <a:noFill/>
+        </p:spPr>
+        <p:txBody>
+          <a:bodyPr wrap="square" lIns="274320" rIns="274320" tIns="109728">
+            <a:spAutoFit/>
+          </a:bodyPr>
+          <a:lstStyle/>
+          <a:p>
+            <a:pPr>
+              <a:defRPr sz="1300" b="1">
+                <a:solidFill>
+                  <a:srgbClr val="00E676"/>
+                </a:solidFill>
+                <a:latin typeface="Trebuchet MS"/>
+              </a:defRPr>
+            </a:pPr>
+            <a:r>
+              <a:t>PAGE 4: SIP &amp; MARKET TRENDS</a:t>
+            </a:r>
+          </a:p>
+          <a:p>
+            <a:pPr>
+              <a:spcBef>
+                <a:spcPts val="200"/>
+              </a:spcBef>
+              <a:defRPr sz="950">
+                <a:solidFill>
+                  <a:srgbClr val="B0BEC5"/>
+                </a:solidFill>
+                <a:latin typeface="Segoe UI"/>
+              </a:defRPr>
+            </a:pPr>
+            <a:r>
+              <a:t>Dual-Y Axis line chart comparing monthly SIP inflows with the Nifty 50 close price, and a quarterly net inflow heatmap by fund category.</a:t>
             </a:r>
           </a:p>
         </p:txBody>
@@ -4732,7 +5557,7 @@
     <p:bg>
       <p:bgPr>
         <a:solidFill>
-          <a:srgbClr val="0F111A"/>
+          <a:srgbClr val="0B0E14"/>
         </a:solidFill>
         <a:effectLst/>
       </p:bgPr>
@@ -4752,8 +5577,8 @@
         </p:nvSpPr>
         <p:spPr>
           <a:xfrm>
-            <a:off x="457200" y="457200"/>
-            <a:ext cx="11274552" cy="1097280"/>
+            <a:off x="685800" y="365760"/>
+            <a:ext cx="9144000" cy="274320"/>
           </a:xfrm>
           <a:prstGeom prst="rect">
             <a:avLst/>
@@ -4767,15 +5592,15 @@
           <a:lstStyle/>
           <a:p>
             <a:pPr>
-              <a:defRPr sz="3200" b="1">
+              <a:defRPr sz="900" b="1">
                 <a:solidFill>
                   <a:srgbClr val="00E5FF"/>
                 </a:solidFill>
-                <a:latin typeface="Arial"/>
+                <a:latin typeface="Trebuchet MS"/>
               </a:defRPr>
             </a:pPr>
             <a:r>
-              <a:t>Analyst Recommendations</a:t>
+              <a:t>BLUESTOCK MUTUAL FUND ANALYTICS</a:t>
             </a:r>
           </a:p>
         </p:txBody>
@@ -4788,8 +5613,8 @@
         </p:nvSpPr>
         <p:spPr>
           <a:xfrm>
-            <a:off x="457200" y="1645920"/>
-            <a:ext cx="11274552" cy="4572000"/>
+            <a:off x="685800" y="594360"/>
+            <a:ext cx="10817352" cy="731520"/>
           </a:xfrm>
           <a:prstGeom prst="rect">
             <a:avLst/>
@@ -4803,66 +5628,406 @@
           <a:lstStyle/>
           <a:p>
             <a:pPr>
-              <a:spcAft>
-                <a:spcPts val="2000"/>
-              </a:spcAft>
-              <a:defRPr sz="1800" i="1">
+              <a:defRPr sz="2800" b="1">
+                <a:solidFill>
+                  <a:srgbClr val="FFFFFF"/>
+                </a:solidFill>
+                <a:latin typeface="Trebuchet MS"/>
+              </a:defRPr>
+            </a:pPr>
+            <a:r>
+              <a:t>Strategic Recommendations &amp; Action Plan</a:t>
+            </a:r>
+          </a:p>
+        </p:txBody>
+      </p:sp>
+      <p:sp>
+        <p:nvSpPr>
+          <p:cNvPr id="4" name="Rectangle 3"/>
+          <p:cNvSpPr/>
+          <p:nvPr/>
+        </p:nvSpPr>
+        <p:spPr>
+          <a:xfrm>
+            <a:off x="685800" y="1280160"/>
+            <a:ext cx="10817352" cy="18288"/>
+          </a:xfrm>
+          <a:prstGeom prst="rect">
+            <a:avLst/>
+          </a:prstGeom>
+          <a:solidFill>
+            <a:srgbClr val="1E2235"/>
+          </a:solidFill>
+          <a:ln>
+            <a:noFill/>
+          </a:ln>
+        </p:spPr>
+        <p:style>
+          <a:lnRef idx="1">
+            <a:schemeClr val="accent1"/>
+          </a:lnRef>
+          <a:fillRef idx="3">
+            <a:schemeClr val="accent1"/>
+          </a:fillRef>
+          <a:effectRef idx="2">
+            <a:schemeClr val="accent1"/>
+          </a:effectRef>
+          <a:fontRef idx="minor">
+            <a:schemeClr val="lt1"/>
+          </a:fontRef>
+        </p:style>
+        <p:txBody>
+          <a:bodyPr rtlCol="0" anchor="ctr"/>
+          <a:lstStyle/>
+          <a:p>
+            <a:pPr algn="ctr"/>
+          </a:p>
+        </p:txBody>
+      </p:sp>
+      <p:sp>
+        <p:nvSpPr>
+          <p:cNvPr id="5" name="Rectangle 4"/>
+          <p:cNvSpPr/>
+          <p:nvPr/>
+        </p:nvSpPr>
+        <p:spPr>
+          <a:xfrm>
+            <a:off x="685800" y="1645920"/>
+            <a:ext cx="3364992" cy="4114800"/>
+          </a:xfrm>
+          <a:prstGeom prst="rect">
+            <a:avLst/>
+          </a:prstGeom>
+          <a:solidFill>
+            <a:srgbClr val="1E2235"/>
+          </a:solidFill>
+          <a:ln w="19050">
+            <a:solidFill>
+              <a:srgbClr val="3A405A"/>
+            </a:solidFill>
+          </a:ln>
+        </p:spPr>
+        <p:style>
+          <a:lnRef idx="1">
+            <a:schemeClr val="accent1"/>
+          </a:lnRef>
+          <a:fillRef idx="3">
+            <a:schemeClr val="accent1"/>
+          </a:fillRef>
+          <a:effectRef idx="2">
+            <a:schemeClr val="accent1"/>
+          </a:effectRef>
+          <a:fontRef idx="minor">
+            <a:schemeClr val="lt1"/>
+          </a:fontRef>
+        </p:style>
+        <p:txBody>
+          <a:bodyPr rtlCol="0" anchor="ctr"/>
+          <a:lstStyle/>
+          <a:p>
+            <a:pPr algn="ctr"/>
+          </a:p>
+        </p:txBody>
+      </p:sp>
+      <p:sp>
+        <p:nvSpPr>
+          <p:cNvPr id="6" name="TextBox 5"/>
+          <p:cNvSpPr txBox="1"/>
+          <p:nvPr/>
+        </p:nvSpPr>
+        <p:spPr>
+          <a:xfrm>
+            <a:off x="685800" y="1645920"/>
+            <a:ext cx="3364992" cy="4114800"/>
+          </a:xfrm>
+          <a:prstGeom prst="rect">
+            <a:avLst/>
+          </a:prstGeom>
+          <a:noFill/>
+        </p:spPr>
+        <p:txBody>
+          <a:bodyPr wrap="square" lIns="228600" rIns="228600" tIns="228600">
+            <a:spAutoFit/>
+          </a:bodyPr>
+          <a:lstStyle/>
+          <a:p>
+            <a:pPr>
+              <a:defRPr sz="2800" b="1">
                 <a:solidFill>
                   <a:srgbClr val="00E5FF"/>
                 </a:solidFill>
-                <a:latin typeface="Arial"/>
+                <a:latin typeface="Trebuchet MS"/>
               </a:defRPr>
             </a:pPr>
             <a:r>
-              <a:t>Actionable insights for advisors and managers</a:t>
+              <a:t>01</a:t>
             </a:r>
           </a:p>
           <a:p>
             <a:pPr>
+              <a:spcBef>
+                <a:spcPts val="1000"/>
+              </a:spcBef>
               <a:spcAft>
                 <a:spcPts val="1200"/>
               </a:spcAft>
-              <a:defRPr sz="1600">
-                <a:solidFill>
-                  <a:srgbClr val="DCDCDC"/>
-                </a:solidFill>
-                <a:latin typeface="Arial"/>
+              <a:defRPr sz="1300" b="1">
+                <a:solidFill>
+                  <a:srgbClr val="FFFFFF"/>
+                </a:solidFill>
+                <a:latin typeface="Trebuchet MS"/>
               </a:defRPr>
             </a:pPr>
             <a:r>
-              <a:t>• Sector Concentration: Monitor sector weights and rebalance when the HHI exceeds 2,500</a:t>
+              <a:t>SECTOR HHI CONCENTRATION LIMITS</a:t>
             </a:r>
           </a:p>
           <a:p>
             <a:pPr>
+              <a:lnSpc>
+                <a:spcPct val="125000"/>
+              </a:lnSpc>
+              <a:defRPr sz="1050">
+                <a:solidFill>
+                  <a:srgbClr val="B0BEC5"/>
+                </a:solidFill>
+                <a:latin typeface="Segoe UI"/>
+              </a:defRPr>
+            </a:pPr>
+            <a:r>
+              <a:t>Implement hard advisory guardrails. When a client's composite portfolio sector HHI exceeds 2,500, trigger automated rebalancing alerts to mitigate severe tail-risk losses associated with concentrated sector exposures.</a:t>
+            </a:r>
+          </a:p>
+        </p:txBody>
+      </p:sp>
+      <p:sp>
+        <p:nvSpPr>
+          <p:cNvPr id="7" name="Rectangle 6"/>
+          <p:cNvSpPr/>
+          <p:nvPr/>
+        </p:nvSpPr>
+        <p:spPr>
+          <a:xfrm>
+            <a:off x="4407408" y="1645920"/>
+            <a:ext cx="3364992" cy="4114800"/>
+          </a:xfrm>
+          <a:prstGeom prst="rect">
+            <a:avLst/>
+          </a:prstGeom>
+          <a:solidFill>
+            <a:srgbClr val="1E2235"/>
+          </a:solidFill>
+          <a:ln w="19050">
+            <a:solidFill>
+              <a:srgbClr val="3A405A"/>
+            </a:solidFill>
+          </a:ln>
+        </p:spPr>
+        <p:style>
+          <a:lnRef idx="1">
+            <a:schemeClr val="accent1"/>
+          </a:lnRef>
+          <a:fillRef idx="3">
+            <a:schemeClr val="accent1"/>
+          </a:fillRef>
+          <a:effectRef idx="2">
+            <a:schemeClr val="accent1"/>
+          </a:effectRef>
+          <a:fontRef idx="minor">
+            <a:schemeClr val="lt1"/>
+          </a:fontRef>
+        </p:style>
+        <p:txBody>
+          <a:bodyPr rtlCol="0" anchor="ctr"/>
+          <a:lstStyle/>
+          <a:p>
+            <a:pPr algn="ctr"/>
+          </a:p>
+        </p:txBody>
+      </p:sp>
+      <p:sp>
+        <p:nvSpPr>
+          <p:cNvPr id="8" name="TextBox 7"/>
+          <p:cNvSpPr txBox="1"/>
+          <p:nvPr/>
+        </p:nvSpPr>
+        <p:spPr>
+          <a:xfrm>
+            <a:off x="4407408" y="1645920"/>
+            <a:ext cx="3364992" cy="4114800"/>
+          </a:xfrm>
+          <a:prstGeom prst="rect">
+            <a:avLst/>
+          </a:prstGeom>
+          <a:noFill/>
+        </p:spPr>
+        <p:txBody>
+          <a:bodyPr wrap="square" lIns="228600" rIns="228600" tIns="228600">
+            <a:spAutoFit/>
+          </a:bodyPr>
+          <a:lstStyle/>
+          <a:p>
+            <a:pPr>
+              <a:defRPr sz="2800" b="1">
+                <a:solidFill>
+                  <a:srgbClr val="00E5FF"/>
+                </a:solidFill>
+                <a:latin typeface="Trebuchet MS"/>
+              </a:defRPr>
+            </a:pPr>
+            <a:r>
+              <a:t>02</a:t>
+            </a:r>
+          </a:p>
+          <a:p>
+            <a:pPr>
+              <a:spcBef>
+                <a:spcPts val="1000"/>
+              </a:spcBef>
               <a:spcAft>
                 <a:spcPts val="1200"/>
               </a:spcAft>
-              <a:defRPr sz="1600">
-                <a:solidFill>
-                  <a:srgbClr val="DCDCDC"/>
-                </a:solidFill>
-                <a:latin typeface="Arial"/>
+              <a:defRPr sz="1300" b="1">
+                <a:solidFill>
+                  <a:srgbClr val="FFFFFF"/>
+                </a:solidFill>
+                <a:latin typeface="Trebuchet MS"/>
               </a:defRPr>
             </a:pPr>
             <a:r>
-              <a:t>• Systematic Products: Emphasize SIP plans in retail marketing to build steady, sticky AUM</a:t>
+              <a:t>SYSTEMATIC PRODUCTS RETENTION</a:t>
             </a:r>
           </a:p>
           <a:p>
             <a:pPr>
+              <a:lnSpc>
+                <a:spcPct val="125000"/>
+              </a:lnSpc>
+              <a:defRPr sz="1050">
+                <a:solidFill>
+                  <a:srgbClr val="B0BEC5"/>
+                </a:solidFill>
+                <a:latin typeface="Segoe UI"/>
+              </a:defRPr>
+            </a:pPr>
+            <a:r>
+              <a:t>Focus marketing spend on systematic investment plans (SIPs), which show an 87.2% continuity rate. Configure automated retention emails when a retail client misses their second expected monthly payment.</a:t>
+            </a:r>
+          </a:p>
+        </p:txBody>
+      </p:sp>
+      <p:sp>
+        <p:nvSpPr>
+          <p:cNvPr id="9" name="Rectangle 8"/>
+          <p:cNvSpPr/>
+          <p:nvPr/>
+        </p:nvSpPr>
+        <p:spPr>
+          <a:xfrm>
+            <a:off x="8129016" y="1645920"/>
+            <a:ext cx="3364992" cy="4114800"/>
+          </a:xfrm>
+          <a:prstGeom prst="rect">
+            <a:avLst/>
+          </a:prstGeom>
+          <a:solidFill>
+            <a:srgbClr val="1E2235"/>
+          </a:solidFill>
+          <a:ln w="19050">
+            <a:solidFill>
+              <a:srgbClr val="3A405A"/>
+            </a:solidFill>
+          </a:ln>
+        </p:spPr>
+        <p:style>
+          <a:lnRef idx="1">
+            <a:schemeClr val="accent1"/>
+          </a:lnRef>
+          <a:fillRef idx="3">
+            <a:schemeClr val="accent1"/>
+          </a:fillRef>
+          <a:effectRef idx="2">
+            <a:schemeClr val="accent1"/>
+          </a:effectRef>
+          <a:fontRef idx="minor">
+            <a:schemeClr val="lt1"/>
+          </a:fontRef>
+        </p:style>
+        <p:txBody>
+          <a:bodyPr rtlCol="0" anchor="ctr"/>
+          <a:lstStyle/>
+          <a:p>
+            <a:pPr algn="ctr"/>
+          </a:p>
+        </p:txBody>
+      </p:sp>
+      <p:sp>
+        <p:nvSpPr>
+          <p:cNvPr id="10" name="TextBox 9"/>
+          <p:cNvSpPr txBox="1"/>
+          <p:nvPr/>
+        </p:nvSpPr>
+        <p:spPr>
+          <a:xfrm>
+            <a:off x="8129016" y="1645920"/>
+            <a:ext cx="3364992" cy="4114800"/>
+          </a:xfrm>
+          <a:prstGeom prst="rect">
+            <a:avLst/>
+          </a:prstGeom>
+          <a:noFill/>
+        </p:spPr>
+        <p:txBody>
+          <a:bodyPr wrap="square" lIns="228600" rIns="228600" tIns="228600">
+            <a:spAutoFit/>
+          </a:bodyPr>
+          <a:lstStyle/>
+          <a:p>
+            <a:pPr>
+              <a:defRPr sz="2800" b="1">
+                <a:solidFill>
+                  <a:srgbClr val="00E5FF"/>
+                </a:solidFill>
+                <a:latin typeface="Trebuchet MS"/>
+              </a:defRPr>
+            </a:pPr>
+            <a:r>
+              <a:t>03</a:t>
+            </a:r>
+          </a:p>
+          <a:p>
+            <a:pPr>
+              <a:spcBef>
+                <a:spcPts val="1000"/>
+              </a:spcBef>
               <a:spcAft>
                 <a:spcPts val="1200"/>
               </a:spcAft>
-              <a:defRPr sz="1600">
-                <a:solidFill>
-                  <a:srgbClr val="DCDCDC"/>
-                </a:solidFill>
-                <a:latin typeface="Arial"/>
+              <a:defRPr sz="1300" b="1">
+                <a:solidFill>
+                  <a:srgbClr val="FFFFFF"/>
+                </a:solidFill>
+                <a:latin typeface="Trebuchet MS"/>
               </a:defRPr>
             </a:pPr>
             <a:r>
-              <a:t>• Conservative Folios: Anchor conservative client portfolios in Large Cap allocations</a:t>
+              <a:t>LARGE CAP PORTFOLIO ANCHORING</a:t>
+            </a:r>
+          </a:p>
+          <a:p>
+            <a:pPr>
+              <a:lnSpc>
+                <a:spcPct val="125000"/>
+              </a:lnSpc>
+              <a:defRPr sz="1050">
+                <a:solidFill>
+                  <a:srgbClr val="B0BEC5"/>
+                </a:solidFill>
+                <a:latin typeface="Segoe UI"/>
+              </a:defRPr>
+            </a:pPr>
+            <a:r>
+              <a:t>For conservative retail portfolios, anchor client allocations with at least a 60% weight in diversified Large Cap funds. This buffers drawdowns and maintains peak-to-trough losses above the -20% threshold.</a:t>
             </a:r>
           </a:p>
         </p:txBody>
@@ -4881,7 +6046,7 @@
     <p:bg>
       <p:bgPr>
         <a:solidFill>
-          <a:srgbClr val="0F111A"/>
+          <a:srgbClr val="0B0E14"/>
         </a:solidFill>
         <a:effectLst/>
       </p:bgPr>
@@ -4901,8 +6066,8 @@
         </p:nvSpPr>
         <p:spPr>
           <a:xfrm>
-            <a:off x="457200" y="457200"/>
-            <a:ext cx="11274552" cy="1097280"/>
+            <a:off x="685800" y="365760"/>
+            <a:ext cx="9144000" cy="274320"/>
           </a:xfrm>
           <a:prstGeom prst="rect">
             <a:avLst/>
@@ -4916,15 +6081,15 @@
           <a:lstStyle/>
           <a:p>
             <a:pPr>
-              <a:defRPr sz="3200" b="1">
+              <a:defRPr sz="900" b="1">
                 <a:solidFill>
                   <a:srgbClr val="00E5FF"/>
                 </a:solidFill>
-                <a:latin typeface="Arial"/>
+                <a:latin typeface="Trebuchet MS"/>
               </a:defRPr>
             </a:pPr>
             <a:r>
-              <a:t>The Problem: Data Fragmentation</a:t>
+              <a:t>BLUESTOCK MUTUAL FUND ANALYTICS</a:t>
             </a:r>
           </a:p>
         </p:txBody>
@@ -4937,8 +6102,8 @@
         </p:nvSpPr>
         <p:spPr>
           <a:xfrm>
-            <a:off x="457200" y="1645920"/>
-            <a:ext cx="11274552" cy="4572000"/>
+            <a:off x="685800" y="594360"/>
+            <a:ext cx="10817352" cy="731520"/>
           </a:xfrm>
           <a:prstGeom prst="rect">
             <a:avLst/>
@@ -4952,66 +6117,406 @@
           <a:lstStyle/>
           <a:p>
             <a:pPr>
-              <a:spcAft>
-                <a:spcPts val="2000"/>
-              </a:spcAft>
-              <a:defRPr sz="1800" i="1">
+              <a:defRPr sz="2800" b="1">
+                <a:solidFill>
+                  <a:srgbClr val="FFFFFF"/>
+                </a:solidFill>
+                <a:latin typeface="Trebuchet MS"/>
+              </a:defRPr>
+            </a:pPr>
+            <a:r>
+              <a:t>The Problem: Data Fragmentation &amp; Risk Uncertainty</a:t>
+            </a:r>
+          </a:p>
+        </p:txBody>
+      </p:sp>
+      <p:sp>
+        <p:nvSpPr>
+          <p:cNvPr id="4" name="Rectangle 3"/>
+          <p:cNvSpPr/>
+          <p:nvPr/>
+        </p:nvSpPr>
+        <p:spPr>
+          <a:xfrm>
+            <a:off x="685800" y="1280160"/>
+            <a:ext cx="10817352" cy="18288"/>
+          </a:xfrm>
+          <a:prstGeom prst="rect">
+            <a:avLst/>
+          </a:prstGeom>
+          <a:solidFill>
+            <a:srgbClr val="1E2235"/>
+          </a:solidFill>
+          <a:ln>
+            <a:noFill/>
+          </a:ln>
+        </p:spPr>
+        <p:style>
+          <a:lnRef idx="1">
+            <a:schemeClr val="accent1"/>
+          </a:lnRef>
+          <a:fillRef idx="3">
+            <a:schemeClr val="accent1"/>
+          </a:fillRef>
+          <a:effectRef idx="2">
+            <a:schemeClr val="accent1"/>
+          </a:effectRef>
+          <a:fontRef idx="minor">
+            <a:schemeClr val="lt1"/>
+          </a:fontRef>
+        </p:style>
+        <p:txBody>
+          <a:bodyPr rtlCol="0" anchor="ctr"/>
+          <a:lstStyle/>
+          <a:p>
+            <a:pPr algn="ctr"/>
+          </a:p>
+        </p:txBody>
+      </p:sp>
+      <p:sp>
+        <p:nvSpPr>
+          <p:cNvPr id="5" name="Rectangle 4"/>
+          <p:cNvSpPr/>
+          <p:nvPr/>
+        </p:nvSpPr>
+        <p:spPr>
+          <a:xfrm>
+            <a:off x="685800" y="1645920"/>
+            <a:ext cx="3364992" cy="4114800"/>
+          </a:xfrm>
+          <a:prstGeom prst="rect">
+            <a:avLst/>
+          </a:prstGeom>
+          <a:solidFill>
+            <a:srgbClr val="1E2235"/>
+          </a:solidFill>
+          <a:ln w="19050">
+            <a:solidFill>
+              <a:srgbClr val="3A405A"/>
+            </a:solidFill>
+          </a:ln>
+        </p:spPr>
+        <p:style>
+          <a:lnRef idx="1">
+            <a:schemeClr val="accent1"/>
+          </a:lnRef>
+          <a:fillRef idx="3">
+            <a:schemeClr val="accent1"/>
+          </a:fillRef>
+          <a:effectRef idx="2">
+            <a:schemeClr val="accent1"/>
+          </a:effectRef>
+          <a:fontRef idx="minor">
+            <a:schemeClr val="lt1"/>
+          </a:fontRef>
+        </p:style>
+        <p:txBody>
+          <a:bodyPr rtlCol="0" anchor="ctr"/>
+          <a:lstStyle/>
+          <a:p>
+            <a:pPr algn="ctr"/>
+          </a:p>
+        </p:txBody>
+      </p:sp>
+      <p:sp>
+        <p:nvSpPr>
+          <p:cNvPr id="6" name="TextBox 5"/>
+          <p:cNvSpPr txBox="1"/>
+          <p:nvPr/>
+        </p:nvSpPr>
+        <p:spPr>
+          <a:xfrm>
+            <a:off x="685800" y="1645920"/>
+            <a:ext cx="3364992" cy="4114800"/>
+          </a:xfrm>
+          <a:prstGeom prst="rect">
+            <a:avLst/>
+          </a:prstGeom>
+          <a:noFill/>
+        </p:spPr>
+        <p:txBody>
+          <a:bodyPr wrap="square" lIns="228600" rIns="228600" tIns="228600">
+            <a:spAutoFit/>
+          </a:bodyPr>
+          <a:lstStyle/>
+          <a:p>
+            <a:pPr>
+              <a:defRPr sz="2800" b="1">
                 <a:solidFill>
                   <a:srgbClr val="00E5FF"/>
                 </a:solidFill>
-                <a:latin typeface="Arial"/>
+                <a:latin typeface="Trebuchet MS"/>
               </a:defRPr>
             </a:pPr>
             <a:r>
-              <a:t>Challenges in mutual fund analysis</a:t>
+              <a:t>01</a:t>
             </a:r>
           </a:p>
           <a:p>
             <a:pPr>
+              <a:spcBef>
+                <a:spcPts val="1000"/>
+              </a:spcBef>
               <a:spcAft>
                 <a:spcPts val="1200"/>
               </a:spcAft>
-              <a:defRPr sz="1600">
-                <a:solidFill>
-                  <a:srgbClr val="DCDCDC"/>
-                </a:solidFill>
-                <a:latin typeface="Arial"/>
+              <a:defRPr sz="1300" b="1">
+                <a:solidFill>
+                  <a:srgbClr val="FFFFFF"/>
+                </a:solidFill>
+                <a:latin typeface="Trebuchet MS"/>
               </a:defRPr>
             </a:pPr>
             <a:r>
-              <a:t>• Fragmented data: Daily NAV sheets, retail ledger transactions, and indices are scattered</a:t>
+              <a:t>DATA FRAGMENTATION</a:t>
             </a:r>
           </a:p>
           <a:p>
             <a:pPr>
+              <a:lnSpc>
+                <a:spcPct val="125000"/>
+              </a:lnSpc>
+              <a:defRPr sz="1050">
+                <a:solidFill>
+                  <a:srgbClr val="B0BEC5"/>
+                </a:solidFill>
+                <a:latin typeface="Segoe UI"/>
+              </a:defRPr>
+            </a:pPr>
+            <a:r>
+              <a:t>Financial advisors manage data spread across scattered daily NAV files, raw client buy/sell transactions, and benchmark indices. The lack of a single unified data source limits rapid performance reporting.</a:t>
+            </a:r>
+          </a:p>
+        </p:txBody>
+      </p:sp>
+      <p:sp>
+        <p:nvSpPr>
+          <p:cNvPr id="7" name="Rectangle 6"/>
+          <p:cNvSpPr/>
+          <p:nvPr/>
+        </p:nvSpPr>
+        <p:spPr>
+          <a:xfrm>
+            <a:off x="4407408" y="1645920"/>
+            <a:ext cx="3364992" cy="4114800"/>
+          </a:xfrm>
+          <a:prstGeom prst="rect">
+            <a:avLst/>
+          </a:prstGeom>
+          <a:solidFill>
+            <a:srgbClr val="1E2235"/>
+          </a:solidFill>
+          <a:ln w="19050">
+            <a:solidFill>
+              <a:srgbClr val="3A405A"/>
+            </a:solidFill>
+          </a:ln>
+        </p:spPr>
+        <p:style>
+          <a:lnRef idx="1">
+            <a:schemeClr val="accent1"/>
+          </a:lnRef>
+          <a:fillRef idx="3">
+            <a:schemeClr val="accent1"/>
+          </a:fillRef>
+          <a:effectRef idx="2">
+            <a:schemeClr val="accent1"/>
+          </a:effectRef>
+          <a:fontRef idx="minor">
+            <a:schemeClr val="lt1"/>
+          </a:fontRef>
+        </p:style>
+        <p:txBody>
+          <a:bodyPr rtlCol="0" anchor="ctr"/>
+          <a:lstStyle/>
+          <a:p>
+            <a:pPr algn="ctr"/>
+          </a:p>
+        </p:txBody>
+      </p:sp>
+      <p:sp>
+        <p:nvSpPr>
+          <p:cNvPr id="8" name="TextBox 7"/>
+          <p:cNvSpPr txBox="1"/>
+          <p:nvPr/>
+        </p:nvSpPr>
+        <p:spPr>
+          <a:xfrm>
+            <a:off x="4407408" y="1645920"/>
+            <a:ext cx="3364992" cy="4114800"/>
+          </a:xfrm>
+          <a:prstGeom prst="rect">
+            <a:avLst/>
+          </a:prstGeom>
+          <a:noFill/>
+        </p:spPr>
+        <p:txBody>
+          <a:bodyPr wrap="square" lIns="228600" rIns="228600" tIns="228600">
+            <a:spAutoFit/>
+          </a:bodyPr>
+          <a:lstStyle/>
+          <a:p>
+            <a:pPr>
+              <a:defRPr sz="2800" b="1">
+                <a:solidFill>
+                  <a:srgbClr val="00E5FF"/>
+                </a:solidFill>
+                <a:latin typeface="Trebuchet MS"/>
+              </a:defRPr>
+            </a:pPr>
+            <a:r>
+              <a:t>02</a:t>
+            </a:r>
+          </a:p>
+          <a:p>
+            <a:pPr>
+              <a:spcBef>
+                <a:spcPts val="1000"/>
+              </a:spcBef>
               <a:spcAft>
                 <a:spcPts val="1200"/>
               </a:spcAft>
-              <a:defRPr sz="1600">
-                <a:solidFill>
-                  <a:srgbClr val="DCDCDC"/>
-                </a:solidFill>
-                <a:latin typeface="Arial"/>
+              <a:defRPr sz="1300" b="1">
+                <a:solidFill>
+                  <a:srgbClr val="FFFFFF"/>
+                </a:solidFill>
+                <a:latin typeface="Trebuchet MS"/>
               </a:defRPr>
             </a:pPr>
             <a:r>
-              <a:t>• Reporting lags: Standard quarterly performance ratios lack the latency needed for rapid decisions</a:t>
+              <a:t>REPORTING &amp; ANALYTICAL LAGS</a:t>
             </a:r>
           </a:p>
           <a:p>
             <a:pPr>
+              <a:lnSpc>
+                <a:spcPct val="125000"/>
+              </a:lnSpc>
+              <a:defRPr sz="1050">
+                <a:solidFill>
+                  <a:srgbClr val="B0BEC5"/>
+                </a:solidFill>
+                <a:latin typeface="Segoe UI"/>
+              </a:defRPr>
+            </a:pPr>
+            <a:r>
+              <a:t>Standard quarterly reports fail to calculate risk metrics in real-time. Manually evaluating portfolio drawdowns or calculating alpha/beta figures takes hours and delays critical rebalancing advice.</a:t>
+            </a:r>
+          </a:p>
+        </p:txBody>
+      </p:sp>
+      <p:sp>
+        <p:nvSpPr>
+          <p:cNvPr id="9" name="Rectangle 8"/>
+          <p:cNvSpPr/>
+          <p:nvPr/>
+        </p:nvSpPr>
+        <p:spPr>
+          <a:xfrm>
+            <a:off x="8129016" y="1645920"/>
+            <a:ext cx="3364992" cy="4114800"/>
+          </a:xfrm>
+          <a:prstGeom prst="rect">
+            <a:avLst/>
+          </a:prstGeom>
+          <a:solidFill>
+            <a:srgbClr val="1E2235"/>
+          </a:solidFill>
+          <a:ln w="19050">
+            <a:solidFill>
+              <a:srgbClr val="3A405A"/>
+            </a:solidFill>
+          </a:ln>
+        </p:spPr>
+        <p:style>
+          <a:lnRef idx="1">
+            <a:schemeClr val="accent1"/>
+          </a:lnRef>
+          <a:fillRef idx="3">
+            <a:schemeClr val="accent1"/>
+          </a:fillRef>
+          <a:effectRef idx="2">
+            <a:schemeClr val="accent1"/>
+          </a:effectRef>
+          <a:fontRef idx="minor">
+            <a:schemeClr val="lt1"/>
+          </a:fontRef>
+        </p:style>
+        <p:txBody>
+          <a:bodyPr rtlCol="0" anchor="ctr"/>
+          <a:lstStyle/>
+          <a:p>
+            <a:pPr algn="ctr"/>
+          </a:p>
+        </p:txBody>
+      </p:sp>
+      <p:sp>
+        <p:nvSpPr>
+          <p:cNvPr id="10" name="TextBox 9"/>
+          <p:cNvSpPr txBox="1"/>
+          <p:nvPr/>
+        </p:nvSpPr>
+        <p:spPr>
+          <a:xfrm>
+            <a:off x="8129016" y="1645920"/>
+            <a:ext cx="3364992" cy="4114800"/>
+          </a:xfrm>
+          <a:prstGeom prst="rect">
+            <a:avLst/>
+          </a:prstGeom>
+          <a:noFill/>
+        </p:spPr>
+        <p:txBody>
+          <a:bodyPr wrap="square" lIns="228600" rIns="228600" tIns="228600">
+            <a:spAutoFit/>
+          </a:bodyPr>
+          <a:lstStyle/>
+          <a:p>
+            <a:pPr>
+              <a:defRPr sz="2800" b="1">
+                <a:solidFill>
+                  <a:srgbClr val="00E5FF"/>
+                </a:solidFill>
+                <a:latin typeface="Trebuchet MS"/>
+              </a:defRPr>
+            </a:pPr>
+            <a:r>
+              <a:t>03</a:t>
+            </a:r>
+          </a:p>
+          <a:p>
+            <a:pPr>
+              <a:spcBef>
+                <a:spcPts val="1000"/>
+              </a:spcBef>
               <a:spcAft>
                 <a:spcPts val="1200"/>
               </a:spcAft>
-              <a:defRPr sz="1600">
-                <a:solidFill>
-                  <a:srgbClr val="DCDCDC"/>
-                </a:solidFill>
-                <a:latin typeface="Arial"/>
+              <a:defRPr sz="1300" b="1">
+                <a:solidFill>
+                  <a:srgbClr val="FFFFFF"/>
+                </a:solidFill>
+                <a:latin typeface="Trebuchet MS"/>
               </a:defRPr>
             </a:pPr>
             <a:r>
-              <a:t>• Undefined risk exposure: Advisors lack simple metrics to evaluate sector concentration and tail risk</a:t>
+              <a:t>UNMANAGED SECTOR TAIL RISK</a:t>
+            </a:r>
+          </a:p>
+          <a:p>
+            <a:pPr>
+              <a:lnSpc>
+                <a:spcPct val="125000"/>
+              </a:lnSpc>
+              <a:defRPr sz="1050">
+                <a:solidFill>
+                  <a:srgbClr val="B0BEC5"/>
+                </a:solidFill>
+                <a:latin typeface="Segoe UI"/>
+              </a:defRPr>
+            </a:pPr>
+            <a:r>
+              <a:t>Advisors recommend sectoral or specialty funds (e.g. technology funds) based on recent returns without quantifying underlying concentration (HHI) or daily expected tail losses (VaR/CVaR) during market drawdowns.</a:t>
             </a:r>
           </a:p>
         </p:txBody>
@@ -5030,7 +6535,7 @@
     <p:bg>
       <p:bgPr>
         <a:solidFill>
-          <a:srgbClr val="0F111A"/>
+          <a:srgbClr val="0B0E14"/>
         </a:solidFill>
         <a:effectLst/>
       </p:bgPr>
@@ -5050,8 +6555,8 @@
         </p:nvSpPr>
         <p:spPr>
           <a:xfrm>
-            <a:off x="457200" y="457200"/>
-            <a:ext cx="11274552" cy="1097280"/>
+            <a:off x="685800" y="365760"/>
+            <a:ext cx="9144000" cy="274320"/>
           </a:xfrm>
           <a:prstGeom prst="rect">
             <a:avLst/>
@@ -5065,15 +6570,15 @@
           <a:lstStyle/>
           <a:p>
             <a:pPr>
-              <a:defRPr sz="3200" b="1">
+              <a:defRPr sz="900" b="1">
                 <a:solidFill>
                   <a:srgbClr val="00E5FF"/>
                 </a:solidFill>
-                <a:latin typeface="Arial"/>
+                <a:latin typeface="Trebuchet MS"/>
               </a:defRPr>
             </a:pPr>
             <a:r>
-              <a:t>Unified Data Assets Ingested</a:t>
+              <a:t>BLUESTOCK MUTUAL FUND ANALYTICS</a:t>
             </a:r>
           </a:p>
         </p:txBody>
@@ -5086,8 +6591,8 @@
         </p:nvSpPr>
         <p:spPr>
           <a:xfrm>
-            <a:off x="457200" y="1645920"/>
-            <a:ext cx="11274552" cy="4572000"/>
+            <a:off x="685800" y="594360"/>
+            <a:ext cx="10817352" cy="731520"/>
           </a:xfrm>
           <a:prstGeom prst="rect">
             <a:avLst/>
@@ -5101,82 +6606,522 @@
           <a:lstStyle/>
           <a:p>
             <a:pPr>
-              <a:spcAft>
-                <a:spcPts val="2000"/>
-              </a:spcAft>
-              <a:defRPr sz="1800" i="1">
+              <a:defRPr sz="2800" b="1">
+                <a:solidFill>
+                  <a:srgbClr val="FFFFFF"/>
+                </a:solidFill>
+                <a:latin typeface="Trebuchet MS"/>
+              </a:defRPr>
+            </a:pPr>
+            <a:r>
+              <a:t>Unified Integration: The Ingested Platform Inputs</a:t>
+            </a:r>
+          </a:p>
+        </p:txBody>
+      </p:sp>
+      <p:sp>
+        <p:nvSpPr>
+          <p:cNvPr id="4" name="Rectangle 3"/>
+          <p:cNvSpPr/>
+          <p:nvPr/>
+        </p:nvSpPr>
+        <p:spPr>
+          <a:xfrm>
+            <a:off x="685800" y="1280160"/>
+            <a:ext cx="10817352" cy="18288"/>
+          </a:xfrm>
+          <a:prstGeom prst="rect">
+            <a:avLst/>
+          </a:prstGeom>
+          <a:solidFill>
+            <a:srgbClr val="1E2235"/>
+          </a:solidFill>
+          <a:ln>
+            <a:noFill/>
+          </a:ln>
+        </p:spPr>
+        <p:style>
+          <a:lnRef idx="1">
+            <a:schemeClr val="accent1"/>
+          </a:lnRef>
+          <a:fillRef idx="3">
+            <a:schemeClr val="accent1"/>
+          </a:fillRef>
+          <a:effectRef idx="2">
+            <a:schemeClr val="accent1"/>
+          </a:effectRef>
+          <a:fontRef idx="minor">
+            <a:schemeClr val="lt1"/>
+          </a:fontRef>
+        </p:style>
+        <p:txBody>
+          <a:bodyPr rtlCol="0" anchor="ctr"/>
+          <a:lstStyle/>
+          <a:p>
+            <a:pPr algn="ctr"/>
+          </a:p>
+        </p:txBody>
+      </p:sp>
+      <p:sp>
+        <p:nvSpPr>
+          <p:cNvPr id="5" name="Rectangle 4"/>
+          <p:cNvSpPr/>
+          <p:nvPr/>
+        </p:nvSpPr>
+        <p:spPr>
+          <a:xfrm>
+            <a:off x="685800" y="1645920"/>
+            <a:ext cx="2468880" cy="4114800"/>
+          </a:xfrm>
+          <a:prstGeom prst="rect">
+            <a:avLst/>
+          </a:prstGeom>
+          <a:solidFill>
+            <a:srgbClr val="1E2235"/>
+          </a:solidFill>
+          <a:ln w="19050">
+            <a:solidFill>
+              <a:srgbClr val="3A405A"/>
+            </a:solidFill>
+          </a:ln>
+        </p:spPr>
+        <p:style>
+          <a:lnRef idx="1">
+            <a:schemeClr val="accent1"/>
+          </a:lnRef>
+          <a:fillRef idx="3">
+            <a:schemeClr val="accent1"/>
+          </a:fillRef>
+          <a:effectRef idx="2">
+            <a:schemeClr val="accent1"/>
+          </a:effectRef>
+          <a:fontRef idx="minor">
+            <a:schemeClr val="lt1"/>
+          </a:fontRef>
+        </p:style>
+        <p:txBody>
+          <a:bodyPr rtlCol="0" anchor="ctr"/>
+          <a:lstStyle/>
+          <a:p>
+            <a:pPr algn="ctr"/>
+          </a:p>
+        </p:txBody>
+      </p:sp>
+      <p:sp>
+        <p:nvSpPr>
+          <p:cNvPr id="6" name="TextBox 5"/>
+          <p:cNvSpPr txBox="1"/>
+          <p:nvPr/>
+        </p:nvSpPr>
+        <p:spPr>
+          <a:xfrm>
+            <a:off x="685800" y="1645920"/>
+            <a:ext cx="2468880" cy="4114800"/>
+          </a:xfrm>
+          <a:prstGeom prst="rect">
+            <a:avLst/>
+          </a:prstGeom>
+          <a:noFill/>
+        </p:spPr>
+        <p:txBody>
+          <a:bodyPr wrap="square" lIns="182880" rIns="182880" tIns="228600">
+            <a:spAutoFit/>
+          </a:bodyPr>
+          <a:lstStyle/>
+          <a:p>
+            <a:pPr>
+              <a:defRPr sz="1200" b="1">
                 <a:solidFill>
                   <a:srgbClr val="00E5FF"/>
                 </a:solidFill>
-                <a:latin typeface="Arial"/>
+                <a:latin typeface="Trebuchet MS"/>
               </a:defRPr>
             </a:pPr>
             <a:r>
-              <a:t>Platform inputs</a:t>
+              <a:t>NAV HISTORY</a:t>
             </a:r>
           </a:p>
           <a:p>
             <a:pPr>
+              <a:spcBef>
+                <a:spcPts val="800"/>
+              </a:spcBef>
               <a:spcAft>
                 <a:spcPts val="1200"/>
               </a:spcAft>
-              <a:defRPr sz="1600">
-                <a:solidFill>
-                  <a:srgbClr val="DCDCDC"/>
-                </a:solidFill>
-                <a:latin typeface="Arial"/>
+              <a:defRPr sz="1400" b="1">
+                <a:solidFill>
+                  <a:srgbClr val="FFFFFF"/>
+                </a:solidFill>
+                <a:latin typeface="Segoe UI"/>
               </a:defRPr>
             </a:pPr>
             <a:r>
-              <a:t>• Daily NAV Histories: Ingested 7,798 AMFI daily NAV rows (2022–2024)</a:t>
+              <a:t>7,798 Clean Rows</a:t>
             </a:r>
           </a:p>
           <a:p>
             <a:pPr>
+              <a:lnSpc>
+                <a:spcPct val="120000"/>
+              </a:lnSpc>
+              <a:defRPr sz="950">
+                <a:solidFill>
+                  <a:srgbClr val="B0BEC5"/>
+                </a:solidFill>
+                <a:latin typeface="Segoe UI"/>
+              </a:defRPr>
+            </a:pPr>
+            <a:r>
+              <a:t>Ingested daily Net Asset Value history spanning a 3-year period (2022-2024) across 10 mutual funds. Establishes the core pricing baseline for return calculations.</a:t>
+            </a:r>
+          </a:p>
+        </p:txBody>
+      </p:sp>
+      <p:sp>
+        <p:nvSpPr>
+          <p:cNvPr id="7" name="Rectangle 6"/>
+          <p:cNvSpPr/>
+          <p:nvPr/>
+        </p:nvSpPr>
+        <p:spPr>
+          <a:xfrm>
+            <a:off x="3429000" y="1645920"/>
+            <a:ext cx="2468880" cy="4114800"/>
+          </a:xfrm>
+          <a:prstGeom prst="rect">
+            <a:avLst/>
+          </a:prstGeom>
+          <a:solidFill>
+            <a:srgbClr val="1E2235"/>
+          </a:solidFill>
+          <a:ln w="19050">
+            <a:solidFill>
+              <a:srgbClr val="3A405A"/>
+            </a:solidFill>
+          </a:ln>
+        </p:spPr>
+        <p:style>
+          <a:lnRef idx="1">
+            <a:schemeClr val="accent1"/>
+          </a:lnRef>
+          <a:fillRef idx="3">
+            <a:schemeClr val="accent1"/>
+          </a:fillRef>
+          <a:effectRef idx="2">
+            <a:schemeClr val="accent1"/>
+          </a:effectRef>
+          <a:fontRef idx="minor">
+            <a:schemeClr val="lt1"/>
+          </a:fontRef>
+        </p:style>
+        <p:txBody>
+          <a:bodyPr rtlCol="0" anchor="ctr"/>
+          <a:lstStyle/>
+          <a:p>
+            <a:pPr algn="ctr"/>
+          </a:p>
+        </p:txBody>
+      </p:sp>
+      <p:sp>
+        <p:nvSpPr>
+          <p:cNvPr id="8" name="TextBox 7"/>
+          <p:cNvSpPr txBox="1"/>
+          <p:nvPr/>
+        </p:nvSpPr>
+        <p:spPr>
+          <a:xfrm>
+            <a:off x="3429000" y="1645920"/>
+            <a:ext cx="2468880" cy="4114800"/>
+          </a:xfrm>
+          <a:prstGeom prst="rect">
+            <a:avLst/>
+          </a:prstGeom>
+          <a:noFill/>
+        </p:spPr>
+        <p:txBody>
+          <a:bodyPr wrap="square" lIns="182880" rIns="182880" tIns="228600">
+            <a:spAutoFit/>
+          </a:bodyPr>
+          <a:lstStyle/>
+          <a:p>
+            <a:pPr>
+              <a:defRPr sz="1200" b="1">
+                <a:solidFill>
+                  <a:srgbClr val="00E5FF"/>
+                </a:solidFill>
+                <a:latin typeface="Trebuchet MS"/>
+              </a:defRPr>
+            </a:pPr>
+            <a:r>
+              <a:t>RETAIL TRANSACTIONS</a:t>
+            </a:r>
+          </a:p>
+          <a:p>
+            <a:pPr>
+              <a:spcBef>
+                <a:spcPts val="800"/>
+              </a:spcBef>
               <a:spcAft>
                 <a:spcPts val="1200"/>
               </a:spcAft>
-              <a:defRPr sz="1600">
-                <a:solidFill>
-                  <a:srgbClr val="DCDCDC"/>
-                </a:solidFill>
-                <a:latin typeface="Arial"/>
+              <a:defRPr sz="1400" b="1">
+                <a:solidFill>
+                  <a:srgbClr val="FFFFFF"/>
+                </a:solidFill>
+                <a:latin typeface="Segoe UI"/>
               </a:defRPr>
             </a:pPr>
             <a:r>
-              <a:t>• Retail Transaction Logs: 1,985 granular buy/sell records across 200 distinct investor profiles</a:t>
+              <a:t>1,985 Ledger Records</a:t>
             </a:r>
           </a:p>
           <a:p>
             <a:pPr>
+              <a:lnSpc>
+                <a:spcPct val="120000"/>
+              </a:lnSpc>
+              <a:defRPr sz="950">
+                <a:solidFill>
+                  <a:srgbClr val="B0BEC5"/>
+                </a:solidFill>
+                <a:latin typeface="Segoe UI"/>
+              </a:defRPr>
+            </a:pPr>
+            <a:r>
+              <a:t>Granular client transactions covering 200 distinct investor profiles. Contains buy/sell classifications, amounts, and units for cohort analysis.</a:t>
+            </a:r>
+          </a:p>
+        </p:txBody>
+      </p:sp>
+      <p:sp>
+        <p:nvSpPr>
+          <p:cNvPr id="9" name="Rectangle 8"/>
+          <p:cNvSpPr/>
+          <p:nvPr/>
+        </p:nvSpPr>
+        <p:spPr>
+          <a:xfrm>
+            <a:off x="6172200" y="1645920"/>
+            <a:ext cx="2468880" cy="4114800"/>
+          </a:xfrm>
+          <a:prstGeom prst="rect">
+            <a:avLst/>
+          </a:prstGeom>
+          <a:solidFill>
+            <a:srgbClr val="1E2235"/>
+          </a:solidFill>
+          <a:ln w="19050">
+            <a:solidFill>
+              <a:srgbClr val="3A405A"/>
+            </a:solidFill>
+          </a:ln>
+        </p:spPr>
+        <p:style>
+          <a:lnRef idx="1">
+            <a:schemeClr val="accent1"/>
+          </a:lnRef>
+          <a:fillRef idx="3">
+            <a:schemeClr val="accent1"/>
+          </a:fillRef>
+          <a:effectRef idx="2">
+            <a:schemeClr val="accent1"/>
+          </a:effectRef>
+          <a:fontRef idx="minor">
+            <a:schemeClr val="lt1"/>
+          </a:fontRef>
+        </p:style>
+        <p:txBody>
+          <a:bodyPr rtlCol="0" anchor="ctr"/>
+          <a:lstStyle/>
+          <a:p>
+            <a:pPr algn="ctr"/>
+          </a:p>
+        </p:txBody>
+      </p:sp>
+      <p:sp>
+        <p:nvSpPr>
+          <p:cNvPr id="10" name="TextBox 9"/>
+          <p:cNvSpPr txBox="1"/>
+          <p:nvPr/>
+        </p:nvSpPr>
+        <p:spPr>
+          <a:xfrm>
+            <a:off x="6172200" y="1645920"/>
+            <a:ext cx="2468880" cy="4114800"/>
+          </a:xfrm>
+          <a:prstGeom prst="rect">
+            <a:avLst/>
+          </a:prstGeom>
+          <a:noFill/>
+        </p:spPr>
+        <p:txBody>
+          <a:bodyPr wrap="square" lIns="182880" rIns="182880" tIns="228600">
+            <a:spAutoFit/>
+          </a:bodyPr>
+          <a:lstStyle/>
+          <a:p>
+            <a:pPr>
+              <a:defRPr sz="1200" b="1">
+                <a:solidFill>
+                  <a:srgbClr val="00E676"/>
+                </a:solidFill>
+                <a:latin typeface="Trebuchet MS"/>
+              </a:defRPr>
+            </a:pPr>
+            <a:r>
+              <a:t>MARKET BENCHMARKS</a:t>
+            </a:r>
+          </a:p>
+          <a:p>
+            <a:pPr>
+              <a:spcBef>
+                <a:spcPts val="800"/>
+              </a:spcBef>
               <a:spcAft>
                 <a:spcPts val="1200"/>
               </a:spcAft>
-              <a:defRPr sz="1600">
-                <a:solidFill>
-                  <a:srgbClr val="DCDCDC"/>
-                </a:solidFill>
-                <a:latin typeface="Arial"/>
+              <a:defRPr sz="1400" b="1">
+                <a:solidFill>
+                  <a:srgbClr val="FFFFFF"/>
+                </a:solidFill>
+                <a:latin typeface="Segoe UI"/>
               </a:defRPr>
             </a:pPr>
             <a:r>
-              <a:t>• Benchmark Indices: Daily Nifty 50 and Nifty 100 prices fetched from yfinance API</a:t>
+              <a:t>Daily Index Feeds</a:t>
             </a:r>
           </a:p>
           <a:p>
             <a:pPr>
+              <a:lnSpc>
+                <a:spcPct val="120000"/>
+              </a:lnSpc>
+              <a:defRPr sz="950">
+                <a:solidFill>
+                  <a:srgbClr val="B0BEC5"/>
+                </a:solidFill>
+                <a:latin typeface="Segoe UI"/>
+              </a:defRPr>
+            </a:pPr>
+            <a:r>
+              <a:t>Fetched daily close pricing for Nifty 50 and Nifty 100 via the yfinance API to serve as market indices and risk baselines.</a:t>
+            </a:r>
+          </a:p>
+        </p:txBody>
+      </p:sp>
+      <p:sp>
+        <p:nvSpPr>
+          <p:cNvPr id="11" name="Rectangle 10"/>
+          <p:cNvSpPr/>
+          <p:nvPr/>
+        </p:nvSpPr>
+        <p:spPr>
+          <a:xfrm>
+            <a:off x="8915400" y="1645920"/>
+            <a:ext cx="2468880" cy="4114800"/>
+          </a:xfrm>
+          <a:prstGeom prst="rect">
+            <a:avLst/>
+          </a:prstGeom>
+          <a:solidFill>
+            <a:srgbClr val="1E2235"/>
+          </a:solidFill>
+          <a:ln w="19050">
+            <a:solidFill>
+              <a:srgbClr val="3A405A"/>
+            </a:solidFill>
+          </a:ln>
+        </p:spPr>
+        <p:style>
+          <a:lnRef idx="1">
+            <a:schemeClr val="accent1"/>
+          </a:lnRef>
+          <a:fillRef idx="3">
+            <a:schemeClr val="accent1"/>
+          </a:fillRef>
+          <a:effectRef idx="2">
+            <a:schemeClr val="accent1"/>
+          </a:effectRef>
+          <a:fontRef idx="minor">
+            <a:schemeClr val="lt1"/>
+          </a:fontRef>
+        </p:style>
+        <p:txBody>
+          <a:bodyPr rtlCol="0" anchor="ctr"/>
+          <a:lstStyle/>
+          <a:p>
+            <a:pPr algn="ctr"/>
+          </a:p>
+        </p:txBody>
+      </p:sp>
+      <p:sp>
+        <p:nvSpPr>
+          <p:cNvPr id="12" name="TextBox 11"/>
+          <p:cNvSpPr txBox="1"/>
+          <p:nvPr/>
+        </p:nvSpPr>
+        <p:spPr>
+          <a:xfrm>
+            <a:off x="8915400" y="1645920"/>
+            <a:ext cx="2468880" cy="4114800"/>
+          </a:xfrm>
+          <a:prstGeom prst="rect">
+            <a:avLst/>
+          </a:prstGeom>
+          <a:noFill/>
+        </p:spPr>
+        <p:txBody>
+          <a:bodyPr wrap="square" lIns="182880" rIns="182880" tIns="228600">
+            <a:spAutoFit/>
+          </a:bodyPr>
+          <a:lstStyle/>
+          <a:p>
+            <a:pPr>
+              <a:defRPr sz="1200" b="1">
+                <a:solidFill>
+                  <a:srgbClr val="00E676"/>
+                </a:solidFill>
+                <a:latin typeface="Trebuchet MS"/>
+              </a:defRPr>
+            </a:pPr>
+            <a:r>
+              <a:t>PORTFOLIO HOLDINGS</a:t>
+            </a:r>
+          </a:p>
+          <a:p>
+            <a:pPr>
+              <a:spcBef>
+                <a:spcPts val="800"/>
+              </a:spcBef>
               <a:spcAft>
                 <a:spcPts val="1200"/>
               </a:spcAft>
-              <a:defRPr sz="1600">
-                <a:solidFill>
-                  <a:srgbClr val="DCDCDC"/>
-                </a:solidFill>
-                <a:latin typeface="Arial"/>
+              <a:defRPr sz="1400" b="1">
+                <a:solidFill>
+                  <a:srgbClr val="FFFFFF"/>
+                </a:solidFill>
+                <a:latin typeface="Segoe UI"/>
               </a:defRPr>
             </a:pPr>
             <a:r>
-              <a:t>• Holdings Allocations: Stock-level allocations mapped across schemes to evaluate sector weights</a:t>
+              <a:t>Stock-Level Weights</a:t>
+            </a:r>
+          </a:p>
+          <a:p>
+            <a:pPr>
+              <a:lnSpc>
+                <a:spcPct val="120000"/>
+              </a:lnSpc>
+              <a:defRPr sz="950">
+                <a:solidFill>
+                  <a:srgbClr val="B0BEC5"/>
+                </a:solidFill>
+                <a:latin typeface="Segoe UI"/>
+              </a:defRPr>
+            </a:pPr>
+            <a:r>
+              <a:t>Holdings allocations mapped across schemes to evaluate sector weights. Drives our Herfindahl-Hirschman Index (HHI) concentration calculations.</a:t>
             </a:r>
           </a:p>
         </p:txBody>
@@ -5195,7 +7140,7 @@
     <p:bg>
       <p:bgPr>
         <a:solidFill>
-          <a:srgbClr val="0F111A"/>
+          <a:srgbClr val="0B0E14"/>
         </a:solidFill>
         <a:effectLst/>
       </p:bgPr>
@@ -5215,8 +7160,8 @@
         </p:nvSpPr>
         <p:spPr>
           <a:xfrm>
-            <a:off x="457200" y="457200"/>
-            <a:ext cx="11274552" cy="1097280"/>
+            <a:off x="685800" y="365760"/>
+            <a:ext cx="9144000" cy="274320"/>
           </a:xfrm>
           <a:prstGeom prst="rect">
             <a:avLst/>
@@ -5230,15 +7175,15 @@
           <a:lstStyle/>
           <a:p>
             <a:pPr>
-              <a:defRPr sz="3200" b="1">
+              <a:defRPr sz="900" b="1">
                 <a:solidFill>
                   <a:srgbClr val="00E5FF"/>
                 </a:solidFill>
-                <a:latin typeface="Arial"/>
+                <a:latin typeface="Trebuchet MS"/>
               </a:defRPr>
             </a:pPr>
             <a:r>
-              <a:t>ETL Ingestion &amp; Database STAR Schema</a:t>
+              <a:t>BLUESTOCK MUTUAL FUND ANALYTICS</a:t>
             </a:r>
           </a:p>
         </p:txBody>
@@ -5251,8 +7196,8 @@
         </p:nvSpPr>
         <p:spPr>
           <a:xfrm>
-            <a:off x="457200" y="1645920"/>
-            <a:ext cx="11274552" cy="4572000"/>
+            <a:off x="685800" y="594360"/>
+            <a:ext cx="10817352" cy="731520"/>
           </a:xfrm>
           <a:prstGeom prst="rect">
             <a:avLst/>
@@ -5266,66 +7211,282 @@
           <a:lstStyle/>
           <a:p>
             <a:pPr>
-              <a:spcAft>
-                <a:spcPts val="2000"/>
-              </a:spcAft>
-              <a:defRPr sz="1800" i="1">
+              <a:defRPr sz="2800" b="1">
+                <a:solidFill>
+                  <a:srgbClr val="FFFFFF"/>
+                </a:solidFill>
+                <a:latin typeface="Trebuchet MS"/>
+              </a:defRPr>
+            </a:pPr>
+            <a:r>
+              <a:t>ETL Pipeline &amp; SQLite STAR Schema Database Design</a:t>
+            </a:r>
+          </a:p>
+        </p:txBody>
+      </p:sp>
+      <p:sp>
+        <p:nvSpPr>
+          <p:cNvPr id="4" name="Rectangle 3"/>
+          <p:cNvSpPr/>
+          <p:nvPr/>
+        </p:nvSpPr>
+        <p:spPr>
+          <a:xfrm>
+            <a:off x="685800" y="1280160"/>
+            <a:ext cx="10817352" cy="18288"/>
+          </a:xfrm>
+          <a:prstGeom prst="rect">
+            <a:avLst/>
+          </a:prstGeom>
+          <a:solidFill>
+            <a:srgbClr val="1E2235"/>
+          </a:solidFill>
+          <a:ln>
+            <a:noFill/>
+          </a:ln>
+        </p:spPr>
+        <p:style>
+          <a:lnRef idx="1">
+            <a:schemeClr val="accent1"/>
+          </a:lnRef>
+          <a:fillRef idx="3">
+            <a:schemeClr val="accent1"/>
+          </a:fillRef>
+          <a:effectRef idx="2">
+            <a:schemeClr val="accent1"/>
+          </a:effectRef>
+          <a:fontRef idx="minor">
+            <a:schemeClr val="lt1"/>
+          </a:fontRef>
+        </p:style>
+        <p:txBody>
+          <a:bodyPr rtlCol="0" anchor="ctr"/>
+          <a:lstStyle/>
+          <a:p>
+            <a:pPr algn="ctr"/>
+          </a:p>
+        </p:txBody>
+      </p:sp>
+      <p:sp>
+        <p:nvSpPr>
+          <p:cNvPr id="5" name="Rectangle 4"/>
+          <p:cNvSpPr/>
+          <p:nvPr/>
+        </p:nvSpPr>
+        <p:spPr>
+          <a:xfrm>
+            <a:off x="685800" y="1645920"/>
+            <a:ext cx="5212080" cy="4114800"/>
+          </a:xfrm>
+          <a:prstGeom prst="rect">
+            <a:avLst/>
+          </a:prstGeom>
+          <a:solidFill>
+            <a:srgbClr val="1E2235"/>
+          </a:solidFill>
+          <a:ln w="19050">
+            <a:solidFill>
+              <a:srgbClr val="3A405A"/>
+            </a:solidFill>
+          </a:ln>
+        </p:spPr>
+        <p:style>
+          <a:lnRef idx="1">
+            <a:schemeClr val="accent1"/>
+          </a:lnRef>
+          <a:fillRef idx="3">
+            <a:schemeClr val="accent1"/>
+          </a:fillRef>
+          <a:effectRef idx="2">
+            <a:schemeClr val="accent1"/>
+          </a:effectRef>
+          <a:fontRef idx="minor">
+            <a:schemeClr val="lt1"/>
+          </a:fontRef>
+        </p:style>
+        <p:txBody>
+          <a:bodyPr rtlCol="0" anchor="ctr" wrap="square" lIns="274320" tIns="274320"/>
+          <a:lstStyle/>
+          <a:p>
+            <a:pPr algn="ctr">
+              <a:defRPr sz="1600" b="1">
                 <a:solidFill>
                   <a:srgbClr val="00E5FF"/>
                 </a:solidFill>
-                <a:latin typeface="Arial"/>
+                <a:latin typeface="Trebuchet MS"/>
               </a:defRPr>
             </a:pPr>
             <a:r>
-              <a:t>Engineered data pipeline</a:t>
+              <a:t>Ingestion Pipeline &amp; Operations</a:t>
             </a:r>
           </a:p>
           <a:p>
             <a:pPr>
-              <a:spcAft>
+              <a:lnSpc>
+                <a:spcPct val="120000"/>
+              </a:lnSpc>
+              <a:spcBef>
                 <a:spcPts val="1200"/>
-              </a:spcAft>
-              <a:defRPr sz="1600">
-                <a:solidFill>
-                  <a:srgbClr val="DCDCDC"/>
-                </a:solidFill>
-                <a:latin typeface="Arial"/>
+              </a:spcBef>
+              <a:defRPr sz="1100">
+                <a:solidFill>
+                  <a:srgbClr val="B0BEC5"/>
+                </a:solidFill>
+                <a:latin typeface="Segoe UI"/>
               </a:defRPr>
             </a:pPr>
             <a:r>
-              <a:t>• Modular pipeline: run scripts/etl_pipeline.py to process and clean files</a:t>
+              <a:t>1. Schema Ingestion Check: Standardizes CSV headers and forces correct naming configurations.</a:t>
             </a:r>
           </a:p>
           <a:p>
             <a:pPr>
-              <a:spcAft>
+              <a:lnSpc>
+                <a:spcPct val="120000"/>
+              </a:lnSpc>
+              <a:spcBef>
                 <a:spcPts val="1200"/>
-              </a:spcAft>
-              <a:defRPr sz="1600">
-                <a:solidFill>
-                  <a:srgbClr val="DCDCDC"/>
-                </a:solidFill>
-                <a:latin typeface="Arial"/>
+              </a:spcBef>
+              <a:defRPr sz="1100">
+                <a:solidFill>
+                  <a:srgbClr val="B0BEC5"/>
+                </a:solidFill>
+                <a:latin typeface="Segoe UI"/>
               </a:defRPr>
             </a:pPr>
             <a:r>
-              <a:t>• SQLite STAR Schema: Loads dimensions (AMC, Scheme, Date, Investor) and facts (NAV, Transact, Performance)</a:t>
+              <a:t>2. Duplicate and Null Pruning: Purges identical ledger lines and imputes missing intermediate NAV entries.</a:t>
             </a:r>
           </a:p>
           <a:p>
             <a:pPr>
-              <a:spcAft>
+              <a:lnSpc>
+                <a:spcPct val="120000"/>
+              </a:lnSpc>
+              <a:spcBef>
                 <a:spcPts val="1200"/>
-              </a:spcAft>
-              <a:defRPr sz="1600">
-                <a:solidFill>
-                  <a:srgbClr val="DCDCDC"/>
-                </a:solidFill>
-                <a:latin typeface="Arial"/>
+              </a:spcBef>
+              <a:defRPr sz="1100">
+                <a:solidFill>
+                  <a:srgbClr val="B0BEC5"/>
+                </a:solidFill>
+                <a:latin typeface="Segoe UI"/>
               </a:defRPr>
             </a:pPr>
             <a:r>
-              <a:t>• Referential integrity: Foreign key mapping and indexes implemented to optimize query performance</a:t>
+              <a:t>3. SQL Loading Engine: Establishes a transaction and loads the dimension and fact tables into SQLite.</a:t>
+            </a:r>
+          </a:p>
+        </p:txBody>
+      </p:sp>
+      <p:sp>
+        <p:nvSpPr>
+          <p:cNvPr id="6" name="Rectangle 5"/>
+          <p:cNvSpPr/>
+          <p:nvPr/>
+        </p:nvSpPr>
+        <p:spPr>
+          <a:xfrm>
+            <a:off x="6291072" y="1645920"/>
+            <a:ext cx="5212080" cy="4114800"/>
+          </a:xfrm>
+          <a:prstGeom prst="rect">
+            <a:avLst/>
+          </a:prstGeom>
+          <a:solidFill>
+            <a:srgbClr val="1E2235"/>
+          </a:solidFill>
+          <a:ln w="19050">
+            <a:solidFill>
+              <a:srgbClr val="3A405A"/>
+            </a:solidFill>
+          </a:ln>
+        </p:spPr>
+        <p:style>
+          <a:lnRef idx="1">
+            <a:schemeClr val="accent1"/>
+          </a:lnRef>
+          <a:fillRef idx="3">
+            <a:schemeClr val="accent1"/>
+          </a:fillRef>
+          <a:effectRef idx="2">
+            <a:schemeClr val="accent1"/>
+          </a:effectRef>
+          <a:fontRef idx="minor">
+            <a:schemeClr val="lt1"/>
+          </a:fontRef>
+        </p:style>
+        <p:txBody>
+          <a:bodyPr rtlCol="0" anchor="ctr" wrap="square" lIns="274320" tIns="274320"/>
+          <a:lstStyle/>
+          <a:p>
+            <a:pPr algn="ctr">
+              <a:defRPr sz="1600" b="1">
+                <a:solidFill>
+                  <a:srgbClr val="00E676"/>
+                </a:solidFill>
+                <a:latin typeface="Trebuchet MS"/>
+              </a:defRPr>
+            </a:pPr>
+            <a:r>
+              <a:t>Relational Star Schema Design</a:t>
+            </a:r>
+          </a:p>
+          <a:p>
+            <a:pPr>
+              <a:lnSpc>
+                <a:spcPct val="120000"/>
+              </a:lnSpc>
+              <a:spcBef>
+                <a:spcPts val="1000"/>
+              </a:spcBef>
+              <a:defRPr sz="1050">
+                <a:solidFill>
+                  <a:srgbClr val="B0BEC5"/>
+                </a:solidFill>
+                <a:latin typeface="Segoe UI"/>
+              </a:defRPr>
+            </a:pPr>
+            <a:r>
+              <a:t>• Dimension Tables: dim_scheme (fund attributes), dim_amc (asset manager masters), dim_investor (client demographics &amp; risk profiles), dim_date (unified time dimension).</a:t>
+            </a:r>
+          </a:p>
+          <a:p>
+            <a:pPr>
+              <a:lnSpc>
+                <a:spcPct val="120000"/>
+              </a:lnSpc>
+              <a:spcBef>
+                <a:spcPts val="1000"/>
+              </a:spcBef>
+              <a:defRPr sz="1050">
+                <a:solidFill>
+                  <a:srgbClr val="B0BEC5"/>
+                </a:solidFill>
+                <a:latin typeface="Segoe UI"/>
+              </a:defRPr>
+            </a:pPr>
+            <a:r>
+              <a:t>• Central Fact Tables: fact_nav_history (pricing records), fact_investor_transactions (retail transaction ledger), fact_scheme_performance (returns summaries).</a:t>
+            </a:r>
+          </a:p>
+          <a:p>
+            <a:pPr>
+              <a:lnSpc>
+                <a:spcPct val="120000"/>
+              </a:lnSpc>
+              <a:spcBef>
+                <a:spcPts val="1000"/>
+              </a:spcBef>
+              <a:defRPr sz="1050">
+                <a:solidFill>
+                  <a:srgbClr val="B0BEC5"/>
+                </a:solidFill>
+                <a:latin typeface="Segoe UI"/>
+              </a:defRPr>
+            </a:pPr>
+            <a:r>
+              <a:t>• Database Integrity: Primary key constraints, cascading foreign keys, and index keys on (date, scheme_code) to optimize analytical queries.</a:t>
             </a:r>
           </a:p>
         </p:txBody>
@@ -5344,7 +7505,7 @@
     <p:bg>
       <p:bgPr>
         <a:solidFill>
-          <a:srgbClr val="0F111A"/>
+          <a:srgbClr val="0B0E14"/>
         </a:solidFill>
         <a:effectLst/>
       </p:bgPr>
@@ -5364,8 +7525,8 @@
         </p:nvSpPr>
         <p:spPr>
           <a:xfrm>
-            <a:off x="457200" y="457200"/>
-            <a:ext cx="11274552" cy="1097280"/>
+            <a:off x="685800" y="365760"/>
+            <a:ext cx="9144000" cy="274320"/>
           </a:xfrm>
           <a:prstGeom prst="rect">
             <a:avLst/>
@@ -5379,15 +7540,15 @@
           <a:lstStyle/>
           <a:p>
             <a:pPr>
-              <a:defRPr sz="3200" b="1">
+              <a:defRPr sz="900" b="1">
                 <a:solidFill>
                   <a:srgbClr val="00E5FF"/>
                 </a:solidFill>
-                <a:latin typeface="Arial"/>
+                <a:latin typeface="Trebuchet MS"/>
               </a:defRPr>
             </a:pPr>
             <a:r>
-              <a:t>Engineering Challenges &amp; Resolutions</a:t>
+              <a:t>BLUESTOCK MUTUAL FUND ANALYTICS</a:t>
             </a:r>
           </a:p>
         </p:txBody>
@@ -5400,8 +7561,8 @@
         </p:nvSpPr>
         <p:spPr>
           <a:xfrm>
-            <a:off x="457200" y="1645920"/>
-            <a:ext cx="11274552" cy="4572000"/>
+            <a:off x="685800" y="594360"/>
+            <a:ext cx="10817352" cy="731520"/>
           </a:xfrm>
           <a:prstGeom prst="rect">
             <a:avLst/>
@@ -5415,66 +7576,358 @@
           <a:lstStyle/>
           <a:p>
             <a:pPr>
-              <a:spcAft>
-                <a:spcPts val="2000"/>
-              </a:spcAft>
-              <a:defRPr sz="1800" i="1">
+              <a:defRPr sz="2800" b="1">
+                <a:solidFill>
+                  <a:srgbClr val="FFFFFF"/>
+                </a:solidFill>
+                <a:latin typeface="Trebuchet MS"/>
+              </a:defRPr>
+            </a:pPr>
+            <a:r>
+              <a:t>Engineering Fallbacks: Handling Production Anomalies</a:t>
+            </a:r>
+          </a:p>
+        </p:txBody>
+      </p:sp>
+      <p:sp>
+        <p:nvSpPr>
+          <p:cNvPr id="4" name="Rectangle 3"/>
+          <p:cNvSpPr/>
+          <p:nvPr/>
+        </p:nvSpPr>
+        <p:spPr>
+          <a:xfrm>
+            <a:off x="685800" y="1280160"/>
+            <a:ext cx="10817352" cy="18288"/>
+          </a:xfrm>
+          <a:prstGeom prst="rect">
+            <a:avLst/>
+          </a:prstGeom>
+          <a:solidFill>
+            <a:srgbClr val="1E2235"/>
+          </a:solidFill>
+          <a:ln>
+            <a:noFill/>
+          </a:ln>
+        </p:spPr>
+        <p:style>
+          <a:lnRef idx="1">
+            <a:schemeClr val="accent1"/>
+          </a:lnRef>
+          <a:fillRef idx="3">
+            <a:schemeClr val="accent1"/>
+          </a:fillRef>
+          <a:effectRef idx="2">
+            <a:schemeClr val="accent1"/>
+          </a:effectRef>
+          <a:fontRef idx="minor">
+            <a:schemeClr val="lt1"/>
+          </a:fontRef>
+        </p:style>
+        <p:txBody>
+          <a:bodyPr rtlCol="0" anchor="ctr"/>
+          <a:lstStyle/>
+          <a:p>
+            <a:pPr algn="ctr"/>
+          </a:p>
+        </p:txBody>
+      </p:sp>
+      <p:sp>
+        <p:nvSpPr>
+          <p:cNvPr id="5" name="Rectangle 4"/>
+          <p:cNvSpPr/>
+          <p:nvPr/>
+        </p:nvSpPr>
+        <p:spPr>
+          <a:xfrm>
+            <a:off x="685800" y="1645920"/>
+            <a:ext cx="10817352" cy="1143000"/>
+          </a:xfrm>
+          <a:prstGeom prst="rect">
+            <a:avLst/>
+          </a:prstGeom>
+          <a:solidFill>
+            <a:srgbClr val="1E2235"/>
+          </a:solidFill>
+          <a:ln w="19050">
+            <a:solidFill>
+              <a:srgbClr val="3A405A"/>
+            </a:solidFill>
+          </a:ln>
+        </p:spPr>
+        <p:style>
+          <a:lnRef idx="1">
+            <a:schemeClr val="accent1"/>
+          </a:lnRef>
+          <a:fillRef idx="3">
+            <a:schemeClr val="accent1"/>
+          </a:fillRef>
+          <a:effectRef idx="2">
+            <a:schemeClr val="accent1"/>
+          </a:effectRef>
+          <a:fontRef idx="minor">
+            <a:schemeClr val="lt1"/>
+          </a:fontRef>
+        </p:style>
+        <p:txBody>
+          <a:bodyPr rtlCol="0" anchor="ctr"/>
+          <a:lstStyle/>
+          <a:p>
+            <a:pPr algn="ctr"/>
+          </a:p>
+        </p:txBody>
+      </p:sp>
+      <p:sp>
+        <p:nvSpPr>
+          <p:cNvPr id="6" name="TextBox 5"/>
+          <p:cNvSpPr txBox="1"/>
+          <p:nvPr/>
+        </p:nvSpPr>
+        <p:spPr>
+          <a:xfrm>
+            <a:off x="685800" y="1645920"/>
+            <a:ext cx="10817352" cy="1143000"/>
+          </a:xfrm>
+          <a:prstGeom prst="rect">
+            <a:avLst/>
+          </a:prstGeom>
+          <a:noFill/>
+        </p:spPr>
+        <p:txBody>
+          <a:bodyPr wrap="square" lIns="274320" rIns="274320" tIns="137160">
+            <a:spAutoFit/>
+          </a:bodyPr>
+          <a:lstStyle/>
+          <a:p>
+            <a:pPr>
+              <a:defRPr sz="1300" b="1">
                 <a:solidFill>
                   <a:srgbClr val="00E5FF"/>
                 </a:solidFill>
-                <a:latin typeface="Arial"/>
+                <a:latin typeface="Trebuchet MS"/>
               </a:defRPr>
             </a:pPr>
             <a:r>
-              <a:t>Handling raw data anomalies in production</a:t>
+              <a:t>Plotly Image Export Fallback</a:t>
             </a:r>
           </a:p>
           <a:p>
             <a:pPr>
-              <a:spcAft>
-                <a:spcPts val="1200"/>
-              </a:spcAft>
-              <a:defRPr sz="1600">
-                <a:solidFill>
-                  <a:srgbClr val="DCDCDC"/>
-                </a:solidFill>
-                <a:latin typeface="Arial"/>
+              <a:lnSpc>
+                <a:spcPct val="115000"/>
+              </a:lnSpc>
+              <a:spcBef>
+                <a:spcPts val="400"/>
+              </a:spcBef>
+              <a:defRPr sz="1050">
+                <a:solidFill>
+                  <a:srgbClr val="B0BEC5"/>
+                </a:solidFill>
+                <a:latin typeface="Segoe UI"/>
               </a:defRPr>
             </a:pPr>
             <a:r>
-              <a:t>• Plotly Static Export: Windows Kaleido hangs resolved by Matplotlib visualization fallback</a:t>
-            </a:r>
-          </a:p>
+              <a:t>Headless tasks on Windows often freeze when running Plotly's static image exporter (Kaleido). We implemented a Matplotlib/Seaborn rendering fallback that automatically translates Plotly trace definitions and exports high-fidelity PNGs if Kaleido hangs.</a:t>
+            </a:r>
+          </a:p>
+        </p:txBody>
+      </p:sp>
+      <p:sp>
+        <p:nvSpPr>
+          <p:cNvPr id="7" name="Rectangle 6"/>
+          <p:cNvSpPr/>
+          <p:nvPr/>
+        </p:nvSpPr>
+        <p:spPr>
+          <a:xfrm>
+            <a:off x="685800" y="3017520"/>
+            <a:ext cx="10817352" cy="1143000"/>
+          </a:xfrm>
+          <a:prstGeom prst="rect">
+            <a:avLst/>
+          </a:prstGeom>
+          <a:solidFill>
+            <a:srgbClr val="1E2235"/>
+          </a:solidFill>
+          <a:ln w="19050">
+            <a:solidFill>
+              <a:srgbClr val="3A405A"/>
+            </a:solidFill>
+          </a:ln>
+        </p:spPr>
+        <p:style>
+          <a:lnRef idx="1">
+            <a:schemeClr val="accent1"/>
+          </a:lnRef>
+          <a:fillRef idx="3">
+            <a:schemeClr val="accent1"/>
+          </a:fillRef>
+          <a:effectRef idx="2">
+            <a:schemeClr val="accent1"/>
+          </a:effectRef>
+          <a:fontRef idx="minor">
+            <a:schemeClr val="lt1"/>
+          </a:fontRef>
+        </p:style>
+        <p:txBody>
+          <a:bodyPr rtlCol="0" anchor="ctr"/>
+          <a:lstStyle/>
+          <a:p>
+            <a:pPr algn="ctr"/>
+          </a:p>
+        </p:txBody>
+      </p:sp>
+      <p:sp>
+        <p:nvSpPr>
+          <p:cNvPr id="8" name="TextBox 7"/>
+          <p:cNvSpPr txBox="1"/>
+          <p:nvPr/>
+        </p:nvSpPr>
+        <p:spPr>
+          <a:xfrm>
+            <a:off x="685800" y="3017520"/>
+            <a:ext cx="10817352" cy="1143000"/>
+          </a:xfrm>
+          <a:prstGeom prst="rect">
+            <a:avLst/>
+          </a:prstGeom>
+          <a:noFill/>
+        </p:spPr>
+        <p:txBody>
+          <a:bodyPr wrap="square" lIns="274320" rIns="274320" tIns="137160">
+            <a:spAutoFit/>
+          </a:bodyPr>
+          <a:lstStyle/>
           <a:p>
             <a:pPr>
-              <a:spcAft>
-                <a:spcPts val="1200"/>
-              </a:spcAft>
-              <a:defRPr sz="1600">
-                <a:solidFill>
-                  <a:srgbClr val="DCDCDC"/>
-                </a:solidFill>
-                <a:latin typeface="Arial"/>
+              <a:defRPr sz="1300" b="1">
+                <a:solidFill>
+                  <a:srgbClr val="00E676"/>
+                </a:solidFill>
+                <a:latin typeface="Trebuchet MS"/>
               </a:defRPr>
             </a:pPr>
             <a:r>
-              <a:t>• yfinance API Column Shifting: Solved yfinance MultiIndex column headers programmatically</a:t>
+              <a:t>yfinance MultiIndex Flattening</a:t>
             </a:r>
           </a:p>
           <a:p>
             <a:pPr>
-              <a:spcAft>
-                <a:spcPts val="1200"/>
-              </a:spcAft>
-              <a:defRPr sz="1600">
-                <a:solidFill>
-                  <a:srgbClr val="DCDCDC"/>
-                </a:solidFill>
-                <a:latin typeface="Arial"/>
+              <a:lnSpc>
+                <a:spcPct val="115000"/>
+              </a:lnSpc>
+              <a:spcBef>
+                <a:spcPts val="400"/>
+              </a:spcBef>
+              <a:defRPr sz="1050">
+                <a:solidFill>
+                  <a:srgbClr val="B0BEC5"/>
+                </a:solidFill>
+                <a:latin typeface="Segoe UI"/>
               </a:defRPr>
             </a:pPr>
             <a:r>
-              <a:t>• Dirty Raw Inputs: Coerced invalid dates ('INVALID' string) to NaT and purged them</a:t>
+              <a:t>Downloading market indices via the Yahoo Finance API returns MultiIndexed columns on single tickers. The ingestion script programmatically flattens these column headers to prevent column shifting during dataframe serialization.</a:t>
+            </a:r>
+          </a:p>
+        </p:txBody>
+      </p:sp>
+      <p:sp>
+        <p:nvSpPr>
+          <p:cNvPr id="9" name="Rectangle 8"/>
+          <p:cNvSpPr/>
+          <p:nvPr/>
+        </p:nvSpPr>
+        <p:spPr>
+          <a:xfrm>
+            <a:off x="685800" y="4389120"/>
+            <a:ext cx="10817352" cy="1143000"/>
+          </a:xfrm>
+          <a:prstGeom prst="rect">
+            <a:avLst/>
+          </a:prstGeom>
+          <a:solidFill>
+            <a:srgbClr val="1E2235"/>
+          </a:solidFill>
+          <a:ln w="19050">
+            <a:solidFill>
+              <a:srgbClr val="3A405A"/>
+            </a:solidFill>
+          </a:ln>
+        </p:spPr>
+        <p:style>
+          <a:lnRef idx="1">
+            <a:schemeClr val="accent1"/>
+          </a:lnRef>
+          <a:fillRef idx="3">
+            <a:schemeClr val="accent1"/>
+          </a:fillRef>
+          <a:effectRef idx="2">
+            <a:schemeClr val="accent1"/>
+          </a:effectRef>
+          <a:fontRef idx="minor">
+            <a:schemeClr val="lt1"/>
+          </a:fontRef>
+        </p:style>
+        <p:txBody>
+          <a:bodyPr rtlCol="0" anchor="ctr"/>
+          <a:lstStyle/>
+          <a:p>
+            <a:pPr algn="ctr"/>
+          </a:p>
+        </p:txBody>
+      </p:sp>
+      <p:sp>
+        <p:nvSpPr>
+          <p:cNvPr id="10" name="TextBox 9"/>
+          <p:cNvSpPr txBox="1"/>
+          <p:nvPr/>
+        </p:nvSpPr>
+        <p:spPr>
+          <a:xfrm>
+            <a:off x="685800" y="4389120"/>
+            <a:ext cx="10817352" cy="1143000"/>
+          </a:xfrm>
+          <a:prstGeom prst="rect">
+            <a:avLst/>
+          </a:prstGeom>
+          <a:noFill/>
+        </p:spPr>
+        <p:txBody>
+          <a:bodyPr wrap="square" lIns="274320" rIns="274320" tIns="137160">
+            <a:spAutoFit/>
+          </a:bodyPr>
+          <a:lstStyle/>
+          <a:p>
+            <a:pPr>
+              <a:defRPr sz="1300" b="1">
+                <a:solidFill>
+                  <a:srgbClr val="00E5FF"/>
+                </a:solidFill>
+                <a:latin typeface="Trebuchet MS"/>
+              </a:defRPr>
+            </a:pPr>
+            <a:r>
+              <a:t>Invalid Transaction Dates</a:t>
+            </a:r>
+          </a:p>
+          <a:p>
+            <a:pPr>
+              <a:lnSpc>
+                <a:spcPct val="115000"/>
+              </a:lnSpc>
+              <a:spcBef>
+                <a:spcPts val="400"/>
+              </a:spcBef>
+              <a:defRPr sz="1050">
+                <a:solidFill>
+                  <a:srgbClr val="B0BEC5"/>
+                </a:solidFill>
+                <a:latin typeface="Segoe UI"/>
+              </a:defRPr>
+            </a:pPr>
+            <a:r>
+              <a:t>The raw transactional sheet contained anomalous text inputs (e.g. 'INVALID' string entries). The cleaning pipeline resolves this by parsing date fields with errors coerced, and purging NaT rows to preserve integrity.</a:t>
             </a:r>
           </a:p>
         </p:txBody>
@@ -5493,7 +7946,7 @@
     <p:bg>
       <p:bgPr>
         <a:solidFill>
-          <a:srgbClr val="0F111A"/>
+          <a:srgbClr val="0B0E14"/>
         </a:solidFill>
         <a:effectLst/>
       </p:bgPr>
@@ -5513,8 +7966,8 @@
         </p:nvSpPr>
         <p:spPr>
           <a:xfrm>
-            <a:off x="457200" y="457200"/>
-            <a:ext cx="11274552" cy="1097280"/>
+            <a:off x="685800" y="365760"/>
+            <a:ext cx="9144000" cy="274320"/>
           </a:xfrm>
           <a:prstGeom prst="rect">
             <a:avLst/>
@@ -5528,15 +7981,15 @@
           <a:lstStyle/>
           <a:p>
             <a:pPr>
-              <a:defRPr sz="3200" b="1">
+              <a:defRPr sz="900" b="1">
                 <a:solidFill>
                   <a:srgbClr val="00E5FF"/>
                 </a:solidFill>
-                <a:latin typeface="Arial"/>
+                <a:latin typeface="Trebuchet MS"/>
               </a:defRPr>
             </a:pPr>
             <a:r>
-              <a:t>Statistical EDA Insights</a:t>
+              <a:t>BLUESTOCK MUTUAL FUND ANALYTICS</a:t>
             </a:r>
           </a:p>
         </p:txBody>
@@ -5549,8 +8002,8 @@
         </p:nvSpPr>
         <p:spPr>
           <a:xfrm>
-            <a:off x="457200" y="1645920"/>
-            <a:ext cx="11274552" cy="4572000"/>
+            <a:off x="685800" y="594360"/>
+            <a:ext cx="10817352" cy="731520"/>
           </a:xfrm>
           <a:prstGeom prst="rect">
             <a:avLst/>
@@ -5564,66 +8017,258 @@
           <a:lstStyle/>
           <a:p>
             <a:pPr>
-              <a:spcAft>
-                <a:spcPts val="2000"/>
-              </a:spcAft>
-              <a:defRPr sz="1800" i="1">
+              <a:defRPr sz="2800" b="1">
+                <a:solidFill>
+                  <a:srgbClr val="FFFFFF"/>
+                </a:solidFill>
+                <a:latin typeface="Trebuchet MS"/>
+              </a:defRPr>
+            </a:pPr>
+            <a:r>
+              <a:t>Exploratory Data Analysis: Key Statistical Insights</a:t>
+            </a:r>
+          </a:p>
+        </p:txBody>
+      </p:sp>
+      <p:sp>
+        <p:nvSpPr>
+          <p:cNvPr id="4" name="Rectangle 3"/>
+          <p:cNvSpPr/>
+          <p:nvPr/>
+        </p:nvSpPr>
+        <p:spPr>
+          <a:xfrm>
+            <a:off x="685800" y="1280160"/>
+            <a:ext cx="10817352" cy="18288"/>
+          </a:xfrm>
+          <a:prstGeom prst="rect">
+            <a:avLst/>
+          </a:prstGeom>
+          <a:solidFill>
+            <a:srgbClr val="1E2235"/>
+          </a:solidFill>
+          <a:ln>
+            <a:noFill/>
+          </a:ln>
+        </p:spPr>
+        <p:style>
+          <a:lnRef idx="1">
+            <a:schemeClr val="accent1"/>
+          </a:lnRef>
+          <a:fillRef idx="3">
+            <a:schemeClr val="accent1"/>
+          </a:fillRef>
+          <a:effectRef idx="2">
+            <a:schemeClr val="accent1"/>
+          </a:effectRef>
+          <a:fontRef idx="minor">
+            <a:schemeClr val="lt1"/>
+          </a:fontRef>
+        </p:style>
+        <p:txBody>
+          <a:bodyPr rtlCol="0" anchor="ctr"/>
+          <a:lstStyle/>
+          <a:p>
+            <a:pPr algn="ctr"/>
+          </a:p>
+        </p:txBody>
+      </p:sp>
+      <p:sp>
+        <p:nvSpPr>
+          <p:cNvPr id="5" name="Rectangle 4"/>
+          <p:cNvSpPr/>
+          <p:nvPr/>
+        </p:nvSpPr>
+        <p:spPr>
+          <a:xfrm>
+            <a:off x="685800" y="1645920"/>
+            <a:ext cx="10817352" cy="1920240"/>
+          </a:xfrm>
+          <a:prstGeom prst="rect">
+            <a:avLst/>
+          </a:prstGeom>
+          <a:solidFill>
+            <a:srgbClr val="1E2235"/>
+          </a:solidFill>
+          <a:ln w="19050">
+            <a:solidFill>
+              <a:srgbClr val="3A405A"/>
+            </a:solidFill>
+          </a:ln>
+        </p:spPr>
+        <p:style>
+          <a:lnRef idx="1">
+            <a:schemeClr val="accent1"/>
+          </a:lnRef>
+          <a:fillRef idx="3">
+            <a:schemeClr val="accent1"/>
+          </a:fillRef>
+          <a:effectRef idx="2">
+            <a:schemeClr val="accent1"/>
+          </a:effectRef>
+          <a:fontRef idx="minor">
+            <a:schemeClr val="lt1"/>
+          </a:fontRef>
+        </p:style>
+        <p:txBody>
+          <a:bodyPr rtlCol="0" anchor="ctr"/>
+          <a:lstStyle/>
+          <a:p>
+            <a:pPr algn="ctr"/>
+          </a:p>
+        </p:txBody>
+      </p:sp>
+      <p:sp>
+        <p:nvSpPr>
+          <p:cNvPr id="6" name="TextBox 5"/>
+          <p:cNvSpPr txBox="1"/>
+          <p:nvPr/>
+        </p:nvSpPr>
+        <p:spPr>
+          <a:xfrm>
+            <a:off x="685800" y="1645920"/>
+            <a:ext cx="10817352" cy="1920240"/>
+          </a:xfrm>
+          <a:prstGeom prst="rect">
+            <a:avLst/>
+          </a:prstGeom>
+          <a:noFill/>
+        </p:spPr>
+        <p:txBody>
+          <a:bodyPr wrap="square" lIns="274320" rIns="274320" tIns="182880">
+            <a:spAutoFit/>
+          </a:bodyPr>
+          <a:lstStyle/>
+          <a:p>
+            <a:pPr>
+              <a:defRPr sz="1500" b="1">
                 <a:solidFill>
                   <a:srgbClr val="00E5FF"/>
                 </a:solidFill>
-                <a:latin typeface="Arial"/>
+                <a:latin typeface="Trebuchet MS"/>
               </a:defRPr>
             </a:pPr>
             <a:r>
-              <a:t>Correlation and cost impact findings</a:t>
+              <a:t>Scheme Co-movement &amp; Diversification</a:t>
             </a:r>
           </a:p>
           <a:p>
             <a:pPr>
-              <a:spcAft>
-                <a:spcPts val="1200"/>
-              </a:spcAft>
-              <a:defRPr sz="1600">
-                <a:solidFill>
-                  <a:srgbClr val="DCDCDC"/>
-                </a:solidFill>
-                <a:latin typeface="Arial"/>
+              <a:lnSpc>
+                <a:spcPct val="125000"/>
+              </a:lnSpc>
+              <a:spcBef>
+                <a:spcPts val="800"/>
+              </a:spcBef>
+              <a:defRPr sz="1100">
+                <a:solidFill>
+                  <a:srgbClr val="B0BEC5"/>
+                </a:solidFill>
+                <a:latin typeface="Segoe UI"/>
               </a:defRPr>
             </a:pPr>
             <a:r>
-              <a:t>• High correlation: Large-cap schemes show returns correlation above 0.85</a:t>
-            </a:r>
-          </a:p>
+              <a:t>Computing the Pearson correlation matrix on daily returns reveals a highly integrated large-cap segment. All core large-cap funds display return correlations above 0.85. In contrast, the ICICI Prudential Technology Fund exhibits a daily correlation of only 0.42 to the core index. This highlights its significant diversification benefit, serving as a shock-absorber during standard large-cap pullbacks.</a:t>
+            </a:r>
+          </a:p>
+        </p:txBody>
+      </p:sp>
+      <p:sp>
+        <p:nvSpPr>
+          <p:cNvPr id="7" name="Rectangle 6"/>
+          <p:cNvSpPr/>
+          <p:nvPr/>
+        </p:nvSpPr>
+        <p:spPr>
+          <a:xfrm>
+            <a:off x="685800" y="3840480"/>
+            <a:ext cx="10817352" cy="1920240"/>
+          </a:xfrm>
+          <a:prstGeom prst="rect">
+            <a:avLst/>
+          </a:prstGeom>
+          <a:solidFill>
+            <a:srgbClr val="1E2235"/>
+          </a:solidFill>
+          <a:ln w="19050">
+            <a:solidFill>
+              <a:srgbClr val="3A405A"/>
+            </a:solidFill>
+          </a:ln>
+        </p:spPr>
+        <p:style>
+          <a:lnRef idx="1">
+            <a:schemeClr val="accent1"/>
+          </a:lnRef>
+          <a:fillRef idx="3">
+            <a:schemeClr val="accent1"/>
+          </a:fillRef>
+          <a:effectRef idx="2">
+            <a:schemeClr val="accent1"/>
+          </a:effectRef>
+          <a:fontRef idx="minor">
+            <a:schemeClr val="lt1"/>
+          </a:fontRef>
+        </p:style>
+        <p:txBody>
+          <a:bodyPr rtlCol="0" anchor="ctr"/>
+          <a:lstStyle/>
+          <a:p>
+            <a:pPr algn="ctr"/>
+          </a:p>
+        </p:txBody>
+      </p:sp>
+      <p:sp>
+        <p:nvSpPr>
+          <p:cNvPr id="8" name="TextBox 7"/>
+          <p:cNvSpPr txBox="1"/>
+          <p:nvPr/>
+        </p:nvSpPr>
+        <p:spPr>
+          <a:xfrm>
+            <a:off x="685800" y="3840480"/>
+            <a:ext cx="10817352" cy="1920240"/>
+          </a:xfrm>
+          <a:prstGeom prst="rect">
+            <a:avLst/>
+          </a:prstGeom>
+          <a:noFill/>
+        </p:spPr>
+        <p:txBody>
+          <a:bodyPr wrap="square" lIns="274320" rIns="274320" tIns="182880">
+            <a:spAutoFit/>
+          </a:bodyPr>
+          <a:lstStyle/>
           <a:p>
             <a:pPr>
-              <a:spcAft>
-                <a:spcPts val="1200"/>
-              </a:spcAft>
-              <a:defRPr sz="1600">
-                <a:solidFill>
-                  <a:srgbClr val="DCDCDC"/>
-                </a:solidFill>
-                <a:latin typeface="Arial"/>
+              <a:defRPr sz="1500" b="1">
+                <a:solidFill>
+                  <a:srgbClr val="00E676"/>
+                </a:solidFill>
+                <a:latin typeface="Trebuchet MS"/>
               </a:defRPr>
             </a:pPr>
             <a:r>
-              <a:t>• Diversification utility: The Tech Fund exhibits low returns correlation (~0.42) to standard indices</a:t>
+              <a:t>Expense Ratio Drag (OLS Regression)</a:t>
             </a:r>
           </a:p>
           <a:p>
             <a:pPr>
-              <a:spcAft>
-                <a:spcPts val="1200"/>
-              </a:spcAft>
-              <a:defRPr sz="1600">
-                <a:solidFill>
-                  <a:srgbClr val="DCDCDC"/>
-                </a:solidFill>
-                <a:latin typeface="Arial"/>
+              <a:lnSpc>
+                <a:spcPct val="125000"/>
+              </a:lnSpc>
+              <a:spcBef>
+                <a:spcPts val="800"/>
+              </a:spcBef>
+              <a:defRPr sz="1100">
+                <a:solidFill>
+                  <a:srgbClr val="B0BEC5"/>
+                </a:solidFill>
+                <a:latin typeface="Segoe UI"/>
               </a:defRPr>
             </a:pPr>
             <a:r>
-              <a:t>• Expense ratio drag: Plotting fees against 3Y CAGR reveals a clear negative cost drag</a:t>
+              <a:t>We ran an Ordinary Least Squares (OLS) regression mapping return drag as a function of annual fund fees. The model confirms that expense ratios act as a systemic drag on performance. Active schemes with expense structures exceeding 1.10% (e.g. SBI Small Cap) consistently erode net compounding returns compared to cost-efficient peers with similar portfolios.</a:t>
             </a:r>
           </a:p>
         </p:txBody>
@@ -5642,7 +8287,7 @@
     <p:bg>
       <p:bgPr>
         <a:solidFill>
-          <a:srgbClr val="0F111A"/>
+          <a:srgbClr val="0B0E14"/>
         </a:solidFill>
         <a:effectLst/>
       </p:bgPr>
@@ -5662,8 +8307,8 @@
         </p:nvSpPr>
         <p:spPr>
           <a:xfrm>
-            <a:off x="457200" y="457200"/>
-            <a:ext cx="11274552" cy="1097280"/>
+            <a:off x="685800" y="365760"/>
+            <a:ext cx="9144000" cy="274320"/>
           </a:xfrm>
           <a:prstGeom prst="rect">
             <a:avLst/>
@@ -5677,15 +8322,15 @@
           <a:lstStyle/>
           <a:p>
             <a:pPr>
-              <a:defRPr sz="3200" b="1">
+              <a:defRPr sz="900" b="1">
                 <a:solidFill>
                   <a:srgbClr val="00E5FF"/>
                 </a:solidFill>
-                <a:latin typeface="Arial"/>
+                <a:latin typeface="Trebuchet MS"/>
               </a:defRPr>
             </a:pPr>
             <a:r>
-              <a:t>The Weighted Fund Scorecard</a:t>
+              <a:t>BLUESTOCK MUTUAL FUND ANALYTICS</a:t>
             </a:r>
           </a:p>
         </p:txBody>
@@ -5698,8 +8343,8 @@
         </p:nvSpPr>
         <p:spPr>
           <a:xfrm>
-            <a:off x="457200" y="1645920"/>
-            <a:ext cx="11274552" cy="4572000"/>
+            <a:off x="685800" y="594360"/>
+            <a:ext cx="10817352" cy="731520"/>
           </a:xfrm>
           <a:prstGeom prst="rect">
             <a:avLst/>
@@ -5713,70 +8358,1369 @@
           <a:lstStyle/>
           <a:p>
             <a:pPr>
-              <a:spcAft>
-                <a:spcPts val="2000"/>
-              </a:spcAft>
-              <a:defRPr sz="1800" i="1">
+              <a:defRPr sz="2800" b="1">
+                <a:solidFill>
+                  <a:srgbClr val="FFFFFF"/>
+                </a:solidFill>
+                <a:latin typeface="Trebuchet MS"/>
+              </a:defRPr>
+            </a:pPr>
+            <a:r>
+              <a:t>The Performance Scorecard Leaderboard (Day 4)</a:t>
+            </a:r>
+          </a:p>
+        </p:txBody>
+      </p:sp>
+      <p:sp>
+        <p:nvSpPr>
+          <p:cNvPr id="4" name="Rectangle 3"/>
+          <p:cNvSpPr/>
+          <p:nvPr/>
+        </p:nvSpPr>
+        <p:spPr>
+          <a:xfrm>
+            <a:off x="685800" y="1280160"/>
+            <a:ext cx="10817352" cy="18288"/>
+          </a:xfrm>
+          <a:prstGeom prst="rect">
+            <a:avLst/>
+          </a:prstGeom>
+          <a:solidFill>
+            <a:srgbClr val="1E2235"/>
+          </a:solidFill>
+          <a:ln>
+            <a:noFill/>
+          </a:ln>
+        </p:spPr>
+        <p:style>
+          <a:lnRef idx="1">
+            <a:schemeClr val="accent1"/>
+          </a:lnRef>
+          <a:fillRef idx="3">
+            <a:schemeClr val="accent1"/>
+          </a:fillRef>
+          <a:effectRef idx="2">
+            <a:schemeClr val="accent1"/>
+          </a:effectRef>
+          <a:fontRef idx="minor">
+            <a:schemeClr val="lt1"/>
+          </a:fontRef>
+        </p:style>
+        <p:txBody>
+          <a:bodyPr rtlCol="0" anchor="ctr"/>
+          <a:lstStyle/>
+          <a:p>
+            <a:pPr algn="ctr"/>
+          </a:p>
+        </p:txBody>
+      </p:sp>
+      <p:sp>
+        <p:nvSpPr>
+          <p:cNvPr id="5" name="TextBox 4"/>
+          <p:cNvSpPr txBox="1"/>
+          <p:nvPr/>
+        </p:nvSpPr>
+        <p:spPr>
+          <a:xfrm>
+            <a:off x="685800" y="1645920"/>
+            <a:ext cx="3474720" cy="4114800"/>
+          </a:xfrm>
+          <a:prstGeom prst="rect">
+            <a:avLst/>
+          </a:prstGeom>
+          <a:noFill/>
+        </p:spPr>
+        <p:txBody>
+          <a:bodyPr wrap="square" lIns="0">
+            <a:spAutoFit/>
+          </a:bodyPr>
+          <a:lstStyle/>
+          <a:p>
+            <a:pPr>
+              <a:defRPr sz="1600" b="1">
                 <a:solidFill>
                   <a:srgbClr val="00E5FF"/>
                 </a:solidFill>
-                <a:latin typeface="Arial"/>
+                <a:latin typeface="Trebuchet MS"/>
               </a:defRPr>
             </a:pPr>
             <a:r>
-              <a:t>Dynamic performance leaderboard (Day 4)</a:t>
+              <a:t>Multi-Factor Scoring</a:t>
             </a:r>
           </a:p>
           <a:p>
             <a:pPr>
-              <a:spcAft>
-                <a:spcPts val="1200"/>
-              </a:spcAft>
-              <a:defRPr sz="1600">
-                <a:solidFill>
-                  <a:srgbClr val="DCDCDC"/>
-                </a:solidFill>
-                <a:latin typeface="Arial"/>
+              <a:lnSpc>
+                <a:spcPct val="120000"/>
+              </a:lnSpc>
+              <a:spcBef>
+                <a:spcPts val="800"/>
+              </a:spcBef>
+              <a:defRPr sz="1000">
+                <a:solidFill>
+                  <a:srgbClr val="B0BEC5"/>
+                </a:solidFill>
+                <a:latin typeface="Segoe UI"/>
               </a:defRPr>
             </a:pPr>
             <a:r>
-              <a:t>• Multi-factor scoring: CAGR (30%), Sharpe (25%), Alpha (20%), Expense (15%), Drawdown (10%)</a:t>
-            </a:r>
-          </a:p>
-          <a:p>
-            <a:pPr>
-              <a:spcAft>
-                <a:spcPts val="1200"/>
-              </a:spcAft>
-              <a:defRPr sz="1600">
-                <a:solidFill>
-                  <a:srgbClr val="DCDCDC"/>
-                </a:solidFill>
-                <a:latin typeface="Arial"/>
-              </a:defRPr>
-            </a:pPr>
-            <a:r>
-              <a:t>• DSP Top 100 Equity: Ranked #1 due to strong Sharpe (1.22) and CAPM Alpha (28.8%)</a:t>
-            </a:r>
-          </a:p>
-          <a:p>
-            <a:pPr>
-              <a:spcAft>
-                <a:spcPts val="1200"/>
-              </a:spcAft>
-              <a:defRPr sz="1600">
-                <a:solidFill>
-                  <a:srgbClr val="DCDCDC"/>
-                </a:solidFill>
-                <a:latin typeface="Arial"/>
-              </a:defRPr>
-            </a:pPr>
-            <a:r>
-              <a:t>• Mirae Asset Large Cap: Ranked #2 due to strong drawdown control (-17.4% max drawdown)</a:t>
-            </a:r>
-          </a:p>
-        </p:txBody>
-      </p:sp>
+              <a:t>We scored the 10 mutual funds based on a weighted rank model:</a:t>
+            </a:r>
+            <a:br/>
+            <a:br/>
+            <a:r>
+              <a:t>• 30% 3-Year CAGR Rank</a:t>
+            </a:r>
+            <a:br/>
+            <a:r>
+              <a:t>• 25% Sharpe Ratio Rank</a:t>
+            </a:r>
+            <a:br/>
+            <a:r>
+              <a:t>• 20% CAPM Alpha Rank</a:t>
+            </a:r>
+            <a:br/>
+            <a:r>
+              <a:t>• 15% Expense Ratio Rank (Inverse)</a:t>
+            </a:r>
+            <a:br/>
+            <a:r>
+              <a:t>• 10% Max Drawdown Rank (Inverse)</a:t>
+            </a:r>
+            <a:br/>
+            <a:br/>
+            <a:r>
+              <a:t>DSP Top 100 ranks #1 due to high annualized active Alpha (28.88%) and a Sharpe of 1.22.</a:t>
+            </a:r>
+            <a:br/>
+            <a:br/>
+            <a:r>
+              <a:t>Mirae Asset Large Cap ranks #2 due to strong drawdown control (-17.47%).</a:t>
+            </a:r>
+          </a:p>
+        </p:txBody>
+      </p:sp>
+      <p:graphicFrame>
+        <p:nvGraphicFramePr>
+          <p:cNvPr id="6" name="Table 5"/>
+          <p:cNvGraphicFramePr>
+            <a:graphicFrameLocks noGrp="1"/>
+          </p:cNvGraphicFramePr>
+          <p:nvPr/>
+        </p:nvGraphicFramePr>
+        <p:xfrm>
+          <a:off x="4389120" y="1645920"/>
+          <a:ext cx="7022591" cy="4114800"/>
+        </p:xfrm>
+        <a:graphic>
+          <a:graphicData uri="http://schemas.openxmlformats.org/drawingml/2006/table">
+            <a:tbl>
+              <a:tblPr firstRow="1" bandRow="1">
+                <a:tableStyleId>{5C22544A-7EE6-4342-B048-85BDC9FD1C3A}</a:tableStyleId>
+              </a:tblPr>
+              <a:tblGrid>
+                <a:gridCol w="594360"/>
+                <a:gridCol w="2084831"/>
+                <a:gridCol w="914400"/>
+                <a:gridCol w="822960"/>
+                <a:gridCol w="822960"/>
+                <a:gridCol w="914400"/>
+                <a:gridCol w="868680"/>
+              </a:tblGrid>
+              <a:tr h="587828">
+                <a:tc>
+                  <a:txBody>
+                    <a:bodyPr/>
+                    <a:lstStyle/>
+                    <a:p>
+                      <a:pPr algn="ctr">
+                        <a:defRPr sz="950" b="1">
+                          <a:solidFill>
+                            <a:srgbClr val="FFFFFF"/>
+                          </a:solidFill>
+                          <a:latin typeface="Trebuchet MS"/>
+                        </a:defRPr>
+                      </a:pPr>
+                      <a:r>
+                        <a:t>Rank</a:t>
+                      </a:r>
+                    </a:p>
+                  </a:txBody>
+                  <a:tcPr>
+                    <a:solidFill>
+                      <a:srgbClr val="1E2235"/>
+                    </a:solidFill>
+                  </a:tcPr>
+                </a:tc>
+                <a:tc>
+                  <a:txBody>
+                    <a:bodyPr/>
+                    <a:lstStyle/>
+                    <a:p>
+                      <a:pPr algn="ctr">
+                        <a:defRPr sz="950" b="1">
+                          <a:solidFill>
+                            <a:srgbClr val="FFFFFF"/>
+                          </a:solidFill>
+                          <a:latin typeface="Trebuchet MS"/>
+                        </a:defRPr>
+                      </a:pPr>
+                      <a:r>
+                        <a:t>Scheme Name</a:t>
+                      </a:r>
+                    </a:p>
+                  </a:txBody>
+                  <a:tcPr>
+                    <a:solidFill>
+                      <a:srgbClr val="1E2235"/>
+                    </a:solidFill>
+                  </a:tcPr>
+                </a:tc>
+                <a:tc>
+                  <a:txBody>
+                    <a:bodyPr/>
+                    <a:lstStyle/>
+                    <a:p>
+                      <a:pPr algn="ctr">
+                        <a:defRPr sz="950" b="1">
+                          <a:solidFill>
+                            <a:srgbClr val="FFFFFF"/>
+                          </a:solidFill>
+                          <a:latin typeface="Trebuchet MS"/>
+                        </a:defRPr>
+                      </a:pPr>
+                      <a:r>
+                        <a:t>3Y CAGR</a:t>
+                      </a:r>
+                    </a:p>
+                  </a:txBody>
+                  <a:tcPr>
+                    <a:solidFill>
+                      <a:srgbClr val="1E2235"/>
+                    </a:solidFill>
+                  </a:tcPr>
+                </a:tc>
+                <a:tc>
+                  <a:txBody>
+                    <a:bodyPr/>
+                    <a:lstStyle/>
+                    <a:p>
+                      <a:pPr algn="ctr">
+                        <a:defRPr sz="950" b="1">
+                          <a:solidFill>
+                            <a:srgbClr val="FFFFFF"/>
+                          </a:solidFill>
+                          <a:latin typeface="Trebuchet MS"/>
+                        </a:defRPr>
+                      </a:pPr>
+                      <a:r>
+                        <a:t>Sharpe</a:t>
+                      </a:r>
+                    </a:p>
+                  </a:txBody>
+                  <a:tcPr>
+                    <a:solidFill>
+                      <a:srgbClr val="1E2235"/>
+                    </a:solidFill>
+                  </a:tcPr>
+                </a:tc>
+                <a:tc>
+                  <a:txBody>
+                    <a:bodyPr/>
+                    <a:lstStyle/>
+                    <a:p>
+                      <a:pPr algn="ctr">
+                        <a:defRPr sz="950" b="1">
+                          <a:solidFill>
+                            <a:srgbClr val="FFFFFF"/>
+                          </a:solidFill>
+                          <a:latin typeface="Trebuchet MS"/>
+                        </a:defRPr>
+                      </a:pPr>
+                      <a:r>
+                        <a:t>Alpha</a:t>
+                      </a:r>
+                    </a:p>
+                  </a:txBody>
+                  <a:tcPr>
+                    <a:solidFill>
+                      <a:srgbClr val="1E2235"/>
+                    </a:solidFill>
+                  </a:tcPr>
+                </a:tc>
+                <a:tc>
+                  <a:txBody>
+                    <a:bodyPr/>
+                    <a:lstStyle/>
+                    <a:p>
+                      <a:pPr algn="ctr">
+                        <a:defRPr sz="950" b="1">
+                          <a:solidFill>
+                            <a:srgbClr val="FFFFFF"/>
+                          </a:solidFill>
+                          <a:latin typeface="Trebuchet MS"/>
+                        </a:defRPr>
+                      </a:pPr>
+                      <a:r>
+                        <a:t>Max DD</a:t>
+                      </a:r>
+                    </a:p>
+                  </a:txBody>
+                  <a:tcPr>
+                    <a:solidFill>
+                      <a:srgbClr val="1E2235"/>
+                    </a:solidFill>
+                  </a:tcPr>
+                </a:tc>
+                <a:tc>
+                  <a:txBody>
+                    <a:bodyPr/>
+                    <a:lstStyle/>
+                    <a:p>
+                      <a:pPr algn="ctr">
+                        <a:defRPr sz="950" b="1">
+                          <a:solidFill>
+                            <a:srgbClr val="FFFFFF"/>
+                          </a:solidFill>
+                          <a:latin typeface="Trebuchet MS"/>
+                        </a:defRPr>
+                      </a:pPr>
+                      <a:r>
+                        <a:t>Expense</a:t>
+                      </a:r>
+                    </a:p>
+                  </a:txBody>
+                  <a:tcPr>
+                    <a:solidFill>
+                      <a:srgbClr val="1E2235"/>
+                    </a:solidFill>
+                  </a:tcPr>
+                </a:tc>
+              </a:tr>
+              <a:tr h="587828">
+                <a:tc>
+                  <a:txBody>
+                    <a:bodyPr/>
+                    <a:lstStyle/>
+                    <a:p>
+                      <a:pPr algn="ctr">
+                        <a:defRPr sz="900" b="1">
+                          <a:solidFill>
+                            <a:srgbClr val="00E5FF"/>
+                          </a:solidFill>
+                          <a:latin typeface="Segoe UI"/>
+                        </a:defRPr>
+                      </a:pPr>
+                      <a:r>
+                        <a:t>#1</a:t>
+                      </a:r>
+                    </a:p>
+                  </a:txBody>
+                  <a:tcPr>
+                    <a:solidFill>
+                      <a:srgbClr val="141826"/>
+                    </a:solidFill>
+                  </a:tcPr>
+                </a:tc>
+                <a:tc>
+                  <a:txBody>
+                    <a:bodyPr/>
+                    <a:lstStyle/>
+                    <a:p>
+                      <a:pPr algn="l">
+                        <a:defRPr sz="900">
+                          <a:solidFill>
+                            <a:srgbClr val="B0BEC5"/>
+                          </a:solidFill>
+                          <a:latin typeface="Segoe UI"/>
+                        </a:defRPr>
+                      </a:pPr>
+                      <a:r>
+                        <a:t>DSP Top 100 Equity</a:t>
+                      </a:r>
+                    </a:p>
+                  </a:txBody>
+                  <a:tcPr>
+                    <a:solidFill>
+                      <a:srgbClr val="141826"/>
+                    </a:solidFill>
+                  </a:tcPr>
+                </a:tc>
+                <a:tc>
+                  <a:txBody>
+                    <a:bodyPr/>
+                    <a:lstStyle/>
+                    <a:p>
+                      <a:pPr algn="ctr">
+                        <a:defRPr sz="900">
+                          <a:solidFill>
+                            <a:srgbClr val="B0BEC5"/>
+                          </a:solidFill>
+                          <a:latin typeface="Segoe UI"/>
+                        </a:defRPr>
+                      </a:pPr>
+                      <a:r>
+                        <a:t>39.8%</a:t>
+                      </a:r>
+                    </a:p>
+                  </a:txBody>
+                  <a:tcPr>
+                    <a:solidFill>
+                      <a:srgbClr val="141826"/>
+                    </a:solidFill>
+                  </a:tcPr>
+                </a:tc>
+                <a:tc>
+                  <a:txBody>
+                    <a:bodyPr/>
+                    <a:lstStyle/>
+                    <a:p>
+                      <a:pPr algn="ctr">
+                        <a:defRPr sz="900">
+                          <a:solidFill>
+                            <a:srgbClr val="B0BEC5"/>
+                          </a:solidFill>
+                          <a:latin typeface="Segoe UI"/>
+                        </a:defRPr>
+                      </a:pPr>
+                      <a:r>
+                        <a:t>1.22</a:t>
+                      </a:r>
+                    </a:p>
+                  </a:txBody>
+                  <a:tcPr>
+                    <a:solidFill>
+                      <a:srgbClr val="141826"/>
+                    </a:solidFill>
+                  </a:tcPr>
+                </a:tc>
+                <a:tc>
+                  <a:txBody>
+                    <a:bodyPr/>
+                    <a:lstStyle/>
+                    <a:p>
+                      <a:pPr algn="ctr">
+                        <a:defRPr sz="900">
+                          <a:solidFill>
+                            <a:srgbClr val="B0BEC5"/>
+                          </a:solidFill>
+                          <a:latin typeface="Segoe UI"/>
+                        </a:defRPr>
+                      </a:pPr>
+                      <a:r>
+                        <a:t>28.9%</a:t>
+                      </a:r>
+                    </a:p>
+                  </a:txBody>
+                  <a:tcPr>
+                    <a:solidFill>
+                      <a:srgbClr val="141826"/>
+                    </a:solidFill>
+                  </a:tcPr>
+                </a:tc>
+                <a:tc>
+                  <a:txBody>
+                    <a:bodyPr/>
+                    <a:lstStyle/>
+                    <a:p>
+                      <a:pPr algn="ctr">
+                        <a:defRPr sz="900">
+                          <a:solidFill>
+                            <a:srgbClr val="B0BEC5"/>
+                          </a:solidFill>
+                          <a:latin typeface="Segoe UI"/>
+                        </a:defRPr>
+                      </a:pPr>
+                      <a:r>
+                        <a:t>-24.7%</a:t>
+                      </a:r>
+                    </a:p>
+                  </a:txBody>
+                  <a:tcPr>
+                    <a:solidFill>
+                      <a:srgbClr val="141826"/>
+                    </a:solidFill>
+                  </a:tcPr>
+                </a:tc>
+                <a:tc>
+                  <a:txBody>
+                    <a:bodyPr/>
+                    <a:lstStyle/>
+                    <a:p>
+                      <a:pPr algn="ctr">
+                        <a:defRPr sz="900">
+                          <a:solidFill>
+                            <a:srgbClr val="B0BEC5"/>
+                          </a:solidFill>
+                          <a:latin typeface="Segoe UI"/>
+                        </a:defRPr>
+                      </a:pPr>
+                      <a:r>
+                        <a:t>59.70%</a:t>
+                      </a:r>
+                    </a:p>
+                  </a:txBody>
+                  <a:tcPr>
+                    <a:solidFill>
+                      <a:srgbClr val="141826"/>
+                    </a:solidFill>
+                  </a:tcPr>
+                </a:tc>
+              </a:tr>
+              <a:tr h="587828">
+                <a:tc>
+                  <a:txBody>
+                    <a:bodyPr/>
+                    <a:lstStyle/>
+                    <a:p>
+                      <a:pPr algn="ctr">
+                        <a:defRPr sz="900" b="1">
+                          <a:solidFill>
+                            <a:srgbClr val="00E5FF"/>
+                          </a:solidFill>
+                          <a:latin typeface="Segoe UI"/>
+                        </a:defRPr>
+                      </a:pPr>
+                      <a:r>
+                        <a:t>#2</a:t>
+                      </a:r>
+                    </a:p>
+                  </a:txBody>
+                  <a:tcPr>
+                    <a:solidFill>
+                      <a:srgbClr val="0B0E14"/>
+                    </a:solidFill>
+                  </a:tcPr>
+                </a:tc>
+                <a:tc>
+                  <a:txBody>
+                    <a:bodyPr/>
+                    <a:lstStyle/>
+                    <a:p>
+                      <a:pPr algn="l">
+                        <a:defRPr sz="900">
+                          <a:solidFill>
+                            <a:srgbClr val="B0BEC5"/>
+                          </a:solidFill>
+                          <a:latin typeface="Segoe UI"/>
+                        </a:defRPr>
+                      </a:pPr>
+                      <a:r>
+                        <a:t>Mirae Asset Large Cap</a:t>
+                      </a:r>
+                    </a:p>
+                  </a:txBody>
+                  <a:tcPr>
+                    <a:solidFill>
+                      <a:srgbClr val="0B0E14"/>
+                    </a:solidFill>
+                  </a:tcPr>
+                </a:tc>
+                <a:tc>
+                  <a:txBody>
+                    <a:bodyPr/>
+                    <a:lstStyle/>
+                    <a:p>
+                      <a:pPr algn="ctr">
+                        <a:defRPr sz="900">
+                          <a:solidFill>
+                            <a:srgbClr val="B0BEC5"/>
+                          </a:solidFill>
+                          <a:latin typeface="Segoe UI"/>
+                        </a:defRPr>
+                      </a:pPr>
+                      <a:r>
+                        <a:t>33.1%</a:t>
+                      </a:r>
+                    </a:p>
+                  </a:txBody>
+                  <a:tcPr>
+                    <a:solidFill>
+                      <a:srgbClr val="0B0E14"/>
+                    </a:solidFill>
+                  </a:tcPr>
+                </a:tc>
+                <a:tc>
+                  <a:txBody>
+                    <a:bodyPr/>
+                    <a:lstStyle/>
+                    <a:p>
+                      <a:pPr algn="ctr">
+                        <a:defRPr sz="900">
+                          <a:solidFill>
+                            <a:srgbClr val="B0BEC5"/>
+                          </a:solidFill>
+                          <a:latin typeface="Segoe UI"/>
+                        </a:defRPr>
+                      </a:pPr>
+                      <a:r>
+                        <a:t>1.07</a:t>
+                      </a:r>
+                    </a:p>
+                  </a:txBody>
+                  <a:tcPr>
+                    <a:solidFill>
+                      <a:srgbClr val="0B0E14"/>
+                    </a:solidFill>
+                  </a:tcPr>
+                </a:tc>
+                <a:tc>
+                  <a:txBody>
+                    <a:bodyPr/>
+                    <a:lstStyle/>
+                    <a:p>
+                      <a:pPr algn="ctr">
+                        <a:defRPr sz="900">
+                          <a:solidFill>
+                            <a:srgbClr val="B0BEC5"/>
+                          </a:solidFill>
+                          <a:latin typeface="Segoe UI"/>
+                        </a:defRPr>
+                      </a:pPr>
+                      <a:r>
+                        <a:t>23.9%</a:t>
+                      </a:r>
+                    </a:p>
+                  </a:txBody>
+                  <a:tcPr>
+                    <a:solidFill>
+                      <a:srgbClr val="0B0E14"/>
+                    </a:solidFill>
+                  </a:tcPr>
+                </a:tc>
+                <a:tc>
+                  <a:txBody>
+                    <a:bodyPr/>
+                    <a:lstStyle/>
+                    <a:p>
+                      <a:pPr algn="ctr">
+                        <a:defRPr sz="900">
+                          <a:solidFill>
+                            <a:srgbClr val="B0BEC5"/>
+                          </a:solidFill>
+                          <a:latin typeface="Segoe UI"/>
+                        </a:defRPr>
+                      </a:pPr>
+                      <a:r>
+                        <a:t>-17.5%</a:t>
+                      </a:r>
+                    </a:p>
+                  </a:txBody>
+                  <a:tcPr>
+                    <a:solidFill>
+                      <a:srgbClr val="0B0E14"/>
+                    </a:solidFill>
+                  </a:tcPr>
+                </a:tc>
+                <a:tc>
+                  <a:txBody>
+                    <a:bodyPr/>
+                    <a:lstStyle/>
+                    <a:p>
+                      <a:pPr algn="ctr">
+                        <a:defRPr sz="900">
+                          <a:solidFill>
+                            <a:srgbClr val="B0BEC5"/>
+                          </a:solidFill>
+                          <a:latin typeface="Segoe UI"/>
+                        </a:defRPr>
+                      </a:pPr>
+                      <a:r>
+                        <a:t>55.60%</a:t>
+                      </a:r>
+                    </a:p>
+                  </a:txBody>
+                  <a:tcPr>
+                    <a:solidFill>
+                      <a:srgbClr val="0B0E14"/>
+                    </a:solidFill>
+                  </a:tcPr>
+                </a:tc>
+              </a:tr>
+              <a:tr h="587828">
+                <a:tc>
+                  <a:txBody>
+                    <a:bodyPr/>
+                    <a:lstStyle/>
+                    <a:p>
+                      <a:pPr algn="ctr">
+                        <a:defRPr sz="900" b="1">
+                          <a:solidFill>
+                            <a:srgbClr val="00E5FF"/>
+                          </a:solidFill>
+                          <a:latin typeface="Segoe UI"/>
+                        </a:defRPr>
+                      </a:pPr>
+                      <a:r>
+                        <a:t>#3</a:t>
+                      </a:r>
+                    </a:p>
+                  </a:txBody>
+                  <a:tcPr>
+                    <a:solidFill>
+                      <a:srgbClr val="141826"/>
+                    </a:solidFill>
+                  </a:tcPr>
+                </a:tc>
+                <a:tc>
+                  <a:txBody>
+                    <a:bodyPr/>
+                    <a:lstStyle/>
+                    <a:p>
+                      <a:pPr algn="l">
+                        <a:defRPr sz="900">
+                          <a:solidFill>
+                            <a:srgbClr val="B0BEC5"/>
+                          </a:solidFill>
+                          <a:latin typeface="Segoe UI"/>
+                        </a:defRPr>
+                      </a:pPr>
+                      <a:r>
+                        <a:t>Axis Bluechip</a:t>
+                      </a:r>
+                    </a:p>
+                  </a:txBody>
+                  <a:tcPr>
+                    <a:solidFill>
+                      <a:srgbClr val="141826"/>
+                    </a:solidFill>
+                  </a:tcPr>
+                </a:tc>
+                <a:tc>
+                  <a:txBody>
+                    <a:bodyPr/>
+                    <a:lstStyle/>
+                    <a:p>
+                      <a:pPr algn="ctr">
+                        <a:defRPr sz="900">
+                          <a:solidFill>
+                            <a:srgbClr val="B0BEC5"/>
+                          </a:solidFill>
+                          <a:latin typeface="Segoe UI"/>
+                        </a:defRPr>
+                      </a:pPr>
+                      <a:r>
+                        <a:t>29.9%</a:t>
+                      </a:r>
+                    </a:p>
+                  </a:txBody>
+                  <a:tcPr>
+                    <a:solidFill>
+                      <a:srgbClr val="141826"/>
+                    </a:solidFill>
+                  </a:tcPr>
+                </a:tc>
+                <a:tc>
+                  <a:txBody>
+                    <a:bodyPr/>
+                    <a:lstStyle/>
+                    <a:p>
+                      <a:pPr algn="ctr">
+                        <a:defRPr sz="900">
+                          <a:solidFill>
+                            <a:srgbClr val="B0BEC5"/>
+                          </a:solidFill>
+                          <a:latin typeface="Segoe UI"/>
+                        </a:defRPr>
+                      </a:pPr>
+                      <a:r>
+                        <a:t>0.96</a:t>
+                      </a:r>
+                    </a:p>
+                  </a:txBody>
+                  <a:tcPr>
+                    <a:solidFill>
+                      <a:srgbClr val="141826"/>
+                    </a:solidFill>
+                  </a:tcPr>
+                </a:tc>
+                <a:tc>
+                  <a:txBody>
+                    <a:bodyPr/>
+                    <a:lstStyle/>
+                    <a:p>
+                      <a:pPr algn="ctr">
+                        <a:defRPr sz="900">
+                          <a:solidFill>
+                            <a:srgbClr val="B0BEC5"/>
+                          </a:solidFill>
+                          <a:latin typeface="Segoe UI"/>
+                        </a:defRPr>
+                      </a:pPr>
+                      <a:r>
+                        <a:t>21.2%</a:t>
+                      </a:r>
+                    </a:p>
+                  </a:txBody>
+                  <a:tcPr>
+                    <a:solidFill>
+                      <a:srgbClr val="141826"/>
+                    </a:solidFill>
+                  </a:tcPr>
+                </a:tc>
+                <a:tc>
+                  <a:txBody>
+                    <a:bodyPr/>
+                    <a:lstStyle/>
+                    <a:p>
+                      <a:pPr algn="ctr">
+                        <a:defRPr sz="900">
+                          <a:solidFill>
+                            <a:srgbClr val="B0BEC5"/>
+                          </a:solidFill>
+                          <a:latin typeface="Segoe UI"/>
+                        </a:defRPr>
+                      </a:pPr>
+                      <a:r>
+                        <a:t>-23.8%</a:t>
+                      </a:r>
+                    </a:p>
+                  </a:txBody>
+                  <a:tcPr>
+                    <a:solidFill>
+                      <a:srgbClr val="141826"/>
+                    </a:solidFill>
+                  </a:tcPr>
+                </a:tc>
+                <a:tc>
+                  <a:txBody>
+                    <a:bodyPr/>
+                    <a:lstStyle/>
+                    <a:p>
+                      <a:pPr algn="ctr">
+                        <a:defRPr sz="900">
+                          <a:solidFill>
+                            <a:srgbClr val="B0BEC5"/>
+                          </a:solidFill>
+                          <a:latin typeface="Segoe UI"/>
+                        </a:defRPr>
+                      </a:pPr>
+                      <a:r>
+                        <a:t>72.27%</a:t>
+                      </a:r>
+                    </a:p>
+                  </a:txBody>
+                  <a:tcPr>
+                    <a:solidFill>
+                      <a:srgbClr val="141826"/>
+                    </a:solidFill>
+                  </a:tcPr>
+                </a:tc>
+              </a:tr>
+              <a:tr h="587828">
+                <a:tc>
+                  <a:txBody>
+                    <a:bodyPr/>
+                    <a:lstStyle/>
+                    <a:p>
+                      <a:pPr algn="ctr">
+                        <a:defRPr sz="900" b="1">
+                          <a:solidFill>
+                            <a:srgbClr val="00E5FF"/>
+                          </a:solidFill>
+                          <a:latin typeface="Segoe UI"/>
+                        </a:defRPr>
+                      </a:pPr>
+                      <a:r>
+                        <a:t>#4</a:t>
+                      </a:r>
+                    </a:p>
+                  </a:txBody>
+                  <a:tcPr>
+                    <a:solidFill>
+                      <a:srgbClr val="0B0E14"/>
+                    </a:solidFill>
+                  </a:tcPr>
+                </a:tc>
+                <a:tc>
+                  <a:txBody>
+                    <a:bodyPr/>
+                    <a:lstStyle/>
+                    <a:p>
+                      <a:pPr algn="l">
+                        <a:defRPr sz="900">
+                          <a:solidFill>
+                            <a:srgbClr val="B0BEC5"/>
+                          </a:solidFill>
+                          <a:latin typeface="Segoe UI"/>
+                        </a:defRPr>
+                      </a:pPr>
+                      <a:r>
+                        <a:t>Canara Robeco Bluechip Equity</a:t>
+                      </a:r>
+                    </a:p>
+                  </a:txBody>
+                  <a:tcPr>
+                    <a:solidFill>
+                      <a:srgbClr val="0B0E14"/>
+                    </a:solidFill>
+                  </a:tcPr>
+                </a:tc>
+                <a:tc>
+                  <a:txBody>
+                    <a:bodyPr/>
+                    <a:lstStyle/>
+                    <a:p>
+                      <a:pPr algn="ctr">
+                        <a:defRPr sz="900">
+                          <a:solidFill>
+                            <a:srgbClr val="B0BEC5"/>
+                          </a:solidFill>
+                          <a:latin typeface="Segoe UI"/>
+                        </a:defRPr>
+                      </a:pPr>
+                      <a:r>
+                        <a:t>4.7%</a:t>
+                      </a:r>
+                    </a:p>
+                  </a:txBody>
+                  <a:tcPr>
+                    <a:solidFill>
+                      <a:srgbClr val="0B0E14"/>
+                    </a:solidFill>
+                  </a:tcPr>
+                </a:tc>
+                <a:tc>
+                  <a:txBody>
+                    <a:bodyPr/>
+                    <a:lstStyle/>
+                    <a:p>
+                      <a:pPr algn="ctr">
+                        <a:defRPr sz="900">
+                          <a:solidFill>
+                            <a:srgbClr val="B0BEC5"/>
+                          </a:solidFill>
+                          <a:latin typeface="Segoe UI"/>
+                        </a:defRPr>
+                      </a:pPr>
+                      <a:r>
+                        <a:t>0.01</a:t>
+                      </a:r>
+                    </a:p>
+                  </a:txBody>
+                  <a:tcPr>
+                    <a:solidFill>
+                      <a:srgbClr val="0B0E14"/>
+                    </a:solidFill>
+                  </a:tcPr>
+                </a:tc>
+                <a:tc>
+                  <a:txBody>
+                    <a:bodyPr/>
+                    <a:lstStyle/>
+                    <a:p>
+                      <a:pPr algn="ctr">
+                        <a:defRPr sz="900">
+                          <a:solidFill>
+                            <a:srgbClr val="B0BEC5"/>
+                          </a:solidFill>
+                          <a:latin typeface="Segoe UI"/>
+                        </a:defRPr>
+                      </a:pPr>
+                      <a:r>
+                        <a:t>0.3%</a:t>
+                      </a:r>
+                    </a:p>
+                  </a:txBody>
+                  <a:tcPr>
+                    <a:solidFill>
+                      <a:srgbClr val="0B0E14"/>
+                    </a:solidFill>
+                  </a:tcPr>
+                </a:tc>
+                <a:tc>
+                  <a:txBody>
+                    <a:bodyPr/>
+                    <a:lstStyle/>
+                    <a:p>
+                      <a:pPr algn="ctr">
+                        <a:defRPr sz="900">
+                          <a:solidFill>
+                            <a:srgbClr val="B0BEC5"/>
+                          </a:solidFill>
+                          <a:latin typeface="Segoe UI"/>
+                        </a:defRPr>
+                      </a:pPr>
+                      <a:r>
+                        <a:t>-24.1%</a:t>
+                      </a:r>
+                    </a:p>
+                  </a:txBody>
+                  <a:tcPr>
+                    <a:solidFill>
+                      <a:srgbClr val="0B0E14"/>
+                    </a:solidFill>
+                  </a:tcPr>
+                </a:tc>
+                <a:tc>
+                  <a:txBody>
+                    <a:bodyPr/>
+                    <a:lstStyle/>
+                    <a:p>
+                      <a:pPr algn="ctr">
+                        <a:defRPr sz="900">
+                          <a:solidFill>
+                            <a:srgbClr val="B0BEC5"/>
+                          </a:solidFill>
+                          <a:latin typeface="Segoe UI"/>
+                        </a:defRPr>
+                      </a:pPr>
+                      <a:r>
+                        <a:t>57.76%</a:t>
+                      </a:r>
+                    </a:p>
+                  </a:txBody>
+                  <a:tcPr>
+                    <a:solidFill>
+                      <a:srgbClr val="0B0E14"/>
+                    </a:solidFill>
+                  </a:tcPr>
+                </a:tc>
+              </a:tr>
+              <a:tr h="587828">
+                <a:tc>
+                  <a:txBody>
+                    <a:bodyPr/>
+                    <a:lstStyle/>
+                    <a:p>
+                      <a:pPr algn="ctr">
+                        <a:defRPr sz="900" b="1">
+                          <a:solidFill>
+                            <a:srgbClr val="00E5FF"/>
+                          </a:solidFill>
+                          <a:latin typeface="Segoe UI"/>
+                        </a:defRPr>
+                      </a:pPr>
+                      <a:r>
+                        <a:t>#5</a:t>
+                      </a:r>
+                    </a:p>
+                  </a:txBody>
+                  <a:tcPr>
+                    <a:solidFill>
+                      <a:srgbClr val="141826"/>
+                    </a:solidFill>
+                  </a:tcPr>
+                </a:tc>
+                <a:tc>
+                  <a:txBody>
+                    <a:bodyPr/>
+                    <a:lstStyle/>
+                    <a:p>
+                      <a:pPr algn="l">
+                        <a:defRPr sz="900">
+                          <a:solidFill>
+                            <a:srgbClr val="B0BEC5"/>
+                          </a:solidFill>
+                          <a:latin typeface="Segoe UI"/>
+                        </a:defRPr>
+                      </a:pPr>
+                      <a:r>
+                        <a:t>SBI Small Cap</a:t>
+                      </a:r>
+                    </a:p>
+                  </a:txBody>
+                  <a:tcPr>
+                    <a:solidFill>
+                      <a:srgbClr val="141826"/>
+                    </a:solidFill>
+                  </a:tcPr>
+                </a:tc>
+                <a:tc>
+                  <a:txBody>
+                    <a:bodyPr/>
+                    <a:lstStyle/>
+                    <a:p>
+                      <a:pPr algn="ctr">
+                        <a:defRPr sz="900">
+                          <a:solidFill>
+                            <a:srgbClr val="B0BEC5"/>
+                          </a:solidFill>
+                          <a:latin typeface="Segoe UI"/>
+                        </a:defRPr>
+                      </a:pPr>
+                      <a:r>
+                        <a:t>14.7%</a:t>
+                      </a:r>
+                    </a:p>
+                  </a:txBody>
+                  <a:tcPr>
+                    <a:solidFill>
+                      <a:srgbClr val="141826"/>
+                    </a:solidFill>
+                  </a:tcPr>
+                </a:tc>
+                <a:tc>
+                  <a:txBody>
+                    <a:bodyPr/>
+                    <a:lstStyle/>
+                    <a:p>
+                      <a:pPr algn="ctr">
+                        <a:defRPr sz="900">
+                          <a:solidFill>
+                            <a:srgbClr val="B0BEC5"/>
+                          </a:solidFill>
+                          <a:latin typeface="Segoe UI"/>
+                        </a:defRPr>
+                      </a:pPr>
+                      <a:r>
+                        <a:t>0.41</a:t>
+                      </a:r>
+                    </a:p>
+                  </a:txBody>
+                  <a:tcPr>
+                    <a:solidFill>
+                      <a:srgbClr val="141826"/>
+                    </a:solidFill>
+                  </a:tcPr>
+                </a:tc>
+                <a:tc>
+                  <a:txBody>
+                    <a:bodyPr/>
+                    <a:lstStyle/>
+                    <a:p>
+                      <a:pPr algn="ctr">
+                        <a:defRPr sz="900">
+                          <a:solidFill>
+                            <a:srgbClr val="B0BEC5"/>
+                          </a:solidFill>
+                          <a:latin typeface="Segoe UI"/>
+                        </a:defRPr>
+                      </a:pPr>
+                      <a:r>
+                        <a:t>9.1%</a:t>
+                      </a:r>
+                    </a:p>
+                  </a:txBody>
+                  <a:tcPr>
+                    <a:solidFill>
+                      <a:srgbClr val="141826"/>
+                    </a:solidFill>
+                  </a:tcPr>
+                </a:tc>
+                <a:tc>
+                  <a:txBody>
+                    <a:bodyPr/>
+                    <a:lstStyle/>
+                    <a:p>
+                      <a:pPr algn="ctr">
+                        <a:defRPr sz="900">
+                          <a:solidFill>
+                            <a:srgbClr val="B0BEC5"/>
+                          </a:solidFill>
+                          <a:latin typeface="Segoe UI"/>
+                        </a:defRPr>
+                      </a:pPr>
+                      <a:r>
+                        <a:t>-32.0%</a:t>
+                      </a:r>
+                    </a:p>
+                  </a:txBody>
+                  <a:tcPr>
+                    <a:solidFill>
+                      <a:srgbClr val="141826"/>
+                    </a:solidFill>
+                  </a:tcPr>
+                </a:tc>
+                <a:tc>
+                  <a:txBody>
+                    <a:bodyPr/>
+                    <a:lstStyle/>
+                    <a:p>
+                      <a:pPr algn="ctr">
+                        <a:defRPr sz="900">
+                          <a:solidFill>
+                            <a:srgbClr val="B0BEC5"/>
+                          </a:solidFill>
+                          <a:latin typeface="Segoe UI"/>
+                        </a:defRPr>
+                      </a:pPr>
+                      <a:r>
+                        <a:t>115.87%</a:t>
+                      </a:r>
+                    </a:p>
+                  </a:txBody>
+                  <a:tcPr>
+                    <a:solidFill>
+                      <a:srgbClr val="141826"/>
+                    </a:solidFill>
+                  </a:tcPr>
+                </a:tc>
+              </a:tr>
+              <a:tr h="587832">
+                <a:tc>
+                  <a:txBody>
+                    <a:bodyPr/>
+                    <a:lstStyle/>
+                    <a:p>
+                      <a:pPr algn="ctr">
+                        <a:defRPr sz="900" b="1">
+                          <a:solidFill>
+                            <a:srgbClr val="00E5FF"/>
+                          </a:solidFill>
+                          <a:latin typeface="Segoe UI"/>
+                        </a:defRPr>
+                      </a:pPr>
+                      <a:r>
+                        <a:t>#6</a:t>
+                      </a:r>
+                    </a:p>
+                  </a:txBody>
+                  <a:tcPr>
+                    <a:solidFill>
+                      <a:srgbClr val="0B0E14"/>
+                    </a:solidFill>
+                  </a:tcPr>
+                </a:tc>
+                <a:tc>
+                  <a:txBody>
+                    <a:bodyPr/>
+                    <a:lstStyle/>
+                    <a:p>
+                      <a:pPr algn="l">
+                        <a:defRPr sz="900">
+                          <a:solidFill>
+                            <a:srgbClr val="B0BEC5"/>
+                          </a:solidFill>
+                          <a:latin typeface="Segoe UI"/>
+                        </a:defRPr>
+                      </a:pPr>
+                      <a:r>
+                        <a:t>ICICI Prudential Technology</a:t>
+                      </a:r>
+                    </a:p>
+                  </a:txBody>
+                  <a:tcPr>
+                    <a:solidFill>
+                      <a:srgbClr val="0B0E14"/>
+                    </a:solidFill>
+                  </a:tcPr>
+                </a:tc>
+                <a:tc>
+                  <a:txBody>
+                    <a:bodyPr/>
+                    <a:lstStyle/>
+                    <a:p>
+                      <a:pPr algn="ctr">
+                        <a:defRPr sz="900">
+                          <a:solidFill>
+                            <a:srgbClr val="B0BEC5"/>
+                          </a:solidFill>
+                          <a:latin typeface="Segoe UI"/>
+                        </a:defRPr>
+                      </a:pPr>
+                      <a:r>
+                        <a:t>2.1%</a:t>
+                      </a:r>
+                    </a:p>
+                  </a:txBody>
+                  <a:tcPr>
+                    <a:solidFill>
+                      <a:srgbClr val="0B0E14"/>
+                    </a:solidFill>
+                  </a:tcPr>
+                </a:tc>
+                <a:tc>
+                  <a:txBody>
+                    <a:bodyPr/>
+                    <a:lstStyle/>
+                    <a:p>
+                      <a:pPr algn="ctr">
+                        <a:defRPr sz="900">
+                          <a:solidFill>
+                            <a:srgbClr val="B0BEC5"/>
+                          </a:solidFill>
+                          <a:latin typeface="Segoe UI"/>
+                        </a:defRPr>
+                      </a:pPr>
+                      <a:r>
+                        <a:t>-0.09</a:t>
+                      </a:r>
+                    </a:p>
+                  </a:txBody>
+                  <a:tcPr>
+                    <a:solidFill>
+                      <a:srgbClr val="0B0E14"/>
+                    </a:solidFill>
+                  </a:tcPr>
+                </a:tc>
+                <a:tc>
+                  <a:txBody>
+                    <a:bodyPr/>
+                    <a:lstStyle/>
+                    <a:p>
+                      <a:pPr algn="ctr">
+                        <a:defRPr sz="900">
+                          <a:solidFill>
+                            <a:srgbClr val="B0BEC5"/>
+                          </a:solidFill>
+                          <a:latin typeface="Segoe UI"/>
+                        </a:defRPr>
+                      </a:pPr>
+                      <a:r>
+                        <a:t>-2.2%</a:t>
+                      </a:r>
+                    </a:p>
+                  </a:txBody>
+                  <a:tcPr>
+                    <a:solidFill>
+                      <a:srgbClr val="0B0E14"/>
+                    </a:solidFill>
+                  </a:tcPr>
+                </a:tc>
+                <a:tc>
+                  <a:txBody>
+                    <a:bodyPr/>
+                    <a:lstStyle/>
+                    <a:p>
+                      <a:pPr algn="ctr">
+                        <a:defRPr sz="900">
+                          <a:solidFill>
+                            <a:srgbClr val="B0BEC5"/>
+                          </a:solidFill>
+                          <a:latin typeface="Segoe UI"/>
+                        </a:defRPr>
+                      </a:pPr>
+                      <a:r>
+                        <a:t>-29.9%</a:t>
+                      </a:r>
+                    </a:p>
+                  </a:txBody>
+                  <a:tcPr>
+                    <a:solidFill>
+                      <a:srgbClr val="0B0E14"/>
+                    </a:solidFill>
+                  </a:tcPr>
+                </a:tc>
+                <a:tc>
+                  <a:txBody>
+                    <a:bodyPr/>
+                    <a:lstStyle/>
+                    <a:p>
+                      <a:pPr algn="ctr">
+                        <a:defRPr sz="900">
+                          <a:solidFill>
+                            <a:srgbClr val="B0BEC5"/>
+                          </a:solidFill>
+                          <a:latin typeface="Segoe UI"/>
+                        </a:defRPr>
+                      </a:pPr>
+                      <a:r>
+                        <a:t>117.74%</a:t>
+                      </a:r>
+                    </a:p>
+                  </a:txBody>
+                  <a:tcPr>
+                    <a:solidFill>
+                      <a:srgbClr val="0B0E14"/>
+                    </a:solidFill>
+                  </a:tcPr>
+                </a:tc>
+              </a:tr>
+            </a:tbl>
+          </a:graphicData>
+        </a:graphic>
+      </p:graphicFrame>
     </p:spTree>
   </p:cSld>
   <p:clrMapOvr>
@@ -5791,7 +9735,7 @@
     <p:bg>
       <p:bgPr>
         <a:solidFill>
-          <a:srgbClr val="0F111A"/>
+          <a:srgbClr val="0B0E14"/>
         </a:solidFill>
         <a:effectLst/>
       </p:bgPr>
@@ -5811,8 +9755,8 @@
         </p:nvSpPr>
         <p:spPr>
           <a:xfrm>
-            <a:off x="457200" y="457200"/>
-            <a:ext cx="11274552" cy="1097280"/>
+            <a:off x="685800" y="365760"/>
+            <a:ext cx="9144000" cy="274320"/>
           </a:xfrm>
           <a:prstGeom prst="rect">
             <a:avLst/>
@@ -5826,15 +9770,15 @@
           <a:lstStyle/>
           <a:p>
             <a:pPr>
-              <a:defRPr sz="3200" b="1">
+              <a:defRPr sz="900" b="1">
                 <a:solidFill>
                   <a:srgbClr val="00E5FF"/>
                 </a:solidFill>
-                <a:latin typeface="Arial"/>
+                <a:latin typeface="Trebuchet MS"/>
               </a:defRPr>
             </a:pPr>
             <a:r>
-              <a:t>Portfolio Concentration &amp; Sector HHI</a:t>
+              <a:t>BLUESTOCK MUTUAL FUND ANALYTICS</a:t>
             </a:r>
           </a:p>
         </p:txBody>
@@ -5847,8 +9791,8 @@
         </p:nvSpPr>
         <p:spPr>
           <a:xfrm>
-            <a:off x="457200" y="1645920"/>
-            <a:ext cx="11274552" cy="4572000"/>
+            <a:off x="685800" y="594360"/>
+            <a:ext cx="10817352" cy="731520"/>
           </a:xfrm>
           <a:prstGeom prst="rect">
             <a:avLst/>
@@ -5862,66 +9806,672 @@
           <a:lstStyle/>
           <a:p>
             <a:pPr>
-              <a:spcAft>
-                <a:spcPts val="2000"/>
-              </a:spcAft>
-              <a:defRPr sz="1800" i="1">
+              <a:defRPr sz="2800" b="1">
+                <a:solidFill>
+                  <a:srgbClr val="FFFFFF"/>
+                </a:solidFill>
+                <a:latin typeface="Trebuchet MS"/>
+              </a:defRPr>
+            </a:pPr>
+            <a:r>
+              <a:t>Portfolio Concentration &amp; Sector HHI Analysis (Day 6)</a:t>
+            </a:r>
+          </a:p>
+        </p:txBody>
+      </p:sp>
+      <p:sp>
+        <p:nvSpPr>
+          <p:cNvPr id="4" name="Rectangle 3"/>
+          <p:cNvSpPr/>
+          <p:nvPr/>
+        </p:nvSpPr>
+        <p:spPr>
+          <a:xfrm>
+            <a:off x="685800" y="1280160"/>
+            <a:ext cx="10817352" cy="18288"/>
+          </a:xfrm>
+          <a:prstGeom prst="rect">
+            <a:avLst/>
+          </a:prstGeom>
+          <a:solidFill>
+            <a:srgbClr val="1E2235"/>
+          </a:solidFill>
+          <a:ln>
+            <a:noFill/>
+          </a:ln>
+        </p:spPr>
+        <p:style>
+          <a:lnRef idx="1">
+            <a:schemeClr val="accent1"/>
+          </a:lnRef>
+          <a:fillRef idx="3">
+            <a:schemeClr val="accent1"/>
+          </a:fillRef>
+          <a:effectRef idx="2">
+            <a:schemeClr val="accent1"/>
+          </a:effectRef>
+          <a:fontRef idx="minor">
+            <a:schemeClr val="lt1"/>
+          </a:fontRef>
+        </p:style>
+        <p:txBody>
+          <a:bodyPr rtlCol="0" anchor="ctr"/>
+          <a:lstStyle/>
+          <a:p>
+            <a:pPr algn="ctr"/>
+          </a:p>
+        </p:txBody>
+      </p:sp>
+      <p:sp>
+        <p:nvSpPr>
+          <p:cNvPr id="5" name="TextBox 4"/>
+          <p:cNvSpPr txBox="1"/>
+          <p:nvPr/>
+        </p:nvSpPr>
+        <p:spPr>
+          <a:xfrm>
+            <a:off x="685800" y="1645920"/>
+            <a:ext cx="4114800" cy="4114800"/>
+          </a:xfrm>
+          <a:prstGeom prst="rect">
+            <a:avLst/>
+          </a:prstGeom>
+          <a:noFill/>
+        </p:spPr>
+        <p:txBody>
+          <a:bodyPr wrap="square" lIns="0">
+            <a:spAutoFit/>
+          </a:bodyPr>
+          <a:lstStyle/>
+          <a:p>
+            <a:pPr>
+              <a:defRPr sz="1600" b="1">
                 <a:solidFill>
                   <a:srgbClr val="00E5FF"/>
                 </a:solidFill>
-                <a:latin typeface="Arial"/>
+                <a:latin typeface="Trebuchet MS"/>
               </a:defRPr>
             </a:pPr>
             <a:r>
-              <a:t>Measuring sector concentration (Day 6)</a:t>
+              <a:t>Herfindahl-Hirschman Index</a:t>
             </a:r>
           </a:p>
           <a:p>
             <a:pPr>
-              <a:spcAft>
-                <a:spcPts val="1200"/>
-              </a:spcAft>
-              <a:defRPr sz="1600">
-                <a:solidFill>
-                  <a:srgbClr val="DCDCDC"/>
-                </a:solidFill>
-                <a:latin typeface="Arial"/>
+              <a:lnSpc>
+                <a:spcPct val="120000"/>
+              </a:lnSpc>
+              <a:spcBef>
+                <a:spcPts val="800"/>
+              </a:spcBef>
+              <a:defRPr sz="1050">
+                <a:solidFill>
+                  <a:srgbClr val="B0BEC5"/>
+                </a:solidFill>
+                <a:latin typeface="Segoe UI"/>
               </a:defRPr>
             </a:pPr>
             <a:r>
-              <a:t>• Sector HHI: Tech sectoral fund has high concentration (HHI = 7,338.00)</a:t>
-            </a:r>
-          </a:p>
+              <a:t>We calculated sector-level concentrations for each scheme using holdings data:</a:t>
+            </a:r>
+            <a:br/>
+            <a:br/>
+            <a:r>
+              <a:t>• High Concentration (HHI &gt; 2,500):</a:t>
+            </a:r>
+            <a:br/>
+            <a:r>
+              <a:t>ICICI Prudential Technology Fund (HHI = 7,288.0) is highly concentrated due to its 85% tech sector allocation.</a:t>
+            </a:r>
+            <a:br/>
+            <a:br/>
+            <a:r>
+              <a:t>• Moderate Concentration (HHI 1,500 - 2,500):</a:t>
+            </a:r>
+            <a:br/>
+            <a:r>
+              <a:t>Diversified Large Cap and Flexi Cap schemes maintain moderate concentrations (~1,827.16) spread across financial services, energy, tech, consumer goods, and healthcare.</a:t>
+            </a:r>
+            <a:br/>
+            <a:br/>
+            <a:r>
+              <a:t>• Low Concentration (HHI &lt; 1,500):</a:t>
+            </a:r>
+            <a:br/>
+            <a:r>
+              <a:t>HDFC Mid-Cap Opportunities shows high sector-level diversification (HHI = 1,327.42).</a:t>
+            </a:r>
+          </a:p>
+        </p:txBody>
+      </p:sp>
+      <p:sp>
+        <p:nvSpPr>
+          <p:cNvPr id="6" name="Rectangle 5"/>
+          <p:cNvSpPr/>
+          <p:nvPr/>
+        </p:nvSpPr>
+        <p:spPr>
+          <a:xfrm>
+            <a:off x="5303520" y="1645920"/>
+            <a:ext cx="6199632" cy="868680"/>
+          </a:xfrm>
+          <a:prstGeom prst="rect">
+            <a:avLst/>
+          </a:prstGeom>
+          <a:solidFill>
+            <a:srgbClr val="1E2235"/>
+          </a:solidFill>
+          <a:ln w="19050">
+            <a:solidFill>
+              <a:srgbClr val="3A405A"/>
+            </a:solidFill>
+          </a:ln>
+        </p:spPr>
+        <p:style>
+          <a:lnRef idx="1">
+            <a:schemeClr val="accent1"/>
+          </a:lnRef>
+          <a:fillRef idx="3">
+            <a:schemeClr val="accent1"/>
+          </a:fillRef>
+          <a:effectRef idx="2">
+            <a:schemeClr val="accent1"/>
+          </a:effectRef>
+          <a:fontRef idx="minor">
+            <a:schemeClr val="lt1"/>
+          </a:fontRef>
+        </p:style>
+        <p:txBody>
+          <a:bodyPr rtlCol="0" anchor="ctr"/>
+          <a:lstStyle/>
+          <a:p>
+            <a:pPr algn="ctr"/>
+          </a:p>
+        </p:txBody>
+      </p:sp>
+      <p:sp>
+        <p:nvSpPr>
+          <p:cNvPr id="7" name="TextBox 6"/>
+          <p:cNvSpPr txBox="1"/>
+          <p:nvPr/>
+        </p:nvSpPr>
+        <p:spPr>
+          <a:xfrm>
+            <a:off x="5303520" y="1645920"/>
+            <a:ext cx="4114800" cy="868680"/>
+          </a:xfrm>
+          <a:prstGeom prst="rect">
+            <a:avLst/>
+          </a:prstGeom>
+          <a:noFill/>
+        </p:spPr>
+        <p:txBody>
+          <a:bodyPr wrap="square" lIns="182880" tIns="137160">
+            <a:spAutoFit/>
+          </a:bodyPr>
+          <a:lstStyle/>
           <a:p>
             <a:pPr>
-              <a:spcAft>
-                <a:spcPts val="1200"/>
-              </a:spcAft>
-              <a:defRPr sz="1600">
-                <a:solidFill>
-                  <a:srgbClr val="DCDCDC"/>
-                </a:solidFill>
-                <a:latin typeface="Arial"/>
+              <a:defRPr sz="1300" b="1">
+                <a:solidFill>
+                  <a:srgbClr val="FFFFFF"/>
+                </a:solidFill>
+                <a:latin typeface="Segoe UI"/>
               </a:defRPr>
             </a:pPr>
             <a:r>
-              <a:t>• Diversified schemes: Large-cap and flexi-cap funds maintain moderate HHIs (~1,827.16)</a:t>
+              <a:t>ICICI Pru Technology</a:t>
             </a:r>
           </a:p>
           <a:p>
             <a:pPr>
-              <a:spcAft>
-                <a:spcPts val="1200"/>
-              </a:spcAft>
-              <a:defRPr sz="1600">
-                <a:solidFill>
-                  <a:srgbClr val="DCDCDC"/>
-                </a:solidFill>
-                <a:latin typeface="Arial"/>
+              <a:spcBef>
+                <a:spcPts val="200"/>
+              </a:spcBef>
+              <a:defRPr sz="850" b="1">
+                <a:solidFill>
+                  <a:srgbClr val="EF5350"/>
+                </a:solidFill>
+                <a:latin typeface="Segoe UI"/>
               </a:defRPr>
             </a:pPr>
             <a:r>
-              <a:t>• Asset allocation: Diversification helps reduce sector-specific risk exposure</a:t>
+              <a:t>HIGH CONCENTRATION</a:t>
+            </a:r>
+          </a:p>
+        </p:txBody>
+      </p:sp>
+      <p:sp>
+        <p:nvSpPr>
+          <p:cNvPr id="8" name="TextBox 7"/>
+          <p:cNvSpPr txBox="1"/>
+          <p:nvPr/>
+        </p:nvSpPr>
+        <p:spPr>
+          <a:xfrm>
+            <a:off x="9418320" y="1645920"/>
+            <a:ext cx="2084831" cy="868680"/>
+          </a:xfrm>
+          <a:prstGeom prst="rect">
+            <a:avLst/>
+          </a:prstGeom>
+          <a:noFill/>
+        </p:spPr>
+        <p:txBody>
+          <a:bodyPr wrap="square" rIns="228600" tIns="109728">
+            <a:spAutoFit/>
+          </a:bodyPr>
+          <a:lstStyle/>
+          <a:p>
+            <a:pPr algn="r">
+              <a:defRPr sz="2200" b="1">
+                <a:solidFill>
+                  <a:srgbClr val="00E5FF"/>
+                </a:solidFill>
+                <a:latin typeface="Trebuchet MS"/>
+              </a:defRPr>
+            </a:pPr>
+            <a:r>
+              <a:t>7,288.00</a:t>
+            </a:r>
+          </a:p>
+        </p:txBody>
+      </p:sp>
+      <p:sp>
+        <p:nvSpPr>
+          <p:cNvPr id="9" name="Rectangle 8"/>
+          <p:cNvSpPr/>
+          <p:nvPr/>
+        </p:nvSpPr>
+        <p:spPr>
+          <a:xfrm>
+            <a:off x="5303520" y="2679192"/>
+            <a:ext cx="6199632" cy="868680"/>
+          </a:xfrm>
+          <a:prstGeom prst="rect">
+            <a:avLst/>
+          </a:prstGeom>
+          <a:solidFill>
+            <a:srgbClr val="1E2235"/>
+          </a:solidFill>
+          <a:ln w="19050">
+            <a:solidFill>
+              <a:srgbClr val="3A405A"/>
+            </a:solidFill>
+          </a:ln>
+        </p:spPr>
+        <p:style>
+          <a:lnRef idx="1">
+            <a:schemeClr val="accent1"/>
+          </a:lnRef>
+          <a:fillRef idx="3">
+            <a:schemeClr val="accent1"/>
+          </a:fillRef>
+          <a:effectRef idx="2">
+            <a:schemeClr val="accent1"/>
+          </a:effectRef>
+          <a:fontRef idx="minor">
+            <a:schemeClr val="lt1"/>
+          </a:fontRef>
+        </p:style>
+        <p:txBody>
+          <a:bodyPr rtlCol="0" anchor="ctr"/>
+          <a:lstStyle/>
+          <a:p>
+            <a:pPr algn="ctr"/>
+          </a:p>
+        </p:txBody>
+      </p:sp>
+      <p:sp>
+        <p:nvSpPr>
+          <p:cNvPr id="10" name="TextBox 9"/>
+          <p:cNvSpPr txBox="1"/>
+          <p:nvPr/>
+        </p:nvSpPr>
+        <p:spPr>
+          <a:xfrm>
+            <a:off x="5303520" y="2679192"/>
+            <a:ext cx="4114800" cy="868680"/>
+          </a:xfrm>
+          <a:prstGeom prst="rect">
+            <a:avLst/>
+          </a:prstGeom>
+          <a:noFill/>
+        </p:spPr>
+        <p:txBody>
+          <a:bodyPr wrap="square" lIns="182880" tIns="137160">
+            <a:spAutoFit/>
+          </a:bodyPr>
+          <a:lstStyle/>
+          <a:p>
+            <a:pPr>
+              <a:defRPr sz="1300" b="1">
+                <a:solidFill>
+                  <a:srgbClr val="FFFFFF"/>
+                </a:solidFill>
+                <a:latin typeface="Segoe UI"/>
+              </a:defRPr>
+            </a:pPr>
+            <a:r>
+              <a:t>Mirae Asset Large Cap</a:t>
+            </a:r>
+          </a:p>
+          <a:p>
+            <a:pPr>
+              <a:spcBef>
+                <a:spcPts val="200"/>
+              </a:spcBef>
+              <a:defRPr sz="850" b="1">
+                <a:solidFill>
+                  <a:srgbClr val="00E676"/>
+                </a:solidFill>
+                <a:latin typeface="Segoe UI"/>
+              </a:defRPr>
+            </a:pPr>
+            <a:r>
+              <a:t>MODERATE CONCENTRATION</a:t>
+            </a:r>
+          </a:p>
+        </p:txBody>
+      </p:sp>
+      <p:sp>
+        <p:nvSpPr>
+          <p:cNvPr id="11" name="TextBox 10"/>
+          <p:cNvSpPr txBox="1"/>
+          <p:nvPr/>
+        </p:nvSpPr>
+        <p:spPr>
+          <a:xfrm>
+            <a:off x="9418320" y="2679192"/>
+            <a:ext cx="2084831" cy="868680"/>
+          </a:xfrm>
+          <a:prstGeom prst="rect">
+            <a:avLst/>
+          </a:prstGeom>
+          <a:noFill/>
+        </p:spPr>
+        <p:txBody>
+          <a:bodyPr wrap="square" rIns="228600" tIns="109728">
+            <a:spAutoFit/>
+          </a:bodyPr>
+          <a:lstStyle/>
+          <a:p>
+            <a:pPr algn="r">
+              <a:defRPr sz="2200" b="1">
+                <a:solidFill>
+                  <a:srgbClr val="00E676"/>
+                </a:solidFill>
+                <a:latin typeface="Trebuchet MS"/>
+              </a:defRPr>
+            </a:pPr>
+            <a:r>
+              <a:t>1,827.16</a:t>
+            </a:r>
+          </a:p>
+        </p:txBody>
+      </p:sp>
+      <p:sp>
+        <p:nvSpPr>
+          <p:cNvPr id="12" name="Rectangle 11"/>
+          <p:cNvSpPr/>
+          <p:nvPr/>
+        </p:nvSpPr>
+        <p:spPr>
+          <a:xfrm>
+            <a:off x="5303520" y="3712464"/>
+            <a:ext cx="6199632" cy="868680"/>
+          </a:xfrm>
+          <a:prstGeom prst="rect">
+            <a:avLst/>
+          </a:prstGeom>
+          <a:solidFill>
+            <a:srgbClr val="1E2235"/>
+          </a:solidFill>
+          <a:ln w="19050">
+            <a:solidFill>
+              <a:srgbClr val="3A405A"/>
+            </a:solidFill>
+          </a:ln>
+        </p:spPr>
+        <p:style>
+          <a:lnRef idx="1">
+            <a:schemeClr val="accent1"/>
+          </a:lnRef>
+          <a:fillRef idx="3">
+            <a:schemeClr val="accent1"/>
+          </a:fillRef>
+          <a:effectRef idx="2">
+            <a:schemeClr val="accent1"/>
+          </a:effectRef>
+          <a:fontRef idx="minor">
+            <a:schemeClr val="lt1"/>
+          </a:fontRef>
+        </p:style>
+        <p:txBody>
+          <a:bodyPr rtlCol="0" anchor="ctr"/>
+          <a:lstStyle/>
+          <a:p>
+            <a:pPr algn="ctr"/>
+          </a:p>
+        </p:txBody>
+      </p:sp>
+      <p:sp>
+        <p:nvSpPr>
+          <p:cNvPr id="13" name="TextBox 12"/>
+          <p:cNvSpPr txBox="1"/>
+          <p:nvPr/>
+        </p:nvSpPr>
+        <p:spPr>
+          <a:xfrm>
+            <a:off x="5303520" y="3712464"/>
+            <a:ext cx="4114800" cy="868680"/>
+          </a:xfrm>
+          <a:prstGeom prst="rect">
+            <a:avLst/>
+          </a:prstGeom>
+          <a:noFill/>
+        </p:spPr>
+        <p:txBody>
+          <a:bodyPr wrap="square" lIns="182880" tIns="137160">
+            <a:spAutoFit/>
+          </a:bodyPr>
+          <a:lstStyle/>
+          <a:p>
+            <a:pPr>
+              <a:defRPr sz="1300" b="1">
+                <a:solidFill>
+                  <a:srgbClr val="FFFFFF"/>
+                </a:solidFill>
+                <a:latin typeface="Segoe UI"/>
+              </a:defRPr>
+            </a:pPr>
+            <a:r>
+              <a:t>DSP Top 100 Equity</a:t>
+            </a:r>
+          </a:p>
+          <a:p>
+            <a:pPr>
+              <a:spcBef>
+                <a:spcPts val="200"/>
+              </a:spcBef>
+              <a:defRPr sz="850" b="1">
+                <a:solidFill>
+                  <a:srgbClr val="00E676"/>
+                </a:solidFill>
+                <a:latin typeface="Segoe UI"/>
+              </a:defRPr>
+            </a:pPr>
+            <a:r>
+              <a:t>MODERATE CONCENTRATION</a:t>
+            </a:r>
+          </a:p>
+        </p:txBody>
+      </p:sp>
+      <p:sp>
+        <p:nvSpPr>
+          <p:cNvPr id="14" name="TextBox 13"/>
+          <p:cNvSpPr txBox="1"/>
+          <p:nvPr/>
+        </p:nvSpPr>
+        <p:spPr>
+          <a:xfrm>
+            <a:off x="9418320" y="3712464"/>
+            <a:ext cx="2084831" cy="868680"/>
+          </a:xfrm>
+          <a:prstGeom prst="rect">
+            <a:avLst/>
+          </a:prstGeom>
+          <a:noFill/>
+        </p:spPr>
+        <p:txBody>
+          <a:bodyPr wrap="square" rIns="228600" tIns="109728">
+            <a:spAutoFit/>
+          </a:bodyPr>
+          <a:lstStyle/>
+          <a:p>
+            <a:pPr algn="r">
+              <a:defRPr sz="2200" b="1">
+                <a:solidFill>
+                  <a:srgbClr val="00E676"/>
+                </a:solidFill>
+                <a:latin typeface="Trebuchet MS"/>
+              </a:defRPr>
+            </a:pPr>
+            <a:r>
+              <a:t>1,827.16</a:t>
+            </a:r>
+          </a:p>
+        </p:txBody>
+      </p:sp>
+      <p:sp>
+        <p:nvSpPr>
+          <p:cNvPr id="15" name="Rectangle 14"/>
+          <p:cNvSpPr/>
+          <p:nvPr/>
+        </p:nvSpPr>
+        <p:spPr>
+          <a:xfrm>
+            <a:off x="5303520" y="4745736"/>
+            <a:ext cx="6199632" cy="868680"/>
+          </a:xfrm>
+          <a:prstGeom prst="rect">
+            <a:avLst/>
+          </a:prstGeom>
+          <a:solidFill>
+            <a:srgbClr val="1E2235"/>
+          </a:solidFill>
+          <a:ln w="19050">
+            <a:solidFill>
+              <a:srgbClr val="3A405A"/>
+            </a:solidFill>
+          </a:ln>
+        </p:spPr>
+        <p:style>
+          <a:lnRef idx="1">
+            <a:schemeClr val="accent1"/>
+          </a:lnRef>
+          <a:fillRef idx="3">
+            <a:schemeClr val="accent1"/>
+          </a:fillRef>
+          <a:effectRef idx="2">
+            <a:schemeClr val="accent1"/>
+          </a:effectRef>
+          <a:fontRef idx="minor">
+            <a:schemeClr val="lt1"/>
+          </a:fontRef>
+        </p:style>
+        <p:txBody>
+          <a:bodyPr rtlCol="0" anchor="ctr"/>
+          <a:lstStyle/>
+          <a:p>
+            <a:pPr algn="ctr"/>
+          </a:p>
+        </p:txBody>
+      </p:sp>
+      <p:sp>
+        <p:nvSpPr>
+          <p:cNvPr id="16" name="TextBox 15"/>
+          <p:cNvSpPr txBox="1"/>
+          <p:nvPr/>
+        </p:nvSpPr>
+        <p:spPr>
+          <a:xfrm>
+            <a:off x="5303520" y="4745736"/>
+            <a:ext cx="4114800" cy="868680"/>
+          </a:xfrm>
+          <a:prstGeom prst="rect">
+            <a:avLst/>
+          </a:prstGeom>
+          <a:noFill/>
+        </p:spPr>
+        <p:txBody>
+          <a:bodyPr wrap="square" lIns="182880" tIns="137160">
+            <a:spAutoFit/>
+          </a:bodyPr>
+          <a:lstStyle/>
+          <a:p>
+            <a:pPr>
+              <a:defRPr sz="1300" b="1">
+                <a:solidFill>
+                  <a:srgbClr val="FFFFFF"/>
+                </a:solidFill>
+                <a:latin typeface="Segoe UI"/>
+              </a:defRPr>
+            </a:pPr>
+            <a:r>
+              <a:t>HDFC Mid-Cap Opp</a:t>
+            </a:r>
+          </a:p>
+          <a:p>
+            <a:pPr>
+              <a:spcBef>
+                <a:spcPts val="200"/>
+              </a:spcBef>
+              <a:defRPr sz="850" b="1">
+                <a:solidFill>
+                  <a:srgbClr val="00E676"/>
+                </a:solidFill>
+                <a:latin typeface="Segoe UI"/>
+              </a:defRPr>
+            </a:pPr>
+            <a:r>
+              <a:t>LOW CONCENTRATION</a:t>
+            </a:r>
+          </a:p>
+        </p:txBody>
+      </p:sp>
+      <p:sp>
+        <p:nvSpPr>
+          <p:cNvPr id="17" name="TextBox 16"/>
+          <p:cNvSpPr txBox="1"/>
+          <p:nvPr/>
+        </p:nvSpPr>
+        <p:spPr>
+          <a:xfrm>
+            <a:off x="9418320" y="4745736"/>
+            <a:ext cx="2084831" cy="868680"/>
+          </a:xfrm>
+          <a:prstGeom prst="rect">
+            <a:avLst/>
+          </a:prstGeom>
+          <a:noFill/>
+        </p:spPr>
+        <p:txBody>
+          <a:bodyPr wrap="square" rIns="228600" tIns="109728">
+            <a:spAutoFit/>
+          </a:bodyPr>
+          <a:lstStyle/>
+          <a:p>
+            <a:pPr algn="r">
+              <a:defRPr sz="2200" b="1">
+                <a:solidFill>
+                  <a:srgbClr val="FFFFFF"/>
+                </a:solidFill>
+                <a:latin typeface="Trebuchet MS"/>
+              </a:defRPr>
+            </a:pPr>
+            <a:r>
+              <a:t>1,327.42</a:t>
             </a:r>
           </a:p>
         </p:txBody>
@@ -5940,7 +10490,7 @@
     <p:bg>
       <p:bgPr>
         <a:solidFill>
-          <a:srgbClr val="0F111A"/>
+          <a:srgbClr val="0B0E14"/>
         </a:solidFill>
         <a:effectLst/>
       </p:bgPr>
@@ -5960,8 +10510,8 @@
         </p:nvSpPr>
         <p:spPr>
           <a:xfrm>
-            <a:off x="457200" y="457200"/>
-            <a:ext cx="11274552" cy="1097280"/>
+            <a:off x="685800" y="365760"/>
+            <a:ext cx="9144000" cy="274320"/>
           </a:xfrm>
           <a:prstGeom prst="rect">
             <a:avLst/>
@@ -5975,15 +10525,15 @@
           <a:lstStyle/>
           <a:p>
             <a:pPr>
-              <a:defRPr sz="3200" b="1">
+              <a:defRPr sz="900" b="1">
                 <a:solidFill>
                   <a:srgbClr val="00E5FF"/>
                 </a:solidFill>
-                <a:latin typeface="Arial"/>
+                <a:latin typeface="Trebuchet MS"/>
               </a:defRPr>
             </a:pPr>
             <a:r>
-              <a:t>Downside Tail Risk (VaR &amp; CVaR)</a:t>
+              <a:t>BLUESTOCK MUTUAL FUND ANALYTICS</a:t>
             </a:r>
           </a:p>
         </p:txBody>
@@ -5996,8 +10546,8 @@
         </p:nvSpPr>
         <p:spPr>
           <a:xfrm>
-            <a:off x="457200" y="1645920"/>
-            <a:ext cx="11274552" cy="4572000"/>
+            <a:off x="685800" y="594360"/>
+            <a:ext cx="10817352" cy="731520"/>
           </a:xfrm>
           <a:prstGeom prst="rect">
             <a:avLst/>
@@ -6011,70 +10561,611 @@
           <a:lstStyle/>
           <a:p>
             <a:pPr>
-              <a:spcAft>
-                <a:spcPts val="2000"/>
-              </a:spcAft>
-              <a:defRPr sz="1800" i="1">
+              <a:defRPr sz="2800" b="1">
+                <a:solidFill>
+                  <a:srgbClr val="FFFFFF"/>
+                </a:solidFill>
+                <a:latin typeface="Trebuchet MS"/>
+              </a:defRPr>
+            </a:pPr>
+            <a:r>
+              <a:t>Downside Tail Risk: Daily Historical VaR &amp; CVaR</a:t>
+            </a:r>
+          </a:p>
+        </p:txBody>
+      </p:sp>
+      <p:sp>
+        <p:nvSpPr>
+          <p:cNvPr id="4" name="Rectangle 3"/>
+          <p:cNvSpPr/>
+          <p:nvPr/>
+        </p:nvSpPr>
+        <p:spPr>
+          <a:xfrm>
+            <a:off x="685800" y="1280160"/>
+            <a:ext cx="10817352" cy="18288"/>
+          </a:xfrm>
+          <a:prstGeom prst="rect">
+            <a:avLst/>
+          </a:prstGeom>
+          <a:solidFill>
+            <a:srgbClr val="1E2235"/>
+          </a:solidFill>
+          <a:ln>
+            <a:noFill/>
+          </a:ln>
+        </p:spPr>
+        <p:style>
+          <a:lnRef idx="1">
+            <a:schemeClr val="accent1"/>
+          </a:lnRef>
+          <a:fillRef idx="3">
+            <a:schemeClr val="accent1"/>
+          </a:fillRef>
+          <a:effectRef idx="2">
+            <a:schemeClr val="accent1"/>
+          </a:effectRef>
+          <a:fontRef idx="minor">
+            <a:schemeClr val="lt1"/>
+          </a:fontRef>
+        </p:style>
+        <p:txBody>
+          <a:bodyPr rtlCol="0" anchor="ctr"/>
+          <a:lstStyle/>
+          <a:p>
+            <a:pPr algn="ctr"/>
+          </a:p>
+        </p:txBody>
+      </p:sp>
+      <p:sp>
+        <p:nvSpPr>
+          <p:cNvPr id="5" name="TextBox 4"/>
+          <p:cNvSpPr txBox="1"/>
+          <p:nvPr/>
+        </p:nvSpPr>
+        <p:spPr>
+          <a:xfrm>
+            <a:off x="685800" y="1645920"/>
+            <a:ext cx="4114800" cy="4114800"/>
+          </a:xfrm>
+          <a:prstGeom prst="rect">
+            <a:avLst/>
+          </a:prstGeom>
+          <a:noFill/>
+        </p:spPr>
+        <p:txBody>
+          <a:bodyPr wrap="square" lIns="0">
+            <a:spAutoFit/>
+          </a:bodyPr>
+          <a:lstStyle/>
+          <a:p>
+            <a:pPr>
+              <a:defRPr sz="1600" b="1">
                 <a:solidFill>
                   <a:srgbClr val="00E5FF"/>
                 </a:solidFill>
-                <a:latin typeface="Arial"/>
+                <a:latin typeface="Trebuchet MS"/>
               </a:defRPr>
             </a:pPr>
             <a:r>
-              <a:t>Estimating tail risk thresholds</a:t>
+              <a:t>Risk Expected Shortfall</a:t>
             </a:r>
           </a:p>
           <a:p>
             <a:pPr>
-              <a:spcAft>
-                <a:spcPts val="1200"/>
-              </a:spcAft>
-              <a:defRPr sz="1600">
-                <a:solidFill>
-                  <a:srgbClr val="DCDCDC"/>
-                </a:solidFill>
-                <a:latin typeface="Arial"/>
+              <a:lnSpc>
+                <a:spcPct val="125000"/>
+              </a:lnSpc>
+              <a:spcBef>
+                <a:spcPts val="800"/>
+              </a:spcBef>
+              <a:defRPr sz="1050">
+                <a:solidFill>
+                  <a:srgbClr val="B0BEC5"/>
+                </a:solidFill>
+                <a:latin typeface="Segoe UI"/>
               </a:defRPr>
             </a:pPr>
             <a:r>
-              <a:t>• Value at Risk (95% VaR): Tech Fund daily VaR = 2.33% vs. Mirae Large Cap = 2.08%</a:t>
-            </a:r>
-          </a:p>
-          <a:p>
-            <a:pPr>
-              <a:spcAft>
-                <a:spcPts val="1200"/>
-              </a:spcAft>
-              <a:defRPr sz="1600">
-                <a:solidFill>
-                  <a:srgbClr val="DCDCDC"/>
-                </a:solidFill>
-                <a:latin typeface="Arial"/>
-              </a:defRPr>
-            </a:pPr>
-            <a:r>
-              <a:t>• Expected Shortfall (95% CVaR): Tech Fund daily CVaR = 3.19% vs. Mirae Large Cap = 2.76%</a:t>
-            </a:r>
-          </a:p>
-          <a:p>
-            <a:pPr>
-              <a:spcAft>
-                <a:spcPts val="1200"/>
-              </a:spcAft>
-              <a:defRPr sz="1600">
-                <a:solidFill>
-                  <a:srgbClr val="DCDCDC"/>
-                </a:solidFill>
-                <a:latin typeface="Arial"/>
-              </a:defRPr>
-            </a:pPr>
-            <a:r>
-              <a:t>• Tail Risk: High sector concentration directly correlates with larger tail risk losses</a:t>
-            </a:r>
-          </a:p>
-        </p:txBody>
-      </p:sp>
+              <a:t>We evaluated extreme tail risk using daily returns:</a:t>
+            </a:r>
+            <a:br/>
+            <a:br/>
+            <a:r>
+              <a:t>• Value at Risk (95% VaR):</a:t>
+            </a:r>
+            <a:br/>
+            <a:r>
+              <a:t>The minimum threshold loss expected on any single trading day with 95% confidence.</a:t>
+            </a:r>
+            <a:br/>
+            <a:br/>
+            <a:r>
+              <a:t>• Conditional VaR (95% CVaR):</a:t>
+            </a:r>
+            <a:br/>
+            <a:r>
+              <a:t>The average expected loss during the worst 5% of trading days. Also known as Expected Shortfall.</a:t>
+            </a:r>
+            <a:br/>
+            <a:br/>
+            <a:r>
+              <a:t>Sector concentration directly amplifies tail risk. The tech sectoral fund displays significantly higher daily losses than diversified large-cap peers.</a:t>
+            </a:r>
+          </a:p>
+        </p:txBody>
+      </p:sp>
+      <p:graphicFrame>
+        <p:nvGraphicFramePr>
+          <p:cNvPr id="6" name="Table 5"/>
+          <p:cNvGraphicFramePr>
+            <a:graphicFrameLocks noGrp="1"/>
+          </p:cNvGraphicFramePr>
+          <p:nvPr/>
+        </p:nvGraphicFramePr>
+        <p:xfrm>
+          <a:off x="5303520" y="1645920"/>
+          <a:ext cx="6199632" cy="4114800"/>
+        </p:xfrm>
+        <a:graphic>
+          <a:graphicData uri="http://schemas.openxmlformats.org/drawingml/2006/table">
+            <a:tbl>
+              <a:tblPr firstRow="1" bandRow="1">
+                <a:tableStyleId>{5C22544A-7EE6-4342-B048-85BDC9FD1C3A}</a:tableStyleId>
+              </a:tblPr>
+              <a:tblGrid>
+                <a:gridCol w="2907792"/>
+                <a:gridCol w="1645920"/>
+                <a:gridCol w="1645920"/>
+              </a:tblGrid>
+              <a:tr h="685800">
+                <a:tc>
+                  <a:txBody>
+                    <a:bodyPr/>
+                    <a:lstStyle/>
+                    <a:p>
+                      <a:pPr algn="ctr">
+                        <a:defRPr sz="1050" b="1">
+                          <a:solidFill>
+                            <a:srgbClr val="FFFFFF"/>
+                          </a:solidFill>
+                          <a:latin typeface="Trebuchet MS"/>
+                        </a:defRPr>
+                      </a:pPr>
+                      <a:r>
+                        <a:t>Scheme Name</a:t>
+                      </a:r>
+                    </a:p>
+                  </a:txBody>
+                  <a:tcPr>
+                    <a:solidFill>
+                      <a:srgbClr val="1E2235"/>
+                    </a:solidFill>
+                  </a:tcPr>
+                </a:tc>
+                <a:tc>
+                  <a:txBody>
+                    <a:bodyPr/>
+                    <a:lstStyle/>
+                    <a:p>
+                      <a:pPr algn="ctr">
+                        <a:defRPr sz="1050" b="1">
+                          <a:solidFill>
+                            <a:srgbClr val="FFFFFF"/>
+                          </a:solidFill>
+                          <a:latin typeface="Trebuchet MS"/>
+                        </a:defRPr>
+                      </a:pPr>
+                      <a:r>
+                        <a:t>Daily VaR (95%)</a:t>
+                      </a:r>
+                    </a:p>
+                  </a:txBody>
+                  <a:tcPr>
+                    <a:solidFill>
+                      <a:srgbClr val="1E2235"/>
+                    </a:solidFill>
+                  </a:tcPr>
+                </a:tc>
+                <a:tc>
+                  <a:txBody>
+                    <a:bodyPr/>
+                    <a:lstStyle/>
+                    <a:p>
+                      <a:pPr algn="ctr">
+                        <a:defRPr sz="1050" b="1">
+                          <a:solidFill>
+                            <a:srgbClr val="FFFFFF"/>
+                          </a:solidFill>
+                          <a:latin typeface="Trebuchet MS"/>
+                        </a:defRPr>
+                      </a:pPr>
+                      <a:r>
+                        <a:t>Daily CVaR (95%)</a:t>
+                      </a:r>
+                    </a:p>
+                  </a:txBody>
+                  <a:tcPr>
+                    <a:solidFill>
+                      <a:srgbClr val="1E2235"/>
+                    </a:solidFill>
+                  </a:tcPr>
+                </a:tc>
+              </a:tr>
+              <a:tr h="685800">
+                <a:tc>
+                  <a:txBody>
+                    <a:bodyPr/>
+                    <a:lstStyle/>
+                    <a:p>
+                      <a:pPr algn="l">
+                        <a:defRPr b="1" sz="1000">
+                          <a:solidFill>
+                            <a:srgbClr val="FFFFFF"/>
+                          </a:solidFill>
+                          <a:latin typeface="Segoe UI"/>
+                        </a:defRPr>
+                      </a:pPr>
+                      <a:r>
+                        <a:t>ICICI Pru Technology</a:t>
+                      </a:r>
+                    </a:p>
+                  </a:txBody>
+                  <a:tcPr>
+                    <a:solidFill>
+                      <a:srgbClr val="141826"/>
+                    </a:solidFill>
+                  </a:tcPr>
+                </a:tc>
+                <a:tc>
+                  <a:txBody>
+                    <a:bodyPr/>
+                    <a:lstStyle/>
+                    <a:p>
+                      <a:pPr algn="ctr">
+                        <a:defRPr sz="1000">
+                          <a:solidFill>
+                            <a:srgbClr val="00E5FF"/>
+                          </a:solidFill>
+                          <a:latin typeface="Segoe UI"/>
+                        </a:defRPr>
+                      </a:pPr>
+                      <a:r>
+                        <a:t>2.33%</a:t>
+                      </a:r>
+                    </a:p>
+                  </a:txBody>
+                  <a:tcPr>
+                    <a:solidFill>
+                      <a:srgbClr val="141826"/>
+                    </a:solidFill>
+                  </a:tcPr>
+                </a:tc>
+                <a:tc>
+                  <a:txBody>
+                    <a:bodyPr/>
+                    <a:lstStyle/>
+                    <a:p>
+                      <a:pPr algn="ctr">
+                        <a:defRPr sz="1000">
+                          <a:solidFill>
+                            <a:srgbClr val="EF5350"/>
+                          </a:solidFill>
+                          <a:latin typeface="Segoe UI"/>
+                        </a:defRPr>
+                      </a:pPr>
+                      <a:r>
+                        <a:t>3.01%</a:t>
+                      </a:r>
+                    </a:p>
+                  </a:txBody>
+                  <a:tcPr>
+                    <a:solidFill>
+                      <a:srgbClr val="141826"/>
+                    </a:solidFill>
+                  </a:tcPr>
+                </a:tc>
+              </a:tr>
+              <a:tr h="685800">
+                <a:tc>
+                  <a:txBody>
+                    <a:bodyPr/>
+                    <a:lstStyle/>
+                    <a:p>
+                      <a:pPr algn="l">
+                        <a:defRPr b="1" sz="1000">
+                          <a:solidFill>
+                            <a:srgbClr val="FFFFFF"/>
+                          </a:solidFill>
+                          <a:latin typeface="Segoe UI"/>
+                        </a:defRPr>
+                      </a:pPr>
+                      <a:r>
+                        <a:t>DSP Top 100 Equity</a:t>
+                      </a:r>
+                    </a:p>
+                  </a:txBody>
+                  <a:tcPr>
+                    <a:solidFill>
+                      <a:srgbClr val="0B0E14"/>
+                    </a:solidFill>
+                  </a:tcPr>
+                </a:tc>
+                <a:tc>
+                  <a:txBody>
+                    <a:bodyPr/>
+                    <a:lstStyle/>
+                    <a:p>
+                      <a:pPr algn="ctr">
+                        <a:defRPr sz="1000">
+                          <a:solidFill>
+                            <a:srgbClr val="00E5FF"/>
+                          </a:solidFill>
+                          <a:latin typeface="Segoe UI"/>
+                        </a:defRPr>
+                      </a:pPr>
+                      <a:r>
+                        <a:t>2.27%</a:t>
+                      </a:r>
+                    </a:p>
+                  </a:txBody>
+                  <a:tcPr>
+                    <a:solidFill>
+                      <a:srgbClr val="0B0E14"/>
+                    </a:solidFill>
+                  </a:tcPr>
+                </a:tc>
+                <a:tc>
+                  <a:txBody>
+                    <a:bodyPr/>
+                    <a:lstStyle/>
+                    <a:p>
+                      <a:pPr algn="ctr">
+                        <a:defRPr sz="1000">
+                          <a:solidFill>
+                            <a:srgbClr val="EF5350"/>
+                          </a:solidFill>
+                          <a:latin typeface="Segoe UI"/>
+                        </a:defRPr>
+                      </a:pPr>
+                      <a:r>
+                        <a:t>2.99%</a:t>
+                      </a:r>
+                    </a:p>
+                  </a:txBody>
+                  <a:tcPr>
+                    <a:solidFill>
+                      <a:srgbClr val="0B0E14"/>
+                    </a:solidFill>
+                  </a:tcPr>
+                </a:tc>
+              </a:tr>
+              <a:tr h="685800">
+                <a:tc>
+                  <a:txBody>
+                    <a:bodyPr/>
+                    <a:lstStyle/>
+                    <a:p>
+                      <a:pPr algn="l">
+                        <a:defRPr b="1" sz="1000">
+                          <a:solidFill>
+                            <a:srgbClr val="FFFFFF"/>
+                          </a:solidFill>
+                          <a:latin typeface="Segoe UI"/>
+                        </a:defRPr>
+                      </a:pPr>
+                      <a:r>
+                        <a:t>Nippon India Large Cap</a:t>
+                      </a:r>
+                    </a:p>
+                  </a:txBody>
+                  <a:tcPr>
+                    <a:solidFill>
+                      <a:srgbClr val="141826"/>
+                    </a:solidFill>
+                  </a:tcPr>
+                </a:tc>
+                <a:tc>
+                  <a:txBody>
+                    <a:bodyPr/>
+                    <a:lstStyle/>
+                    <a:p>
+                      <a:pPr algn="ctr">
+                        <a:defRPr sz="1000">
+                          <a:solidFill>
+                            <a:srgbClr val="00E5FF"/>
+                          </a:solidFill>
+                          <a:latin typeface="Segoe UI"/>
+                        </a:defRPr>
+                      </a:pPr>
+                      <a:r>
+                        <a:t>2.15%</a:t>
+                      </a:r>
+                    </a:p>
+                  </a:txBody>
+                  <a:tcPr>
+                    <a:solidFill>
+                      <a:srgbClr val="141826"/>
+                    </a:solidFill>
+                  </a:tcPr>
+                </a:tc>
+                <a:tc>
+                  <a:txBody>
+                    <a:bodyPr/>
+                    <a:lstStyle/>
+                    <a:p>
+                      <a:pPr algn="ctr">
+                        <a:defRPr sz="1000">
+                          <a:solidFill>
+                            <a:srgbClr val="EF5350"/>
+                          </a:solidFill>
+                          <a:latin typeface="Segoe UI"/>
+                        </a:defRPr>
+                      </a:pPr>
+                      <a:r>
+                        <a:t>2.89%</a:t>
+                      </a:r>
+                    </a:p>
+                  </a:txBody>
+                  <a:tcPr>
+                    <a:solidFill>
+                      <a:srgbClr val="141826"/>
+                    </a:solidFill>
+                  </a:tcPr>
+                </a:tc>
+              </a:tr>
+              <a:tr h="685800">
+                <a:tc>
+                  <a:txBody>
+                    <a:bodyPr/>
+                    <a:lstStyle/>
+                    <a:p>
+                      <a:pPr algn="l">
+                        <a:defRPr b="1" sz="1000">
+                          <a:solidFill>
+                            <a:srgbClr val="FFFFFF"/>
+                          </a:solidFill>
+                          <a:latin typeface="Segoe UI"/>
+                        </a:defRPr>
+                      </a:pPr>
+                      <a:r>
+                        <a:t>Mirae Asset Large Cap</a:t>
+                      </a:r>
+                    </a:p>
+                  </a:txBody>
+                  <a:tcPr>
+                    <a:solidFill>
+                      <a:srgbClr val="0B0E14"/>
+                    </a:solidFill>
+                  </a:tcPr>
+                </a:tc>
+                <a:tc>
+                  <a:txBody>
+                    <a:bodyPr/>
+                    <a:lstStyle/>
+                    <a:p>
+                      <a:pPr algn="ctr">
+                        <a:defRPr sz="1000">
+                          <a:solidFill>
+                            <a:srgbClr val="00E5FF"/>
+                          </a:solidFill>
+                          <a:latin typeface="Segoe UI"/>
+                        </a:defRPr>
+                      </a:pPr>
+                      <a:r>
+                        <a:t>2.08%</a:t>
+                      </a:r>
+                    </a:p>
+                  </a:txBody>
+                  <a:tcPr>
+                    <a:solidFill>
+                      <a:srgbClr val="0B0E14"/>
+                    </a:solidFill>
+                  </a:tcPr>
+                </a:tc>
+                <a:tc>
+                  <a:txBody>
+                    <a:bodyPr/>
+                    <a:lstStyle/>
+                    <a:p>
+                      <a:pPr algn="ctr">
+                        <a:defRPr sz="1000">
+                          <a:solidFill>
+                            <a:srgbClr val="EF5350"/>
+                          </a:solidFill>
+                          <a:latin typeface="Segoe UI"/>
+                        </a:defRPr>
+                      </a:pPr>
+                      <a:r>
+                        <a:t>2.76%</a:t>
+                      </a:r>
+                    </a:p>
+                  </a:txBody>
+                  <a:tcPr>
+                    <a:solidFill>
+                      <a:srgbClr val="0B0E14"/>
+                    </a:solidFill>
+                  </a:tcPr>
+                </a:tc>
+              </a:tr>
+              <a:tr h="685800">
+                <a:tc>
+                  <a:txBody>
+                    <a:bodyPr/>
+                    <a:lstStyle/>
+                    <a:p>
+                      <a:pPr algn="l">
+                        <a:defRPr b="1" sz="1000">
+                          <a:solidFill>
+                            <a:srgbClr val="FFFFFF"/>
+                          </a:solidFill>
+                          <a:latin typeface="Segoe UI"/>
+                        </a:defRPr>
+                      </a:pPr>
+                      <a:r>
+                        <a:t>Axis Bluechip</a:t>
+                      </a:r>
+                    </a:p>
+                  </a:txBody>
+                  <a:tcPr>
+                    <a:solidFill>
+                      <a:srgbClr val="141826"/>
+                    </a:solidFill>
+                  </a:tcPr>
+                </a:tc>
+                <a:tc>
+                  <a:txBody>
+                    <a:bodyPr/>
+                    <a:lstStyle/>
+                    <a:p>
+                      <a:pPr algn="ctr">
+                        <a:defRPr sz="1000">
+                          <a:solidFill>
+                            <a:srgbClr val="00E5FF"/>
+                          </a:solidFill>
+                          <a:latin typeface="Segoe UI"/>
+                        </a:defRPr>
+                      </a:pPr>
+                      <a:r>
+                        <a:t>2.05%</a:t>
+                      </a:r>
+                    </a:p>
+                  </a:txBody>
+                  <a:tcPr>
+                    <a:solidFill>
+                      <a:srgbClr val="141826"/>
+                    </a:solidFill>
+                  </a:tcPr>
+                </a:tc>
+                <a:tc>
+                  <a:txBody>
+                    <a:bodyPr/>
+                    <a:lstStyle/>
+                    <a:p>
+                      <a:pPr algn="ctr">
+                        <a:defRPr sz="1000">
+                          <a:solidFill>
+                            <a:srgbClr val="EF5350"/>
+                          </a:solidFill>
+                          <a:latin typeface="Segoe UI"/>
+                        </a:defRPr>
+                      </a:pPr>
+                      <a:r>
+                        <a:t>2.71%</a:t>
+                      </a:r>
+                    </a:p>
+                  </a:txBody>
+                  <a:tcPr>
+                    <a:solidFill>
+                      <a:srgbClr val="141826"/>
+                    </a:solidFill>
+                  </a:tcPr>
+                </a:tc>
+              </a:tr>
+            </a:tbl>
+          </a:graphicData>
+        </a:graphic>
+      </p:graphicFrame>
     </p:spTree>
   </p:cSld>
   <p:clrMapOvr>

--- a/reports/Presentation.pptx
+++ b/reports/Presentation.pptx
@@ -513,7 +513,7 @@
           <a:lstStyle/>
           <a:p>
             <a:r>
-              <a:t>Welcome to the board presentation of our Mutual Fund Analytics and Risk Platform. This platform represents a complete end-to-end data pipeline: from raw AMFI and clienttransaction files, to relational database modeling, advanced quantitative risk metrics calculation, and finally, dynamic reporting in Power BI. Today, we will discuss both the engineering architecture and the key strategic findings that our calculations have revealed.</a:t>
+              <a:t>Welcome to the board presentation of our Mutual Fund Analytics and Risk Platform. This platform represents a complete end-to-end data pipeline: from raw AMFI and client transaction files, to relational database modeling, advanced quantitative risk metrics calculation, and finally, dynamic reporting in Power BI. Today, we will discuss both the engineering architecture and the key strategic findings that our calculations have revealed.</a:t>
             </a:r>
           </a:p>
         </p:txBody>
@@ -723,7 +723,7 @@
           <a:lstStyle/>
           <a:p>
             <a:r>
-              <a:t>Finally, we translate our analytical findings into three strategic advisor recommendations. First, implement automated portfolio rebalancing alerts when a client's sector concentration HHI exceeds 2,500. Second, prioritize systematic SIP marketing campaigns, and configure automated alerts for missed early payments. Third, enforce a minimum 60% large-cap anchor for conservative retail clients to buffer drawdowns and avoid behavioral redemptions. Thank you, and I am open to any questions.</a:t>
+              <a:t>Finally, we translate our advisory calculations into three concrete recommendations. First, implement automated portfolio alerts when HHI exceeds 2,500 to control concentration risk. Second, direct retail campaign resources to recurring systematic SIPs and trigger follow-up calls for missed early payments. Third, anchor conservative clients with a 60% large-cap core to limit historical peak-to-trough drawdowns above a -20% floor. Thank you, and I am open to any questions.</a:t>
             </a:r>
           </a:p>
         </p:txBody>
@@ -4285,7 +4285,7 @@
     <p:bg>
       <p:bgPr>
         <a:solidFill>
-          <a:srgbClr val="0B0E14"/>
+          <a:srgbClr val="FFFFFF"/>
         </a:solidFill>
         <a:effectLst/>
       </p:bgPr>
@@ -4297,22 +4297,117 @@
         <p:nvPr/>
       </p:nvGrpSpPr>
       <p:grpSpPr/>
-      <p:sp>
-        <p:nvSpPr>
-          <p:cNvPr id="2" name="Rectangle 1"/>
+      <p:pic>
+        <p:nvPicPr>
+          <p:cNvPr id="2" name="Picture 1" descr="urban_stairs.png"/>
+          <p:cNvPicPr>
+            <a:picLocks noChangeAspect="1"/>
+          </p:cNvPicPr>
+          <p:nvPr/>
+        </p:nvPicPr>
+        <p:blipFill>
+          <a:blip r:embed="rId2"/>
+          <a:stretch>
+            <a:fillRect/>
+          </a:stretch>
+        </p:blipFill>
+        <p:spPr>
+          <a:xfrm>
+            <a:off x="0" y="0"/>
+            <a:ext cx="4937760" cy="6858000"/>
+          </a:xfrm>
+          <a:prstGeom prst="rect">
+            <a:avLst/>
+          </a:prstGeom>
+        </p:spPr>
+      </p:pic>
+      <p:sp>
+        <p:nvSpPr>
+          <p:cNvPr id="3" name="TextBox 2"/>
+          <p:cNvSpPr txBox="1"/>
+          <p:nvPr/>
+        </p:nvSpPr>
+        <p:spPr>
+          <a:xfrm>
+            <a:off x="5440680" y="1645920"/>
+            <a:ext cx="6035040" cy="4114800"/>
+          </a:xfrm>
+          <a:prstGeom prst="rect">
+            <a:avLst/>
+          </a:prstGeom>
+          <a:noFill/>
+        </p:spPr>
+        <p:txBody>
+          <a:bodyPr wrap="square">
+            <a:spAutoFit/>
+          </a:bodyPr>
+          <a:lstStyle/>
+          <a:p>
+            <a:pPr>
+              <a:defRPr sz="950" b="1">
+                <a:solidFill>
+                  <a:srgbClr val="787878"/>
+                </a:solidFill>
+                <a:latin typeface="Calibri"/>
+              </a:defRPr>
+            </a:pPr>
+            <a:r>
+              <a:t>BLUESTOCK ANALYTICS • CAPSTONE SUBMISSION</a:t>
+            </a:r>
+          </a:p>
+          <a:p>
+            <a:pPr>
+              <a:spcBef>
+                <a:spcPts val="1200"/>
+              </a:spcBef>
+              <a:defRPr sz="3600" b="1">
+                <a:solidFill>
+                  <a:srgbClr val="000000"/>
+                </a:solidFill>
+                <a:latin typeface="Georgia"/>
+              </a:defRPr>
+            </a:pPr>
+            <a:r>
+              <a:t>Mutual Fund Analytics &amp; Risk Platform</a:t>
+            </a:r>
+          </a:p>
+          <a:p>
+            <a:pPr>
+              <a:spcBef>
+                <a:spcPts val="600"/>
+              </a:spcBef>
+              <a:spcAft>
+                <a:spcPts val="2400"/>
+              </a:spcAft>
+              <a:defRPr sz="1400">
+                <a:solidFill>
+                  <a:srgbClr val="787878"/>
+                </a:solidFill>
+                <a:latin typeface="Georgia"/>
+              </a:defRPr>
+            </a:pPr>
+            <a:r>
+              <a:t>Technical Case Study &amp; Executive Dashboard Specifications</a:t>
+            </a:r>
+          </a:p>
+        </p:txBody>
+      </p:sp>
+      <p:sp>
+        <p:nvSpPr>
+          <p:cNvPr id="4" name="Rectangle 3"/>
           <p:cNvSpPr/>
           <p:nvPr/>
         </p:nvSpPr>
         <p:spPr>
           <a:xfrm>
-            <a:off x="0" y="0"/>
-            <a:ext cx="12191695" cy="320040"/>
+            <a:off x="5440680" y="3383280"/>
+            <a:ext cx="6035040" cy="13716"/>
           </a:xfrm>
           <a:prstGeom prst="rect">
             <a:avLst/>
           </a:prstGeom>
           <a:solidFill>
-            <a:srgbClr val="1E2235"/>
+            <a:srgbClr val="D2D2D2"/>
           </a:solidFill>
           <a:ln>
             <a:noFill/>
@@ -4342,20 +4437,241 @@
       </p:sp>
       <p:sp>
         <p:nvSpPr>
-          <p:cNvPr id="3" name="Rectangle 2"/>
+          <p:cNvPr id="5" name="TextBox 4"/>
+          <p:cNvSpPr txBox="1"/>
+          <p:nvPr/>
+        </p:nvSpPr>
+        <p:spPr>
+          <a:xfrm>
+            <a:off x="5440680" y="3657600"/>
+            <a:ext cx="6035040" cy="2011680"/>
+          </a:xfrm>
+          <a:prstGeom prst="rect">
+            <a:avLst/>
+          </a:prstGeom>
+          <a:noFill/>
+        </p:spPr>
+        <p:txBody>
+          <a:bodyPr wrap="square">
+            <a:spAutoFit/>
+          </a:bodyPr>
+          <a:lstStyle/>
+          <a:p>
+            <a:pPr>
+              <a:spcAft>
+                <a:spcPts val="400"/>
+              </a:spcAft>
+            </a:pPr>
+            <a:r>
+              <a:rPr sz="1100" b="1">
+                <a:solidFill>
+                  <a:srgbClr val="000000"/>
+                </a:solidFill>
+                <a:latin typeface="Calibri"/>
+              </a:rPr>
+              <a:t>Presenter:</a:t>
+            </a:r>
+            <a:r>
+              <a:rPr sz="1100">
+                <a:solidFill>
+                  <a:srgbClr val="334155"/>
+                </a:solidFill>
+                <a:latin typeface="Calibri"/>
+              </a:rPr>
+              <a:t> Dhileep B, Lead Quantitative Analyst</a:t>
+            </a:r>
+          </a:p>
+          <a:p>
+            <a:pPr>
+              <a:spcAft>
+                <a:spcPts val="400"/>
+              </a:spcAft>
+            </a:pPr>
+            <a:r>
+              <a:rPr sz="1100" b="1">
+                <a:solidFill>
+                  <a:srgbClr val="000000"/>
+                </a:solidFill>
+                <a:latin typeface="Calibri"/>
+              </a:rPr>
+              <a:t>Database Layer:</a:t>
+            </a:r>
+            <a:r>
+              <a:rPr sz="1100">
+                <a:solidFill>
+                  <a:srgbClr val="334155"/>
+                </a:solidFill>
+                <a:latin typeface="Calibri"/>
+              </a:rPr>
+              <a:t> Relational SQLite 3 STAR Schema</a:t>
+            </a:r>
+          </a:p>
+          <a:p>
+            <a:pPr>
+              <a:spcAft>
+                <a:spcPts val="400"/>
+              </a:spcAft>
+            </a:pPr>
+            <a:r>
+              <a:rPr sz="1100" b="1">
+                <a:solidFill>
+                  <a:srgbClr val="000000"/>
+                </a:solidFill>
+                <a:latin typeface="Calibri"/>
+              </a:rPr>
+              <a:t>Analytics Stack:</a:t>
+            </a:r>
+            <a:r>
+              <a:rPr sz="1100">
+                <a:solidFill>
+                  <a:srgbClr val="334155"/>
+                </a:solidFill>
+                <a:latin typeface="Calibri"/>
+              </a:rPr>
+              <a:t> Python (pandas, scipy, yfinance) &amp; Power BI</a:t>
+            </a:r>
+          </a:p>
+          <a:p>
+            <a:pPr>
+              <a:spcAft>
+                <a:spcPts val="400"/>
+              </a:spcAft>
+            </a:pPr>
+            <a:r>
+              <a:rPr sz="1100" b="1">
+                <a:solidFill>
+                  <a:srgbClr val="000000"/>
+                </a:solidFill>
+                <a:latin typeface="Calibri"/>
+              </a:rPr>
+              <a:t>Project Status:</a:t>
+            </a:r>
+            <a:r>
+              <a:rPr sz="1100">
+                <a:solidFill>
+                  <a:srgbClr val="334155"/>
+                </a:solidFill>
+                <a:latin typeface="Calibri"/>
+              </a:rPr>
+              <a:t> Production Ready Clean Build</a:t>
+            </a:r>
+          </a:p>
+        </p:txBody>
+      </p:sp>
+    </p:spTree>
+  </p:cSld>
+  <p:clrMapOvr>
+    <a:masterClrMapping/>
+  </p:clrMapOvr>
+</p:sld>
+</file>
+
+<file path=ppt/slides/slide10.xml><?xml version="1.0" encoding="utf-8"?>
+<p:sld xmlns:a="http://schemas.openxmlformats.org/drawingml/2006/main" xmlns:p="http://schemas.openxmlformats.org/presentationml/2006/main" xmlns:r="http://schemas.openxmlformats.org/officeDocument/2006/relationships">
+  <p:cSld>
+    <p:bg>
+      <p:bgPr>
+        <a:solidFill>
+          <a:srgbClr val="FFFFFF"/>
+        </a:solidFill>
+        <a:effectLst/>
+      </p:bgPr>
+    </p:bg>
+    <p:spTree>
+      <p:nvGrpSpPr>
+        <p:cNvPr id="1" name=""/>
+        <p:cNvGrpSpPr/>
+        <p:nvPr/>
+      </p:nvGrpSpPr>
+      <p:grpSpPr/>
+      <p:sp>
+        <p:nvSpPr>
+          <p:cNvPr id="2" name="TextBox 1"/>
+          <p:cNvSpPr txBox="1"/>
+          <p:nvPr/>
+        </p:nvSpPr>
+        <p:spPr>
+          <a:xfrm>
+            <a:off x="685800" y="365760"/>
+            <a:ext cx="9144000" cy="274320"/>
+          </a:xfrm>
+          <a:prstGeom prst="rect">
+            <a:avLst/>
+          </a:prstGeom>
+          <a:noFill/>
+        </p:spPr>
+        <p:txBody>
+          <a:bodyPr wrap="square">
+            <a:spAutoFit/>
+          </a:bodyPr>
+          <a:lstStyle/>
+          <a:p>
+            <a:pPr>
+              <a:defRPr sz="850" b="1">
+                <a:solidFill>
+                  <a:srgbClr val="787878"/>
+                </a:solidFill>
+                <a:latin typeface="Calibri"/>
+              </a:defRPr>
+            </a:pPr>
+            <a:r>
+              <a:t>BLUESTOCK MUTUAL FUND ANALYTICS</a:t>
+            </a:r>
+          </a:p>
+        </p:txBody>
+      </p:sp>
+      <p:sp>
+        <p:nvSpPr>
+          <p:cNvPr id="3" name="TextBox 2"/>
+          <p:cNvSpPr txBox="1"/>
+          <p:nvPr/>
+        </p:nvSpPr>
+        <p:spPr>
+          <a:xfrm>
+            <a:off x="685800" y="502920"/>
+            <a:ext cx="10817352" cy="731520"/>
+          </a:xfrm>
+          <a:prstGeom prst="rect">
+            <a:avLst/>
+          </a:prstGeom>
+          <a:noFill/>
+        </p:spPr>
+        <p:txBody>
+          <a:bodyPr wrap="square">
+            <a:spAutoFit/>
+          </a:bodyPr>
+          <a:lstStyle/>
+          <a:p>
+            <a:pPr>
+              <a:defRPr sz="2600" b="1">
+                <a:solidFill>
+                  <a:srgbClr val="000000"/>
+                </a:solidFill>
+                <a:latin typeface="Georgia"/>
+              </a:defRPr>
+            </a:pPr>
+            <a:r>
+              <a:t>Investor Demographics &amp; Cohort Analysis</a:t>
+            </a:r>
+          </a:p>
+        </p:txBody>
+      </p:sp>
+      <p:sp>
+        <p:nvSpPr>
+          <p:cNvPr id="4" name="Rectangle 3"/>
           <p:cNvSpPr/>
           <p:nvPr/>
         </p:nvSpPr>
         <p:spPr>
           <a:xfrm>
-            <a:off x="0" y="320040"/>
-            <a:ext cx="12191695" cy="109728"/>
+            <a:off x="685800" y="1188720"/>
+            <a:ext cx="10817352" cy="13716"/>
           </a:xfrm>
           <a:prstGeom prst="rect">
             <a:avLst/>
           </a:prstGeom>
           <a:solidFill>
-            <a:srgbClr val="00E5FF"/>
+            <a:srgbClr val="D2D2D2"/>
           </a:solidFill>
           <a:ln>
             <a:noFill/>
@@ -4385,199 +4701,24 @@
       </p:sp>
       <p:sp>
         <p:nvSpPr>
-          <p:cNvPr id="4" name="TextBox 3"/>
-          <p:cNvSpPr txBox="1"/>
-          <p:nvPr/>
-        </p:nvSpPr>
-        <p:spPr>
-          <a:xfrm>
-            <a:off x="685800" y="1645920"/>
-            <a:ext cx="10817352" cy="1645920"/>
-          </a:xfrm>
-          <a:prstGeom prst="rect">
-            <a:avLst/>
-          </a:prstGeom>
-          <a:noFill/>
-        </p:spPr>
-        <p:txBody>
-          <a:bodyPr wrap="square">
-            <a:spAutoFit/>
-          </a:bodyPr>
-          <a:lstStyle/>
-          <a:p>
-            <a:pPr>
-              <a:defRPr sz="4400" b="1">
-                <a:solidFill>
-                  <a:srgbClr val="FFFFFF"/>
-                </a:solidFill>
-                <a:latin typeface="Trebuchet MS"/>
-              </a:defRPr>
-            </a:pPr>
-            <a:r>
-              <a:t>Mutual Fund Analytics &amp; Portfolio Risk</a:t>
-            </a:r>
-          </a:p>
-          <a:p>
-            <a:pPr>
-              <a:spcBef>
-                <a:spcPts val="1000"/>
-              </a:spcBef>
-              <a:defRPr sz="2000">
-                <a:solidFill>
-                  <a:srgbClr val="00E5FF"/>
-                </a:solidFill>
-                <a:latin typeface="Trebuchet MS"/>
-              </a:defRPr>
-            </a:pPr>
-            <a:r>
-              <a:t>Technical Case Study &amp; Executive Dashboard Specifications</a:t>
-            </a:r>
-          </a:p>
-        </p:txBody>
-      </p:sp>
-      <p:sp>
-        <p:nvSpPr>
-          <p:cNvPr id="5" name="TextBox 4"/>
-          <p:cNvSpPr txBox="1"/>
-          <p:nvPr/>
-        </p:nvSpPr>
-        <p:spPr>
-          <a:xfrm>
-            <a:off x="685800" y="3840480"/>
-            <a:ext cx="5943600" cy="2011680"/>
-          </a:xfrm>
-          <a:prstGeom prst="rect">
-            <a:avLst/>
-          </a:prstGeom>
-          <a:noFill/>
-        </p:spPr>
-        <p:txBody>
-          <a:bodyPr wrap="square">
-            <a:spAutoFit/>
-          </a:bodyPr>
-          <a:lstStyle/>
-          <a:p>
-            <a:pPr>
-              <a:spcAft>
-                <a:spcPts val="600"/>
-              </a:spcAft>
-            </a:pPr>
-            <a:r>
-              <a:rPr sz="1100" b="1">
-                <a:solidFill>
-                  <a:srgbClr val="FFFFFF"/>
-                </a:solidFill>
-                <a:latin typeface="Segoe UI"/>
-              </a:rPr>
-              <a:t>Presenter:</a:t>
-            </a:r>
-            <a:r>
-              <a:rPr sz="1100">
-                <a:solidFill>
-                  <a:srgbClr val="B0BEC5"/>
-                </a:solidFill>
-                <a:latin typeface="Segoe UI"/>
-              </a:rPr>
-              <a:t> Dhileep B, Lead Financial Data Analyst &amp; Quant Analyst</a:t>
-            </a:r>
-          </a:p>
-          <a:p>
-            <a:pPr>
-              <a:spcAft>
-                <a:spcPts val="600"/>
-              </a:spcAft>
-            </a:pPr>
-            <a:r>
-              <a:rPr sz="1100" b="1">
-                <a:solidFill>
-                  <a:srgbClr val="FFFFFF"/>
-                </a:solidFill>
-                <a:latin typeface="Segoe UI"/>
-              </a:rPr>
-              <a:t>Database Layer:</a:t>
-            </a:r>
-            <a:r>
-              <a:rPr sz="1100">
-                <a:solidFill>
-                  <a:srgbClr val="B0BEC5"/>
-                </a:solidFill>
-                <a:latin typeface="Segoe UI"/>
-              </a:rPr>
-              <a:t> Relational SQLite 3 Schema with automated indexing</a:t>
-            </a:r>
-          </a:p>
-          <a:p>
-            <a:pPr>
-              <a:spcAft>
-                <a:spcPts val="600"/>
-              </a:spcAft>
-            </a:pPr>
-            <a:r>
-              <a:rPr sz="1100" b="1">
-                <a:solidFill>
-                  <a:srgbClr val="FFFFFF"/>
-                </a:solidFill>
-                <a:latin typeface="Segoe UI"/>
-              </a:rPr>
-              <a:t>Analytics Stack:</a:t>
-            </a:r>
-            <a:r>
-              <a:rPr sz="1100">
-                <a:solidFill>
-                  <a:srgbClr val="B0BEC5"/>
-                </a:solidFill>
-                <a:latin typeface="Segoe UI"/>
-              </a:rPr>
-              <a:t> Python, pandas, scipy, yfinance API, &amp; Power BI Theme</a:t>
-            </a:r>
-          </a:p>
-          <a:p>
-            <a:pPr>
-              <a:spcAft>
-                <a:spcPts val="600"/>
-              </a:spcAft>
-            </a:pPr>
-            <a:r>
-              <a:rPr sz="1100" b="1">
-                <a:solidFill>
-                  <a:srgbClr val="FFFFFF"/>
-                </a:solidFill>
-                <a:latin typeface="Segoe UI"/>
-              </a:rPr>
-              <a:t>Project Status:</a:t>
-            </a:r>
-            <a:r>
-              <a:rPr sz="1100">
-                <a:solidFill>
-                  <a:srgbClr val="B0BEC5"/>
-                </a:solidFill>
-                <a:latin typeface="Segoe UI"/>
-              </a:rPr>
-              <a:t> Production Ready Build (CFD86E1)</a:t>
-            </a:r>
-          </a:p>
-        </p:txBody>
-      </p:sp>
-      <p:sp>
-        <p:nvSpPr>
-          <p:cNvPr id="6" name="Rectangle 5"/>
+          <p:cNvPr id="5" name="Rectangle 4"/>
           <p:cNvSpPr/>
           <p:nvPr/>
         </p:nvSpPr>
         <p:spPr>
           <a:xfrm>
-            <a:off x="7772400" y="3840480"/>
-            <a:ext cx="3730752" cy="2011680"/>
+            <a:off x="685800" y="1645920"/>
+            <a:ext cx="5212080" cy="4114800"/>
           </a:xfrm>
           <a:prstGeom prst="rect">
             <a:avLst/>
           </a:prstGeom>
           <a:solidFill>
-            <a:srgbClr val="1E2235"/>
+            <a:srgbClr val="F8FAFC"/>
           </a:solidFill>
-          <a:ln w="19050">
+          <a:ln w="12700">
             <a:solidFill>
-              <a:srgbClr val="3A405A"/>
+              <a:srgbClr val="DCE0E6"/>
             </a:solidFill>
           </a:ln>
         </p:spPr>
@@ -4596,91 +4737,23 @@
           </a:fontRef>
         </p:style>
         <p:txBody>
-          <a:bodyPr rtlCol="0" anchor="ctr" wrap="square" lIns="182880" tIns="182880"/>
-          <a:lstStyle/>
-          <a:p>
-            <a:pPr algn="ctr">
-              <a:defRPr sz="1100" b="1">
-                <a:solidFill>
-                  <a:srgbClr val="00E5FF"/>
-                </a:solidFill>
-                <a:latin typeface="Trebuchet MS"/>
-              </a:defRPr>
-            </a:pPr>
-            <a:r>
-              <a:t>BLUESTOCK SUBMISSION</a:t>
-            </a:r>
-          </a:p>
-          <a:p>
-            <a:pPr>
-              <a:spcBef>
-                <a:spcPts val="800"/>
-              </a:spcBef>
-              <a:defRPr sz="1400" b="1">
-                <a:solidFill>
-                  <a:srgbClr val="FFFFFF"/>
-                </a:solidFill>
-                <a:latin typeface="Segoe UI"/>
-              </a:defRPr>
-            </a:pPr>
-            <a:r>
-              <a:t>Day 1 to Day 6 Deliverables</a:t>
-            </a:r>
-          </a:p>
-          <a:p>
-            <a:pPr>
-              <a:spcBef>
-                <a:spcPts val="800"/>
-              </a:spcBef>
-              <a:defRPr sz="950">
-                <a:solidFill>
-                  <a:srgbClr val="B0BEC5"/>
-                </a:solidFill>
-                <a:latin typeface="Segoe UI"/>
-              </a:defRPr>
-            </a:pPr>
-            <a:r>
-              <a:t>ETL Pipeline, SQL DB, Performance scorecard, Value-at-Risk modeling, and BI themes.</a:t>
-            </a:r>
-          </a:p>
-        </p:txBody>
-      </p:sp>
-    </p:spTree>
-  </p:cSld>
-  <p:clrMapOvr>
-    <a:masterClrMapping/>
-  </p:clrMapOvr>
-</p:sld>
-</file>
-
-<file path=ppt/slides/slide10.xml><?xml version="1.0" encoding="utf-8"?>
-<p:sld xmlns:a="http://schemas.openxmlformats.org/drawingml/2006/main" xmlns:p="http://schemas.openxmlformats.org/presentationml/2006/main" xmlns:r="http://schemas.openxmlformats.org/officeDocument/2006/relationships">
-  <p:cSld>
-    <p:bg>
-      <p:bgPr>
-        <a:solidFill>
-          <a:srgbClr val="0B0E14"/>
-        </a:solidFill>
-        <a:effectLst/>
-      </p:bgPr>
-    </p:bg>
-    <p:spTree>
-      <p:nvGrpSpPr>
-        <p:cNvPr id="1" name=""/>
-        <p:cNvGrpSpPr/>
-        <p:nvPr/>
-      </p:nvGrpSpPr>
-      <p:grpSpPr/>
-      <p:sp>
-        <p:nvSpPr>
-          <p:cNvPr id="2" name="TextBox 1"/>
+          <a:bodyPr rtlCol="0" anchor="ctr"/>
+          <a:lstStyle/>
+          <a:p>
+            <a:pPr algn="ctr"/>
+          </a:p>
+        </p:txBody>
+      </p:sp>
+      <p:sp>
+        <p:nvSpPr>
+          <p:cNvPr id="6" name="TextBox 5"/>
           <p:cNvSpPr txBox="1"/>
           <p:nvPr/>
         </p:nvSpPr>
         <p:spPr>
           <a:xfrm>
-            <a:off x="685800" y="365760"/>
-            <a:ext cx="9144000" cy="274320"/>
+            <a:off x="685800" y="1645920"/>
+            <a:ext cx="5212080" cy="4114800"/>
           </a:xfrm>
           <a:prstGeom prst="rect">
             <a:avLst/>
@@ -4688,80 +4761,83 @@
           <a:noFill/>
         </p:spPr>
         <p:txBody>
-          <a:bodyPr wrap="square">
+          <a:bodyPr wrap="square" lIns="274320" tIns="274320">
             <a:spAutoFit/>
           </a:bodyPr>
           <a:lstStyle/>
           <a:p>
             <a:pPr>
-              <a:defRPr sz="900" b="1">
-                <a:solidFill>
-                  <a:srgbClr val="00E5FF"/>
-                </a:solidFill>
-                <a:latin typeface="Trebuchet MS"/>
+              <a:defRPr sz="1600" b="1">
+                <a:solidFill>
+                  <a:srgbClr val="000000"/>
+                </a:solidFill>
+                <a:latin typeface="Georgia"/>
               </a:defRPr>
             </a:pPr>
             <a:r>
-              <a:t>BLUESTOCK MUTUAL FUND ANALYTICS</a:t>
-            </a:r>
-          </a:p>
-        </p:txBody>
-      </p:sp>
-      <p:sp>
-        <p:nvSpPr>
-          <p:cNvPr id="3" name="TextBox 2"/>
-          <p:cNvSpPr txBox="1"/>
-          <p:nvPr/>
-        </p:nvSpPr>
-        <p:spPr>
-          <a:xfrm>
-            <a:off x="685800" y="594360"/>
-            <a:ext cx="10817352" cy="731520"/>
-          </a:xfrm>
-          <a:prstGeom prst="rect">
-            <a:avLst/>
-          </a:prstGeom>
-          <a:noFill/>
-        </p:spPr>
-        <p:txBody>
-          <a:bodyPr wrap="square">
-            <a:spAutoFit/>
-          </a:bodyPr>
-          <a:lstStyle/>
+              <a:t>Inflow Vintage Cohorts</a:t>
+            </a:r>
+          </a:p>
           <a:p>
             <a:pPr>
-              <a:defRPr sz="2800" b="1">
-                <a:solidFill>
-                  <a:srgbClr val="FFFFFF"/>
-                </a:solidFill>
-                <a:latin typeface="Trebuchet MS"/>
+              <a:lnSpc>
+                <a:spcPct val="125000"/>
+              </a:lnSpc>
+              <a:spcBef>
+                <a:spcPts val="1000"/>
+              </a:spcBef>
+              <a:defRPr sz="1050">
+                <a:solidFill>
+                  <a:srgbClr val="334155"/>
+                </a:solidFill>
+                <a:latin typeface="Calibri"/>
               </a:defRPr>
             </a:pPr>
             <a:r>
-              <a:t>Investor Demographics &amp; Cohort Analysis</a:t>
-            </a:r>
-          </a:p>
-        </p:txBody>
-      </p:sp>
-      <p:sp>
-        <p:nvSpPr>
-          <p:cNvPr id="4" name="Rectangle 3"/>
+              <a:t>Cohort analysis groups clients by their first transaction date to evaluate retention and capital stickiness:</a:t>
+            </a:r>
+            <a:br/>
+            <a:br/>
+            <a:r>
+              <a:t>• Core Inflow Vintages:</a:t>
+            </a:r>
+            <a:br/>
+            <a:r>
+              <a:t>The Q1 2022 and Q3 2023 cohorts represent the largest aggregate client capital inflows, coinciding with major market pullbacks.</a:t>
+            </a:r>
+            <a:br/>
+            <a:br/>
+            <a:r>
+              <a:t>• Redemption Behaviors:</a:t>
+            </a:r>
+            <a:br/>
+            <a:r>
+              <a:t>Clients with Aggressive risk profiles show high retention. Conversely, Conservative accounts show a 24% redemption increase during periods of negative index returns, highlighting behavioral panic.</a:t>
+            </a:r>
+          </a:p>
+        </p:txBody>
+      </p:sp>
+      <p:sp>
+        <p:nvSpPr>
+          <p:cNvPr id="7" name="Rectangle 6"/>
           <p:cNvSpPr/>
           <p:nvPr/>
         </p:nvSpPr>
         <p:spPr>
           <a:xfrm>
-            <a:off x="685800" y="1280160"/>
-            <a:ext cx="10817352" cy="18288"/>
+            <a:off x="6291072" y="1645920"/>
+            <a:ext cx="5212080" cy="4114800"/>
           </a:xfrm>
           <a:prstGeom prst="rect">
             <a:avLst/>
           </a:prstGeom>
           <a:solidFill>
-            <a:srgbClr val="1E2235"/>
+            <a:srgbClr val="F8FAFC"/>
           </a:solidFill>
-          <a:ln>
-            <a:noFill/>
+          <a:ln w="12700">
+            <a:solidFill>
+              <a:srgbClr val="DCE0E6"/>
+            </a:solidFill>
           </a:ln>
         </p:spPr>
         <p:style>
@@ -4788,25 +4864,186 @@
       </p:sp>
       <p:sp>
         <p:nvSpPr>
-          <p:cNvPr id="5" name="Rectangle 4"/>
+          <p:cNvPr id="8" name="TextBox 7"/>
+          <p:cNvSpPr txBox="1"/>
+          <p:nvPr/>
+        </p:nvSpPr>
+        <p:spPr>
+          <a:xfrm>
+            <a:off x="6291072" y="1645920"/>
+            <a:ext cx="5212080" cy="4114800"/>
+          </a:xfrm>
+          <a:prstGeom prst="rect">
+            <a:avLst/>
+          </a:prstGeom>
+          <a:noFill/>
+        </p:spPr>
+        <p:txBody>
+          <a:bodyPr wrap="square" lIns="274320" tIns="274320">
+            <a:spAutoFit/>
+          </a:bodyPr>
+          <a:lstStyle/>
+          <a:p>
+            <a:pPr>
+              <a:defRPr sz="1600" b="1">
+                <a:solidFill>
+                  <a:srgbClr val="000000"/>
+                </a:solidFill>
+                <a:latin typeface="Georgia"/>
+              </a:defRPr>
+            </a:pPr>
+            <a:r>
+              <a:t>SIP Continuity &amp; Churn Streaks</a:t>
+            </a:r>
+          </a:p>
+          <a:p>
+            <a:pPr>
+              <a:lnSpc>
+                <a:spcPct val="125000"/>
+              </a:lnSpc>
+              <a:spcBef>
+                <a:spcPts val="1000"/>
+              </a:spcBef>
+              <a:defRPr sz="1050">
+                <a:solidFill>
+                  <a:srgbClr val="334155"/>
+                </a:solidFill>
+                <a:latin typeface="Calibri"/>
+              </a:defRPr>
+            </a:pPr>
+            <a:r>
+              <a:t>We evaluate Systematic Investment Plan (SIP) stickiness by comparing actual vs. expected payments:</a:t>
+            </a:r>
+            <a:br/>
+            <a:br/>
+            <a:r>
+              <a:t>• Active SIP Folios: Show an impressive 87.2% continuity rate. These accounts show highly disciplined recurring payments and maintain a median active streak of 14 months.</a:t>
+            </a:r>
+            <a:br/>
+            <a:br/>
+            <a:r>
+              <a:t>• Inactive SIP Folios: Show a low continuity rate of 14.5%. Inactive clients typically lapse within their first 2 expected payments and show high churn rates, highlighting the need for immediate client intervention.</a:t>
+            </a:r>
+          </a:p>
+        </p:txBody>
+      </p:sp>
+    </p:spTree>
+  </p:cSld>
+  <p:clrMapOvr>
+    <a:masterClrMapping/>
+  </p:clrMapOvr>
+</p:sld>
+</file>
+
+<file path=ppt/slides/slide11.xml><?xml version="1.0" encoding="utf-8"?>
+<p:sld xmlns:a="http://schemas.openxmlformats.org/drawingml/2006/main" xmlns:p="http://schemas.openxmlformats.org/presentationml/2006/main" xmlns:r="http://schemas.openxmlformats.org/officeDocument/2006/relationships">
+  <p:cSld>
+    <p:bg>
+      <p:bgPr>
+        <a:solidFill>
+          <a:srgbClr val="FFFFFF"/>
+        </a:solidFill>
+        <a:effectLst/>
+      </p:bgPr>
+    </p:bg>
+    <p:spTree>
+      <p:nvGrpSpPr>
+        <p:cNvPr id="1" name=""/>
+        <p:cNvGrpSpPr/>
+        <p:nvPr/>
+      </p:nvGrpSpPr>
+      <p:grpSpPr/>
+      <p:sp>
+        <p:nvSpPr>
+          <p:cNvPr id="2" name="TextBox 1"/>
+          <p:cNvSpPr txBox="1"/>
+          <p:nvPr/>
+        </p:nvSpPr>
+        <p:spPr>
+          <a:xfrm>
+            <a:off x="685800" y="365760"/>
+            <a:ext cx="9144000" cy="274320"/>
+          </a:xfrm>
+          <a:prstGeom prst="rect">
+            <a:avLst/>
+          </a:prstGeom>
+          <a:noFill/>
+        </p:spPr>
+        <p:txBody>
+          <a:bodyPr wrap="square">
+            <a:spAutoFit/>
+          </a:bodyPr>
+          <a:lstStyle/>
+          <a:p>
+            <a:pPr>
+              <a:defRPr sz="850" b="1">
+                <a:solidFill>
+                  <a:srgbClr val="787878"/>
+                </a:solidFill>
+                <a:latin typeface="Calibri"/>
+              </a:defRPr>
+            </a:pPr>
+            <a:r>
+              <a:t>BLUESTOCK MUTUAL FUND ANALYTICS</a:t>
+            </a:r>
+          </a:p>
+        </p:txBody>
+      </p:sp>
+      <p:sp>
+        <p:nvSpPr>
+          <p:cNvPr id="3" name="TextBox 2"/>
+          <p:cNvSpPr txBox="1"/>
+          <p:nvPr/>
+        </p:nvSpPr>
+        <p:spPr>
+          <a:xfrm>
+            <a:off x="685800" y="502920"/>
+            <a:ext cx="10817352" cy="731520"/>
+          </a:xfrm>
+          <a:prstGeom prst="rect">
+            <a:avLst/>
+          </a:prstGeom>
+          <a:noFill/>
+        </p:spPr>
+        <p:txBody>
+          <a:bodyPr wrap="square">
+            <a:spAutoFit/>
+          </a:bodyPr>
+          <a:lstStyle/>
+          <a:p>
+            <a:pPr>
+              <a:defRPr sz="2600" b="1">
+                <a:solidFill>
+                  <a:srgbClr val="000000"/>
+                </a:solidFill>
+                <a:latin typeface="Georgia"/>
+              </a:defRPr>
+            </a:pPr>
+            <a:r>
+              <a:t>Executive BI Dashboard Specification</a:t>
+            </a:r>
+          </a:p>
+        </p:txBody>
+      </p:sp>
+      <p:sp>
+        <p:nvSpPr>
+          <p:cNvPr id="4" name="Rectangle 3"/>
           <p:cNvSpPr/>
           <p:nvPr/>
         </p:nvSpPr>
         <p:spPr>
           <a:xfrm>
-            <a:off x="685800" y="1645920"/>
-            <a:ext cx="5212080" cy="4114800"/>
+            <a:off x="685800" y="1188720"/>
+            <a:ext cx="10817352" cy="13716"/>
           </a:xfrm>
           <a:prstGeom prst="rect">
             <a:avLst/>
           </a:prstGeom>
           <a:solidFill>
-            <a:srgbClr val="1E2235"/>
+            <a:srgbClr val="D2D2D2"/>
           </a:solidFill>
-          <a:ln w="19050">
-            <a:solidFill>
-              <a:srgbClr val="3A405A"/>
-            </a:solidFill>
+          <a:ln>
+            <a:noFill/>
           </a:ln>
         </p:spPr>
         <p:style>
@@ -4833,97 +5070,24 @@
       </p:sp>
       <p:sp>
         <p:nvSpPr>
-          <p:cNvPr id="6" name="TextBox 5"/>
-          <p:cNvSpPr txBox="1"/>
-          <p:nvPr/>
-        </p:nvSpPr>
-        <p:spPr>
-          <a:xfrm>
-            <a:off x="685800" y="1645920"/>
-            <a:ext cx="5212080" cy="4114800"/>
-          </a:xfrm>
-          <a:prstGeom prst="rect">
-            <a:avLst/>
-          </a:prstGeom>
-          <a:noFill/>
-        </p:spPr>
-        <p:txBody>
-          <a:bodyPr wrap="square" lIns="274320" tIns="274320">
-            <a:spAutoFit/>
-          </a:bodyPr>
-          <a:lstStyle/>
-          <a:p>
-            <a:pPr>
-              <a:defRPr sz="1600" b="1">
-                <a:solidFill>
-                  <a:srgbClr val="00E5FF"/>
-                </a:solidFill>
-                <a:latin typeface="Trebuchet MS"/>
-              </a:defRPr>
-            </a:pPr>
-            <a:r>
-              <a:t>Inflow Vintage Cohorts</a:t>
-            </a:r>
-          </a:p>
-          <a:p>
-            <a:pPr>
-              <a:lnSpc>
-                <a:spcPct val="125000"/>
-              </a:lnSpc>
-              <a:spcBef>
-                <a:spcPts val="1000"/>
-              </a:spcBef>
-              <a:defRPr sz="1050">
-                <a:solidFill>
-                  <a:srgbClr val="B0BEC5"/>
-                </a:solidFill>
-                <a:latin typeface="Segoe UI"/>
-              </a:defRPr>
-            </a:pPr>
-            <a:r>
-              <a:t>Cohort analysis groups clients by their first transaction date to evaluate retention and capital stickiness:</a:t>
-            </a:r>
-            <a:br/>
-            <a:br/>
-            <a:r>
-              <a:t>• Core Inflow Vintages:</a:t>
-            </a:r>
-            <a:br/>
-            <a:r>
-              <a:t>The Q1 2022 and Q3 2023 cohorts represent the largest aggregate client capital inflows, coinciding with major market pullbacks.</a:t>
-            </a:r>
-            <a:br/>
-            <a:br/>
-            <a:r>
-              <a:t>• Redemption Behaviors:</a:t>
-            </a:r>
-            <a:br/>
-            <a:r>
-              <a:t>Clients with Aggressive risk profiles show high retention. Conversely, Conservative accounts show a 24% redemption increase during periods of negative index returns, highlighting behavioral panic.</a:t>
-            </a:r>
-          </a:p>
-        </p:txBody>
-      </p:sp>
-      <p:sp>
-        <p:nvSpPr>
-          <p:cNvPr id="7" name="Rectangle 6"/>
+          <p:cNvPr id="5" name="Rectangle 4"/>
           <p:cNvSpPr/>
           <p:nvPr/>
         </p:nvSpPr>
         <p:spPr>
           <a:xfrm>
-            <a:off x="6291072" y="1645920"/>
-            <a:ext cx="5212080" cy="4114800"/>
+            <a:off x="685800" y="1645920"/>
+            <a:ext cx="10817352" cy="868680"/>
           </a:xfrm>
           <a:prstGeom prst="rect">
             <a:avLst/>
           </a:prstGeom>
           <a:solidFill>
-            <a:srgbClr val="1E2235"/>
+            <a:srgbClr val="F8FAFC"/>
           </a:solidFill>
-          <a:ln w="19050">
+          <a:ln w="12700">
             <a:solidFill>
-              <a:srgbClr val="3A405A"/>
+              <a:srgbClr val="DCE0E6"/>
             </a:solidFill>
           </a:ln>
         </p:spPr>
@@ -4951,14 +5115,14 @@
       </p:sp>
       <p:sp>
         <p:nvSpPr>
-          <p:cNvPr id="8" name="TextBox 7"/>
+          <p:cNvPr id="6" name="TextBox 5"/>
           <p:cNvSpPr txBox="1"/>
           <p:nvPr/>
         </p:nvSpPr>
         <p:spPr>
           <a:xfrm>
-            <a:off x="6291072" y="1645920"/>
-            <a:ext cx="5212080" cy="4114800"/>
+            <a:off x="685800" y="1645920"/>
+            <a:ext cx="10817352" cy="868680"/>
           </a:xfrm>
           <a:prstGeom prst="rect">
             <a:avLst/>
@@ -4966,171 +5130,62 @@
           <a:noFill/>
         </p:spPr>
         <p:txBody>
-          <a:bodyPr wrap="square" lIns="274320" tIns="274320">
+          <a:bodyPr wrap="square" lIns="274320" rIns="274320" tIns="109728">
             <a:spAutoFit/>
           </a:bodyPr>
           <a:lstStyle/>
           <a:p>
             <a:pPr>
-              <a:defRPr sz="1600" b="1">
-                <a:solidFill>
-                  <a:srgbClr val="00E676"/>
-                </a:solidFill>
-                <a:latin typeface="Trebuchet MS"/>
+              <a:defRPr sz="1300" b="1">
+                <a:solidFill>
+                  <a:srgbClr val="000000"/>
+                </a:solidFill>
+                <a:latin typeface="Georgia"/>
               </a:defRPr>
             </a:pPr>
             <a:r>
-              <a:t>SIP Continuity &amp; Churn Streaks</a:t>
+              <a:t>PAGE 1: INDUSTRY OVERVIEW</a:t>
             </a:r>
           </a:p>
           <a:p>
             <a:pPr>
-              <a:lnSpc>
-                <a:spcPct val="125000"/>
-              </a:lnSpc>
               <a:spcBef>
-                <a:spcPts val="1000"/>
+                <a:spcPts val="200"/>
               </a:spcBef>
-              <a:defRPr sz="1050">
-                <a:solidFill>
-                  <a:srgbClr val="B0BEC5"/>
-                </a:solidFill>
-                <a:latin typeface="Segoe UI"/>
+              <a:defRPr sz="950">
+                <a:solidFill>
+                  <a:srgbClr val="334155"/>
+                </a:solidFill>
+                <a:latin typeface="Calibri"/>
               </a:defRPr>
             </a:pPr>
             <a:r>
-              <a:t>We evaluate Systematic Investment Plan (SIP) stickiness by comparing actual vs. expected payments:</a:t>
-            </a:r>
-            <a:br/>
-            <a:br/>
-            <a:r>
-              <a:t>• Active SIP Folios: Show an impressive 87.2% continuity rate. These accounts show highly disciplined recurring payments and maintain a median active streak of 14 months.</a:t>
-            </a:r>
-            <a:br/>
-            <a:br/>
-            <a:r>
-              <a:t>• Inactive SIP Folios: Show a low continuity rate of 14.5%. Inactive clients typically lapse within their first 2 expected payments and show high churn rates, highlighting the need for immediate client intervention.</a:t>
-            </a:r>
-          </a:p>
-        </p:txBody>
-      </p:sp>
-    </p:spTree>
-  </p:cSld>
-  <p:clrMapOvr>
-    <a:masterClrMapping/>
-  </p:clrMapOvr>
-</p:sld>
-</file>
-
-<file path=ppt/slides/slide11.xml><?xml version="1.0" encoding="utf-8"?>
-<p:sld xmlns:a="http://schemas.openxmlformats.org/drawingml/2006/main" xmlns:p="http://schemas.openxmlformats.org/presentationml/2006/main" xmlns:r="http://schemas.openxmlformats.org/officeDocument/2006/relationships">
-  <p:cSld>
-    <p:bg>
-      <p:bgPr>
-        <a:solidFill>
-          <a:srgbClr val="0B0E14"/>
-        </a:solidFill>
-        <a:effectLst/>
-      </p:bgPr>
-    </p:bg>
-    <p:spTree>
-      <p:nvGrpSpPr>
-        <p:cNvPr id="1" name=""/>
-        <p:cNvGrpSpPr/>
-        <p:nvPr/>
-      </p:nvGrpSpPr>
-      <p:grpSpPr/>
-      <p:sp>
-        <p:nvSpPr>
-          <p:cNvPr id="2" name="TextBox 1"/>
-          <p:cNvSpPr txBox="1"/>
-          <p:nvPr/>
-        </p:nvSpPr>
-        <p:spPr>
-          <a:xfrm>
-            <a:off x="685800" y="365760"/>
-            <a:ext cx="9144000" cy="274320"/>
-          </a:xfrm>
-          <a:prstGeom prst="rect">
-            <a:avLst/>
-          </a:prstGeom>
-          <a:noFill/>
-        </p:spPr>
-        <p:txBody>
-          <a:bodyPr wrap="square">
-            <a:spAutoFit/>
-          </a:bodyPr>
-          <a:lstStyle/>
-          <a:p>
-            <a:pPr>
-              <a:defRPr sz="900" b="1">
-                <a:solidFill>
-                  <a:srgbClr val="00E5FF"/>
-                </a:solidFill>
-                <a:latin typeface="Trebuchet MS"/>
-              </a:defRPr>
-            </a:pPr>
-            <a:r>
-              <a:t>BLUESTOCK MUTUAL FUND ANALYTICS</a:t>
-            </a:r>
-          </a:p>
-        </p:txBody>
-      </p:sp>
-      <p:sp>
-        <p:nvSpPr>
-          <p:cNvPr id="3" name="TextBox 2"/>
-          <p:cNvSpPr txBox="1"/>
-          <p:nvPr/>
-        </p:nvSpPr>
-        <p:spPr>
-          <a:xfrm>
-            <a:off x="685800" y="594360"/>
-            <a:ext cx="10817352" cy="731520"/>
-          </a:xfrm>
-          <a:prstGeom prst="rect">
-            <a:avLst/>
-          </a:prstGeom>
-          <a:noFill/>
-        </p:spPr>
-        <p:txBody>
-          <a:bodyPr wrap="square">
-            <a:spAutoFit/>
-          </a:bodyPr>
-          <a:lstStyle/>
-          <a:p>
-            <a:pPr>
-              <a:defRPr sz="2800" b="1">
-                <a:solidFill>
-                  <a:srgbClr val="FFFFFF"/>
-                </a:solidFill>
-                <a:latin typeface="Trebuchet MS"/>
-              </a:defRPr>
-            </a:pPr>
-            <a:r>
-              <a:t>Executive BI Dashboard Specification</a:t>
-            </a:r>
-          </a:p>
-        </p:txBody>
-      </p:sp>
-      <p:sp>
-        <p:nvSpPr>
-          <p:cNvPr id="4" name="Rectangle 3"/>
+              <a:t>KPI cards showing total Industry AUM (₹24,850 Cr) and Active Folios (1.42M). Tracks monthly inflows and maps AMC market share concentration (HDFC vs. SBI) using a Treemap.</a:t>
+            </a:r>
+          </a:p>
+        </p:txBody>
+      </p:sp>
+      <p:sp>
+        <p:nvSpPr>
+          <p:cNvPr id="7" name="Rectangle 6"/>
           <p:cNvSpPr/>
           <p:nvPr/>
         </p:nvSpPr>
         <p:spPr>
           <a:xfrm>
-            <a:off x="685800" y="1280160"/>
-            <a:ext cx="10817352" cy="18288"/>
+            <a:off x="685800" y="2679192"/>
+            <a:ext cx="10817352" cy="868680"/>
           </a:xfrm>
           <a:prstGeom prst="rect">
             <a:avLst/>
           </a:prstGeom>
           <a:solidFill>
-            <a:srgbClr val="1E2235"/>
+            <a:srgbClr val="F8FAFC"/>
           </a:solidFill>
-          <a:ln>
-            <a:noFill/>
+          <a:ln w="12700">
+            <a:solidFill>
+              <a:srgbClr val="DCE0E6"/>
+            </a:solidFill>
           </a:ln>
         </p:spPr>
         <p:style>
@@ -5157,24 +5212,76 @@
       </p:sp>
       <p:sp>
         <p:nvSpPr>
-          <p:cNvPr id="5" name="Rectangle 4"/>
+          <p:cNvPr id="8" name="TextBox 7"/>
+          <p:cNvSpPr txBox="1"/>
+          <p:nvPr/>
+        </p:nvSpPr>
+        <p:spPr>
+          <a:xfrm>
+            <a:off x="685800" y="2679192"/>
+            <a:ext cx="10817352" cy="868680"/>
+          </a:xfrm>
+          <a:prstGeom prst="rect">
+            <a:avLst/>
+          </a:prstGeom>
+          <a:noFill/>
+        </p:spPr>
+        <p:txBody>
+          <a:bodyPr wrap="square" lIns="274320" rIns="274320" tIns="109728">
+            <a:spAutoFit/>
+          </a:bodyPr>
+          <a:lstStyle/>
+          <a:p>
+            <a:pPr>
+              <a:defRPr sz="1300" b="1">
+                <a:solidFill>
+                  <a:srgbClr val="000000"/>
+                </a:solidFill>
+                <a:latin typeface="Georgia"/>
+              </a:defRPr>
+            </a:pPr>
+            <a:r>
+              <a:t>PAGE 2: FUND PERFORMANCE</a:t>
+            </a:r>
+          </a:p>
+          <a:p>
+            <a:pPr>
+              <a:spcBef>
+                <a:spcPts val="200"/>
+              </a:spcBef>
+              <a:defRPr sz="950">
+                <a:solidFill>
+                  <a:srgbClr val="334155"/>
+                </a:solidFill>
+                <a:latin typeface="Calibri"/>
+              </a:defRPr>
+            </a:pPr>
+            <a:r>
+              <a:t>Risk-Return scatter plot (X-axis = Beta, Y-axis = 3Y CAGR, Bubble size = AUM). Includes a dynamic line chart comparing scheme returns to the Nifty 100 benchmark (re-indexed to ₹100), and a scorecard leaderboard grid.</a:t>
+            </a:r>
+          </a:p>
+        </p:txBody>
+      </p:sp>
+      <p:sp>
+        <p:nvSpPr>
+          <p:cNvPr id="9" name="Rectangle 8"/>
           <p:cNvSpPr/>
           <p:nvPr/>
         </p:nvSpPr>
         <p:spPr>
           <a:xfrm>
-            <a:off x="685800" y="1645920"/>
+            <a:off x="685800" y="3712464"/>
             <a:ext cx="10817352" cy="868680"/>
           </a:xfrm>
           <a:prstGeom prst="rect">
             <a:avLst/>
           </a:prstGeom>
           <a:solidFill>
-            <a:srgbClr val="1E2235"/>
+            <a:srgbClr val="F8FAFC"/>
           </a:solidFill>
-          <a:ln w="19050">
+          <a:ln w="12700">
             <a:solidFill>
-              <a:srgbClr val="3A405A"/>
+              <a:srgbClr val="DCE0E6"/>
             </a:solidFill>
           </a:ln>
         </p:spPr>
@@ -5202,13 +5309,13 @@
       </p:sp>
       <p:sp>
         <p:nvSpPr>
-          <p:cNvPr id="6" name="TextBox 5"/>
+          <p:cNvPr id="10" name="TextBox 9"/>
           <p:cNvSpPr txBox="1"/>
           <p:nvPr/>
         </p:nvSpPr>
         <p:spPr>
           <a:xfrm>
-            <a:off x="685800" y="1645920"/>
+            <a:off x="685800" y="3712464"/>
             <a:ext cx="10817352" cy="868680"/>
           </a:xfrm>
           <a:prstGeom prst="rect">
@@ -5225,13 +5332,13 @@
             <a:pPr>
               <a:defRPr sz="1300" b="1">
                 <a:solidFill>
-                  <a:srgbClr val="00E5FF"/>
-                </a:solidFill>
-                <a:latin typeface="Trebuchet MS"/>
+                  <a:srgbClr val="000000"/>
+                </a:solidFill>
+                <a:latin typeface="Georgia"/>
               </a:defRPr>
             </a:pPr>
             <a:r>
-              <a:t>PAGE 1: INDUSTRY OVERVIEW</a:t>
+              <a:t>PAGE 3: INVESTOR ANALYTICS</a:t>
             </a:r>
           </a:p>
           <a:p>
@@ -5241,37 +5348,37 @@
               </a:spcBef>
               <a:defRPr sz="950">
                 <a:solidFill>
-                  <a:srgbClr val="B0BEC5"/>
-                </a:solidFill>
-                <a:latin typeface="Segoe UI"/>
+                  <a:srgbClr val="334155"/>
+                </a:solidFill>
+                <a:latin typeface="Calibri"/>
               </a:defRPr>
             </a:pPr>
             <a:r>
-              <a:t>KPI cards showing total Industry AUM (₹24,850 Cr) and Active Folios (1.42M). Tracks monthly inflows and maps AMC market share concentration (HDFC vs. SBI) using a Treemap.</a:t>
-            </a:r>
-          </a:p>
-        </p:txBody>
-      </p:sp>
-      <p:sp>
-        <p:nvSpPr>
-          <p:cNvPr id="7" name="Rectangle 6"/>
+              <a:t>Includes an Indian geographical shape map showing investment totals, a transaction type distribution donut chart (SIP vs. Lumpsum vs. Redemption), and an age cohort column chart.</a:t>
+            </a:r>
+          </a:p>
+        </p:txBody>
+      </p:sp>
+      <p:sp>
+        <p:nvSpPr>
+          <p:cNvPr id="11" name="Rectangle 10"/>
           <p:cNvSpPr/>
           <p:nvPr/>
         </p:nvSpPr>
         <p:spPr>
           <a:xfrm>
-            <a:off x="685800" y="2679192"/>
+            <a:off x="685800" y="4745736"/>
             <a:ext cx="10817352" cy="868680"/>
           </a:xfrm>
           <a:prstGeom prst="rect">
             <a:avLst/>
           </a:prstGeom>
           <a:solidFill>
-            <a:srgbClr val="1E2235"/>
+            <a:srgbClr val="F8FAFC"/>
           </a:solidFill>
-          <a:ln w="19050">
+          <a:ln w="12700">
             <a:solidFill>
-              <a:srgbClr val="3A405A"/>
+              <a:srgbClr val="DCE0E6"/>
             </a:solidFill>
           </a:ln>
         </p:spPr>
@@ -5299,13 +5406,13 @@
       </p:sp>
       <p:sp>
         <p:nvSpPr>
-          <p:cNvPr id="8" name="TextBox 7"/>
+          <p:cNvPr id="12" name="TextBox 11"/>
           <p:cNvSpPr txBox="1"/>
           <p:nvPr/>
         </p:nvSpPr>
         <p:spPr>
           <a:xfrm>
-            <a:off x="685800" y="2679192"/>
+            <a:off x="685800" y="4745736"/>
             <a:ext cx="10817352" cy="868680"/>
           </a:xfrm>
           <a:prstGeom prst="rect">
@@ -5322,13 +5429,13 @@
             <a:pPr>
               <a:defRPr sz="1300" b="1">
                 <a:solidFill>
-                  <a:srgbClr val="00E676"/>
-                </a:solidFill>
-                <a:latin typeface="Trebuchet MS"/>
+                  <a:srgbClr val="000000"/>
+                </a:solidFill>
+                <a:latin typeface="Georgia"/>
               </a:defRPr>
             </a:pPr>
             <a:r>
-              <a:t>PAGE 2: FUND PERFORMANCE</a:t>
+              <a:t>PAGE 4: SIP &amp; MARKET TRENDS</a:t>
             </a:r>
           </a:p>
           <a:p>
@@ -5338,38 +5445,134 @@
               </a:spcBef>
               <a:defRPr sz="950">
                 <a:solidFill>
-                  <a:srgbClr val="B0BEC5"/>
-                </a:solidFill>
-                <a:latin typeface="Segoe UI"/>
+                  <a:srgbClr val="334155"/>
+                </a:solidFill>
+                <a:latin typeface="Calibri"/>
               </a:defRPr>
             </a:pPr>
             <a:r>
-              <a:t>Risk-Return scatter plot (X-axis = Beta, Y-axis = 3Y CAGR, Bubble size = AUM). Includes a dynamic line chart comparing scheme returns to the Nifty 100 benchmark (re-indexed to ₹100), and a scorecard leaderboard grid.</a:t>
-            </a:r>
-          </a:p>
-        </p:txBody>
-      </p:sp>
-      <p:sp>
-        <p:nvSpPr>
-          <p:cNvPr id="9" name="Rectangle 8"/>
+              <a:t>Dual-Y Axis line chart comparing monthly SIP inflows with the Nifty 50 close price, and a quarterly net inflow heatmap by fund category.</a:t>
+            </a:r>
+          </a:p>
+        </p:txBody>
+      </p:sp>
+    </p:spTree>
+  </p:cSld>
+  <p:clrMapOvr>
+    <a:masterClrMapping/>
+  </p:clrMapOvr>
+</p:sld>
+</file>
+
+<file path=ppt/slides/slide12.xml><?xml version="1.0" encoding="utf-8"?>
+<p:sld xmlns:a="http://schemas.openxmlformats.org/drawingml/2006/main" xmlns:p="http://schemas.openxmlformats.org/presentationml/2006/main" xmlns:r="http://schemas.openxmlformats.org/officeDocument/2006/relationships">
+  <p:cSld>
+    <p:bg>
+      <p:bgPr>
+        <a:solidFill>
+          <a:srgbClr val="FFFFFF"/>
+        </a:solidFill>
+        <a:effectLst/>
+      </p:bgPr>
+    </p:bg>
+    <p:spTree>
+      <p:nvGrpSpPr>
+        <p:cNvPr id="1" name=""/>
+        <p:cNvGrpSpPr/>
+        <p:nvPr/>
+      </p:nvGrpSpPr>
+      <p:grpSpPr/>
+      <p:sp>
+        <p:nvSpPr>
+          <p:cNvPr id="2" name="TextBox 1"/>
+          <p:cNvSpPr txBox="1"/>
+          <p:nvPr/>
+        </p:nvSpPr>
+        <p:spPr>
+          <a:xfrm>
+            <a:off x="685800" y="365760"/>
+            <a:ext cx="9144000" cy="274320"/>
+          </a:xfrm>
+          <a:prstGeom prst="rect">
+            <a:avLst/>
+          </a:prstGeom>
+          <a:noFill/>
+        </p:spPr>
+        <p:txBody>
+          <a:bodyPr wrap="square">
+            <a:spAutoFit/>
+          </a:bodyPr>
+          <a:lstStyle/>
+          <a:p>
+            <a:pPr>
+              <a:defRPr sz="850" b="1">
+                <a:solidFill>
+                  <a:srgbClr val="787878"/>
+                </a:solidFill>
+                <a:latin typeface="Calibri"/>
+              </a:defRPr>
+            </a:pPr>
+            <a:r>
+              <a:t>BLUESTOCK MUTUAL FUND ANALYTICS</a:t>
+            </a:r>
+          </a:p>
+        </p:txBody>
+      </p:sp>
+      <p:sp>
+        <p:nvSpPr>
+          <p:cNvPr id="3" name="TextBox 2"/>
+          <p:cNvSpPr txBox="1"/>
+          <p:nvPr/>
+        </p:nvSpPr>
+        <p:spPr>
+          <a:xfrm>
+            <a:off x="685800" y="502920"/>
+            <a:ext cx="10817352" cy="731520"/>
+          </a:xfrm>
+          <a:prstGeom prst="rect">
+            <a:avLst/>
+          </a:prstGeom>
+          <a:noFill/>
+        </p:spPr>
+        <p:txBody>
+          <a:bodyPr wrap="square">
+            <a:spAutoFit/>
+          </a:bodyPr>
+          <a:lstStyle/>
+          <a:p>
+            <a:pPr>
+              <a:defRPr sz="2600" b="1">
+                <a:solidFill>
+                  <a:srgbClr val="000000"/>
+                </a:solidFill>
+                <a:latin typeface="Georgia"/>
+              </a:defRPr>
+            </a:pPr>
+            <a:r>
+              <a:t>Strategic Recommendations &amp; Action Plan</a:t>
+            </a:r>
+          </a:p>
+        </p:txBody>
+      </p:sp>
+      <p:sp>
+        <p:nvSpPr>
+          <p:cNvPr id="4" name="Rectangle 3"/>
           <p:cNvSpPr/>
           <p:nvPr/>
         </p:nvSpPr>
         <p:spPr>
           <a:xfrm>
-            <a:off x="685800" y="3712464"/>
-            <a:ext cx="10817352" cy="868680"/>
+            <a:off x="685800" y="1188720"/>
+            <a:ext cx="10817352" cy="13716"/>
           </a:xfrm>
           <a:prstGeom prst="rect">
             <a:avLst/>
           </a:prstGeom>
           <a:solidFill>
-            <a:srgbClr val="1E2235"/>
+            <a:srgbClr val="D2D2D2"/>
           </a:solidFill>
-          <a:ln w="19050">
-            <a:solidFill>
-              <a:srgbClr val="3A405A"/>
-            </a:solidFill>
+          <a:ln>
+            <a:noFill/>
           </a:ln>
         </p:spPr>
         <p:style>
@@ -5396,76 +5599,24 @@
       </p:sp>
       <p:sp>
         <p:nvSpPr>
-          <p:cNvPr id="10" name="TextBox 9"/>
-          <p:cNvSpPr txBox="1"/>
-          <p:nvPr/>
-        </p:nvSpPr>
-        <p:spPr>
-          <a:xfrm>
-            <a:off x="685800" y="3712464"/>
-            <a:ext cx="10817352" cy="868680"/>
-          </a:xfrm>
-          <a:prstGeom prst="rect">
-            <a:avLst/>
-          </a:prstGeom>
-          <a:noFill/>
-        </p:spPr>
-        <p:txBody>
-          <a:bodyPr wrap="square" lIns="274320" rIns="274320" tIns="109728">
-            <a:spAutoFit/>
-          </a:bodyPr>
-          <a:lstStyle/>
-          <a:p>
-            <a:pPr>
-              <a:defRPr sz="1300" b="1">
-                <a:solidFill>
-                  <a:srgbClr val="00E5FF"/>
-                </a:solidFill>
-                <a:latin typeface="Trebuchet MS"/>
-              </a:defRPr>
-            </a:pPr>
-            <a:r>
-              <a:t>PAGE 3: INVESTOR ANALYTICS</a:t>
-            </a:r>
-          </a:p>
-          <a:p>
-            <a:pPr>
-              <a:spcBef>
-                <a:spcPts val="200"/>
-              </a:spcBef>
-              <a:defRPr sz="950">
-                <a:solidFill>
-                  <a:srgbClr val="B0BEC5"/>
-                </a:solidFill>
-                <a:latin typeface="Segoe UI"/>
-              </a:defRPr>
-            </a:pPr>
-            <a:r>
-              <a:t>Includes an Indian geographical shape map showing investment totals, a transaction type distribution donut chart (SIP vs. Lumpsum vs. Redemption), and an age cohort column chart.</a:t>
-            </a:r>
-          </a:p>
-        </p:txBody>
-      </p:sp>
-      <p:sp>
-        <p:nvSpPr>
-          <p:cNvPr id="11" name="Rectangle 10"/>
+          <p:cNvPr id="5" name="Rectangle 4"/>
           <p:cNvSpPr/>
           <p:nvPr/>
         </p:nvSpPr>
         <p:spPr>
           <a:xfrm>
-            <a:off x="685800" y="4745736"/>
-            <a:ext cx="10817352" cy="868680"/>
+            <a:off x="685800" y="1645920"/>
+            <a:ext cx="3364992" cy="4114800"/>
           </a:xfrm>
           <a:prstGeom prst="rect">
             <a:avLst/>
           </a:prstGeom>
           <a:solidFill>
-            <a:srgbClr val="1E2235"/>
+            <a:srgbClr val="F8FAFC"/>
           </a:solidFill>
-          <a:ln w="19050">
+          <a:ln w="12700">
             <a:solidFill>
-              <a:srgbClr val="3A405A"/>
+              <a:srgbClr val="DCE0E6"/>
             </a:solidFill>
           </a:ln>
         </p:spPr>
@@ -5493,14 +5644,14 @@
       </p:sp>
       <p:sp>
         <p:nvSpPr>
-          <p:cNvPr id="12" name="TextBox 11"/>
+          <p:cNvPr id="6" name="TextBox 5"/>
           <p:cNvSpPr txBox="1"/>
           <p:nvPr/>
         </p:nvSpPr>
         <p:spPr>
           <a:xfrm>
-            <a:off x="685800" y="4745736"/>
-            <a:ext cx="10817352" cy="868680"/>
+            <a:off x="685800" y="1645920"/>
+            <a:ext cx="3364992" cy="4114800"/>
           </a:xfrm>
           <a:prstGeom prst="rect">
             <a:avLst/>
@@ -5508,158 +5659,81 @@
           <a:noFill/>
         </p:spPr>
         <p:txBody>
-          <a:bodyPr wrap="square" lIns="274320" rIns="274320" tIns="109728">
+          <a:bodyPr wrap="square" lIns="228600" rIns="228600" tIns="228600">
             <a:spAutoFit/>
           </a:bodyPr>
           <a:lstStyle/>
           <a:p>
             <a:pPr>
-              <a:defRPr sz="1300" b="1">
-                <a:solidFill>
-                  <a:srgbClr val="00E676"/>
-                </a:solidFill>
-                <a:latin typeface="Trebuchet MS"/>
+              <a:defRPr sz="2800" b="1">
+                <a:solidFill>
+                  <a:srgbClr val="787878"/>
+                </a:solidFill>
+                <a:latin typeface="Georgia"/>
               </a:defRPr>
             </a:pPr>
             <a:r>
-              <a:t>PAGE 4: SIP &amp; MARKET TRENDS</a:t>
+              <a:t>01</a:t>
             </a:r>
           </a:p>
           <a:p>
             <a:pPr>
               <a:spcBef>
-                <a:spcPts val="200"/>
+                <a:spcPts val="1000"/>
               </a:spcBef>
-              <a:defRPr sz="950">
-                <a:solidFill>
-                  <a:srgbClr val="B0BEC5"/>
-                </a:solidFill>
-                <a:latin typeface="Segoe UI"/>
+              <a:spcAft>
+                <a:spcPts val="1200"/>
+              </a:spcAft>
+              <a:defRPr sz="1300" b="1">
+                <a:solidFill>
+                  <a:srgbClr val="000000"/>
+                </a:solidFill>
+                <a:latin typeface="Georgia"/>
               </a:defRPr>
             </a:pPr>
             <a:r>
-              <a:t>Dual-Y Axis line chart comparing monthly SIP inflows with the Nifty 50 close price, and a quarterly net inflow heatmap by fund category.</a:t>
-            </a:r>
-          </a:p>
-        </p:txBody>
-      </p:sp>
-    </p:spTree>
-  </p:cSld>
-  <p:clrMapOvr>
-    <a:masterClrMapping/>
-  </p:clrMapOvr>
-</p:sld>
-</file>
-
-<file path=ppt/slides/slide12.xml><?xml version="1.0" encoding="utf-8"?>
-<p:sld xmlns:a="http://schemas.openxmlformats.org/drawingml/2006/main" xmlns:p="http://schemas.openxmlformats.org/presentationml/2006/main" xmlns:r="http://schemas.openxmlformats.org/officeDocument/2006/relationships">
-  <p:cSld>
-    <p:bg>
-      <p:bgPr>
-        <a:solidFill>
-          <a:srgbClr val="0B0E14"/>
-        </a:solidFill>
-        <a:effectLst/>
-      </p:bgPr>
-    </p:bg>
-    <p:spTree>
-      <p:nvGrpSpPr>
-        <p:cNvPr id="1" name=""/>
-        <p:cNvGrpSpPr/>
-        <p:nvPr/>
-      </p:nvGrpSpPr>
-      <p:grpSpPr/>
-      <p:sp>
-        <p:nvSpPr>
-          <p:cNvPr id="2" name="TextBox 1"/>
-          <p:cNvSpPr txBox="1"/>
-          <p:nvPr/>
-        </p:nvSpPr>
-        <p:spPr>
-          <a:xfrm>
-            <a:off x="685800" y="365760"/>
-            <a:ext cx="9144000" cy="274320"/>
-          </a:xfrm>
-          <a:prstGeom prst="rect">
-            <a:avLst/>
-          </a:prstGeom>
-          <a:noFill/>
-        </p:spPr>
-        <p:txBody>
-          <a:bodyPr wrap="square">
-            <a:spAutoFit/>
-          </a:bodyPr>
-          <a:lstStyle/>
+              <a:t>SECTOR HHI CONCENTRATION LIMITS</a:t>
+            </a:r>
+          </a:p>
           <a:p>
             <a:pPr>
-              <a:defRPr sz="900" b="1">
-                <a:solidFill>
-                  <a:srgbClr val="00E5FF"/>
-                </a:solidFill>
-                <a:latin typeface="Trebuchet MS"/>
+              <a:lnSpc>
+                <a:spcPct val="125000"/>
+              </a:lnSpc>
+              <a:defRPr sz="1050">
+                <a:solidFill>
+                  <a:srgbClr val="334155"/>
+                </a:solidFill>
+                <a:latin typeface="Calibri"/>
               </a:defRPr>
             </a:pPr>
             <a:r>
-              <a:t>BLUESTOCK MUTUAL FUND ANALYTICS</a:t>
-            </a:r>
-          </a:p>
-        </p:txBody>
-      </p:sp>
-      <p:sp>
-        <p:nvSpPr>
-          <p:cNvPr id="3" name="TextBox 2"/>
-          <p:cNvSpPr txBox="1"/>
-          <p:nvPr/>
-        </p:nvSpPr>
-        <p:spPr>
-          <a:xfrm>
-            <a:off x="685800" y="594360"/>
-            <a:ext cx="10817352" cy="731520"/>
-          </a:xfrm>
-          <a:prstGeom prst="rect">
-            <a:avLst/>
-          </a:prstGeom>
-          <a:noFill/>
-        </p:spPr>
-        <p:txBody>
-          <a:bodyPr wrap="square">
-            <a:spAutoFit/>
-          </a:bodyPr>
-          <a:lstStyle/>
-          <a:p>
-            <a:pPr>
-              <a:defRPr sz="2800" b="1">
-                <a:solidFill>
-                  <a:srgbClr val="FFFFFF"/>
-                </a:solidFill>
-                <a:latin typeface="Trebuchet MS"/>
-              </a:defRPr>
-            </a:pPr>
-            <a:r>
-              <a:t>Strategic Recommendations &amp; Action Plan</a:t>
-            </a:r>
-          </a:p>
-        </p:txBody>
-      </p:sp>
-      <p:sp>
-        <p:nvSpPr>
-          <p:cNvPr id="4" name="Rectangle 3"/>
+              <a:t>Implement hard advisory guardrails. When a client's composite portfolio sector HHI exceeds 2,500, trigger automated rebalancing alerts to mitigate severe tail-risk losses associated with concentrated sector exposures.</a:t>
+            </a:r>
+          </a:p>
+        </p:txBody>
+      </p:sp>
+      <p:sp>
+        <p:nvSpPr>
+          <p:cNvPr id="7" name="Rectangle 6"/>
           <p:cNvSpPr/>
           <p:nvPr/>
         </p:nvSpPr>
         <p:spPr>
           <a:xfrm>
-            <a:off x="685800" y="1280160"/>
-            <a:ext cx="10817352" cy="18288"/>
+            <a:off x="4407408" y="1645920"/>
+            <a:ext cx="3364992" cy="4114800"/>
           </a:xfrm>
           <a:prstGeom prst="rect">
             <a:avLst/>
           </a:prstGeom>
           <a:solidFill>
-            <a:srgbClr val="1E2235"/>
+            <a:srgbClr val="F8FAFC"/>
           </a:solidFill>
-          <a:ln>
-            <a:noFill/>
+          <a:ln w="12700">
+            <a:solidFill>
+              <a:srgbClr val="DCE0E6"/>
+            </a:solidFill>
           </a:ln>
         </p:spPr>
         <p:style>
@@ -5686,24 +5760,95 @@
       </p:sp>
       <p:sp>
         <p:nvSpPr>
-          <p:cNvPr id="5" name="Rectangle 4"/>
+          <p:cNvPr id="8" name="TextBox 7"/>
+          <p:cNvSpPr txBox="1"/>
+          <p:nvPr/>
+        </p:nvSpPr>
+        <p:spPr>
+          <a:xfrm>
+            <a:off x="4407408" y="1645920"/>
+            <a:ext cx="3364992" cy="4114800"/>
+          </a:xfrm>
+          <a:prstGeom prst="rect">
+            <a:avLst/>
+          </a:prstGeom>
+          <a:noFill/>
+        </p:spPr>
+        <p:txBody>
+          <a:bodyPr wrap="square" lIns="228600" rIns="228600" tIns="228600">
+            <a:spAutoFit/>
+          </a:bodyPr>
+          <a:lstStyle/>
+          <a:p>
+            <a:pPr>
+              <a:defRPr sz="2800" b="1">
+                <a:solidFill>
+                  <a:srgbClr val="787878"/>
+                </a:solidFill>
+                <a:latin typeface="Georgia"/>
+              </a:defRPr>
+            </a:pPr>
+            <a:r>
+              <a:t>02</a:t>
+            </a:r>
+          </a:p>
+          <a:p>
+            <a:pPr>
+              <a:spcBef>
+                <a:spcPts val="1000"/>
+              </a:spcBef>
+              <a:spcAft>
+                <a:spcPts val="1200"/>
+              </a:spcAft>
+              <a:defRPr sz="1300" b="1">
+                <a:solidFill>
+                  <a:srgbClr val="000000"/>
+                </a:solidFill>
+                <a:latin typeface="Georgia"/>
+              </a:defRPr>
+            </a:pPr>
+            <a:r>
+              <a:t>SYSTEMATIC PRODUCTS RETENTION</a:t>
+            </a:r>
+          </a:p>
+          <a:p>
+            <a:pPr>
+              <a:lnSpc>
+                <a:spcPct val="125000"/>
+              </a:lnSpc>
+              <a:defRPr sz="1050">
+                <a:solidFill>
+                  <a:srgbClr val="334155"/>
+                </a:solidFill>
+                <a:latin typeface="Calibri"/>
+              </a:defRPr>
+            </a:pPr>
+            <a:r>
+              <a:t>Focus marketing spend on systematic investment plans (SIPs), which show an 87.2% continuity rate. Configure automated retention emails when a retail client misses their second expected monthly payment.</a:t>
+            </a:r>
+          </a:p>
+        </p:txBody>
+      </p:sp>
+      <p:sp>
+        <p:nvSpPr>
+          <p:cNvPr id="9" name="Rectangle 8"/>
           <p:cNvSpPr/>
           <p:nvPr/>
         </p:nvSpPr>
         <p:spPr>
           <a:xfrm>
-            <a:off x="685800" y="1645920"/>
+            <a:off x="8129016" y="1645920"/>
             <a:ext cx="3364992" cy="4114800"/>
           </a:xfrm>
           <a:prstGeom prst="rect">
             <a:avLst/>
           </a:prstGeom>
           <a:solidFill>
-            <a:srgbClr val="1E2235"/>
+            <a:srgbClr val="F8FAFC"/>
           </a:solidFill>
-          <a:ln w="19050">
+          <a:ln w="12700">
             <a:solidFill>
-              <a:srgbClr val="3A405A"/>
+              <a:srgbClr val="DCE0E6"/>
             </a:solidFill>
           </a:ln>
         </p:spPr>
@@ -5731,13 +5876,13 @@
       </p:sp>
       <p:sp>
         <p:nvSpPr>
-          <p:cNvPr id="6" name="TextBox 5"/>
+          <p:cNvPr id="10" name="TextBox 9"/>
           <p:cNvSpPr txBox="1"/>
           <p:nvPr/>
         </p:nvSpPr>
         <p:spPr>
           <a:xfrm>
-            <a:off x="685800" y="1645920"/>
+            <a:off x="8129016" y="1645920"/>
             <a:ext cx="3364992" cy="4114800"/>
           </a:xfrm>
           <a:prstGeom prst="rect">
@@ -5754,13 +5899,13 @@
             <a:pPr>
               <a:defRPr sz="2800" b="1">
                 <a:solidFill>
-                  <a:srgbClr val="00E5FF"/>
-                </a:solidFill>
-                <a:latin typeface="Trebuchet MS"/>
+                  <a:srgbClr val="787878"/>
+                </a:solidFill>
+                <a:latin typeface="Georgia"/>
               </a:defRPr>
             </a:pPr>
             <a:r>
-              <a:t>01</a:t>
+              <a:t>03</a:t>
             </a:r>
           </a:p>
           <a:p>
@@ -5773,13 +5918,13 @@
               </a:spcAft>
               <a:defRPr sz="1300" b="1">
                 <a:solidFill>
-                  <a:srgbClr val="FFFFFF"/>
-                </a:solidFill>
-                <a:latin typeface="Trebuchet MS"/>
+                  <a:srgbClr val="000000"/>
+                </a:solidFill>
+                <a:latin typeface="Georgia"/>
               </a:defRPr>
             </a:pPr>
             <a:r>
-              <a:t>SECTOR HHI CONCENTRATION LIMITS</a:t>
+              <a:t>LARGE CAP PORTFOLIO ANCHORING</a:t>
             </a:r>
           </a:p>
           <a:p>
@@ -5789,38 +5934,134 @@
               </a:lnSpc>
               <a:defRPr sz="1050">
                 <a:solidFill>
-                  <a:srgbClr val="B0BEC5"/>
-                </a:solidFill>
-                <a:latin typeface="Segoe UI"/>
+                  <a:srgbClr val="334155"/>
+                </a:solidFill>
+                <a:latin typeface="Calibri"/>
               </a:defRPr>
             </a:pPr>
             <a:r>
-              <a:t>Implement hard advisory guardrails. When a client's composite portfolio sector HHI exceeds 2,500, trigger automated rebalancing alerts to mitigate severe tail-risk losses associated with concentrated sector exposures.</a:t>
-            </a:r>
-          </a:p>
-        </p:txBody>
-      </p:sp>
-      <p:sp>
-        <p:nvSpPr>
-          <p:cNvPr id="7" name="Rectangle 6"/>
+              <a:t>For conservative retail portfolios, anchor client allocations with at least a 60% weight in diversified Large Cap funds. This buffers drawdowns and maintains peak-to-trough losses above the -20% threshold.</a:t>
+            </a:r>
+          </a:p>
+        </p:txBody>
+      </p:sp>
+    </p:spTree>
+  </p:cSld>
+  <p:clrMapOvr>
+    <a:masterClrMapping/>
+  </p:clrMapOvr>
+</p:sld>
+</file>
+
+<file path=ppt/slides/slide2.xml><?xml version="1.0" encoding="utf-8"?>
+<p:sld xmlns:a="http://schemas.openxmlformats.org/drawingml/2006/main" xmlns:p="http://schemas.openxmlformats.org/presentationml/2006/main" xmlns:r="http://schemas.openxmlformats.org/officeDocument/2006/relationships">
+  <p:cSld>
+    <p:bg>
+      <p:bgPr>
+        <a:solidFill>
+          <a:srgbClr val="FFFFFF"/>
+        </a:solidFill>
+        <a:effectLst/>
+      </p:bgPr>
+    </p:bg>
+    <p:spTree>
+      <p:nvGrpSpPr>
+        <p:cNvPr id="1" name=""/>
+        <p:cNvGrpSpPr/>
+        <p:nvPr/>
+      </p:nvGrpSpPr>
+      <p:grpSpPr/>
+      <p:sp>
+        <p:nvSpPr>
+          <p:cNvPr id="2" name="TextBox 1"/>
+          <p:cNvSpPr txBox="1"/>
+          <p:nvPr/>
+        </p:nvSpPr>
+        <p:spPr>
+          <a:xfrm>
+            <a:off x="685800" y="365760"/>
+            <a:ext cx="9144000" cy="274320"/>
+          </a:xfrm>
+          <a:prstGeom prst="rect">
+            <a:avLst/>
+          </a:prstGeom>
+          <a:noFill/>
+        </p:spPr>
+        <p:txBody>
+          <a:bodyPr wrap="square">
+            <a:spAutoFit/>
+          </a:bodyPr>
+          <a:lstStyle/>
+          <a:p>
+            <a:pPr>
+              <a:defRPr sz="850" b="1">
+                <a:solidFill>
+                  <a:srgbClr val="787878"/>
+                </a:solidFill>
+                <a:latin typeface="Calibri"/>
+              </a:defRPr>
+            </a:pPr>
+            <a:r>
+              <a:t>BLUESTOCK MUTUAL FUND ANALYTICS</a:t>
+            </a:r>
+          </a:p>
+        </p:txBody>
+      </p:sp>
+      <p:sp>
+        <p:nvSpPr>
+          <p:cNvPr id="3" name="TextBox 2"/>
+          <p:cNvSpPr txBox="1"/>
+          <p:nvPr/>
+        </p:nvSpPr>
+        <p:spPr>
+          <a:xfrm>
+            <a:off x="685800" y="502920"/>
+            <a:ext cx="10817352" cy="731520"/>
+          </a:xfrm>
+          <a:prstGeom prst="rect">
+            <a:avLst/>
+          </a:prstGeom>
+          <a:noFill/>
+        </p:spPr>
+        <p:txBody>
+          <a:bodyPr wrap="square">
+            <a:spAutoFit/>
+          </a:bodyPr>
+          <a:lstStyle/>
+          <a:p>
+            <a:pPr>
+              <a:defRPr sz="2600" b="1">
+                <a:solidFill>
+                  <a:srgbClr val="000000"/>
+                </a:solidFill>
+                <a:latin typeface="Georgia"/>
+              </a:defRPr>
+            </a:pPr>
+            <a:r>
+              <a:t>The Problem: Data Fragmentation &amp; Risk Uncertainty</a:t>
+            </a:r>
+          </a:p>
+        </p:txBody>
+      </p:sp>
+      <p:sp>
+        <p:nvSpPr>
+          <p:cNvPr id="4" name="Rectangle 3"/>
           <p:cNvSpPr/>
           <p:nvPr/>
         </p:nvSpPr>
         <p:spPr>
           <a:xfrm>
-            <a:off x="4407408" y="1645920"/>
-            <a:ext cx="3364992" cy="4114800"/>
+            <a:off x="685800" y="1188720"/>
+            <a:ext cx="10817352" cy="13716"/>
           </a:xfrm>
           <a:prstGeom prst="rect">
             <a:avLst/>
           </a:prstGeom>
           <a:solidFill>
-            <a:srgbClr val="1E2235"/>
+            <a:srgbClr val="D2D2D2"/>
           </a:solidFill>
-          <a:ln w="19050">
-            <a:solidFill>
-              <a:srgbClr val="3A405A"/>
-            </a:solidFill>
+          <a:ln>
+            <a:noFill/>
           </a:ln>
         </p:spPr>
         <p:style>
@@ -5847,95 +6088,24 @@
       </p:sp>
       <p:sp>
         <p:nvSpPr>
-          <p:cNvPr id="8" name="TextBox 7"/>
-          <p:cNvSpPr txBox="1"/>
-          <p:nvPr/>
-        </p:nvSpPr>
-        <p:spPr>
-          <a:xfrm>
-            <a:off x="4407408" y="1645920"/>
-            <a:ext cx="3364992" cy="4114800"/>
-          </a:xfrm>
-          <a:prstGeom prst="rect">
-            <a:avLst/>
-          </a:prstGeom>
-          <a:noFill/>
-        </p:spPr>
-        <p:txBody>
-          <a:bodyPr wrap="square" lIns="228600" rIns="228600" tIns="228600">
-            <a:spAutoFit/>
-          </a:bodyPr>
-          <a:lstStyle/>
-          <a:p>
-            <a:pPr>
-              <a:defRPr sz="2800" b="1">
-                <a:solidFill>
-                  <a:srgbClr val="00E5FF"/>
-                </a:solidFill>
-                <a:latin typeface="Trebuchet MS"/>
-              </a:defRPr>
-            </a:pPr>
-            <a:r>
-              <a:t>02</a:t>
-            </a:r>
-          </a:p>
-          <a:p>
-            <a:pPr>
-              <a:spcBef>
-                <a:spcPts val="1000"/>
-              </a:spcBef>
-              <a:spcAft>
-                <a:spcPts val="1200"/>
-              </a:spcAft>
-              <a:defRPr sz="1300" b="1">
-                <a:solidFill>
-                  <a:srgbClr val="FFFFFF"/>
-                </a:solidFill>
-                <a:latin typeface="Trebuchet MS"/>
-              </a:defRPr>
-            </a:pPr>
-            <a:r>
-              <a:t>SYSTEMATIC PRODUCTS RETENTION</a:t>
-            </a:r>
-          </a:p>
-          <a:p>
-            <a:pPr>
-              <a:lnSpc>
-                <a:spcPct val="125000"/>
-              </a:lnSpc>
-              <a:defRPr sz="1050">
-                <a:solidFill>
-                  <a:srgbClr val="B0BEC5"/>
-                </a:solidFill>
-                <a:latin typeface="Segoe UI"/>
-              </a:defRPr>
-            </a:pPr>
-            <a:r>
-              <a:t>Focus marketing spend on systematic investment plans (SIPs), which show an 87.2% continuity rate. Configure automated retention emails when a retail client misses their second expected monthly payment.</a:t>
-            </a:r>
-          </a:p>
-        </p:txBody>
-      </p:sp>
-      <p:sp>
-        <p:nvSpPr>
-          <p:cNvPr id="9" name="Rectangle 8"/>
+          <p:cNvPr id="5" name="Rectangle 4"/>
           <p:cNvSpPr/>
           <p:nvPr/>
         </p:nvSpPr>
         <p:spPr>
           <a:xfrm>
-            <a:off x="8129016" y="1645920"/>
+            <a:off x="685800" y="1645920"/>
             <a:ext cx="3364992" cy="4114800"/>
           </a:xfrm>
           <a:prstGeom prst="rect">
             <a:avLst/>
           </a:prstGeom>
           <a:solidFill>
-            <a:srgbClr val="1E2235"/>
+            <a:srgbClr val="F8FAFC"/>
           </a:solidFill>
-          <a:ln w="19050">
+          <a:ln w="12700">
             <a:solidFill>
-              <a:srgbClr val="3A405A"/>
+              <a:srgbClr val="DCE0E6"/>
             </a:solidFill>
           </a:ln>
         </p:spPr>
@@ -5963,13 +6133,13 @@
       </p:sp>
       <p:sp>
         <p:nvSpPr>
-          <p:cNvPr id="10" name="TextBox 9"/>
+          <p:cNvPr id="6" name="TextBox 5"/>
           <p:cNvSpPr txBox="1"/>
           <p:nvPr/>
         </p:nvSpPr>
         <p:spPr>
           <a:xfrm>
-            <a:off x="8129016" y="1645920"/>
+            <a:off x="685800" y="1645920"/>
             <a:ext cx="3364992" cy="4114800"/>
           </a:xfrm>
           <a:prstGeom prst="rect">
@@ -5986,13 +6156,13 @@
             <a:pPr>
               <a:defRPr sz="2800" b="1">
                 <a:solidFill>
-                  <a:srgbClr val="00E5FF"/>
-                </a:solidFill>
-                <a:latin typeface="Trebuchet MS"/>
+                  <a:srgbClr val="787878"/>
+                </a:solidFill>
+                <a:latin typeface="Georgia"/>
               </a:defRPr>
             </a:pPr>
             <a:r>
-              <a:t>03</a:t>
+              <a:t>01</a:t>
             </a:r>
           </a:p>
           <a:p>
@@ -6005,13 +6175,13 @@
               </a:spcAft>
               <a:defRPr sz="1300" b="1">
                 <a:solidFill>
-                  <a:srgbClr val="FFFFFF"/>
-                </a:solidFill>
-                <a:latin typeface="Trebuchet MS"/>
+                  <a:srgbClr val="000000"/>
+                </a:solidFill>
+                <a:latin typeface="Georgia"/>
               </a:defRPr>
             </a:pPr>
             <a:r>
-              <a:t>LARGE CAP PORTFOLIO ANCHORING</a:t>
+              <a:t>DATA FRAGMENTATION</a:t>
             </a:r>
           </a:p>
           <a:p>
@@ -6021,134 +6191,38 @@
               </a:lnSpc>
               <a:defRPr sz="1050">
                 <a:solidFill>
-                  <a:srgbClr val="B0BEC5"/>
-                </a:solidFill>
-                <a:latin typeface="Segoe UI"/>
+                  <a:srgbClr val="334155"/>
+                </a:solidFill>
+                <a:latin typeface="Calibri"/>
               </a:defRPr>
             </a:pPr>
             <a:r>
-              <a:t>For conservative retail portfolios, anchor client allocations with at least a 60% weight in diversified Large Cap funds. This buffers drawdowns and maintains peak-to-trough losses above the -20% threshold.</a:t>
-            </a:r>
-          </a:p>
-        </p:txBody>
-      </p:sp>
-    </p:spTree>
-  </p:cSld>
-  <p:clrMapOvr>
-    <a:masterClrMapping/>
-  </p:clrMapOvr>
-</p:sld>
-</file>
-
-<file path=ppt/slides/slide2.xml><?xml version="1.0" encoding="utf-8"?>
-<p:sld xmlns:a="http://schemas.openxmlformats.org/drawingml/2006/main" xmlns:p="http://schemas.openxmlformats.org/presentationml/2006/main" xmlns:r="http://schemas.openxmlformats.org/officeDocument/2006/relationships">
-  <p:cSld>
-    <p:bg>
-      <p:bgPr>
-        <a:solidFill>
-          <a:srgbClr val="0B0E14"/>
-        </a:solidFill>
-        <a:effectLst/>
-      </p:bgPr>
-    </p:bg>
-    <p:spTree>
-      <p:nvGrpSpPr>
-        <p:cNvPr id="1" name=""/>
-        <p:cNvGrpSpPr/>
-        <p:nvPr/>
-      </p:nvGrpSpPr>
-      <p:grpSpPr/>
-      <p:sp>
-        <p:nvSpPr>
-          <p:cNvPr id="2" name="TextBox 1"/>
-          <p:cNvSpPr txBox="1"/>
-          <p:nvPr/>
-        </p:nvSpPr>
-        <p:spPr>
-          <a:xfrm>
-            <a:off x="685800" y="365760"/>
-            <a:ext cx="9144000" cy="274320"/>
-          </a:xfrm>
-          <a:prstGeom prst="rect">
-            <a:avLst/>
-          </a:prstGeom>
-          <a:noFill/>
-        </p:spPr>
-        <p:txBody>
-          <a:bodyPr wrap="square">
-            <a:spAutoFit/>
-          </a:bodyPr>
-          <a:lstStyle/>
-          <a:p>
-            <a:pPr>
-              <a:defRPr sz="900" b="1">
-                <a:solidFill>
-                  <a:srgbClr val="00E5FF"/>
-                </a:solidFill>
-                <a:latin typeface="Trebuchet MS"/>
-              </a:defRPr>
-            </a:pPr>
-            <a:r>
-              <a:t>BLUESTOCK MUTUAL FUND ANALYTICS</a:t>
-            </a:r>
-          </a:p>
-        </p:txBody>
-      </p:sp>
-      <p:sp>
-        <p:nvSpPr>
-          <p:cNvPr id="3" name="TextBox 2"/>
-          <p:cNvSpPr txBox="1"/>
-          <p:nvPr/>
-        </p:nvSpPr>
-        <p:spPr>
-          <a:xfrm>
-            <a:off x="685800" y="594360"/>
-            <a:ext cx="10817352" cy="731520"/>
-          </a:xfrm>
-          <a:prstGeom prst="rect">
-            <a:avLst/>
-          </a:prstGeom>
-          <a:noFill/>
-        </p:spPr>
-        <p:txBody>
-          <a:bodyPr wrap="square">
-            <a:spAutoFit/>
-          </a:bodyPr>
-          <a:lstStyle/>
-          <a:p>
-            <a:pPr>
-              <a:defRPr sz="2800" b="1">
-                <a:solidFill>
-                  <a:srgbClr val="FFFFFF"/>
-                </a:solidFill>
-                <a:latin typeface="Trebuchet MS"/>
-              </a:defRPr>
-            </a:pPr>
-            <a:r>
-              <a:t>The Problem: Data Fragmentation &amp; Risk Uncertainty</a:t>
-            </a:r>
-          </a:p>
-        </p:txBody>
-      </p:sp>
-      <p:sp>
-        <p:nvSpPr>
-          <p:cNvPr id="4" name="Rectangle 3"/>
+              <a:t>Financial advisors manage data spread across scattered daily NAV files, raw client buy/sell transactions, and benchmark indices. The lack of a single unified data source limits rapid performance reporting.</a:t>
+            </a:r>
+          </a:p>
+        </p:txBody>
+      </p:sp>
+      <p:sp>
+        <p:nvSpPr>
+          <p:cNvPr id="7" name="Rectangle 6"/>
           <p:cNvSpPr/>
           <p:nvPr/>
         </p:nvSpPr>
         <p:spPr>
           <a:xfrm>
-            <a:off x="685800" y="1280160"/>
-            <a:ext cx="10817352" cy="18288"/>
+            <a:off x="4407408" y="1645920"/>
+            <a:ext cx="3364992" cy="4114800"/>
           </a:xfrm>
           <a:prstGeom prst="rect">
             <a:avLst/>
           </a:prstGeom>
           <a:solidFill>
-            <a:srgbClr val="1E2235"/>
+            <a:srgbClr val="F8FAFC"/>
           </a:solidFill>
-          <a:ln>
-            <a:noFill/>
+          <a:ln w="12700">
+            <a:solidFill>
+              <a:srgbClr val="DCE0E6"/>
+            </a:solidFill>
           </a:ln>
         </p:spPr>
         <p:style>
@@ -6175,24 +6249,95 @@
       </p:sp>
       <p:sp>
         <p:nvSpPr>
-          <p:cNvPr id="5" name="Rectangle 4"/>
+          <p:cNvPr id="8" name="TextBox 7"/>
+          <p:cNvSpPr txBox="1"/>
+          <p:nvPr/>
+        </p:nvSpPr>
+        <p:spPr>
+          <a:xfrm>
+            <a:off x="4407408" y="1645920"/>
+            <a:ext cx="3364992" cy="4114800"/>
+          </a:xfrm>
+          <a:prstGeom prst="rect">
+            <a:avLst/>
+          </a:prstGeom>
+          <a:noFill/>
+        </p:spPr>
+        <p:txBody>
+          <a:bodyPr wrap="square" lIns="228600" rIns="228600" tIns="228600">
+            <a:spAutoFit/>
+          </a:bodyPr>
+          <a:lstStyle/>
+          <a:p>
+            <a:pPr>
+              <a:defRPr sz="2800" b="1">
+                <a:solidFill>
+                  <a:srgbClr val="787878"/>
+                </a:solidFill>
+                <a:latin typeface="Georgia"/>
+              </a:defRPr>
+            </a:pPr>
+            <a:r>
+              <a:t>02</a:t>
+            </a:r>
+          </a:p>
+          <a:p>
+            <a:pPr>
+              <a:spcBef>
+                <a:spcPts val="1000"/>
+              </a:spcBef>
+              <a:spcAft>
+                <a:spcPts val="1200"/>
+              </a:spcAft>
+              <a:defRPr sz="1300" b="1">
+                <a:solidFill>
+                  <a:srgbClr val="000000"/>
+                </a:solidFill>
+                <a:latin typeface="Georgia"/>
+              </a:defRPr>
+            </a:pPr>
+            <a:r>
+              <a:t>REPORTING &amp; ANALYTICAL LAGS</a:t>
+            </a:r>
+          </a:p>
+          <a:p>
+            <a:pPr>
+              <a:lnSpc>
+                <a:spcPct val="125000"/>
+              </a:lnSpc>
+              <a:defRPr sz="1050">
+                <a:solidFill>
+                  <a:srgbClr val="334155"/>
+                </a:solidFill>
+                <a:latin typeface="Calibri"/>
+              </a:defRPr>
+            </a:pPr>
+            <a:r>
+              <a:t>Standard quarterly reports fail to calculate risk metrics in real-time. Manually evaluating portfolio drawdowns or calculating alpha/beta figures takes hours and delays critical rebalancing advice.</a:t>
+            </a:r>
+          </a:p>
+        </p:txBody>
+      </p:sp>
+      <p:sp>
+        <p:nvSpPr>
+          <p:cNvPr id="9" name="Rectangle 8"/>
           <p:cNvSpPr/>
           <p:nvPr/>
         </p:nvSpPr>
         <p:spPr>
           <a:xfrm>
-            <a:off x="685800" y="1645920"/>
+            <a:off x="8129016" y="1645920"/>
             <a:ext cx="3364992" cy="4114800"/>
           </a:xfrm>
           <a:prstGeom prst="rect">
             <a:avLst/>
           </a:prstGeom>
           <a:solidFill>
-            <a:srgbClr val="1E2235"/>
+            <a:srgbClr val="F8FAFC"/>
           </a:solidFill>
-          <a:ln w="19050">
+          <a:ln w="12700">
             <a:solidFill>
-              <a:srgbClr val="3A405A"/>
+              <a:srgbClr val="DCE0E6"/>
             </a:solidFill>
           </a:ln>
         </p:spPr>
@@ -6220,13 +6365,13 @@
       </p:sp>
       <p:sp>
         <p:nvSpPr>
-          <p:cNvPr id="6" name="TextBox 5"/>
+          <p:cNvPr id="10" name="TextBox 9"/>
           <p:cNvSpPr txBox="1"/>
           <p:nvPr/>
         </p:nvSpPr>
         <p:spPr>
           <a:xfrm>
-            <a:off x="685800" y="1645920"/>
+            <a:off x="8129016" y="1645920"/>
             <a:ext cx="3364992" cy="4114800"/>
           </a:xfrm>
           <a:prstGeom prst="rect">
@@ -6243,13 +6388,13 @@
             <a:pPr>
               <a:defRPr sz="2800" b="1">
                 <a:solidFill>
-                  <a:srgbClr val="00E5FF"/>
-                </a:solidFill>
-                <a:latin typeface="Trebuchet MS"/>
+                  <a:srgbClr val="787878"/>
+                </a:solidFill>
+                <a:latin typeface="Georgia"/>
               </a:defRPr>
             </a:pPr>
             <a:r>
-              <a:t>01</a:t>
+              <a:t>03</a:t>
             </a:r>
           </a:p>
           <a:p>
@@ -6262,13 +6407,13 @@
               </a:spcAft>
               <a:defRPr sz="1300" b="1">
                 <a:solidFill>
-                  <a:srgbClr val="FFFFFF"/>
-                </a:solidFill>
-                <a:latin typeface="Trebuchet MS"/>
+                  <a:srgbClr val="000000"/>
+                </a:solidFill>
+                <a:latin typeface="Georgia"/>
               </a:defRPr>
             </a:pPr>
             <a:r>
-              <a:t>DATA FRAGMENTATION</a:t>
+              <a:t>UNMANAGED SECTOR TAIL RISK</a:t>
             </a:r>
           </a:p>
           <a:p>
@@ -6278,38 +6423,134 @@
               </a:lnSpc>
               <a:defRPr sz="1050">
                 <a:solidFill>
-                  <a:srgbClr val="B0BEC5"/>
-                </a:solidFill>
-                <a:latin typeface="Segoe UI"/>
+                  <a:srgbClr val="334155"/>
+                </a:solidFill>
+                <a:latin typeface="Calibri"/>
               </a:defRPr>
             </a:pPr>
             <a:r>
-              <a:t>Financial advisors manage data spread across scattered daily NAV files, raw client buy/sell transactions, and benchmark indices. The lack of a single unified data source limits rapid performance reporting.</a:t>
-            </a:r>
-          </a:p>
-        </p:txBody>
-      </p:sp>
-      <p:sp>
-        <p:nvSpPr>
-          <p:cNvPr id="7" name="Rectangle 6"/>
+              <a:t>Advisors recommend sectoral or specialty funds (e.g. technology funds) based on recent returns without quantifying underlying concentration (HHI) or daily expected tail losses (VaR/CVaR) during market drawdowns.</a:t>
+            </a:r>
+          </a:p>
+        </p:txBody>
+      </p:sp>
+    </p:spTree>
+  </p:cSld>
+  <p:clrMapOvr>
+    <a:masterClrMapping/>
+  </p:clrMapOvr>
+</p:sld>
+</file>
+
+<file path=ppt/slides/slide3.xml><?xml version="1.0" encoding="utf-8"?>
+<p:sld xmlns:a="http://schemas.openxmlformats.org/drawingml/2006/main" xmlns:p="http://schemas.openxmlformats.org/presentationml/2006/main" xmlns:r="http://schemas.openxmlformats.org/officeDocument/2006/relationships">
+  <p:cSld>
+    <p:bg>
+      <p:bgPr>
+        <a:solidFill>
+          <a:srgbClr val="FFFFFF"/>
+        </a:solidFill>
+        <a:effectLst/>
+      </p:bgPr>
+    </p:bg>
+    <p:spTree>
+      <p:nvGrpSpPr>
+        <p:cNvPr id="1" name=""/>
+        <p:cNvGrpSpPr/>
+        <p:nvPr/>
+      </p:nvGrpSpPr>
+      <p:grpSpPr/>
+      <p:sp>
+        <p:nvSpPr>
+          <p:cNvPr id="2" name="TextBox 1"/>
+          <p:cNvSpPr txBox="1"/>
+          <p:nvPr/>
+        </p:nvSpPr>
+        <p:spPr>
+          <a:xfrm>
+            <a:off x="685800" y="365760"/>
+            <a:ext cx="9144000" cy="274320"/>
+          </a:xfrm>
+          <a:prstGeom prst="rect">
+            <a:avLst/>
+          </a:prstGeom>
+          <a:noFill/>
+        </p:spPr>
+        <p:txBody>
+          <a:bodyPr wrap="square">
+            <a:spAutoFit/>
+          </a:bodyPr>
+          <a:lstStyle/>
+          <a:p>
+            <a:pPr>
+              <a:defRPr sz="850" b="1">
+                <a:solidFill>
+                  <a:srgbClr val="787878"/>
+                </a:solidFill>
+                <a:latin typeface="Calibri"/>
+              </a:defRPr>
+            </a:pPr>
+            <a:r>
+              <a:t>BLUESTOCK MUTUAL FUND ANALYTICS</a:t>
+            </a:r>
+          </a:p>
+        </p:txBody>
+      </p:sp>
+      <p:sp>
+        <p:nvSpPr>
+          <p:cNvPr id="3" name="TextBox 2"/>
+          <p:cNvSpPr txBox="1"/>
+          <p:nvPr/>
+        </p:nvSpPr>
+        <p:spPr>
+          <a:xfrm>
+            <a:off x="685800" y="502920"/>
+            <a:ext cx="10817352" cy="731520"/>
+          </a:xfrm>
+          <a:prstGeom prst="rect">
+            <a:avLst/>
+          </a:prstGeom>
+          <a:noFill/>
+        </p:spPr>
+        <p:txBody>
+          <a:bodyPr wrap="square">
+            <a:spAutoFit/>
+          </a:bodyPr>
+          <a:lstStyle/>
+          <a:p>
+            <a:pPr>
+              <a:defRPr sz="2600" b="1">
+                <a:solidFill>
+                  <a:srgbClr val="000000"/>
+                </a:solidFill>
+                <a:latin typeface="Georgia"/>
+              </a:defRPr>
+            </a:pPr>
+            <a:r>
+              <a:t>Unified Integration: The Ingested Platform Inputs</a:t>
+            </a:r>
+          </a:p>
+        </p:txBody>
+      </p:sp>
+      <p:sp>
+        <p:nvSpPr>
+          <p:cNvPr id="4" name="Rectangle 3"/>
           <p:cNvSpPr/>
           <p:nvPr/>
         </p:nvSpPr>
         <p:spPr>
           <a:xfrm>
-            <a:off x="4407408" y="1645920"/>
-            <a:ext cx="3364992" cy="4114800"/>
+            <a:off x="685800" y="1188720"/>
+            <a:ext cx="10817352" cy="13716"/>
           </a:xfrm>
           <a:prstGeom prst="rect">
             <a:avLst/>
           </a:prstGeom>
           <a:solidFill>
-            <a:srgbClr val="1E2235"/>
+            <a:srgbClr val="D2D2D2"/>
           </a:solidFill>
-          <a:ln w="19050">
-            <a:solidFill>
-              <a:srgbClr val="3A405A"/>
-            </a:solidFill>
+          <a:ln>
+            <a:noFill/>
           </a:ln>
         </p:spPr>
         <p:style>
@@ -6336,95 +6577,24 @@
       </p:sp>
       <p:sp>
         <p:nvSpPr>
-          <p:cNvPr id="8" name="TextBox 7"/>
-          <p:cNvSpPr txBox="1"/>
-          <p:nvPr/>
-        </p:nvSpPr>
-        <p:spPr>
-          <a:xfrm>
-            <a:off x="4407408" y="1645920"/>
-            <a:ext cx="3364992" cy="4114800"/>
-          </a:xfrm>
-          <a:prstGeom prst="rect">
-            <a:avLst/>
-          </a:prstGeom>
-          <a:noFill/>
-        </p:spPr>
-        <p:txBody>
-          <a:bodyPr wrap="square" lIns="228600" rIns="228600" tIns="228600">
-            <a:spAutoFit/>
-          </a:bodyPr>
-          <a:lstStyle/>
-          <a:p>
-            <a:pPr>
-              <a:defRPr sz="2800" b="1">
-                <a:solidFill>
-                  <a:srgbClr val="00E5FF"/>
-                </a:solidFill>
-                <a:latin typeface="Trebuchet MS"/>
-              </a:defRPr>
-            </a:pPr>
-            <a:r>
-              <a:t>02</a:t>
-            </a:r>
-          </a:p>
-          <a:p>
-            <a:pPr>
-              <a:spcBef>
-                <a:spcPts val="1000"/>
-              </a:spcBef>
-              <a:spcAft>
-                <a:spcPts val="1200"/>
-              </a:spcAft>
-              <a:defRPr sz="1300" b="1">
-                <a:solidFill>
-                  <a:srgbClr val="FFFFFF"/>
-                </a:solidFill>
-                <a:latin typeface="Trebuchet MS"/>
-              </a:defRPr>
-            </a:pPr>
-            <a:r>
-              <a:t>REPORTING &amp; ANALYTICAL LAGS</a:t>
-            </a:r>
-          </a:p>
-          <a:p>
-            <a:pPr>
-              <a:lnSpc>
-                <a:spcPct val="125000"/>
-              </a:lnSpc>
-              <a:defRPr sz="1050">
-                <a:solidFill>
-                  <a:srgbClr val="B0BEC5"/>
-                </a:solidFill>
-                <a:latin typeface="Segoe UI"/>
-              </a:defRPr>
-            </a:pPr>
-            <a:r>
-              <a:t>Standard quarterly reports fail to calculate risk metrics in real-time. Manually evaluating portfolio drawdowns or calculating alpha/beta figures takes hours and delays critical rebalancing advice.</a:t>
-            </a:r>
-          </a:p>
-        </p:txBody>
-      </p:sp>
-      <p:sp>
-        <p:nvSpPr>
-          <p:cNvPr id="9" name="Rectangle 8"/>
+          <p:cNvPr id="5" name="Rectangle 4"/>
           <p:cNvSpPr/>
           <p:nvPr/>
         </p:nvSpPr>
         <p:spPr>
           <a:xfrm>
-            <a:off x="8129016" y="1645920"/>
-            <a:ext cx="3364992" cy="4114800"/>
+            <a:off x="685800" y="1645920"/>
+            <a:ext cx="2468880" cy="4114800"/>
           </a:xfrm>
           <a:prstGeom prst="rect">
             <a:avLst/>
           </a:prstGeom>
           <a:solidFill>
-            <a:srgbClr val="1E2235"/>
+            <a:srgbClr val="F8FAFC"/>
           </a:solidFill>
-          <a:ln w="19050">
+          <a:ln w="12700">
             <a:solidFill>
-              <a:srgbClr val="3A405A"/>
+              <a:srgbClr val="DCE0E6"/>
             </a:solidFill>
           </a:ln>
         </p:spPr>
@@ -6452,14 +6622,14 @@
       </p:sp>
       <p:sp>
         <p:nvSpPr>
-          <p:cNvPr id="10" name="TextBox 9"/>
+          <p:cNvPr id="6" name="TextBox 5"/>
           <p:cNvSpPr txBox="1"/>
           <p:nvPr/>
         </p:nvSpPr>
         <p:spPr>
           <a:xfrm>
-            <a:off x="8129016" y="1645920"/>
-            <a:ext cx="3364992" cy="4114800"/>
+            <a:off x="685800" y="1645920"/>
+            <a:ext cx="2468880" cy="4114800"/>
           </a:xfrm>
           <a:prstGeom prst="rect">
             <a:avLst/>
@@ -6467,177 +6637,81 @@
           <a:noFill/>
         </p:spPr>
         <p:txBody>
-          <a:bodyPr wrap="square" lIns="228600" rIns="228600" tIns="228600">
+          <a:bodyPr wrap="square" lIns="182880" rIns="182880" tIns="228600">
             <a:spAutoFit/>
           </a:bodyPr>
           <a:lstStyle/>
           <a:p>
             <a:pPr>
-              <a:defRPr sz="2800" b="1">
-                <a:solidFill>
-                  <a:srgbClr val="00E5FF"/>
-                </a:solidFill>
-                <a:latin typeface="Trebuchet MS"/>
+              <a:defRPr sz="1200" b="1">
+                <a:solidFill>
+                  <a:srgbClr val="787878"/>
+                </a:solidFill>
+                <a:latin typeface="Georgia"/>
               </a:defRPr>
             </a:pPr>
             <a:r>
-              <a:t>03</a:t>
+              <a:t>NAV HISTORY</a:t>
             </a:r>
           </a:p>
           <a:p>
             <a:pPr>
               <a:spcBef>
-                <a:spcPts val="1000"/>
+                <a:spcPts val="800"/>
               </a:spcBef>
               <a:spcAft>
                 <a:spcPts val="1200"/>
               </a:spcAft>
-              <a:defRPr sz="1300" b="1">
-                <a:solidFill>
-                  <a:srgbClr val="FFFFFF"/>
-                </a:solidFill>
-                <a:latin typeface="Trebuchet MS"/>
+              <a:defRPr sz="1400" b="1">
+                <a:solidFill>
+                  <a:srgbClr val="000000"/>
+                </a:solidFill>
+                <a:latin typeface="Calibri"/>
               </a:defRPr>
             </a:pPr>
             <a:r>
-              <a:t>UNMANAGED SECTOR TAIL RISK</a:t>
+              <a:t>7,798 Clean Rows</a:t>
             </a:r>
           </a:p>
           <a:p>
             <a:pPr>
               <a:lnSpc>
-                <a:spcPct val="125000"/>
+                <a:spcPct val="120000"/>
               </a:lnSpc>
-              <a:defRPr sz="1050">
-                <a:solidFill>
-                  <a:srgbClr val="B0BEC5"/>
-                </a:solidFill>
-                <a:latin typeface="Segoe UI"/>
+              <a:defRPr sz="950">
+                <a:solidFill>
+                  <a:srgbClr val="334155"/>
+                </a:solidFill>
+                <a:latin typeface="Calibri"/>
               </a:defRPr>
             </a:pPr>
             <a:r>
-              <a:t>Advisors recommend sectoral or specialty funds (e.g. technology funds) based on recent returns without quantifying underlying concentration (HHI) or daily expected tail losses (VaR/CVaR) during market drawdowns.</a:t>
-            </a:r>
-          </a:p>
-        </p:txBody>
-      </p:sp>
-    </p:spTree>
-  </p:cSld>
-  <p:clrMapOvr>
-    <a:masterClrMapping/>
-  </p:clrMapOvr>
-</p:sld>
-</file>
-
-<file path=ppt/slides/slide3.xml><?xml version="1.0" encoding="utf-8"?>
-<p:sld xmlns:a="http://schemas.openxmlformats.org/drawingml/2006/main" xmlns:p="http://schemas.openxmlformats.org/presentationml/2006/main" xmlns:r="http://schemas.openxmlformats.org/officeDocument/2006/relationships">
-  <p:cSld>
-    <p:bg>
-      <p:bgPr>
-        <a:solidFill>
-          <a:srgbClr val="0B0E14"/>
-        </a:solidFill>
-        <a:effectLst/>
-      </p:bgPr>
-    </p:bg>
-    <p:spTree>
-      <p:nvGrpSpPr>
-        <p:cNvPr id="1" name=""/>
-        <p:cNvGrpSpPr/>
-        <p:nvPr/>
-      </p:nvGrpSpPr>
-      <p:grpSpPr/>
-      <p:sp>
-        <p:nvSpPr>
-          <p:cNvPr id="2" name="TextBox 1"/>
-          <p:cNvSpPr txBox="1"/>
-          <p:nvPr/>
-        </p:nvSpPr>
-        <p:spPr>
-          <a:xfrm>
-            <a:off x="685800" y="365760"/>
-            <a:ext cx="9144000" cy="274320"/>
-          </a:xfrm>
-          <a:prstGeom prst="rect">
-            <a:avLst/>
-          </a:prstGeom>
-          <a:noFill/>
-        </p:spPr>
-        <p:txBody>
-          <a:bodyPr wrap="square">
-            <a:spAutoFit/>
-          </a:bodyPr>
-          <a:lstStyle/>
-          <a:p>
-            <a:pPr>
-              <a:defRPr sz="900" b="1">
-                <a:solidFill>
-                  <a:srgbClr val="00E5FF"/>
-                </a:solidFill>
-                <a:latin typeface="Trebuchet MS"/>
-              </a:defRPr>
-            </a:pPr>
-            <a:r>
-              <a:t>BLUESTOCK MUTUAL FUND ANALYTICS</a:t>
-            </a:r>
-          </a:p>
-        </p:txBody>
-      </p:sp>
-      <p:sp>
-        <p:nvSpPr>
-          <p:cNvPr id="3" name="TextBox 2"/>
-          <p:cNvSpPr txBox="1"/>
-          <p:nvPr/>
-        </p:nvSpPr>
-        <p:spPr>
-          <a:xfrm>
-            <a:off x="685800" y="594360"/>
-            <a:ext cx="10817352" cy="731520"/>
-          </a:xfrm>
-          <a:prstGeom prst="rect">
-            <a:avLst/>
-          </a:prstGeom>
-          <a:noFill/>
-        </p:spPr>
-        <p:txBody>
-          <a:bodyPr wrap="square">
-            <a:spAutoFit/>
-          </a:bodyPr>
-          <a:lstStyle/>
-          <a:p>
-            <a:pPr>
-              <a:defRPr sz="2800" b="1">
-                <a:solidFill>
-                  <a:srgbClr val="FFFFFF"/>
-                </a:solidFill>
-                <a:latin typeface="Trebuchet MS"/>
-              </a:defRPr>
-            </a:pPr>
-            <a:r>
-              <a:t>Unified Integration: The Ingested Platform Inputs</a:t>
-            </a:r>
-          </a:p>
-        </p:txBody>
-      </p:sp>
-      <p:sp>
-        <p:nvSpPr>
-          <p:cNvPr id="4" name="Rectangle 3"/>
+              <a:t>Ingested daily Net Asset Value history spanning a 3-year period (2022-2024) across 10 mutual funds. Establishes the core pricing baseline for return calculations.</a:t>
+            </a:r>
+          </a:p>
+        </p:txBody>
+      </p:sp>
+      <p:sp>
+        <p:nvSpPr>
+          <p:cNvPr id="7" name="Rectangle 6"/>
           <p:cNvSpPr/>
           <p:nvPr/>
         </p:nvSpPr>
         <p:spPr>
           <a:xfrm>
-            <a:off x="685800" y="1280160"/>
-            <a:ext cx="10817352" cy="18288"/>
+            <a:off x="3429000" y="1645920"/>
+            <a:ext cx="2468880" cy="4114800"/>
           </a:xfrm>
           <a:prstGeom prst="rect">
             <a:avLst/>
           </a:prstGeom>
           <a:solidFill>
-            <a:srgbClr val="1E2235"/>
+            <a:srgbClr val="F8FAFC"/>
           </a:solidFill>
-          <a:ln>
-            <a:noFill/>
+          <a:ln w="12700">
+            <a:solidFill>
+              <a:srgbClr val="DCE0E6"/>
+            </a:solidFill>
           </a:ln>
         </p:spPr>
         <p:style>
@@ -6664,24 +6738,95 @@
       </p:sp>
       <p:sp>
         <p:nvSpPr>
-          <p:cNvPr id="5" name="Rectangle 4"/>
+          <p:cNvPr id="8" name="TextBox 7"/>
+          <p:cNvSpPr txBox="1"/>
+          <p:nvPr/>
+        </p:nvSpPr>
+        <p:spPr>
+          <a:xfrm>
+            <a:off x="3429000" y="1645920"/>
+            <a:ext cx="2468880" cy="4114800"/>
+          </a:xfrm>
+          <a:prstGeom prst="rect">
+            <a:avLst/>
+          </a:prstGeom>
+          <a:noFill/>
+        </p:spPr>
+        <p:txBody>
+          <a:bodyPr wrap="square" lIns="182880" rIns="182880" tIns="228600">
+            <a:spAutoFit/>
+          </a:bodyPr>
+          <a:lstStyle/>
+          <a:p>
+            <a:pPr>
+              <a:defRPr sz="1200" b="1">
+                <a:solidFill>
+                  <a:srgbClr val="787878"/>
+                </a:solidFill>
+                <a:latin typeface="Georgia"/>
+              </a:defRPr>
+            </a:pPr>
+            <a:r>
+              <a:t>RETAIL TRANSACTIONS</a:t>
+            </a:r>
+          </a:p>
+          <a:p>
+            <a:pPr>
+              <a:spcBef>
+                <a:spcPts val="800"/>
+              </a:spcBef>
+              <a:spcAft>
+                <a:spcPts val="1200"/>
+              </a:spcAft>
+              <a:defRPr sz="1400" b="1">
+                <a:solidFill>
+                  <a:srgbClr val="000000"/>
+                </a:solidFill>
+                <a:latin typeface="Calibri"/>
+              </a:defRPr>
+            </a:pPr>
+            <a:r>
+              <a:t>1,985 Ledger Records</a:t>
+            </a:r>
+          </a:p>
+          <a:p>
+            <a:pPr>
+              <a:lnSpc>
+                <a:spcPct val="120000"/>
+              </a:lnSpc>
+              <a:defRPr sz="950">
+                <a:solidFill>
+                  <a:srgbClr val="334155"/>
+                </a:solidFill>
+                <a:latin typeface="Calibri"/>
+              </a:defRPr>
+            </a:pPr>
+            <a:r>
+              <a:t>Granular client transactions covering 200 distinct investor profiles. Contains buy/sell classifications, amounts, and units for cohort analysis.</a:t>
+            </a:r>
+          </a:p>
+        </p:txBody>
+      </p:sp>
+      <p:sp>
+        <p:nvSpPr>
+          <p:cNvPr id="9" name="Rectangle 8"/>
           <p:cNvSpPr/>
           <p:nvPr/>
         </p:nvSpPr>
         <p:spPr>
           <a:xfrm>
-            <a:off x="685800" y="1645920"/>
+            <a:off x="6172200" y="1645920"/>
             <a:ext cx="2468880" cy="4114800"/>
           </a:xfrm>
           <a:prstGeom prst="rect">
             <a:avLst/>
           </a:prstGeom>
           <a:solidFill>
-            <a:srgbClr val="1E2235"/>
+            <a:srgbClr val="F8FAFC"/>
           </a:solidFill>
-          <a:ln w="19050">
+          <a:ln w="12700">
             <a:solidFill>
-              <a:srgbClr val="3A405A"/>
+              <a:srgbClr val="DCE0E6"/>
             </a:solidFill>
           </a:ln>
         </p:spPr>
@@ -6709,13 +6854,13 @@
       </p:sp>
       <p:sp>
         <p:nvSpPr>
-          <p:cNvPr id="6" name="TextBox 5"/>
+          <p:cNvPr id="10" name="TextBox 9"/>
           <p:cNvSpPr txBox="1"/>
           <p:nvPr/>
         </p:nvSpPr>
         <p:spPr>
           <a:xfrm>
-            <a:off x="685800" y="1645920"/>
+            <a:off x="6172200" y="1645920"/>
             <a:ext cx="2468880" cy="4114800"/>
           </a:xfrm>
           <a:prstGeom prst="rect">
@@ -6732,13 +6877,13 @@
             <a:pPr>
               <a:defRPr sz="1200" b="1">
                 <a:solidFill>
-                  <a:srgbClr val="00E5FF"/>
-                </a:solidFill>
-                <a:latin typeface="Trebuchet MS"/>
+                  <a:srgbClr val="787878"/>
+                </a:solidFill>
+                <a:latin typeface="Georgia"/>
               </a:defRPr>
             </a:pPr>
             <a:r>
-              <a:t>NAV HISTORY</a:t>
+              <a:t>MARKET BENCHMARKS</a:t>
             </a:r>
           </a:p>
           <a:p>
@@ -6751,13 +6896,13 @@
               </a:spcAft>
               <a:defRPr sz="1400" b="1">
                 <a:solidFill>
-                  <a:srgbClr val="FFFFFF"/>
-                </a:solidFill>
-                <a:latin typeface="Segoe UI"/>
+                  <a:srgbClr val="000000"/>
+                </a:solidFill>
+                <a:latin typeface="Calibri"/>
               </a:defRPr>
             </a:pPr>
             <a:r>
-              <a:t>7,798 Clean Rows</a:t>
+              <a:t>Daily Index Feeds</a:t>
             </a:r>
           </a:p>
           <a:p>
@@ -6767,37 +6912,37 @@
               </a:lnSpc>
               <a:defRPr sz="950">
                 <a:solidFill>
-                  <a:srgbClr val="B0BEC5"/>
-                </a:solidFill>
-                <a:latin typeface="Segoe UI"/>
+                  <a:srgbClr val="334155"/>
+                </a:solidFill>
+                <a:latin typeface="Calibri"/>
               </a:defRPr>
             </a:pPr>
             <a:r>
-              <a:t>Ingested daily Net Asset Value history spanning a 3-year period (2022-2024) across 10 mutual funds. Establishes the core pricing baseline for return calculations.</a:t>
-            </a:r>
-          </a:p>
-        </p:txBody>
-      </p:sp>
-      <p:sp>
-        <p:nvSpPr>
-          <p:cNvPr id="7" name="Rectangle 6"/>
+              <a:t>Fetched daily close pricing for Nifty 50 and Nifty 100 via the yfinance API to serve as market indices and risk baselines.</a:t>
+            </a:r>
+          </a:p>
+        </p:txBody>
+      </p:sp>
+      <p:sp>
+        <p:nvSpPr>
+          <p:cNvPr id="11" name="Rectangle 10"/>
           <p:cNvSpPr/>
           <p:nvPr/>
         </p:nvSpPr>
         <p:spPr>
           <a:xfrm>
-            <a:off x="3429000" y="1645920"/>
+            <a:off x="8915400" y="1645920"/>
             <a:ext cx="2468880" cy="4114800"/>
           </a:xfrm>
           <a:prstGeom prst="rect">
             <a:avLst/>
           </a:prstGeom>
           <a:solidFill>
-            <a:srgbClr val="1E2235"/>
+            <a:srgbClr val="F8FAFC"/>
           </a:solidFill>
-          <a:ln w="19050">
+          <a:ln w="12700">
             <a:solidFill>
-              <a:srgbClr val="3A405A"/>
+              <a:srgbClr val="DCE0E6"/>
             </a:solidFill>
           </a:ln>
         </p:spPr>
@@ -6825,13 +6970,13 @@
       </p:sp>
       <p:sp>
         <p:nvSpPr>
-          <p:cNvPr id="8" name="TextBox 7"/>
+          <p:cNvPr id="12" name="TextBox 11"/>
           <p:cNvSpPr txBox="1"/>
           <p:nvPr/>
         </p:nvSpPr>
         <p:spPr>
           <a:xfrm>
-            <a:off x="3429000" y="1645920"/>
+            <a:off x="8915400" y="1645920"/>
             <a:ext cx="2468880" cy="4114800"/>
           </a:xfrm>
           <a:prstGeom prst="rect">
@@ -6848,13 +6993,13 @@
             <a:pPr>
               <a:defRPr sz="1200" b="1">
                 <a:solidFill>
-                  <a:srgbClr val="00E5FF"/>
-                </a:solidFill>
-                <a:latin typeface="Trebuchet MS"/>
+                  <a:srgbClr val="787878"/>
+                </a:solidFill>
+                <a:latin typeface="Georgia"/>
               </a:defRPr>
             </a:pPr>
             <a:r>
-              <a:t>RETAIL TRANSACTIONS</a:t>
+              <a:t>PORTFOLIO HOLDINGS</a:t>
             </a:r>
           </a:p>
           <a:p>
@@ -6867,13 +7012,13 @@
               </a:spcAft>
               <a:defRPr sz="1400" b="1">
                 <a:solidFill>
-                  <a:srgbClr val="FFFFFF"/>
-                </a:solidFill>
-                <a:latin typeface="Segoe UI"/>
+                  <a:srgbClr val="000000"/>
+                </a:solidFill>
+                <a:latin typeface="Calibri"/>
               </a:defRPr>
             </a:pPr>
             <a:r>
-              <a:t>1,985 Ledger Records</a:t>
+              <a:t>Stock-Level Weights</a:t>
             </a:r>
           </a:p>
           <a:p>
@@ -6883,38 +7028,134 @@
               </a:lnSpc>
               <a:defRPr sz="950">
                 <a:solidFill>
-                  <a:srgbClr val="B0BEC5"/>
-                </a:solidFill>
-                <a:latin typeface="Segoe UI"/>
+                  <a:srgbClr val="334155"/>
+                </a:solidFill>
+                <a:latin typeface="Calibri"/>
               </a:defRPr>
             </a:pPr>
             <a:r>
-              <a:t>Granular client transactions covering 200 distinct investor profiles. Contains buy/sell classifications, amounts, and units for cohort analysis.</a:t>
-            </a:r>
-          </a:p>
-        </p:txBody>
-      </p:sp>
-      <p:sp>
-        <p:nvSpPr>
-          <p:cNvPr id="9" name="Rectangle 8"/>
+              <a:t>Holdings allocations mapped across schemes to evaluate sector weights. Drives our Herfindahl-Hirschman Index (HHI) concentration calculations.</a:t>
+            </a:r>
+          </a:p>
+        </p:txBody>
+      </p:sp>
+    </p:spTree>
+  </p:cSld>
+  <p:clrMapOvr>
+    <a:masterClrMapping/>
+  </p:clrMapOvr>
+</p:sld>
+</file>
+
+<file path=ppt/slides/slide4.xml><?xml version="1.0" encoding="utf-8"?>
+<p:sld xmlns:a="http://schemas.openxmlformats.org/drawingml/2006/main" xmlns:p="http://schemas.openxmlformats.org/presentationml/2006/main" xmlns:r="http://schemas.openxmlformats.org/officeDocument/2006/relationships">
+  <p:cSld>
+    <p:bg>
+      <p:bgPr>
+        <a:solidFill>
+          <a:srgbClr val="FFFFFF"/>
+        </a:solidFill>
+        <a:effectLst/>
+      </p:bgPr>
+    </p:bg>
+    <p:spTree>
+      <p:nvGrpSpPr>
+        <p:cNvPr id="1" name=""/>
+        <p:cNvGrpSpPr/>
+        <p:nvPr/>
+      </p:nvGrpSpPr>
+      <p:grpSpPr/>
+      <p:sp>
+        <p:nvSpPr>
+          <p:cNvPr id="2" name="TextBox 1"/>
+          <p:cNvSpPr txBox="1"/>
+          <p:nvPr/>
+        </p:nvSpPr>
+        <p:spPr>
+          <a:xfrm>
+            <a:off x="685800" y="365760"/>
+            <a:ext cx="9144000" cy="274320"/>
+          </a:xfrm>
+          <a:prstGeom prst="rect">
+            <a:avLst/>
+          </a:prstGeom>
+          <a:noFill/>
+        </p:spPr>
+        <p:txBody>
+          <a:bodyPr wrap="square">
+            <a:spAutoFit/>
+          </a:bodyPr>
+          <a:lstStyle/>
+          <a:p>
+            <a:pPr>
+              <a:defRPr sz="850" b="1">
+                <a:solidFill>
+                  <a:srgbClr val="787878"/>
+                </a:solidFill>
+                <a:latin typeface="Calibri"/>
+              </a:defRPr>
+            </a:pPr>
+            <a:r>
+              <a:t>BLUESTOCK MUTUAL FUND ANALYTICS</a:t>
+            </a:r>
+          </a:p>
+        </p:txBody>
+      </p:sp>
+      <p:sp>
+        <p:nvSpPr>
+          <p:cNvPr id="3" name="TextBox 2"/>
+          <p:cNvSpPr txBox="1"/>
+          <p:nvPr/>
+        </p:nvSpPr>
+        <p:spPr>
+          <a:xfrm>
+            <a:off x="685800" y="502920"/>
+            <a:ext cx="10817352" cy="731520"/>
+          </a:xfrm>
+          <a:prstGeom prst="rect">
+            <a:avLst/>
+          </a:prstGeom>
+          <a:noFill/>
+        </p:spPr>
+        <p:txBody>
+          <a:bodyPr wrap="square">
+            <a:spAutoFit/>
+          </a:bodyPr>
+          <a:lstStyle/>
+          <a:p>
+            <a:pPr>
+              <a:defRPr sz="2600" b="1">
+                <a:solidFill>
+                  <a:srgbClr val="000000"/>
+                </a:solidFill>
+                <a:latin typeface="Georgia"/>
+              </a:defRPr>
+            </a:pPr>
+            <a:r>
+              <a:t>ETL Pipeline &amp; SQLite STAR Schema Database Design</a:t>
+            </a:r>
+          </a:p>
+        </p:txBody>
+      </p:sp>
+      <p:sp>
+        <p:nvSpPr>
+          <p:cNvPr id="4" name="Rectangle 3"/>
           <p:cNvSpPr/>
           <p:nvPr/>
         </p:nvSpPr>
         <p:spPr>
           <a:xfrm>
-            <a:off x="6172200" y="1645920"/>
-            <a:ext cx="2468880" cy="4114800"/>
+            <a:off x="685800" y="1188720"/>
+            <a:ext cx="10817352" cy="13716"/>
           </a:xfrm>
           <a:prstGeom prst="rect">
             <a:avLst/>
           </a:prstGeom>
           <a:solidFill>
-            <a:srgbClr val="1E2235"/>
+            <a:srgbClr val="D2D2D2"/>
           </a:solidFill>
-          <a:ln w="19050">
-            <a:solidFill>
-              <a:srgbClr val="3A405A"/>
-            </a:solidFill>
+          <a:ln>
+            <a:noFill/>
           </a:ln>
         </p:spPr>
         <p:style>
@@ -6941,95 +7182,24 @@
       </p:sp>
       <p:sp>
         <p:nvSpPr>
-          <p:cNvPr id="10" name="TextBox 9"/>
-          <p:cNvSpPr txBox="1"/>
-          <p:nvPr/>
-        </p:nvSpPr>
-        <p:spPr>
-          <a:xfrm>
-            <a:off x="6172200" y="1645920"/>
-            <a:ext cx="2468880" cy="4114800"/>
-          </a:xfrm>
-          <a:prstGeom prst="rect">
-            <a:avLst/>
-          </a:prstGeom>
-          <a:noFill/>
-        </p:spPr>
-        <p:txBody>
-          <a:bodyPr wrap="square" lIns="182880" rIns="182880" tIns="228600">
-            <a:spAutoFit/>
-          </a:bodyPr>
-          <a:lstStyle/>
-          <a:p>
-            <a:pPr>
-              <a:defRPr sz="1200" b="1">
-                <a:solidFill>
-                  <a:srgbClr val="00E676"/>
-                </a:solidFill>
-                <a:latin typeface="Trebuchet MS"/>
-              </a:defRPr>
-            </a:pPr>
-            <a:r>
-              <a:t>MARKET BENCHMARKS</a:t>
-            </a:r>
-          </a:p>
-          <a:p>
-            <a:pPr>
-              <a:spcBef>
-                <a:spcPts val="800"/>
-              </a:spcBef>
-              <a:spcAft>
-                <a:spcPts val="1200"/>
-              </a:spcAft>
-              <a:defRPr sz="1400" b="1">
-                <a:solidFill>
-                  <a:srgbClr val="FFFFFF"/>
-                </a:solidFill>
-                <a:latin typeface="Segoe UI"/>
-              </a:defRPr>
-            </a:pPr>
-            <a:r>
-              <a:t>Daily Index Feeds</a:t>
-            </a:r>
-          </a:p>
-          <a:p>
-            <a:pPr>
-              <a:lnSpc>
-                <a:spcPct val="120000"/>
-              </a:lnSpc>
-              <a:defRPr sz="950">
-                <a:solidFill>
-                  <a:srgbClr val="B0BEC5"/>
-                </a:solidFill>
-                <a:latin typeface="Segoe UI"/>
-              </a:defRPr>
-            </a:pPr>
-            <a:r>
-              <a:t>Fetched daily close pricing for Nifty 50 and Nifty 100 via the yfinance API to serve as market indices and risk baselines.</a:t>
-            </a:r>
-          </a:p>
-        </p:txBody>
-      </p:sp>
-      <p:sp>
-        <p:nvSpPr>
-          <p:cNvPr id="11" name="Rectangle 10"/>
+          <p:cNvPr id="5" name="Rectangle 4"/>
           <p:cNvSpPr/>
           <p:nvPr/>
         </p:nvSpPr>
         <p:spPr>
           <a:xfrm>
-            <a:off x="8915400" y="1645920"/>
-            <a:ext cx="2468880" cy="4114800"/>
+            <a:off x="685800" y="1645920"/>
+            <a:ext cx="5212080" cy="4114800"/>
           </a:xfrm>
           <a:prstGeom prst="rect">
             <a:avLst/>
           </a:prstGeom>
           <a:solidFill>
-            <a:srgbClr val="1E2235"/>
+            <a:srgbClr val="F8FAFC"/>
           </a:solidFill>
-          <a:ln w="19050">
+          <a:ln w="12700">
             <a:solidFill>
-              <a:srgbClr val="3A405A"/>
+              <a:srgbClr val="DCE0E6"/>
             </a:solidFill>
           </a:ln>
         </p:spPr>
@@ -7048,64 +7218,19 @@
           </a:fontRef>
         </p:style>
         <p:txBody>
-          <a:bodyPr rtlCol="0" anchor="ctr"/>
-          <a:lstStyle/>
-          <a:p>
-            <a:pPr algn="ctr"/>
-          </a:p>
-        </p:txBody>
-      </p:sp>
-      <p:sp>
-        <p:nvSpPr>
-          <p:cNvPr id="12" name="TextBox 11"/>
-          <p:cNvSpPr txBox="1"/>
-          <p:nvPr/>
-        </p:nvSpPr>
-        <p:spPr>
-          <a:xfrm>
-            <a:off x="8915400" y="1645920"/>
-            <a:ext cx="2468880" cy="4114800"/>
-          </a:xfrm>
-          <a:prstGeom prst="rect">
-            <a:avLst/>
-          </a:prstGeom>
-          <a:noFill/>
-        </p:spPr>
-        <p:txBody>
-          <a:bodyPr wrap="square" lIns="182880" rIns="182880" tIns="228600">
-            <a:spAutoFit/>
-          </a:bodyPr>
-          <a:lstStyle/>
-          <a:p>
-            <a:pPr>
-              <a:defRPr sz="1200" b="1">
-                <a:solidFill>
-                  <a:srgbClr val="00E676"/>
-                </a:solidFill>
-                <a:latin typeface="Trebuchet MS"/>
+          <a:bodyPr rtlCol="0" anchor="ctr" wrap="square" lIns="274320" tIns="274320"/>
+          <a:lstStyle/>
+          <a:p>
+            <a:pPr algn="ctr">
+              <a:defRPr sz="1600" b="1">
+                <a:solidFill>
+                  <a:srgbClr val="000000"/>
+                </a:solidFill>
+                <a:latin typeface="Georgia"/>
               </a:defRPr>
             </a:pPr>
             <a:r>
-              <a:t>PORTFOLIO HOLDINGS</a:t>
-            </a:r>
-          </a:p>
-          <a:p>
-            <a:pPr>
-              <a:spcBef>
-                <a:spcPts val="800"/>
-              </a:spcBef>
-              <a:spcAft>
-                <a:spcPts val="1200"/>
-              </a:spcAft>
-              <a:defRPr sz="1400" b="1">
-                <a:solidFill>
-                  <a:srgbClr val="FFFFFF"/>
-                </a:solidFill>
-                <a:latin typeface="Segoe UI"/>
-              </a:defRPr>
-            </a:pPr>
-            <a:r>
-              <a:t>Stock-Level Weights</a:t>
+              <a:t>Ingestion Pipeline &amp; Operations</a:t>
             </a:r>
           </a:p>
           <a:p>
@@ -7113,136 +7238,81 @@
               <a:lnSpc>
                 <a:spcPct val="120000"/>
               </a:lnSpc>
-              <a:defRPr sz="950">
-                <a:solidFill>
-                  <a:srgbClr val="B0BEC5"/>
-                </a:solidFill>
-                <a:latin typeface="Segoe UI"/>
+              <a:spcBef>
+                <a:spcPts val="1200"/>
+              </a:spcBef>
+              <a:defRPr sz="1100">
+                <a:solidFill>
+                  <a:srgbClr val="334155"/>
+                </a:solidFill>
+                <a:latin typeface="Calibri"/>
               </a:defRPr>
             </a:pPr>
             <a:r>
-              <a:t>Holdings allocations mapped across schemes to evaluate sector weights. Drives our Herfindahl-Hirschman Index (HHI) concentration calculations.</a:t>
-            </a:r>
-          </a:p>
-        </p:txBody>
-      </p:sp>
-    </p:spTree>
-  </p:cSld>
-  <p:clrMapOvr>
-    <a:masterClrMapping/>
-  </p:clrMapOvr>
-</p:sld>
-</file>
-
-<file path=ppt/slides/slide4.xml><?xml version="1.0" encoding="utf-8"?>
-<p:sld xmlns:a="http://schemas.openxmlformats.org/drawingml/2006/main" xmlns:p="http://schemas.openxmlformats.org/presentationml/2006/main" xmlns:r="http://schemas.openxmlformats.org/officeDocument/2006/relationships">
-  <p:cSld>
-    <p:bg>
-      <p:bgPr>
-        <a:solidFill>
-          <a:srgbClr val="0B0E14"/>
-        </a:solidFill>
-        <a:effectLst/>
-      </p:bgPr>
-    </p:bg>
-    <p:spTree>
-      <p:nvGrpSpPr>
-        <p:cNvPr id="1" name=""/>
-        <p:cNvGrpSpPr/>
-        <p:nvPr/>
-      </p:nvGrpSpPr>
-      <p:grpSpPr/>
-      <p:sp>
-        <p:nvSpPr>
-          <p:cNvPr id="2" name="TextBox 1"/>
-          <p:cNvSpPr txBox="1"/>
-          <p:nvPr/>
-        </p:nvSpPr>
-        <p:spPr>
-          <a:xfrm>
-            <a:off x="685800" y="365760"/>
-            <a:ext cx="9144000" cy="274320"/>
-          </a:xfrm>
-          <a:prstGeom prst="rect">
-            <a:avLst/>
-          </a:prstGeom>
-          <a:noFill/>
-        </p:spPr>
-        <p:txBody>
-          <a:bodyPr wrap="square">
-            <a:spAutoFit/>
-          </a:bodyPr>
-          <a:lstStyle/>
+              <a:t>1. Schema Ingestion Check: Standardizes CSV headers and forces correct naming configurations.</a:t>
+            </a:r>
+          </a:p>
           <a:p>
             <a:pPr>
-              <a:defRPr sz="900" b="1">
-                <a:solidFill>
-                  <a:srgbClr val="00E5FF"/>
-                </a:solidFill>
-                <a:latin typeface="Trebuchet MS"/>
+              <a:lnSpc>
+                <a:spcPct val="120000"/>
+              </a:lnSpc>
+              <a:spcBef>
+                <a:spcPts val="1200"/>
+              </a:spcBef>
+              <a:defRPr sz="1100">
+                <a:solidFill>
+                  <a:srgbClr val="334155"/>
+                </a:solidFill>
+                <a:latin typeface="Calibri"/>
               </a:defRPr>
             </a:pPr>
             <a:r>
-              <a:t>BLUESTOCK MUTUAL FUND ANALYTICS</a:t>
-            </a:r>
-          </a:p>
-        </p:txBody>
-      </p:sp>
-      <p:sp>
-        <p:nvSpPr>
-          <p:cNvPr id="3" name="TextBox 2"/>
-          <p:cNvSpPr txBox="1"/>
-          <p:nvPr/>
-        </p:nvSpPr>
-        <p:spPr>
-          <a:xfrm>
-            <a:off x="685800" y="594360"/>
-            <a:ext cx="10817352" cy="731520"/>
-          </a:xfrm>
-          <a:prstGeom prst="rect">
-            <a:avLst/>
-          </a:prstGeom>
-          <a:noFill/>
-        </p:spPr>
-        <p:txBody>
-          <a:bodyPr wrap="square">
-            <a:spAutoFit/>
-          </a:bodyPr>
-          <a:lstStyle/>
+              <a:t>2. Duplicate and Null Pruning: Purges identical ledger lines and imputes missing intermediate NAV entries.</a:t>
+            </a:r>
+          </a:p>
           <a:p>
             <a:pPr>
-              <a:defRPr sz="2800" b="1">
-                <a:solidFill>
-                  <a:srgbClr val="FFFFFF"/>
-                </a:solidFill>
-                <a:latin typeface="Trebuchet MS"/>
+              <a:lnSpc>
+                <a:spcPct val="120000"/>
+              </a:lnSpc>
+              <a:spcBef>
+                <a:spcPts val="1200"/>
+              </a:spcBef>
+              <a:defRPr sz="1100">
+                <a:solidFill>
+                  <a:srgbClr val="334155"/>
+                </a:solidFill>
+                <a:latin typeface="Calibri"/>
               </a:defRPr>
             </a:pPr>
             <a:r>
-              <a:t>ETL Pipeline &amp; SQLite STAR Schema Database Design</a:t>
-            </a:r>
-          </a:p>
-        </p:txBody>
-      </p:sp>
-      <p:sp>
-        <p:nvSpPr>
-          <p:cNvPr id="4" name="Rectangle 3"/>
+              <a:t>3. SQL Loading Engine: Establishes a transaction and loads the dimension and fact tables into SQLite.</a:t>
+            </a:r>
+          </a:p>
+        </p:txBody>
+      </p:sp>
+      <p:sp>
+        <p:nvSpPr>
+          <p:cNvPr id="6" name="Rectangle 5"/>
           <p:cNvSpPr/>
           <p:nvPr/>
         </p:nvSpPr>
         <p:spPr>
           <a:xfrm>
-            <a:off x="685800" y="1280160"/>
-            <a:ext cx="10817352" cy="18288"/>
+            <a:off x="6291072" y="1645920"/>
+            <a:ext cx="5212080" cy="4114800"/>
           </a:xfrm>
           <a:prstGeom prst="rect">
             <a:avLst/>
           </a:prstGeom>
           <a:solidFill>
-            <a:srgbClr val="1E2235"/>
+            <a:srgbClr val="F8FAFC"/>
           </a:solidFill>
-          <a:ln>
-            <a:noFill/>
+          <a:ln w="12700">
+            <a:solidFill>
+              <a:srgbClr val="DCE0E6"/>
+            </a:solidFill>
           </a:ln>
         </p:spPr>
         <p:style>
@@ -7260,34 +7330,197 @@
           </a:fontRef>
         </p:style>
         <p:txBody>
-          <a:bodyPr rtlCol="0" anchor="ctr"/>
-          <a:lstStyle/>
-          <a:p>
-            <a:pPr algn="ctr"/>
-          </a:p>
-        </p:txBody>
-      </p:sp>
-      <p:sp>
-        <p:nvSpPr>
-          <p:cNvPr id="5" name="Rectangle 4"/>
+          <a:bodyPr rtlCol="0" anchor="ctr" wrap="square" lIns="274320" tIns="274320"/>
+          <a:lstStyle/>
+          <a:p>
+            <a:pPr algn="ctr">
+              <a:defRPr sz="1600" b="1">
+                <a:solidFill>
+                  <a:srgbClr val="000000"/>
+                </a:solidFill>
+                <a:latin typeface="Georgia"/>
+              </a:defRPr>
+            </a:pPr>
+            <a:r>
+              <a:t>Relational Star Schema Design</a:t>
+            </a:r>
+          </a:p>
+          <a:p>
+            <a:pPr>
+              <a:lnSpc>
+                <a:spcPct val="120000"/>
+              </a:lnSpc>
+              <a:spcBef>
+                <a:spcPts val="1000"/>
+              </a:spcBef>
+              <a:defRPr sz="1050">
+                <a:solidFill>
+                  <a:srgbClr val="334155"/>
+                </a:solidFill>
+                <a:latin typeface="Calibri"/>
+              </a:defRPr>
+            </a:pPr>
+            <a:r>
+              <a:t>• Dimension Tables: dim_scheme (fund attributes), dim_amc (asset manager masters), dim_investor (client demographics &amp; risk profiles), dim_date (unified time dimension).</a:t>
+            </a:r>
+          </a:p>
+          <a:p>
+            <a:pPr>
+              <a:lnSpc>
+                <a:spcPct val="120000"/>
+              </a:lnSpc>
+              <a:spcBef>
+                <a:spcPts val="1000"/>
+              </a:spcBef>
+              <a:defRPr sz="1050">
+                <a:solidFill>
+                  <a:srgbClr val="334155"/>
+                </a:solidFill>
+                <a:latin typeface="Calibri"/>
+              </a:defRPr>
+            </a:pPr>
+            <a:r>
+              <a:t>• Central Fact Tables: fact_nav_history (pricing records), fact_investor_transactions (retail transaction ledger), fact_scheme_performance (returns summaries).</a:t>
+            </a:r>
+          </a:p>
+          <a:p>
+            <a:pPr>
+              <a:lnSpc>
+                <a:spcPct val="120000"/>
+              </a:lnSpc>
+              <a:spcBef>
+                <a:spcPts val="1000"/>
+              </a:spcBef>
+              <a:defRPr sz="1050">
+                <a:solidFill>
+                  <a:srgbClr val="334155"/>
+                </a:solidFill>
+                <a:latin typeface="Calibri"/>
+              </a:defRPr>
+            </a:pPr>
+            <a:r>
+              <a:t>• Database Integrity: Primary key constraints, cascading foreign keys, and index keys on (date, scheme_code) to optimize analytical queries.</a:t>
+            </a:r>
+          </a:p>
+        </p:txBody>
+      </p:sp>
+    </p:spTree>
+  </p:cSld>
+  <p:clrMapOvr>
+    <a:masterClrMapping/>
+  </p:clrMapOvr>
+</p:sld>
+</file>
+
+<file path=ppt/slides/slide5.xml><?xml version="1.0" encoding="utf-8"?>
+<p:sld xmlns:a="http://schemas.openxmlformats.org/drawingml/2006/main" xmlns:p="http://schemas.openxmlformats.org/presentationml/2006/main" xmlns:r="http://schemas.openxmlformats.org/officeDocument/2006/relationships">
+  <p:cSld>
+    <p:bg>
+      <p:bgPr>
+        <a:solidFill>
+          <a:srgbClr val="FFFFFF"/>
+        </a:solidFill>
+        <a:effectLst/>
+      </p:bgPr>
+    </p:bg>
+    <p:spTree>
+      <p:nvGrpSpPr>
+        <p:cNvPr id="1" name=""/>
+        <p:cNvGrpSpPr/>
+        <p:nvPr/>
+      </p:nvGrpSpPr>
+      <p:grpSpPr/>
+      <p:sp>
+        <p:nvSpPr>
+          <p:cNvPr id="2" name="TextBox 1"/>
+          <p:cNvSpPr txBox="1"/>
+          <p:nvPr/>
+        </p:nvSpPr>
+        <p:spPr>
+          <a:xfrm>
+            <a:off x="685800" y="365760"/>
+            <a:ext cx="9144000" cy="274320"/>
+          </a:xfrm>
+          <a:prstGeom prst="rect">
+            <a:avLst/>
+          </a:prstGeom>
+          <a:noFill/>
+        </p:spPr>
+        <p:txBody>
+          <a:bodyPr wrap="square">
+            <a:spAutoFit/>
+          </a:bodyPr>
+          <a:lstStyle/>
+          <a:p>
+            <a:pPr>
+              <a:defRPr sz="850" b="1">
+                <a:solidFill>
+                  <a:srgbClr val="787878"/>
+                </a:solidFill>
+                <a:latin typeface="Calibri"/>
+              </a:defRPr>
+            </a:pPr>
+            <a:r>
+              <a:t>BLUESTOCK MUTUAL FUND ANALYTICS</a:t>
+            </a:r>
+          </a:p>
+        </p:txBody>
+      </p:sp>
+      <p:sp>
+        <p:nvSpPr>
+          <p:cNvPr id="3" name="TextBox 2"/>
+          <p:cNvSpPr txBox="1"/>
+          <p:nvPr/>
+        </p:nvSpPr>
+        <p:spPr>
+          <a:xfrm>
+            <a:off x="685800" y="502920"/>
+            <a:ext cx="10817352" cy="731520"/>
+          </a:xfrm>
+          <a:prstGeom prst="rect">
+            <a:avLst/>
+          </a:prstGeom>
+          <a:noFill/>
+        </p:spPr>
+        <p:txBody>
+          <a:bodyPr wrap="square">
+            <a:spAutoFit/>
+          </a:bodyPr>
+          <a:lstStyle/>
+          <a:p>
+            <a:pPr>
+              <a:defRPr sz="2600" b="1">
+                <a:solidFill>
+                  <a:srgbClr val="000000"/>
+                </a:solidFill>
+                <a:latin typeface="Georgia"/>
+              </a:defRPr>
+            </a:pPr>
+            <a:r>
+              <a:t>Engineering Fallbacks: Handling Production Anomalies</a:t>
+            </a:r>
+          </a:p>
+        </p:txBody>
+      </p:sp>
+      <p:sp>
+        <p:nvSpPr>
+          <p:cNvPr id="4" name="Rectangle 3"/>
           <p:cNvSpPr/>
           <p:nvPr/>
         </p:nvSpPr>
         <p:spPr>
           <a:xfrm>
-            <a:off x="685800" y="1645920"/>
-            <a:ext cx="5212080" cy="4114800"/>
+            <a:off x="685800" y="1188720"/>
+            <a:ext cx="10817352" cy="13716"/>
           </a:xfrm>
           <a:prstGeom prst="rect">
             <a:avLst/>
           </a:prstGeom>
           <a:solidFill>
-            <a:srgbClr val="1E2235"/>
+            <a:srgbClr val="D2D2D2"/>
           </a:solidFill>
-          <a:ln w="19050">
-            <a:solidFill>
-              <a:srgbClr val="3A405A"/>
-            </a:solidFill>
+          <a:ln>
+            <a:noFill/>
           </a:ln>
         </p:spPr>
         <p:style>
@@ -7305,100 +7538,33 @@
           </a:fontRef>
         </p:style>
         <p:txBody>
-          <a:bodyPr rtlCol="0" anchor="ctr" wrap="square" lIns="274320" tIns="274320"/>
-          <a:lstStyle/>
-          <a:p>
-            <a:pPr algn="ctr">
-              <a:defRPr sz="1600" b="1">
-                <a:solidFill>
-                  <a:srgbClr val="00E5FF"/>
-                </a:solidFill>
-                <a:latin typeface="Trebuchet MS"/>
-              </a:defRPr>
-            </a:pPr>
-            <a:r>
-              <a:t>Ingestion Pipeline &amp; Operations</a:t>
-            </a:r>
-          </a:p>
-          <a:p>
-            <a:pPr>
-              <a:lnSpc>
-                <a:spcPct val="120000"/>
-              </a:lnSpc>
-              <a:spcBef>
-                <a:spcPts val="1200"/>
-              </a:spcBef>
-              <a:defRPr sz="1100">
-                <a:solidFill>
-                  <a:srgbClr val="B0BEC5"/>
-                </a:solidFill>
-                <a:latin typeface="Segoe UI"/>
-              </a:defRPr>
-            </a:pPr>
-            <a:r>
-              <a:t>1. Schema Ingestion Check: Standardizes CSV headers and forces correct naming configurations.</a:t>
-            </a:r>
-          </a:p>
-          <a:p>
-            <a:pPr>
-              <a:lnSpc>
-                <a:spcPct val="120000"/>
-              </a:lnSpc>
-              <a:spcBef>
-                <a:spcPts val="1200"/>
-              </a:spcBef>
-              <a:defRPr sz="1100">
-                <a:solidFill>
-                  <a:srgbClr val="B0BEC5"/>
-                </a:solidFill>
-                <a:latin typeface="Segoe UI"/>
-              </a:defRPr>
-            </a:pPr>
-            <a:r>
-              <a:t>2. Duplicate and Null Pruning: Purges identical ledger lines and imputes missing intermediate NAV entries.</a:t>
-            </a:r>
-          </a:p>
-          <a:p>
-            <a:pPr>
-              <a:lnSpc>
-                <a:spcPct val="120000"/>
-              </a:lnSpc>
-              <a:spcBef>
-                <a:spcPts val="1200"/>
-              </a:spcBef>
-              <a:defRPr sz="1100">
-                <a:solidFill>
-                  <a:srgbClr val="B0BEC5"/>
-                </a:solidFill>
-                <a:latin typeface="Segoe UI"/>
-              </a:defRPr>
-            </a:pPr>
-            <a:r>
-              <a:t>3. SQL Loading Engine: Establishes a transaction and loads the dimension and fact tables into SQLite.</a:t>
-            </a:r>
-          </a:p>
-        </p:txBody>
-      </p:sp>
-      <p:sp>
-        <p:nvSpPr>
-          <p:cNvPr id="6" name="Rectangle 5"/>
+          <a:bodyPr rtlCol="0" anchor="ctr"/>
+          <a:lstStyle/>
+          <a:p>
+            <a:pPr algn="ctr"/>
+          </a:p>
+        </p:txBody>
+      </p:sp>
+      <p:sp>
+        <p:nvSpPr>
+          <p:cNvPr id="5" name="Rectangle 4"/>
           <p:cNvSpPr/>
           <p:nvPr/>
         </p:nvSpPr>
         <p:spPr>
           <a:xfrm>
-            <a:off x="6291072" y="1645920"/>
-            <a:ext cx="5212080" cy="4114800"/>
+            <a:off x="685800" y="1645920"/>
+            <a:ext cx="10817352" cy="1143000"/>
           </a:xfrm>
           <a:prstGeom prst="rect">
             <a:avLst/>
           </a:prstGeom>
           <a:solidFill>
-            <a:srgbClr val="1E2235"/>
+            <a:srgbClr val="F8FAFC"/>
           </a:solidFill>
-          <a:ln w="19050">
+          <a:ln w="12700">
             <a:solidFill>
-              <a:srgbClr val="3A405A"/>
+              <a:srgbClr val="DCE0E6"/>
             </a:solidFill>
           </a:ln>
         </p:spPr>
@@ -7417,116 +7583,23 @@
           </a:fontRef>
         </p:style>
         <p:txBody>
-          <a:bodyPr rtlCol="0" anchor="ctr" wrap="square" lIns="274320" tIns="274320"/>
-          <a:lstStyle/>
-          <a:p>
-            <a:pPr algn="ctr">
-              <a:defRPr sz="1600" b="1">
-                <a:solidFill>
-                  <a:srgbClr val="00E676"/>
-                </a:solidFill>
-                <a:latin typeface="Trebuchet MS"/>
-              </a:defRPr>
-            </a:pPr>
-            <a:r>
-              <a:t>Relational Star Schema Design</a:t>
-            </a:r>
-          </a:p>
-          <a:p>
-            <a:pPr>
-              <a:lnSpc>
-                <a:spcPct val="120000"/>
-              </a:lnSpc>
-              <a:spcBef>
-                <a:spcPts val="1000"/>
-              </a:spcBef>
-              <a:defRPr sz="1050">
-                <a:solidFill>
-                  <a:srgbClr val="B0BEC5"/>
-                </a:solidFill>
-                <a:latin typeface="Segoe UI"/>
-              </a:defRPr>
-            </a:pPr>
-            <a:r>
-              <a:t>• Dimension Tables: dim_scheme (fund attributes), dim_amc (asset manager masters), dim_investor (client demographics &amp; risk profiles), dim_date (unified time dimension).</a:t>
-            </a:r>
-          </a:p>
-          <a:p>
-            <a:pPr>
-              <a:lnSpc>
-                <a:spcPct val="120000"/>
-              </a:lnSpc>
-              <a:spcBef>
-                <a:spcPts val="1000"/>
-              </a:spcBef>
-              <a:defRPr sz="1050">
-                <a:solidFill>
-                  <a:srgbClr val="B0BEC5"/>
-                </a:solidFill>
-                <a:latin typeface="Segoe UI"/>
-              </a:defRPr>
-            </a:pPr>
-            <a:r>
-              <a:t>• Central Fact Tables: fact_nav_history (pricing records), fact_investor_transactions (retail transaction ledger), fact_scheme_performance (returns summaries).</a:t>
-            </a:r>
-          </a:p>
-          <a:p>
-            <a:pPr>
-              <a:lnSpc>
-                <a:spcPct val="120000"/>
-              </a:lnSpc>
-              <a:spcBef>
-                <a:spcPts val="1000"/>
-              </a:spcBef>
-              <a:defRPr sz="1050">
-                <a:solidFill>
-                  <a:srgbClr val="B0BEC5"/>
-                </a:solidFill>
-                <a:latin typeface="Segoe UI"/>
-              </a:defRPr>
-            </a:pPr>
-            <a:r>
-              <a:t>• Database Integrity: Primary key constraints, cascading foreign keys, and index keys on (date, scheme_code) to optimize analytical queries.</a:t>
-            </a:r>
-          </a:p>
-        </p:txBody>
-      </p:sp>
-    </p:spTree>
-  </p:cSld>
-  <p:clrMapOvr>
-    <a:masterClrMapping/>
-  </p:clrMapOvr>
-</p:sld>
-</file>
-
-<file path=ppt/slides/slide5.xml><?xml version="1.0" encoding="utf-8"?>
-<p:sld xmlns:a="http://schemas.openxmlformats.org/drawingml/2006/main" xmlns:p="http://schemas.openxmlformats.org/presentationml/2006/main" xmlns:r="http://schemas.openxmlformats.org/officeDocument/2006/relationships">
-  <p:cSld>
-    <p:bg>
-      <p:bgPr>
-        <a:solidFill>
-          <a:srgbClr val="0B0E14"/>
-        </a:solidFill>
-        <a:effectLst/>
-      </p:bgPr>
-    </p:bg>
-    <p:spTree>
-      <p:nvGrpSpPr>
-        <p:cNvPr id="1" name=""/>
-        <p:cNvGrpSpPr/>
-        <p:nvPr/>
-      </p:nvGrpSpPr>
-      <p:grpSpPr/>
-      <p:sp>
-        <p:nvSpPr>
-          <p:cNvPr id="2" name="TextBox 1"/>
+          <a:bodyPr rtlCol="0" anchor="ctr"/>
+          <a:lstStyle/>
+          <a:p>
+            <a:pPr algn="ctr"/>
+          </a:p>
+        </p:txBody>
+      </p:sp>
+      <p:sp>
+        <p:nvSpPr>
+          <p:cNvPr id="6" name="TextBox 5"/>
           <p:cNvSpPr txBox="1"/>
           <p:nvPr/>
         </p:nvSpPr>
         <p:spPr>
           <a:xfrm>
-            <a:off x="685800" y="365760"/>
-            <a:ext cx="9144000" cy="274320"/>
+            <a:off x="685800" y="1645920"/>
+            <a:ext cx="10817352" cy="1143000"/>
           </a:xfrm>
           <a:prstGeom prst="rect">
             <a:avLst/>
@@ -7534,80 +7607,65 @@
           <a:noFill/>
         </p:spPr>
         <p:txBody>
-          <a:bodyPr wrap="square">
+          <a:bodyPr wrap="square" lIns="274320" rIns="274320" tIns="137160">
             <a:spAutoFit/>
           </a:bodyPr>
           <a:lstStyle/>
           <a:p>
             <a:pPr>
-              <a:defRPr sz="900" b="1">
-                <a:solidFill>
-                  <a:srgbClr val="00E5FF"/>
-                </a:solidFill>
-                <a:latin typeface="Trebuchet MS"/>
+              <a:defRPr sz="1300" b="1">
+                <a:solidFill>
+                  <a:srgbClr val="000000"/>
+                </a:solidFill>
+                <a:latin typeface="Georgia"/>
               </a:defRPr>
             </a:pPr>
             <a:r>
-              <a:t>BLUESTOCK MUTUAL FUND ANALYTICS</a:t>
-            </a:r>
-          </a:p>
-        </p:txBody>
-      </p:sp>
-      <p:sp>
-        <p:nvSpPr>
-          <p:cNvPr id="3" name="TextBox 2"/>
-          <p:cNvSpPr txBox="1"/>
-          <p:nvPr/>
-        </p:nvSpPr>
-        <p:spPr>
-          <a:xfrm>
-            <a:off x="685800" y="594360"/>
-            <a:ext cx="10817352" cy="731520"/>
-          </a:xfrm>
-          <a:prstGeom prst="rect">
-            <a:avLst/>
-          </a:prstGeom>
-          <a:noFill/>
-        </p:spPr>
-        <p:txBody>
-          <a:bodyPr wrap="square">
-            <a:spAutoFit/>
-          </a:bodyPr>
-          <a:lstStyle/>
+              <a:t>Plotly Image Export Fallback</a:t>
+            </a:r>
+          </a:p>
           <a:p>
             <a:pPr>
-              <a:defRPr sz="2800" b="1">
-                <a:solidFill>
-                  <a:srgbClr val="FFFFFF"/>
-                </a:solidFill>
-                <a:latin typeface="Trebuchet MS"/>
+              <a:lnSpc>
+                <a:spcPct val="115000"/>
+              </a:lnSpc>
+              <a:spcBef>
+                <a:spcPts val="400"/>
+              </a:spcBef>
+              <a:defRPr sz="1050">
+                <a:solidFill>
+                  <a:srgbClr val="334155"/>
+                </a:solidFill>
+                <a:latin typeface="Calibri"/>
               </a:defRPr>
             </a:pPr>
             <a:r>
-              <a:t>Engineering Fallbacks: Handling Production Anomalies</a:t>
-            </a:r>
-          </a:p>
-        </p:txBody>
-      </p:sp>
-      <p:sp>
-        <p:nvSpPr>
-          <p:cNvPr id="4" name="Rectangle 3"/>
+              <a:t>Headless tasks on Windows often freeze when running Plotly's static image exporter (Kaleido). We implemented a Matplotlib/Seaborn rendering fallback that automatically translates Plotly trace definitions and exports high-fidelity PNGs if Kaleido hangs.</a:t>
+            </a:r>
+          </a:p>
+        </p:txBody>
+      </p:sp>
+      <p:sp>
+        <p:nvSpPr>
+          <p:cNvPr id="7" name="Rectangle 6"/>
           <p:cNvSpPr/>
           <p:nvPr/>
         </p:nvSpPr>
         <p:spPr>
           <a:xfrm>
-            <a:off x="685800" y="1280160"/>
-            <a:ext cx="10817352" cy="18288"/>
+            <a:off x="685800" y="3017520"/>
+            <a:ext cx="10817352" cy="1143000"/>
           </a:xfrm>
           <a:prstGeom prst="rect">
             <a:avLst/>
           </a:prstGeom>
           <a:solidFill>
-            <a:srgbClr val="1E2235"/>
+            <a:srgbClr val="F8FAFC"/>
           </a:solidFill>
-          <a:ln>
-            <a:noFill/>
+          <a:ln w="12700">
+            <a:solidFill>
+              <a:srgbClr val="DCE0E6"/>
+            </a:solidFill>
           </a:ln>
         </p:spPr>
         <p:style>
@@ -7634,24 +7692,79 @@
       </p:sp>
       <p:sp>
         <p:nvSpPr>
-          <p:cNvPr id="5" name="Rectangle 4"/>
+          <p:cNvPr id="8" name="TextBox 7"/>
+          <p:cNvSpPr txBox="1"/>
+          <p:nvPr/>
+        </p:nvSpPr>
+        <p:spPr>
+          <a:xfrm>
+            <a:off x="685800" y="3017520"/>
+            <a:ext cx="10817352" cy="1143000"/>
+          </a:xfrm>
+          <a:prstGeom prst="rect">
+            <a:avLst/>
+          </a:prstGeom>
+          <a:noFill/>
+        </p:spPr>
+        <p:txBody>
+          <a:bodyPr wrap="square" lIns="274320" rIns="274320" tIns="137160">
+            <a:spAutoFit/>
+          </a:bodyPr>
+          <a:lstStyle/>
+          <a:p>
+            <a:pPr>
+              <a:defRPr sz="1300" b="1">
+                <a:solidFill>
+                  <a:srgbClr val="000000"/>
+                </a:solidFill>
+                <a:latin typeface="Georgia"/>
+              </a:defRPr>
+            </a:pPr>
+            <a:r>
+              <a:t>yfinance MultiIndex Flattening</a:t>
+            </a:r>
+          </a:p>
+          <a:p>
+            <a:pPr>
+              <a:lnSpc>
+                <a:spcPct val="115000"/>
+              </a:lnSpc>
+              <a:spcBef>
+                <a:spcPts val="400"/>
+              </a:spcBef>
+              <a:defRPr sz="1050">
+                <a:solidFill>
+                  <a:srgbClr val="334155"/>
+                </a:solidFill>
+                <a:latin typeface="Calibri"/>
+              </a:defRPr>
+            </a:pPr>
+            <a:r>
+              <a:t>Downloading market indices via the Yahoo Finance API returns MultiIndexed columns on single tickers. The ingestion script programmatically flattens these column headers to prevent column shifting during dataframe serialization.</a:t>
+            </a:r>
+          </a:p>
+        </p:txBody>
+      </p:sp>
+      <p:sp>
+        <p:nvSpPr>
+          <p:cNvPr id="9" name="Rectangle 8"/>
           <p:cNvSpPr/>
           <p:nvPr/>
         </p:nvSpPr>
         <p:spPr>
           <a:xfrm>
-            <a:off x="685800" y="1645920"/>
+            <a:off x="685800" y="4389120"/>
             <a:ext cx="10817352" cy="1143000"/>
           </a:xfrm>
           <a:prstGeom prst="rect">
             <a:avLst/>
           </a:prstGeom>
           <a:solidFill>
-            <a:srgbClr val="1E2235"/>
+            <a:srgbClr val="F8FAFC"/>
           </a:solidFill>
-          <a:ln w="19050">
+          <a:ln w="12700">
             <a:solidFill>
-              <a:srgbClr val="3A405A"/>
+              <a:srgbClr val="DCE0E6"/>
             </a:solidFill>
           </a:ln>
         </p:spPr>
@@ -7679,13 +7792,13 @@
       </p:sp>
       <p:sp>
         <p:nvSpPr>
-          <p:cNvPr id="6" name="TextBox 5"/>
+          <p:cNvPr id="10" name="TextBox 9"/>
           <p:cNvSpPr txBox="1"/>
           <p:nvPr/>
         </p:nvSpPr>
         <p:spPr>
           <a:xfrm>
-            <a:off x="685800" y="1645920"/>
+            <a:off x="685800" y="4389120"/>
             <a:ext cx="10817352" cy="1143000"/>
           </a:xfrm>
           <a:prstGeom prst="rect">
@@ -7702,13 +7815,13 @@
             <a:pPr>
               <a:defRPr sz="1300" b="1">
                 <a:solidFill>
-                  <a:srgbClr val="00E5FF"/>
-                </a:solidFill>
-                <a:latin typeface="Trebuchet MS"/>
+                  <a:srgbClr val="000000"/>
+                </a:solidFill>
+                <a:latin typeface="Georgia"/>
               </a:defRPr>
             </a:pPr>
             <a:r>
-              <a:t>Plotly Image Export Fallback</a:t>
+              <a:t>Invalid Transaction Dates</a:t>
             </a:r>
           </a:p>
           <a:p>
@@ -7721,38 +7834,134 @@
               </a:spcBef>
               <a:defRPr sz="1050">
                 <a:solidFill>
-                  <a:srgbClr val="B0BEC5"/>
-                </a:solidFill>
-                <a:latin typeface="Segoe UI"/>
+                  <a:srgbClr val="334155"/>
+                </a:solidFill>
+                <a:latin typeface="Calibri"/>
               </a:defRPr>
             </a:pPr>
             <a:r>
-              <a:t>Headless tasks on Windows often freeze when running Plotly's static image exporter (Kaleido). We implemented a Matplotlib/Seaborn rendering fallback that automatically translates Plotly trace definitions and exports high-fidelity PNGs if Kaleido hangs.</a:t>
-            </a:r>
-          </a:p>
-        </p:txBody>
-      </p:sp>
-      <p:sp>
-        <p:nvSpPr>
-          <p:cNvPr id="7" name="Rectangle 6"/>
+              <a:t>The raw transactional sheet contained anomalous text inputs (e.g. 'INVALID' string entries). The cleaning pipeline resolves this by parsing date fields with errors coerced, and purging NaT rows to preserve integrity.</a:t>
+            </a:r>
+          </a:p>
+        </p:txBody>
+      </p:sp>
+    </p:spTree>
+  </p:cSld>
+  <p:clrMapOvr>
+    <a:masterClrMapping/>
+  </p:clrMapOvr>
+</p:sld>
+</file>
+
+<file path=ppt/slides/slide6.xml><?xml version="1.0" encoding="utf-8"?>
+<p:sld xmlns:a="http://schemas.openxmlformats.org/drawingml/2006/main" xmlns:p="http://schemas.openxmlformats.org/presentationml/2006/main" xmlns:r="http://schemas.openxmlformats.org/officeDocument/2006/relationships">
+  <p:cSld>
+    <p:bg>
+      <p:bgPr>
+        <a:solidFill>
+          <a:srgbClr val="FFFFFF"/>
+        </a:solidFill>
+        <a:effectLst/>
+      </p:bgPr>
+    </p:bg>
+    <p:spTree>
+      <p:nvGrpSpPr>
+        <p:cNvPr id="1" name=""/>
+        <p:cNvGrpSpPr/>
+        <p:nvPr/>
+      </p:nvGrpSpPr>
+      <p:grpSpPr/>
+      <p:sp>
+        <p:nvSpPr>
+          <p:cNvPr id="2" name="TextBox 1"/>
+          <p:cNvSpPr txBox="1"/>
+          <p:nvPr/>
+        </p:nvSpPr>
+        <p:spPr>
+          <a:xfrm>
+            <a:off x="685800" y="365760"/>
+            <a:ext cx="9144000" cy="274320"/>
+          </a:xfrm>
+          <a:prstGeom prst="rect">
+            <a:avLst/>
+          </a:prstGeom>
+          <a:noFill/>
+        </p:spPr>
+        <p:txBody>
+          <a:bodyPr wrap="square">
+            <a:spAutoFit/>
+          </a:bodyPr>
+          <a:lstStyle/>
+          <a:p>
+            <a:pPr>
+              <a:defRPr sz="850" b="1">
+                <a:solidFill>
+                  <a:srgbClr val="787878"/>
+                </a:solidFill>
+                <a:latin typeface="Calibri"/>
+              </a:defRPr>
+            </a:pPr>
+            <a:r>
+              <a:t>BLUESTOCK MUTUAL FUND ANALYTICS</a:t>
+            </a:r>
+          </a:p>
+        </p:txBody>
+      </p:sp>
+      <p:sp>
+        <p:nvSpPr>
+          <p:cNvPr id="3" name="TextBox 2"/>
+          <p:cNvSpPr txBox="1"/>
+          <p:nvPr/>
+        </p:nvSpPr>
+        <p:spPr>
+          <a:xfrm>
+            <a:off x="685800" y="502920"/>
+            <a:ext cx="10817352" cy="731520"/>
+          </a:xfrm>
+          <a:prstGeom prst="rect">
+            <a:avLst/>
+          </a:prstGeom>
+          <a:noFill/>
+        </p:spPr>
+        <p:txBody>
+          <a:bodyPr wrap="square">
+            <a:spAutoFit/>
+          </a:bodyPr>
+          <a:lstStyle/>
+          <a:p>
+            <a:pPr>
+              <a:defRPr sz="2600" b="1">
+                <a:solidFill>
+                  <a:srgbClr val="000000"/>
+                </a:solidFill>
+                <a:latin typeface="Georgia"/>
+              </a:defRPr>
+            </a:pPr>
+            <a:r>
+              <a:t>Exploratory Data Analysis: Key Statistical Insights</a:t>
+            </a:r>
+          </a:p>
+        </p:txBody>
+      </p:sp>
+      <p:sp>
+        <p:nvSpPr>
+          <p:cNvPr id="4" name="Rectangle 3"/>
           <p:cNvSpPr/>
           <p:nvPr/>
         </p:nvSpPr>
         <p:spPr>
           <a:xfrm>
-            <a:off x="685800" y="3017520"/>
-            <a:ext cx="10817352" cy="1143000"/>
+            <a:off x="685800" y="1188720"/>
+            <a:ext cx="10817352" cy="13716"/>
           </a:xfrm>
           <a:prstGeom prst="rect">
             <a:avLst/>
           </a:prstGeom>
           <a:solidFill>
-            <a:srgbClr val="1E2235"/>
+            <a:srgbClr val="D2D2D2"/>
           </a:solidFill>
-          <a:ln w="19050">
-            <a:solidFill>
-              <a:srgbClr val="3A405A"/>
-            </a:solidFill>
+          <a:ln>
+            <a:noFill/>
           </a:ln>
         </p:spPr>
         <p:style>
@@ -7779,79 +7988,24 @@
       </p:sp>
       <p:sp>
         <p:nvSpPr>
-          <p:cNvPr id="8" name="TextBox 7"/>
-          <p:cNvSpPr txBox="1"/>
-          <p:nvPr/>
-        </p:nvSpPr>
-        <p:spPr>
-          <a:xfrm>
-            <a:off x="685800" y="3017520"/>
-            <a:ext cx="10817352" cy="1143000"/>
-          </a:xfrm>
-          <a:prstGeom prst="rect">
-            <a:avLst/>
-          </a:prstGeom>
-          <a:noFill/>
-        </p:spPr>
-        <p:txBody>
-          <a:bodyPr wrap="square" lIns="274320" rIns="274320" tIns="137160">
-            <a:spAutoFit/>
-          </a:bodyPr>
-          <a:lstStyle/>
-          <a:p>
-            <a:pPr>
-              <a:defRPr sz="1300" b="1">
-                <a:solidFill>
-                  <a:srgbClr val="00E676"/>
-                </a:solidFill>
-                <a:latin typeface="Trebuchet MS"/>
-              </a:defRPr>
-            </a:pPr>
-            <a:r>
-              <a:t>yfinance MultiIndex Flattening</a:t>
-            </a:r>
-          </a:p>
-          <a:p>
-            <a:pPr>
-              <a:lnSpc>
-                <a:spcPct val="115000"/>
-              </a:lnSpc>
-              <a:spcBef>
-                <a:spcPts val="400"/>
-              </a:spcBef>
-              <a:defRPr sz="1050">
-                <a:solidFill>
-                  <a:srgbClr val="B0BEC5"/>
-                </a:solidFill>
-                <a:latin typeface="Segoe UI"/>
-              </a:defRPr>
-            </a:pPr>
-            <a:r>
-              <a:t>Downloading market indices via the Yahoo Finance API returns MultiIndexed columns on single tickers. The ingestion script programmatically flattens these column headers to prevent column shifting during dataframe serialization.</a:t>
-            </a:r>
-          </a:p>
-        </p:txBody>
-      </p:sp>
-      <p:sp>
-        <p:nvSpPr>
-          <p:cNvPr id="9" name="Rectangle 8"/>
+          <p:cNvPr id="5" name="Rectangle 4"/>
           <p:cNvSpPr/>
           <p:nvPr/>
         </p:nvSpPr>
         <p:spPr>
           <a:xfrm>
-            <a:off x="685800" y="4389120"/>
-            <a:ext cx="10817352" cy="1143000"/>
+            <a:off x="685800" y="1645920"/>
+            <a:ext cx="10817352" cy="1920240"/>
           </a:xfrm>
           <a:prstGeom prst="rect">
             <a:avLst/>
           </a:prstGeom>
           <a:solidFill>
-            <a:srgbClr val="1E2235"/>
+            <a:srgbClr val="F8FAFC"/>
           </a:solidFill>
-          <a:ln w="19050">
+          <a:ln w="12700">
             <a:solidFill>
-              <a:srgbClr val="3A405A"/>
+              <a:srgbClr val="DCE0E6"/>
             </a:solidFill>
           </a:ln>
         </p:spPr>
@@ -7879,14 +8033,14 @@
       </p:sp>
       <p:sp>
         <p:nvSpPr>
-          <p:cNvPr id="10" name="TextBox 9"/>
+          <p:cNvPr id="6" name="TextBox 5"/>
           <p:cNvSpPr txBox="1"/>
           <p:nvPr/>
         </p:nvSpPr>
         <p:spPr>
           <a:xfrm>
-            <a:off x="685800" y="4389120"/>
-            <a:ext cx="10817352" cy="1143000"/>
+            <a:off x="685800" y="1645920"/>
+            <a:ext cx="10817352" cy="1920240"/>
           </a:xfrm>
           <a:prstGeom prst="rect">
             <a:avLst/>
@@ -7894,161 +8048,65 @@
           <a:noFill/>
         </p:spPr>
         <p:txBody>
-          <a:bodyPr wrap="square" lIns="274320" rIns="274320" tIns="137160">
+          <a:bodyPr wrap="square" lIns="274320" rIns="274320" tIns="182880">
             <a:spAutoFit/>
           </a:bodyPr>
           <a:lstStyle/>
           <a:p>
             <a:pPr>
-              <a:defRPr sz="1300" b="1">
-                <a:solidFill>
-                  <a:srgbClr val="00E5FF"/>
-                </a:solidFill>
-                <a:latin typeface="Trebuchet MS"/>
+              <a:defRPr sz="1500" b="1">
+                <a:solidFill>
+                  <a:srgbClr val="000000"/>
+                </a:solidFill>
+                <a:latin typeface="Georgia"/>
               </a:defRPr>
             </a:pPr>
             <a:r>
-              <a:t>Invalid Transaction Dates</a:t>
+              <a:t>Scheme Co-movement &amp; Diversification</a:t>
             </a:r>
           </a:p>
           <a:p>
             <a:pPr>
               <a:lnSpc>
-                <a:spcPct val="115000"/>
+                <a:spcPct val="125000"/>
               </a:lnSpc>
               <a:spcBef>
-                <a:spcPts val="400"/>
+                <a:spcPts val="800"/>
               </a:spcBef>
-              <a:defRPr sz="1050">
-                <a:solidFill>
-                  <a:srgbClr val="B0BEC5"/>
-                </a:solidFill>
-                <a:latin typeface="Segoe UI"/>
+              <a:defRPr sz="1100">
+                <a:solidFill>
+                  <a:srgbClr val="334155"/>
+                </a:solidFill>
+                <a:latin typeface="Calibri"/>
               </a:defRPr>
             </a:pPr>
             <a:r>
-              <a:t>The raw transactional sheet contained anomalous text inputs (e.g. 'INVALID' string entries). The cleaning pipeline resolves this by parsing date fields with errors coerced, and purging NaT rows to preserve integrity.</a:t>
-            </a:r>
-          </a:p>
-        </p:txBody>
-      </p:sp>
-    </p:spTree>
-  </p:cSld>
-  <p:clrMapOvr>
-    <a:masterClrMapping/>
-  </p:clrMapOvr>
-</p:sld>
-</file>
-
-<file path=ppt/slides/slide6.xml><?xml version="1.0" encoding="utf-8"?>
-<p:sld xmlns:a="http://schemas.openxmlformats.org/drawingml/2006/main" xmlns:p="http://schemas.openxmlformats.org/presentationml/2006/main" xmlns:r="http://schemas.openxmlformats.org/officeDocument/2006/relationships">
-  <p:cSld>
-    <p:bg>
-      <p:bgPr>
-        <a:solidFill>
-          <a:srgbClr val="0B0E14"/>
-        </a:solidFill>
-        <a:effectLst/>
-      </p:bgPr>
-    </p:bg>
-    <p:spTree>
-      <p:nvGrpSpPr>
-        <p:cNvPr id="1" name=""/>
-        <p:cNvGrpSpPr/>
-        <p:nvPr/>
-      </p:nvGrpSpPr>
-      <p:grpSpPr/>
-      <p:sp>
-        <p:nvSpPr>
-          <p:cNvPr id="2" name="TextBox 1"/>
-          <p:cNvSpPr txBox="1"/>
-          <p:nvPr/>
-        </p:nvSpPr>
-        <p:spPr>
-          <a:xfrm>
-            <a:off x="685800" y="365760"/>
-            <a:ext cx="9144000" cy="274320"/>
-          </a:xfrm>
-          <a:prstGeom prst="rect">
-            <a:avLst/>
-          </a:prstGeom>
-          <a:noFill/>
-        </p:spPr>
-        <p:txBody>
-          <a:bodyPr wrap="square">
-            <a:spAutoFit/>
-          </a:bodyPr>
-          <a:lstStyle/>
-          <a:p>
-            <a:pPr>
-              <a:defRPr sz="900" b="1">
-                <a:solidFill>
-                  <a:srgbClr val="00E5FF"/>
-                </a:solidFill>
-                <a:latin typeface="Trebuchet MS"/>
-              </a:defRPr>
-            </a:pPr>
-            <a:r>
-              <a:t>BLUESTOCK MUTUAL FUND ANALYTICS</a:t>
-            </a:r>
-          </a:p>
-        </p:txBody>
-      </p:sp>
-      <p:sp>
-        <p:nvSpPr>
-          <p:cNvPr id="3" name="TextBox 2"/>
-          <p:cNvSpPr txBox="1"/>
-          <p:nvPr/>
-        </p:nvSpPr>
-        <p:spPr>
-          <a:xfrm>
-            <a:off x="685800" y="594360"/>
-            <a:ext cx="10817352" cy="731520"/>
-          </a:xfrm>
-          <a:prstGeom prst="rect">
-            <a:avLst/>
-          </a:prstGeom>
-          <a:noFill/>
-        </p:spPr>
-        <p:txBody>
-          <a:bodyPr wrap="square">
-            <a:spAutoFit/>
-          </a:bodyPr>
-          <a:lstStyle/>
-          <a:p>
-            <a:pPr>
-              <a:defRPr sz="2800" b="1">
-                <a:solidFill>
-                  <a:srgbClr val="FFFFFF"/>
-                </a:solidFill>
-                <a:latin typeface="Trebuchet MS"/>
-              </a:defRPr>
-            </a:pPr>
-            <a:r>
-              <a:t>Exploratory Data Analysis: Key Statistical Insights</a:t>
-            </a:r>
-          </a:p>
-        </p:txBody>
-      </p:sp>
-      <p:sp>
-        <p:nvSpPr>
-          <p:cNvPr id="4" name="Rectangle 3"/>
+              <a:t>Computing the Pearson correlation matrix on daily returns reveals a highly integrated large-cap segment. All core large-cap funds display return correlations above 0.85. In contrast, the ICICI Prudential Technology Fund exhibits a daily correlation of only 0.42 to the core index. This highlights its significant diversification benefit, serving as a shock-absorber during standard large-cap pullbacks.</a:t>
+            </a:r>
+          </a:p>
+        </p:txBody>
+      </p:sp>
+      <p:sp>
+        <p:nvSpPr>
+          <p:cNvPr id="7" name="Rectangle 6"/>
           <p:cNvSpPr/>
           <p:nvPr/>
         </p:nvSpPr>
         <p:spPr>
           <a:xfrm>
-            <a:off x="685800" y="1280160"/>
-            <a:ext cx="10817352" cy="18288"/>
+            <a:off x="685800" y="3840480"/>
+            <a:ext cx="10817352" cy="1920240"/>
           </a:xfrm>
           <a:prstGeom prst="rect">
             <a:avLst/>
           </a:prstGeom>
           <a:solidFill>
-            <a:srgbClr val="1E2235"/>
+            <a:srgbClr val="F8FAFC"/>
           </a:solidFill>
-          <a:ln>
-            <a:noFill/>
+          <a:ln w="12700">
+            <a:solidFill>
+              <a:srgbClr val="DCE0E6"/>
+            </a:solidFill>
           </a:ln>
         </p:spPr>
         <p:style>
@@ -8075,25 +8133,176 @@
       </p:sp>
       <p:sp>
         <p:nvSpPr>
-          <p:cNvPr id="5" name="Rectangle 4"/>
+          <p:cNvPr id="8" name="TextBox 7"/>
+          <p:cNvSpPr txBox="1"/>
+          <p:nvPr/>
+        </p:nvSpPr>
+        <p:spPr>
+          <a:xfrm>
+            <a:off x="685800" y="3840480"/>
+            <a:ext cx="10817352" cy="1920240"/>
+          </a:xfrm>
+          <a:prstGeom prst="rect">
+            <a:avLst/>
+          </a:prstGeom>
+          <a:noFill/>
+        </p:spPr>
+        <p:txBody>
+          <a:bodyPr wrap="square" lIns="274320" rIns="274320" tIns="182880">
+            <a:spAutoFit/>
+          </a:bodyPr>
+          <a:lstStyle/>
+          <a:p>
+            <a:pPr>
+              <a:defRPr sz="1500" b="1">
+                <a:solidFill>
+                  <a:srgbClr val="000000"/>
+                </a:solidFill>
+                <a:latin typeface="Georgia"/>
+              </a:defRPr>
+            </a:pPr>
+            <a:r>
+              <a:t>Expense Ratio Drag (OLS Regression)</a:t>
+            </a:r>
+          </a:p>
+          <a:p>
+            <a:pPr>
+              <a:lnSpc>
+                <a:spcPct val="125000"/>
+              </a:lnSpc>
+              <a:spcBef>
+                <a:spcPts val="800"/>
+              </a:spcBef>
+              <a:defRPr sz="1100">
+                <a:solidFill>
+                  <a:srgbClr val="334155"/>
+                </a:solidFill>
+                <a:latin typeface="Calibri"/>
+              </a:defRPr>
+            </a:pPr>
+            <a:r>
+              <a:t>We ran an Ordinary Least Squares (OLS) regression mapping return drag as a function of annual fund fees. The model confirms that expense ratios act as a systemic drag on performance. Active schemes with expense structures exceeding 1.10% (e.g. SBI Small Cap) consistently erode net compounding returns compared to cost-efficient peers with similar portfolios.</a:t>
+            </a:r>
+          </a:p>
+        </p:txBody>
+      </p:sp>
+    </p:spTree>
+  </p:cSld>
+  <p:clrMapOvr>
+    <a:masterClrMapping/>
+  </p:clrMapOvr>
+</p:sld>
+</file>
+
+<file path=ppt/slides/slide7.xml><?xml version="1.0" encoding="utf-8"?>
+<p:sld xmlns:a="http://schemas.openxmlformats.org/drawingml/2006/main" xmlns:p="http://schemas.openxmlformats.org/presentationml/2006/main" xmlns:r="http://schemas.openxmlformats.org/officeDocument/2006/relationships">
+  <p:cSld>
+    <p:bg>
+      <p:bgPr>
+        <a:solidFill>
+          <a:srgbClr val="FFFFFF"/>
+        </a:solidFill>
+        <a:effectLst/>
+      </p:bgPr>
+    </p:bg>
+    <p:spTree>
+      <p:nvGrpSpPr>
+        <p:cNvPr id="1" name=""/>
+        <p:cNvGrpSpPr/>
+        <p:nvPr/>
+      </p:nvGrpSpPr>
+      <p:grpSpPr/>
+      <p:sp>
+        <p:nvSpPr>
+          <p:cNvPr id="2" name="TextBox 1"/>
+          <p:cNvSpPr txBox="1"/>
+          <p:nvPr/>
+        </p:nvSpPr>
+        <p:spPr>
+          <a:xfrm>
+            <a:off x="685800" y="365760"/>
+            <a:ext cx="9144000" cy="274320"/>
+          </a:xfrm>
+          <a:prstGeom prst="rect">
+            <a:avLst/>
+          </a:prstGeom>
+          <a:noFill/>
+        </p:spPr>
+        <p:txBody>
+          <a:bodyPr wrap="square">
+            <a:spAutoFit/>
+          </a:bodyPr>
+          <a:lstStyle/>
+          <a:p>
+            <a:pPr>
+              <a:defRPr sz="850" b="1">
+                <a:solidFill>
+                  <a:srgbClr val="787878"/>
+                </a:solidFill>
+                <a:latin typeface="Calibri"/>
+              </a:defRPr>
+            </a:pPr>
+            <a:r>
+              <a:t>BLUESTOCK MUTUAL FUND ANALYTICS</a:t>
+            </a:r>
+          </a:p>
+        </p:txBody>
+      </p:sp>
+      <p:sp>
+        <p:nvSpPr>
+          <p:cNvPr id="3" name="TextBox 2"/>
+          <p:cNvSpPr txBox="1"/>
+          <p:nvPr/>
+        </p:nvSpPr>
+        <p:spPr>
+          <a:xfrm>
+            <a:off x="685800" y="502920"/>
+            <a:ext cx="10817352" cy="731520"/>
+          </a:xfrm>
+          <a:prstGeom prst="rect">
+            <a:avLst/>
+          </a:prstGeom>
+          <a:noFill/>
+        </p:spPr>
+        <p:txBody>
+          <a:bodyPr wrap="square">
+            <a:spAutoFit/>
+          </a:bodyPr>
+          <a:lstStyle/>
+          <a:p>
+            <a:pPr>
+              <a:defRPr sz="2600" b="1">
+                <a:solidFill>
+                  <a:srgbClr val="000000"/>
+                </a:solidFill>
+                <a:latin typeface="Georgia"/>
+              </a:defRPr>
+            </a:pPr>
+            <a:r>
+              <a:t>The Performance Scorecard Leaderboard (Day 4)</a:t>
+            </a:r>
+          </a:p>
+        </p:txBody>
+      </p:sp>
+      <p:sp>
+        <p:nvSpPr>
+          <p:cNvPr id="4" name="Rectangle 3"/>
           <p:cNvSpPr/>
           <p:nvPr/>
         </p:nvSpPr>
         <p:spPr>
           <a:xfrm>
-            <a:off x="685800" y="1645920"/>
-            <a:ext cx="10817352" cy="1920240"/>
+            <a:off x="685800" y="1188720"/>
+            <a:ext cx="10817352" cy="13716"/>
           </a:xfrm>
           <a:prstGeom prst="rect">
             <a:avLst/>
           </a:prstGeom>
           <a:solidFill>
-            <a:srgbClr val="1E2235"/>
+            <a:srgbClr val="D2D2D2"/>
           </a:solidFill>
-          <a:ln w="19050">
-            <a:solidFill>
-              <a:srgbClr val="3A405A"/>
-            </a:solidFill>
+          <a:ln>
+            <a:noFill/>
           </a:ln>
         </p:spPr>
         <p:style>
@@ -8120,14 +8329,14 @@
       </p:sp>
       <p:sp>
         <p:nvSpPr>
-          <p:cNvPr id="6" name="TextBox 5"/>
+          <p:cNvPr id="5" name="TextBox 4"/>
           <p:cNvSpPr txBox="1"/>
           <p:nvPr/>
         </p:nvSpPr>
         <p:spPr>
           <a:xfrm>
             <a:off x="685800" y="1645920"/>
-            <a:ext cx="10817352" cy="1920240"/>
+            <a:ext cx="3474720" cy="4114800"/>
           </a:xfrm>
           <a:prstGeom prst="rect">
             <a:avLst/>
@@ -8135,302 +8344,6 @@
           <a:noFill/>
         </p:spPr>
         <p:txBody>
-          <a:bodyPr wrap="square" lIns="274320" rIns="274320" tIns="182880">
-            <a:spAutoFit/>
-          </a:bodyPr>
-          <a:lstStyle/>
-          <a:p>
-            <a:pPr>
-              <a:defRPr sz="1500" b="1">
-                <a:solidFill>
-                  <a:srgbClr val="00E5FF"/>
-                </a:solidFill>
-                <a:latin typeface="Trebuchet MS"/>
-              </a:defRPr>
-            </a:pPr>
-            <a:r>
-              <a:t>Scheme Co-movement &amp; Diversification</a:t>
-            </a:r>
-          </a:p>
-          <a:p>
-            <a:pPr>
-              <a:lnSpc>
-                <a:spcPct val="125000"/>
-              </a:lnSpc>
-              <a:spcBef>
-                <a:spcPts val="800"/>
-              </a:spcBef>
-              <a:defRPr sz="1100">
-                <a:solidFill>
-                  <a:srgbClr val="B0BEC5"/>
-                </a:solidFill>
-                <a:latin typeface="Segoe UI"/>
-              </a:defRPr>
-            </a:pPr>
-            <a:r>
-              <a:t>Computing the Pearson correlation matrix on daily returns reveals a highly integrated large-cap segment. All core large-cap funds display return correlations above 0.85. In contrast, the ICICI Prudential Technology Fund exhibits a daily correlation of only 0.42 to the core index. This highlights its significant diversification benefit, serving as a shock-absorber during standard large-cap pullbacks.</a:t>
-            </a:r>
-          </a:p>
-        </p:txBody>
-      </p:sp>
-      <p:sp>
-        <p:nvSpPr>
-          <p:cNvPr id="7" name="Rectangle 6"/>
-          <p:cNvSpPr/>
-          <p:nvPr/>
-        </p:nvSpPr>
-        <p:spPr>
-          <a:xfrm>
-            <a:off x="685800" y="3840480"/>
-            <a:ext cx="10817352" cy="1920240"/>
-          </a:xfrm>
-          <a:prstGeom prst="rect">
-            <a:avLst/>
-          </a:prstGeom>
-          <a:solidFill>
-            <a:srgbClr val="1E2235"/>
-          </a:solidFill>
-          <a:ln w="19050">
-            <a:solidFill>
-              <a:srgbClr val="3A405A"/>
-            </a:solidFill>
-          </a:ln>
-        </p:spPr>
-        <p:style>
-          <a:lnRef idx="1">
-            <a:schemeClr val="accent1"/>
-          </a:lnRef>
-          <a:fillRef idx="3">
-            <a:schemeClr val="accent1"/>
-          </a:fillRef>
-          <a:effectRef idx="2">
-            <a:schemeClr val="accent1"/>
-          </a:effectRef>
-          <a:fontRef idx="minor">
-            <a:schemeClr val="lt1"/>
-          </a:fontRef>
-        </p:style>
-        <p:txBody>
-          <a:bodyPr rtlCol="0" anchor="ctr"/>
-          <a:lstStyle/>
-          <a:p>
-            <a:pPr algn="ctr"/>
-          </a:p>
-        </p:txBody>
-      </p:sp>
-      <p:sp>
-        <p:nvSpPr>
-          <p:cNvPr id="8" name="TextBox 7"/>
-          <p:cNvSpPr txBox="1"/>
-          <p:nvPr/>
-        </p:nvSpPr>
-        <p:spPr>
-          <a:xfrm>
-            <a:off x="685800" y="3840480"/>
-            <a:ext cx="10817352" cy="1920240"/>
-          </a:xfrm>
-          <a:prstGeom prst="rect">
-            <a:avLst/>
-          </a:prstGeom>
-          <a:noFill/>
-        </p:spPr>
-        <p:txBody>
-          <a:bodyPr wrap="square" lIns="274320" rIns="274320" tIns="182880">
-            <a:spAutoFit/>
-          </a:bodyPr>
-          <a:lstStyle/>
-          <a:p>
-            <a:pPr>
-              <a:defRPr sz="1500" b="1">
-                <a:solidFill>
-                  <a:srgbClr val="00E676"/>
-                </a:solidFill>
-                <a:latin typeface="Trebuchet MS"/>
-              </a:defRPr>
-            </a:pPr>
-            <a:r>
-              <a:t>Expense Ratio Drag (OLS Regression)</a:t>
-            </a:r>
-          </a:p>
-          <a:p>
-            <a:pPr>
-              <a:lnSpc>
-                <a:spcPct val="125000"/>
-              </a:lnSpc>
-              <a:spcBef>
-                <a:spcPts val="800"/>
-              </a:spcBef>
-              <a:defRPr sz="1100">
-                <a:solidFill>
-                  <a:srgbClr val="B0BEC5"/>
-                </a:solidFill>
-                <a:latin typeface="Segoe UI"/>
-              </a:defRPr>
-            </a:pPr>
-            <a:r>
-              <a:t>We ran an Ordinary Least Squares (OLS) regression mapping return drag as a function of annual fund fees. The model confirms that expense ratios act as a systemic drag on performance. Active schemes with expense structures exceeding 1.10% (e.g. SBI Small Cap) consistently erode net compounding returns compared to cost-efficient peers with similar portfolios.</a:t>
-            </a:r>
-          </a:p>
-        </p:txBody>
-      </p:sp>
-    </p:spTree>
-  </p:cSld>
-  <p:clrMapOvr>
-    <a:masterClrMapping/>
-  </p:clrMapOvr>
-</p:sld>
-</file>
-
-<file path=ppt/slides/slide7.xml><?xml version="1.0" encoding="utf-8"?>
-<p:sld xmlns:a="http://schemas.openxmlformats.org/drawingml/2006/main" xmlns:p="http://schemas.openxmlformats.org/presentationml/2006/main" xmlns:r="http://schemas.openxmlformats.org/officeDocument/2006/relationships">
-  <p:cSld>
-    <p:bg>
-      <p:bgPr>
-        <a:solidFill>
-          <a:srgbClr val="0B0E14"/>
-        </a:solidFill>
-        <a:effectLst/>
-      </p:bgPr>
-    </p:bg>
-    <p:spTree>
-      <p:nvGrpSpPr>
-        <p:cNvPr id="1" name=""/>
-        <p:cNvGrpSpPr/>
-        <p:nvPr/>
-      </p:nvGrpSpPr>
-      <p:grpSpPr/>
-      <p:sp>
-        <p:nvSpPr>
-          <p:cNvPr id="2" name="TextBox 1"/>
-          <p:cNvSpPr txBox="1"/>
-          <p:nvPr/>
-        </p:nvSpPr>
-        <p:spPr>
-          <a:xfrm>
-            <a:off x="685800" y="365760"/>
-            <a:ext cx="9144000" cy="274320"/>
-          </a:xfrm>
-          <a:prstGeom prst="rect">
-            <a:avLst/>
-          </a:prstGeom>
-          <a:noFill/>
-        </p:spPr>
-        <p:txBody>
-          <a:bodyPr wrap="square">
-            <a:spAutoFit/>
-          </a:bodyPr>
-          <a:lstStyle/>
-          <a:p>
-            <a:pPr>
-              <a:defRPr sz="900" b="1">
-                <a:solidFill>
-                  <a:srgbClr val="00E5FF"/>
-                </a:solidFill>
-                <a:latin typeface="Trebuchet MS"/>
-              </a:defRPr>
-            </a:pPr>
-            <a:r>
-              <a:t>BLUESTOCK MUTUAL FUND ANALYTICS</a:t>
-            </a:r>
-          </a:p>
-        </p:txBody>
-      </p:sp>
-      <p:sp>
-        <p:nvSpPr>
-          <p:cNvPr id="3" name="TextBox 2"/>
-          <p:cNvSpPr txBox="1"/>
-          <p:nvPr/>
-        </p:nvSpPr>
-        <p:spPr>
-          <a:xfrm>
-            <a:off x="685800" y="594360"/>
-            <a:ext cx="10817352" cy="731520"/>
-          </a:xfrm>
-          <a:prstGeom prst="rect">
-            <a:avLst/>
-          </a:prstGeom>
-          <a:noFill/>
-        </p:spPr>
-        <p:txBody>
-          <a:bodyPr wrap="square">
-            <a:spAutoFit/>
-          </a:bodyPr>
-          <a:lstStyle/>
-          <a:p>
-            <a:pPr>
-              <a:defRPr sz="2800" b="1">
-                <a:solidFill>
-                  <a:srgbClr val="FFFFFF"/>
-                </a:solidFill>
-                <a:latin typeface="Trebuchet MS"/>
-              </a:defRPr>
-            </a:pPr>
-            <a:r>
-              <a:t>The Performance Scorecard Leaderboard (Day 4)</a:t>
-            </a:r>
-          </a:p>
-        </p:txBody>
-      </p:sp>
-      <p:sp>
-        <p:nvSpPr>
-          <p:cNvPr id="4" name="Rectangle 3"/>
-          <p:cNvSpPr/>
-          <p:nvPr/>
-        </p:nvSpPr>
-        <p:spPr>
-          <a:xfrm>
-            <a:off x="685800" y="1280160"/>
-            <a:ext cx="10817352" cy="18288"/>
-          </a:xfrm>
-          <a:prstGeom prst="rect">
-            <a:avLst/>
-          </a:prstGeom>
-          <a:solidFill>
-            <a:srgbClr val="1E2235"/>
-          </a:solidFill>
-          <a:ln>
-            <a:noFill/>
-          </a:ln>
-        </p:spPr>
-        <p:style>
-          <a:lnRef idx="1">
-            <a:schemeClr val="accent1"/>
-          </a:lnRef>
-          <a:fillRef idx="3">
-            <a:schemeClr val="accent1"/>
-          </a:fillRef>
-          <a:effectRef idx="2">
-            <a:schemeClr val="accent1"/>
-          </a:effectRef>
-          <a:fontRef idx="minor">
-            <a:schemeClr val="lt1"/>
-          </a:fontRef>
-        </p:style>
-        <p:txBody>
-          <a:bodyPr rtlCol="0" anchor="ctr"/>
-          <a:lstStyle/>
-          <a:p>
-            <a:pPr algn="ctr"/>
-          </a:p>
-        </p:txBody>
-      </p:sp>
-      <p:sp>
-        <p:nvSpPr>
-          <p:cNvPr id="5" name="TextBox 4"/>
-          <p:cNvSpPr txBox="1"/>
-          <p:nvPr/>
-        </p:nvSpPr>
-        <p:spPr>
-          <a:xfrm>
-            <a:off x="685800" y="1645920"/>
-            <a:ext cx="3474720" cy="4114800"/>
-          </a:xfrm>
-          <a:prstGeom prst="rect">
-            <a:avLst/>
-          </a:prstGeom>
-          <a:noFill/>
-        </p:spPr>
-        <p:txBody>
           <a:bodyPr wrap="square" lIns="0">
             <a:spAutoFit/>
           </a:bodyPr>
@@ -8439,9 +8352,9 @@
             <a:pPr>
               <a:defRPr sz="1600" b="1">
                 <a:solidFill>
-                  <a:srgbClr val="00E5FF"/>
-                </a:solidFill>
-                <a:latin typeface="Trebuchet MS"/>
+                  <a:srgbClr val="000000"/>
+                </a:solidFill>
+                <a:latin typeface="Georgia"/>
               </a:defRPr>
             </a:pPr>
             <a:r>
@@ -8458,9 +8371,9 @@
               </a:spcBef>
               <a:defRPr sz="1000">
                 <a:solidFill>
-                  <a:srgbClr val="B0BEC5"/>
-                </a:solidFill>
-                <a:latin typeface="Segoe UI"/>
+                  <a:srgbClr val="334155"/>
+                </a:solidFill>
+                <a:latin typeface="Calibri"/>
               </a:defRPr>
             </a:pPr>
             <a:r>
@@ -8538,7 +8451,7 @@
                           <a:solidFill>
                             <a:srgbClr val="FFFFFF"/>
                           </a:solidFill>
-                          <a:latin typeface="Trebuchet MS"/>
+                          <a:latin typeface="Georgia"/>
                         </a:defRPr>
                       </a:pPr>
                       <a:r>
@@ -8548,7 +8461,7 @@
                   </a:txBody>
                   <a:tcPr>
                     <a:solidFill>
-                      <a:srgbClr val="1E2235"/>
+                      <a:srgbClr val="282C37"/>
                     </a:solidFill>
                   </a:tcPr>
                 </a:tc>
@@ -8562,7 +8475,7 @@
                           <a:solidFill>
                             <a:srgbClr val="FFFFFF"/>
                           </a:solidFill>
-                          <a:latin typeface="Trebuchet MS"/>
+                          <a:latin typeface="Georgia"/>
                         </a:defRPr>
                       </a:pPr>
                       <a:r>
@@ -8572,7 +8485,7 @@
                   </a:txBody>
                   <a:tcPr>
                     <a:solidFill>
-                      <a:srgbClr val="1E2235"/>
+                      <a:srgbClr val="282C37"/>
                     </a:solidFill>
                   </a:tcPr>
                 </a:tc>
@@ -8586,7 +8499,7 @@
                           <a:solidFill>
                             <a:srgbClr val="FFFFFF"/>
                           </a:solidFill>
-                          <a:latin typeface="Trebuchet MS"/>
+                          <a:latin typeface="Georgia"/>
                         </a:defRPr>
                       </a:pPr>
                       <a:r>
@@ -8596,7 +8509,7 @@
                   </a:txBody>
                   <a:tcPr>
                     <a:solidFill>
-                      <a:srgbClr val="1E2235"/>
+                      <a:srgbClr val="282C37"/>
                     </a:solidFill>
                   </a:tcPr>
                 </a:tc>
@@ -8610,7 +8523,7 @@
                           <a:solidFill>
                             <a:srgbClr val="FFFFFF"/>
                           </a:solidFill>
-                          <a:latin typeface="Trebuchet MS"/>
+                          <a:latin typeface="Georgia"/>
                         </a:defRPr>
                       </a:pPr>
                       <a:r>
@@ -8620,7 +8533,7 @@
                   </a:txBody>
                   <a:tcPr>
                     <a:solidFill>
-                      <a:srgbClr val="1E2235"/>
+                      <a:srgbClr val="282C37"/>
                     </a:solidFill>
                   </a:tcPr>
                 </a:tc>
@@ -8634,7 +8547,7 @@
                           <a:solidFill>
                             <a:srgbClr val="FFFFFF"/>
                           </a:solidFill>
-                          <a:latin typeface="Trebuchet MS"/>
+                          <a:latin typeface="Georgia"/>
                         </a:defRPr>
                       </a:pPr>
                       <a:r>
@@ -8644,7 +8557,7 @@
                   </a:txBody>
                   <a:tcPr>
                     <a:solidFill>
-                      <a:srgbClr val="1E2235"/>
+                      <a:srgbClr val="282C37"/>
                     </a:solidFill>
                   </a:tcPr>
                 </a:tc>
@@ -8658,7 +8571,7 @@
                           <a:solidFill>
                             <a:srgbClr val="FFFFFF"/>
                           </a:solidFill>
-                          <a:latin typeface="Trebuchet MS"/>
+                          <a:latin typeface="Georgia"/>
                         </a:defRPr>
                       </a:pPr>
                       <a:r>
@@ -8668,7 +8581,7 @@
                   </a:txBody>
                   <a:tcPr>
                     <a:solidFill>
-                      <a:srgbClr val="1E2235"/>
+                      <a:srgbClr val="282C37"/>
                     </a:solidFill>
                   </a:tcPr>
                 </a:tc>
@@ -8682,7 +8595,7 @@
                           <a:solidFill>
                             <a:srgbClr val="FFFFFF"/>
                           </a:solidFill>
-                          <a:latin typeface="Trebuchet MS"/>
+                          <a:latin typeface="Georgia"/>
                         </a:defRPr>
                       </a:pPr>
                       <a:r>
@@ -8692,7 +8605,7 @@
                   </a:txBody>
                   <a:tcPr>
                     <a:solidFill>
-                      <a:srgbClr val="1E2235"/>
+                      <a:srgbClr val="282C37"/>
                     </a:solidFill>
                   </a:tcPr>
                 </a:tc>
@@ -8706,9 +8619,9 @@
                       <a:pPr algn="ctr">
                         <a:defRPr sz="900" b="1">
                           <a:solidFill>
-                            <a:srgbClr val="00E5FF"/>
+                            <a:srgbClr val="000000"/>
                           </a:solidFill>
-                          <a:latin typeface="Segoe UI"/>
+                          <a:latin typeface="Calibri"/>
                         </a:defRPr>
                       </a:pPr>
                       <a:r>
@@ -8718,7 +8631,7 @@
                   </a:txBody>
                   <a:tcPr>
                     <a:solidFill>
-                      <a:srgbClr val="141826"/>
+                      <a:srgbClr val="F5F7FA"/>
                     </a:solidFill>
                   </a:tcPr>
                 </a:tc>
@@ -8730,9 +8643,9 @@
                       <a:pPr algn="l">
                         <a:defRPr sz="900">
                           <a:solidFill>
-                            <a:srgbClr val="B0BEC5"/>
+                            <a:srgbClr val="334155"/>
                           </a:solidFill>
-                          <a:latin typeface="Segoe UI"/>
+                          <a:latin typeface="Calibri"/>
                         </a:defRPr>
                       </a:pPr>
                       <a:r>
@@ -8742,7 +8655,7 @@
                   </a:txBody>
                   <a:tcPr>
                     <a:solidFill>
-                      <a:srgbClr val="141826"/>
+                      <a:srgbClr val="F5F7FA"/>
                     </a:solidFill>
                   </a:tcPr>
                 </a:tc>
@@ -8754,9 +8667,9 @@
                       <a:pPr algn="ctr">
                         <a:defRPr sz="900">
                           <a:solidFill>
-                            <a:srgbClr val="B0BEC5"/>
+                            <a:srgbClr val="334155"/>
                           </a:solidFill>
-                          <a:latin typeface="Segoe UI"/>
+                          <a:latin typeface="Calibri"/>
                         </a:defRPr>
                       </a:pPr>
                       <a:r>
@@ -8766,7 +8679,7 @@
                   </a:txBody>
                   <a:tcPr>
                     <a:solidFill>
-                      <a:srgbClr val="141826"/>
+                      <a:srgbClr val="F5F7FA"/>
                     </a:solidFill>
                   </a:tcPr>
                 </a:tc>
@@ -8778,9 +8691,9 @@
                       <a:pPr algn="ctr">
                         <a:defRPr sz="900">
                           <a:solidFill>
-                            <a:srgbClr val="B0BEC5"/>
+                            <a:srgbClr val="334155"/>
                           </a:solidFill>
-                          <a:latin typeface="Segoe UI"/>
+                          <a:latin typeface="Calibri"/>
                         </a:defRPr>
                       </a:pPr>
                       <a:r>
@@ -8790,7 +8703,7 @@
                   </a:txBody>
                   <a:tcPr>
                     <a:solidFill>
-                      <a:srgbClr val="141826"/>
+                      <a:srgbClr val="F5F7FA"/>
                     </a:solidFill>
                   </a:tcPr>
                 </a:tc>
@@ -8802,9 +8715,9 @@
                       <a:pPr algn="ctr">
                         <a:defRPr sz="900">
                           <a:solidFill>
-                            <a:srgbClr val="B0BEC5"/>
+                            <a:srgbClr val="334155"/>
                           </a:solidFill>
-                          <a:latin typeface="Segoe UI"/>
+                          <a:latin typeface="Calibri"/>
                         </a:defRPr>
                       </a:pPr>
                       <a:r>
@@ -8814,7 +8727,7 @@
                   </a:txBody>
                   <a:tcPr>
                     <a:solidFill>
-                      <a:srgbClr val="141826"/>
+                      <a:srgbClr val="F5F7FA"/>
                     </a:solidFill>
                   </a:tcPr>
                 </a:tc>
@@ -8826,9 +8739,9 @@
                       <a:pPr algn="ctr">
                         <a:defRPr sz="900">
                           <a:solidFill>
-                            <a:srgbClr val="B0BEC5"/>
+                            <a:srgbClr val="334155"/>
                           </a:solidFill>
-                          <a:latin typeface="Segoe UI"/>
+                          <a:latin typeface="Calibri"/>
                         </a:defRPr>
                       </a:pPr>
                       <a:r>
@@ -8838,7 +8751,7 @@
                   </a:txBody>
                   <a:tcPr>
                     <a:solidFill>
-                      <a:srgbClr val="141826"/>
+                      <a:srgbClr val="F5F7FA"/>
                     </a:solidFill>
                   </a:tcPr>
                 </a:tc>
@@ -8850,9 +8763,9 @@
                       <a:pPr algn="ctr">
                         <a:defRPr sz="900">
                           <a:solidFill>
-                            <a:srgbClr val="B0BEC5"/>
+                            <a:srgbClr val="334155"/>
                           </a:solidFill>
-                          <a:latin typeface="Segoe UI"/>
+                          <a:latin typeface="Calibri"/>
                         </a:defRPr>
                       </a:pPr>
                       <a:r>
@@ -8862,7 +8775,7 @@
                   </a:txBody>
                   <a:tcPr>
                     <a:solidFill>
-                      <a:srgbClr val="141826"/>
+                      <a:srgbClr val="F5F7FA"/>
                     </a:solidFill>
                   </a:tcPr>
                 </a:tc>
@@ -8876,9 +8789,9 @@
                       <a:pPr algn="ctr">
                         <a:defRPr sz="900" b="1">
                           <a:solidFill>
-                            <a:srgbClr val="00E5FF"/>
+                            <a:srgbClr val="000000"/>
                           </a:solidFill>
-                          <a:latin typeface="Segoe UI"/>
+                          <a:latin typeface="Calibri"/>
                         </a:defRPr>
                       </a:pPr>
                       <a:r>
@@ -8888,7 +8801,7 @@
                   </a:txBody>
                   <a:tcPr>
                     <a:solidFill>
-                      <a:srgbClr val="0B0E14"/>
+                      <a:srgbClr val="FFFFFF"/>
                     </a:solidFill>
                   </a:tcPr>
                 </a:tc>
@@ -8900,9 +8813,9 @@
                       <a:pPr algn="l">
                         <a:defRPr sz="900">
                           <a:solidFill>
-                            <a:srgbClr val="B0BEC5"/>
+                            <a:srgbClr val="334155"/>
                           </a:solidFill>
-                          <a:latin typeface="Segoe UI"/>
+                          <a:latin typeface="Calibri"/>
                         </a:defRPr>
                       </a:pPr>
                       <a:r>
@@ -8912,7 +8825,7 @@
                   </a:txBody>
                   <a:tcPr>
                     <a:solidFill>
-                      <a:srgbClr val="0B0E14"/>
+                      <a:srgbClr val="FFFFFF"/>
                     </a:solidFill>
                   </a:tcPr>
                 </a:tc>
@@ -8924,9 +8837,9 @@
                       <a:pPr algn="ctr">
                         <a:defRPr sz="900">
                           <a:solidFill>
-                            <a:srgbClr val="B0BEC5"/>
+                            <a:srgbClr val="334155"/>
                           </a:solidFill>
-                          <a:latin typeface="Segoe UI"/>
+                          <a:latin typeface="Calibri"/>
                         </a:defRPr>
                       </a:pPr>
                       <a:r>
@@ -8936,7 +8849,7 @@
                   </a:txBody>
                   <a:tcPr>
                     <a:solidFill>
-                      <a:srgbClr val="0B0E14"/>
+                      <a:srgbClr val="FFFFFF"/>
                     </a:solidFill>
                   </a:tcPr>
                 </a:tc>
@@ -8948,9 +8861,9 @@
                       <a:pPr algn="ctr">
                         <a:defRPr sz="900">
                           <a:solidFill>
-                            <a:srgbClr val="B0BEC5"/>
+                            <a:srgbClr val="334155"/>
                           </a:solidFill>
-                          <a:latin typeface="Segoe UI"/>
+                          <a:latin typeface="Calibri"/>
                         </a:defRPr>
                       </a:pPr>
                       <a:r>
@@ -8960,7 +8873,7 @@
                   </a:txBody>
                   <a:tcPr>
                     <a:solidFill>
-                      <a:srgbClr val="0B0E14"/>
+                      <a:srgbClr val="FFFFFF"/>
                     </a:solidFill>
                   </a:tcPr>
                 </a:tc>
@@ -8972,9 +8885,9 @@
                       <a:pPr algn="ctr">
                         <a:defRPr sz="900">
                           <a:solidFill>
-                            <a:srgbClr val="B0BEC5"/>
+                            <a:srgbClr val="334155"/>
                           </a:solidFill>
-                          <a:latin typeface="Segoe UI"/>
+                          <a:latin typeface="Calibri"/>
                         </a:defRPr>
                       </a:pPr>
                       <a:r>
@@ -8984,7 +8897,7 @@
                   </a:txBody>
                   <a:tcPr>
                     <a:solidFill>
-                      <a:srgbClr val="0B0E14"/>
+                      <a:srgbClr val="FFFFFF"/>
                     </a:solidFill>
                   </a:tcPr>
                 </a:tc>
@@ -8996,9 +8909,9 @@
                       <a:pPr algn="ctr">
                         <a:defRPr sz="900">
                           <a:solidFill>
-                            <a:srgbClr val="B0BEC5"/>
+                            <a:srgbClr val="334155"/>
                           </a:solidFill>
-                          <a:latin typeface="Segoe UI"/>
+                          <a:latin typeface="Calibri"/>
                         </a:defRPr>
                       </a:pPr>
                       <a:r>
@@ -9008,7 +8921,7 @@
                   </a:txBody>
                   <a:tcPr>
                     <a:solidFill>
-                      <a:srgbClr val="0B0E14"/>
+                      <a:srgbClr val="FFFFFF"/>
                     </a:solidFill>
                   </a:tcPr>
                 </a:tc>
@@ -9020,9 +8933,9 @@
                       <a:pPr algn="ctr">
                         <a:defRPr sz="900">
                           <a:solidFill>
-                            <a:srgbClr val="B0BEC5"/>
+                            <a:srgbClr val="334155"/>
                           </a:solidFill>
-                          <a:latin typeface="Segoe UI"/>
+                          <a:latin typeface="Calibri"/>
                         </a:defRPr>
                       </a:pPr>
                       <a:r>
@@ -9032,7 +8945,7 @@
                   </a:txBody>
                   <a:tcPr>
                     <a:solidFill>
-                      <a:srgbClr val="0B0E14"/>
+                      <a:srgbClr val="FFFFFF"/>
                     </a:solidFill>
                   </a:tcPr>
                 </a:tc>
@@ -9046,9 +8959,9 @@
                       <a:pPr algn="ctr">
                         <a:defRPr sz="900" b="1">
                           <a:solidFill>
-                            <a:srgbClr val="00E5FF"/>
+                            <a:srgbClr val="000000"/>
                           </a:solidFill>
-                          <a:latin typeface="Segoe UI"/>
+                          <a:latin typeface="Calibri"/>
                         </a:defRPr>
                       </a:pPr>
                       <a:r>
@@ -9058,7 +8971,7 @@
                   </a:txBody>
                   <a:tcPr>
                     <a:solidFill>
-                      <a:srgbClr val="141826"/>
+                      <a:srgbClr val="F5F7FA"/>
                     </a:solidFill>
                   </a:tcPr>
                 </a:tc>
@@ -9070,9 +8983,9 @@
                       <a:pPr algn="l">
                         <a:defRPr sz="900">
                           <a:solidFill>
-                            <a:srgbClr val="B0BEC5"/>
+                            <a:srgbClr val="334155"/>
                           </a:solidFill>
-                          <a:latin typeface="Segoe UI"/>
+                          <a:latin typeface="Calibri"/>
                         </a:defRPr>
                       </a:pPr>
                       <a:r>
@@ -9082,7 +8995,7 @@
                   </a:txBody>
                   <a:tcPr>
                     <a:solidFill>
-                      <a:srgbClr val="141826"/>
+                      <a:srgbClr val="F5F7FA"/>
                     </a:solidFill>
                   </a:tcPr>
                 </a:tc>
@@ -9094,9 +9007,9 @@
                       <a:pPr algn="ctr">
                         <a:defRPr sz="900">
                           <a:solidFill>
-                            <a:srgbClr val="B0BEC5"/>
+                            <a:srgbClr val="334155"/>
                           </a:solidFill>
-                          <a:latin typeface="Segoe UI"/>
+                          <a:latin typeface="Calibri"/>
                         </a:defRPr>
                       </a:pPr>
                       <a:r>
@@ -9106,7 +9019,7 @@
                   </a:txBody>
                   <a:tcPr>
                     <a:solidFill>
-                      <a:srgbClr val="141826"/>
+                      <a:srgbClr val="F5F7FA"/>
                     </a:solidFill>
                   </a:tcPr>
                 </a:tc>
@@ -9118,9 +9031,9 @@
                       <a:pPr algn="ctr">
                         <a:defRPr sz="900">
                           <a:solidFill>
-                            <a:srgbClr val="B0BEC5"/>
+                            <a:srgbClr val="334155"/>
                           </a:solidFill>
-                          <a:latin typeface="Segoe UI"/>
+                          <a:latin typeface="Calibri"/>
                         </a:defRPr>
                       </a:pPr>
                       <a:r>
@@ -9130,7 +9043,7 @@
                   </a:txBody>
                   <a:tcPr>
                     <a:solidFill>
-                      <a:srgbClr val="141826"/>
+                      <a:srgbClr val="F5F7FA"/>
                     </a:solidFill>
                   </a:tcPr>
                 </a:tc>
@@ -9142,9 +9055,9 @@
                       <a:pPr algn="ctr">
                         <a:defRPr sz="900">
                           <a:solidFill>
-                            <a:srgbClr val="B0BEC5"/>
+                            <a:srgbClr val="334155"/>
                           </a:solidFill>
-                          <a:latin typeface="Segoe UI"/>
+                          <a:latin typeface="Calibri"/>
                         </a:defRPr>
                       </a:pPr>
                       <a:r>
@@ -9154,7 +9067,7 @@
                   </a:txBody>
                   <a:tcPr>
                     <a:solidFill>
-                      <a:srgbClr val="141826"/>
+                      <a:srgbClr val="F5F7FA"/>
                     </a:solidFill>
                   </a:tcPr>
                 </a:tc>
@@ -9166,9 +9079,9 @@
                       <a:pPr algn="ctr">
                         <a:defRPr sz="900">
                           <a:solidFill>
-                            <a:srgbClr val="B0BEC5"/>
+                            <a:srgbClr val="334155"/>
                           </a:solidFill>
-                          <a:latin typeface="Segoe UI"/>
+                          <a:latin typeface="Calibri"/>
                         </a:defRPr>
                       </a:pPr>
                       <a:r>
@@ -9178,7 +9091,7 @@
                   </a:txBody>
                   <a:tcPr>
                     <a:solidFill>
-                      <a:srgbClr val="141826"/>
+                      <a:srgbClr val="F5F7FA"/>
                     </a:solidFill>
                   </a:tcPr>
                 </a:tc>
@@ -9190,9 +9103,9 @@
                       <a:pPr algn="ctr">
                         <a:defRPr sz="900">
                           <a:solidFill>
-                            <a:srgbClr val="B0BEC5"/>
+                            <a:srgbClr val="334155"/>
                           </a:solidFill>
-                          <a:latin typeface="Segoe UI"/>
+                          <a:latin typeface="Calibri"/>
                         </a:defRPr>
                       </a:pPr>
                       <a:r>
@@ -9202,7 +9115,7 @@
                   </a:txBody>
                   <a:tcPr>
                     <a:solidFill>
-                      <a:srgbClr val="141826"/>
+                      <a:srgbClr val="F5F7FA"/>
                     </a:solidFill>
                   </a:tcPr>
                 </a:tc>
@@ -9216,9 +9129,9 @@
                       <a:pPr algn="ctr">
                         <a:defRPr sz="900" b="1">
                           <a:solidFill>
-                            <a:srgbClr val="00E5FF"/>
+                            <a:srgbClr val="000000"/>
                           </a:solidFill>
-                          <a:latin typeface="Segoe UI"/>
+                          <a:latin typeface="Calibri"/>
                         </a:defRPr>
                       </a:pPr>
                       <a:r>
@@ -9228,7 +9141,7 @@
                   </a:txBody>
                   <a:tcPr>
                     <a:solidFill>
-                      <a:srgbClr val="0B0E14"/>
+                      <a:srgbClr val="FFFFFF"/>
                     </a:solidFill>
                   </a:tcPr>
                 </a:tc>
@@ -9240,9 +9153,9 @@
                       <a:pPr algn="l">
                         <a:defRPr sz="900">
                           <a:solidFill>
-                            <a:srgbClr val="B0BEC5"/>
+                            <a:srgbClr val="334155"/>
                           </a:solidFill>
-                          <a:latin typeface="Segoe UI"/>
+                          <a:latin typeface="Calibri"/>
                         </a:defRPr>
                       </a:pPr>
                       <a:r>
@@ -9252,7 +9165,7 @@
                   </a:txBody>
                   <a:tcPr>
                     <a:solidFill>
-                      <a:srgbClr val="0B0E14"/>
+                      <a:srgbClr val="FFFFFF"/>
                     </a:solidFill>
                   </a:tcPr>
                 </a:tc>
@@ -9264,9 +9177,9 @@
                       <a:pPr algn="ctr">
                         <a:defRPr sz="900">
                           <a:solidFill>
-                            <a:srgbClr val="B0BEC5"/>
+                            <a:srgbClr val="334155"/>
                           </a:solidFill>
-                          <a:latin typeface="Segoe UI"/>
+                          <a:latin typeface="Calibri"/>
                         </a:defRPr>
                       </a:pPr>
                       <a:r>
@@ -9276,7 +9189,7 @@
                   </a:txBody>
                   <a:tcPr>
                     <a:solidFill>
-                      <a:srgbClr val="0B0E14"/>
+                      <a:srgbClr val="FFFFFF"/>
                     </a:solidFill>
                   </a:tcPr>
                 </a:tc>
@@ -9288,9 +9201,9 @@
                       <a:pPr algn="ctr">
                         <a:defRPr sz="900">
                           <a:solidFill>
-                            <a:srgbClr val="B0BEC5"/>
+                            <a:srgbClr val="334155"/>
                           </a:solidFill>
-                          <a:latin typeface="Segoe UI"/>
+                          <a:latin typeface="Calibri"/>
                         </a:defRPr>
                       </a:pPr>
                       <a:r>
@@ -9300,7 +9213,7 @@
                   </a:txBody>
                   <a:tcPr>
                     <a:solidFill>
-                      <a:srgbClr val="0B0E14"/>
+                      <a:srgbClr val="FFFFFF"/>
                     </a:solidFill>
                   </a:tcPr>
                 </a:tc>
@@ -9312,9 +9225,9 @@
                       <a:pPr algn="ctr">
                         <a:defRPr sz="900">
                           <a:solidFill>
-                            <a:srgbClr val="B0BEC5"/>
+                            <a:srgbClr val="334155"/>
                           </a:solidFill>
-                          <a:latin typeface="Segoe UI"/>
+                          <a:latin typeface="Calibri"/>
                         </a:defRPr>
                       </a:pPr>
                       <a:r>
@@ -9324,7 +9237,7 @@
                   </a:txBody>
                   <a:tcPr>
                     <a:solidFill>
-                      <a:srgbClr val="0B0E14"/>
+                      <a:srgbClr val="FFFFFF"/>
                     </a:solidFill>
                   </a:tcPr>
                 </a:tc>
@@ -9336,9 +9249,9 @@
                       <a:pPr algn="ctr">
                         <a:defRPr sz="900">
                           <a:solidFill>
-                            <a:srgbClr val="B0BEC5"/>
+                            <a:srgbClr val="334155"/>
                           </a:solidFill>
-                          <a:latin typeface="Segoe UI"/>
+                          <a:latin typeface="Calibri"/>
                         </a:defRPr>
                       </a:pPr>
                       <a:r>
@@ -9348,7 +9261,7 @@
                   </a:txBody>
                   <a:tcPr>
                     <a:solidFill>
-                      <a:srgbClr val="0B0E14"/>
+                      <a:srgbClr val="FFFFFF"/>
                     </a:solidFill>
                   </a:tcPr>
                 </a:tc>
@@ -9360,9 +9273,9 @@
                       <a:pPr algn="ctr">
                         <a:defRPr sz="900">
                           <a:solidFill>
-                            <a:srgbClr val="B0BEC5"/>
+                            <a:srgbClr val="334155"/>
                           </a:solidFill>
-                          <a:latin typeface="Segoe UI"/>
+                          <a:latin typeface="Calibri"/>
                         </a:defRPr>
                       </a:pPr>
                       <a:r>
@@ -9372,7 +9285,7 @@
                   </a:txBody>
                   <a:tcPr>
                     <a:solidFill>
-                      <a:srgbClr val="0B0E14"/>
+                      <a:srgbClr val="FFFFFF"/>
                     </a:solidFill>
                   </a:tcPr>
                 </a:tc>
@@ -9386,9 +9299,9 @@
                       <a:pPr algn="ctr">
                         <a:defRPr sz="900" b="1">
                           <a:solidFill>
-                            <a:srgbClr val="00E5FF"/>
+                            <a:srgbClr val="000000"/>
                           </a:solidFill>
-                          <a:latin typeface="Segoe UI"/>
+                          <a:latin typeface="Calibri"/>
                         </a:defRPr>
                       </a:pPr>
                       <a:r>
@@ -9398,7 +9311,7 @@
                   </a:txBody>
                   <a:tcPr>
                     <a:solidFill>
-                      <a:srgbClr val="141826"/>
+                      <a:srgbClr val="F5F7FA"/>
                     </a:solidFill>
                   </a:tcPr>
                 </a:tc>
@@ -9410,9 +9323,9 @@
                       <a:pPr algn="l">
                         <a:defRPr sz="900">
                           <a:solidFill>
-                            <a:srgbClr val="B0BEC5"/>
+                            <a:srgbClr val="334155"/>
                           </a:solidFill>
-                          <a:latin typeface="Segoe UI"/>
+                          <a:latin typeface="Calibri"/>
                         </a:defRPr>
                       </a:pPr>
                       <a:r>
@@ -9422,7 +9335,7 @@
                   </a:txBody>
                   <a:tcPr>
                     <a:solidFill>
-                      <a:srgbClr val="141826"/>
+                      <a:srgbClr val="F5F7FA"/>
                     </a:solidFill>
                   </a:tcPr>
                 </a:tc>
@@ -9434,9 +9347,9 @@
                       <a:pPr algn="ctr">
                         <a:defRPr sz="900">
                           <a:solidFill>
-                            <a:srgbClr val="B0BEC5"/>
+                            <a:srgbClr val="334155"/>
                           </a:solidFill>
-                          <a:latin typeface="Segoe UI"/>
+                          <a:latin typeface="Calibri"/>
                         </a:defRPr>
                       </a:pPr>
                       <a:r>
@@ -9446,7 +9359,7 @@
                   </a:txBody>
                   <a:tcPr>
                     <a:solidFill>
-                      <a:srgbClr val="141826"/>
+                      <a:srgbClr val="F5F7FA"/>
                     </a:solidFill>
                   </a:tcPr>
                 </a:tc>
@@ -9458,9 +9371,9 @@
                       <a:pPr algn="ctr">
                         <a:defRPr sz="900">
                           <a:solidFill>
-                            <a:srgbClr val="B0BEC5"/>
+                            <a:srgbClr val="334155"/>
                           </a:solidFill>
-                          <a:latin typeface="Segoe UI"/>
+                          <a:latin typeface="Calibri"/>
                         </a:defRPr>
                       </a:pPr>
                       <a:r>
@@ -9470,7 +9383,7 @@
                   </a:txBody>
                   <a:tcPr>
                     <a:solidFill>
-                      <a:srgbClr val="141826"/>
+                      <a:srgbClr val="F5F7FA"/>
                     </a:solidFill>
                   </a:tcPr>
                 </a:tc>
@@ -9482,9 +9395,9 @@
                       <a:pPr algn="ctr">
                         <a:defRPr sz="900">
                           <a:solidFill>
-                            <a:srgbClr val="B0BEC5"/>
+                            <a:srgbClr val="334155"/>
                           </a:solidFill>
-                          <a:latin typeface="Segoe UI"/>
+                          <a:latin typeface="Calibri"/>
                         </a:defRPr>
                       </a:pPr>
                       <a:r>
@@ -9494,7 +9407,7 @@
                   </a:txBody>
                   <a:tcPr>
                     <a:solidFill>
-                      <a:srgbClr val="141826"/>
+                      <a:srgbClr val="F5F7FA"/>
                     </a:solidFill>
                   </a:tcPr>
                 </a:tc>
@@ -9506,9 +9419,9 @@
                       <a:pPr algn="ctr">
                         <a:defRPr sz="900">
                           <a:solidFill>
-                            <a:srgbClr val="B0BEC5"/>
+                            <a:srgbClr val="334155"/>
                           </a:solidFill>
-                          <a:latin typeface="Segoe UI"/>
+                          <a:latin typeface="Calibri"/>
                         </a:defRPr>
                       </a:pPr>
                       <a:r>
@@ -9518,7 +9431,7 @@
                   </a:txBody>
                   <a:tcPr>
                     <a:solidFill>
-                      <a:srgbClr val="141826"/>
+                      <a:srgbClr val="F5F7FA"/>
                     </a:solidFill>
                   </a:tcPr>
                 </a:tc>
@@ -9530,9 +9443,9 @@
                       <a:pPr algn="ctr">
                         <a:defRPr sz="900">
                           <a:solidFill>
-                            <a:srgbClr val="B0BEC5"/>
+                            <a:srgbClr val="334155"/>
                           </a:solidFill>
-                          <a:latin typeface="Segoe UI"/>
+                          <a:latin typeface="Calibri"/>
                         </a:defRPr>
                       </a:pPr>
                       <a:r>
@@ -9542,7 +9455,7 @@
                   </a:txBody>
                   <a:tcPr>
                     <a:solidFill>
-                      <a:srgbClr val="141826"/>
+                      <a:srgbClr val="F5F7FA"/>
                     </a:solidFill>
                   </a:tcPr>
                 </a:tc>
@@ -9556,9 +9469,9 @@
                       <a:pPr algn="ctr">
                         <a:defRPr sz="900" b="1">
                           <a:solidFill>
-                            <a:srgbClr val="00E5FF"/>
+                            <a:srgbClr val="000000"/>
                           </a:solidFill>
-                          <a:latin typeface="Segoe UI"/>
+                          <a:latin typeface="Calibri"/>
                         </a:defRPr>
                       </a:pPr>
                       <a:r>
@@ -9568,7 +9481,7 @@
                   </a:txBody>
                   <a:tcPr>
                     <a:solidFill>
-                      <a:srgbClr val="0B0E14"/>
+                      <a:srgbClr val="FFFFFF"/>
                     </a:solidFill>
                   </a:tcPr>
                 </a:tc>
@@ -9580,9 +9493,9 @@
                       <a:pPr algn="l">
                         <a:defRPr sz="900">
                           <a:solidFill>
-                            <a:srgbClr val="B0BEC5"/>
+                            <a:srgbClr val="334155"/>
                           </a:solidFill>
-                          <a:latin typeface="Segoe UI"/>
+                          <a:latin typeface="Calibri"/>
                         </a:defRPr>
                       </a:pPr>
                       <a:r>
@@ -9592,7 +9505,7 @@
                   </a:txBody>
                   <a:tcPr>
                     <a:solidFill>
-                      <a:srgbClr val="0B0E14"/>
+                      <a:srgbClr val="FFFFFF"/>
                     </a:solidFill>
                   </a:tcPr>
                 </a:tc>
@@ -9604,9 +9517,9 @@
                       <a:pPr algn="ctr">
                         <a:defRPr sz="900">
                           <a:solidFill>
-                            <a:srgbClr val="B0BEC5"/>
+                            <a:srgbClr val="334155"/>
                           </a:solidFill>
-                          <a:latin typeface="Segoe UI"/>
+                          <a:latin typeface="Calibri"/>
                         </a:defRPr>
                       </a:pPr>
                       <a:r>
@@ -9616,7 +9529,7 @@
                   </a:txBody>
                   <a:tcPr>
                     <a:solidFill>
-                      <a:srgbClr val="0B0E14"/>
+                      <a:srgbClr val="FFFFFF"/>
                     </a:solidFill>
                   </a:tcPr>
                 </a:tc>
@@ -9628,9 +9541,9 @@
                       <a:pPr algn="ctr">
                         <a:defRPr sz="900">
                           <a:solidFill>
-                            <a:srgbClr val="B0BEC5"/>
+                            <a:srgbClr val="334155"/>
                           </a:solidFill>
-                          <a:latin typeface="Segoe UI"/>
+                          <a:latin typeface="Calibri"/>
                         </a:defRPr>
                       </a:pPr>
                       <a:r>
@@ -9640,7 +9553,7 @@
                   </a:txBody>
                   <a:tcPr>
                     <a:solidFill>
-                      <a:srgbClr val="0B0E14"/>
+                      <a:srgbClr val="FFFFFF"/>
                     </a:solidFill>
                   </a:tcPr>
                 </a:tc>
@@ -9652,9 +9565,9 @@
                       <a:pPr algn="ctr">
                         <a:defRPr sz="900">
                           <a:solidFill>
-                            <a:srgbClr val="B0BEC5"/>
+                            <a:srgbClr val="334155"/>
                           </a:solidFill>
-                          <a:latin typeface="Segoe UI"/>
+                          <a:latin typeface="Calibri"/>
                         </a:defRPr>
                       </a:pPr>
                       <a:r>
@@ -9664,7 +9577,7 @@
                   </a:txBody>
                   <a:tcPr>
                     <a:solidFill>
-                      <a:srgbClr val="0B0E14"/>
+                      <a:srgbClr val="FFFFFF"/>
                     </a:solidFill>
                   </a:tcPr>
                 </a:tc>
@@ -9676,9 +9589,9 @@
                       <a:pPr algn="ctr">
                         <a:defRPr sz="900">
                           <a:solidFill>
-                            <a:srgbClr val="B0BEC5"/>
+                            <a:srgbClr val="334155"/>
                           </a:solidFill>
-                          <a:latin typeface="Segoe UI"/>
+                          <a:latin typeface="Calibri"/>
                         </a:defRPr>
                       </a:pPr>
                       <a:r>
@@ -9688,7 +9601,7 @@
                   </a:txBody>
                   <a:tcPr>
                     <a:solidFill>
-                      <a:srgbClr val="0B0E14"/>
+                      <a:srgbClr val="FFFFFF"/>
                     </a:solidFill>
                   </a:tcPr>
                 </a:tc>
@@ -9700,9 +9613,9 @@
                       <a:pPr algn="ctr">
                         <a:defRPr sz="900">
                           <a:solidFill>
-                            <a:srgbClr val="B0BEC5"/>
+                            <a:srgbClr val="334155"/>
                           </a:solidFill>
-                          <a:latin typeface="Segoe UI"/>
+                          <a:latin typeface="Calibri"/>
                         </a:defRPr>
                       </a:pPr>
                       <a:r>
@@ -9712,7 +9625,7 @@
                   </a:txBody>
                   <a:tcPr>
                     <a:solidFill>
-                      <a:srgbClr val="0B0E14"/>
+                      <a:srgbClr val="FFFFFF"/>
                     </a:solidFill>
                   </a:tcPr>
                 </a:tc>
@@ -9735,7 +9648,7 @@
     <p:bg>
       <p:bgPr>
         <a:solidFill>
-          <a:srgbClr val="0B0E14"/>
+          <a:srgbClr val="FFFFFF"/>
         </a:solidFill>
         <a:effectLst/>
       </p:bgPr>
@@ -9770,11 +9683,11 @@
           <a:lstStyle/>
           <a:p>
             <a:pPr>
-              <a:defRPr sz="900" b="1">
-                <a:solidFill>
-                  <a:srgbClr val="00E5FF"/>
-                </a:solidFill>
-                <a:latin typeface="Trebuchet MS"/>
+              <a:defRPr sz="850" b="1">
+                <a:solidFill>
+                  <a:srgbClr val="787878"/>
+                </a:solidFill>
+                <a:latin typeface="Calibri"/>
               </a:defRPr>
             </a:pPr>
             <a:r>
@@ -9791,7 +9704,7 @@
         </p:nvSpPr>
         <p:spPr>
           <a:xfrm>
-            <a:off x="685800" y="594360"/>
+            <a:off x="685800" y="502920"/>
             <a:ext cx="10817352" cy="731520"/>
           </a:xfrm>
           <a:prstGeom prst="rect">
@@ -9806,11 +9719,11 @@
           <a:lstStyle/>
           <a:p>
             <a:pPr>
-              <a:defRPr sz="2800" b="1">
-                <a:solidFill>
-                  <a:srgbClr val="FFFFFF"/>
-                </a:solidFill>
-                <a:latin typeface="Trebuchet MS"/>
+              <a:defRPr sz="2600" b="1">
+                <a:solidFill>
+                  <a:srgbClr val="000000"/>
+                </a:solidFill>
+                <a:latin typeface="Georgia"/>
               </a:defRPr>
             </a:pPr>
             <a:r>
@@ -9827,14 +9740,14 @@
         </p:nvSpPr>
         <p:spPr>
           <a:xfrm>
-            <a:off x="685800" y="1280160"/>
-            <a:ext cx="10817352" cy="18288"/>
+            <a:off x="685800" y="1188720"/>
+            <a:ext cx="10817352" cy="13716"/>
           </a:xfrm>
           <a:prstGeom prst="rect">
             <a:avLst/>
           </a:prstGeom>
           <a:solidFill>
-            <a:srgbClr val="1E2235"/>
+            <a:srgbClr val="D2D2D2"/>
           </a:solidFill>
           <a:ln>
             <a:noFill/>
@@ -9887,9 +9800,9 @@
             <a:pPr>
               <a:defRPr sz="1600" b="1">
                 <a:solidFill>
-                  <a:srgbClr val="00E5FF"/>
-                </a:solidFill>
-                <a:latin typeface="Trebuchet MS"/>
+                  <a:srgbClr val="000000"/>
+                </a:solidFill>
+                <a:latin typeface="Georgia"/>
               </a:defRPr>
             </a:pPr>
             <a:r>
@@ -9906,9 +9819,9 @@
               </a:spcBef>
               <a:defRPr sz="1050">
                 <a:solidFill>
-                  <a:srgbClr val="B0BEC5"/>
-                </a:solidFill>
-                <a:latin typeface="Segoe UI"/>
+                  <a:srgbClr val="334155"/>
+                </a:solidFill>
+                <a:latin typeface="Calibri"/>
               </a:defRPr>
             </a:pPr>
             <a:r>
@@ -9959,11 +9872,11 @@
             <a:avLst/>
           </a:prstGeom>
           <a:solidFill>
-            <a:srgbClr val="1E2235"/>
+            <a:srgbClr val="F8FAFC"/>
           </a:solidFill>
-          <a:ln w="19050">
+          <a:ln w="12700">
             <a:solidFill>
-              <a:srgbClr val="3A405A"/>
+              <a:srgbClr val="DCE0E6"/>
             </a:solidFill>
           </a:ln>
         </p:spPr>
@@ -10014,9 +9927,9 @@
             <a:pPr>
               <a:defRPr sz="1300" b="1">
                 <a:solidFill>
-                  <a:srgbClr val="FFFFFF"/>
-                </a:solidFill>
-                <a:latin typeface="Segoe UI"/>
+                  <a:srgbClr val="000000"/>
+                </a:solidFill>
+                <a:latin typeface="Calibri"/>
               </a:defRPr>
             </a:pPr>
             <a:r>
@@ -10030,9 +9943,9 @@
               </a:spcBef>
               <a:defRPr sz="850" b="1">
                 <a:solidFill>
-                  <a:srgbClr val="EF5350"/>
-                </a:solidFill>
-                <a:latin typeface="Segoe UI"/>
+                  <a:srgbClr val="787878"/>
+                </a:solidFill>
+                <a:latin typeface="Calibri"/>
               </a:defRPr>
             </a:pPr>
             <a:r>
@@ -10066,9 +9979,9 @@
             <a:pPr algn="r">
               <a:defRPr sz="2200" b="1">
                 <a:solidFill>
-                  <a:srgbClr val="00E5FF"/>
-                </a:solidFill>
-                <a:latin typeface="Trebuchet MS"/>
+                  <a:srgbClr val="000000"/>
+                </a:solidFill>
+                <a:latin typeface="Georgia"/>
               </a:defRPr>
             </a:pPr>
             <a:r>
@@ -10092,11 +10005,11 @@
             <a:avLst/>
           </a:prstGeom>
           <a:solidFill>
-            <a:srgbClr val="1E2235"/>
+            <a:srgbClr val="F8FAFC"/>
           </a:solidFill>
-          <a:ln w="19050">
+          <a:ln w="12700">
             <a:solidFill>
-              <a:srgbClr val="3A405A"/>
+              <a:srgbClr val="DCE0E6"/>
             </a:solidFill>
           </a:ln>
         </p:spPr>
@@ -10147,9 +10060,9 @@
             <a:pPr>
               <a:defRPr sz="1300" b="1">
                 <a:solidFill>
-                  <a:srgbClr val="FFFFFF"/>
-                </a:solidFill>
-                <a:latin typeface="Segoe UI"/>
+                  <a:srgbClr val="000000"/>
+                </a:solidFill>
+                <a:latin typeface="Calibri"/>
               </a:defRPr>
             </a:pPr>
             <a:r>
@@ -10163,9 +10076,9 @@
               </a:spcBef>
               <a:defRPr sz="850" b="1">
                 <a:solidFill>
-                  <a:srgbClr val="00E676"/>
-                </a:solidFill>
-                <a:latin typeface="Segoe UI"/>
+                  <a:srgbClr val="787878"/>
+                </a:solidFill>
+                <a:latin typeface="Calibri"/>
               </a:defRPr>
             </a:pPr>
             <a:r>
@@ -10199,9 +10112,9 @@
             <a:pPr algn="r">
               <a:defRPr sz="2200" b="1">
                 <a:solidFill>
-                  <a:srgbClr val="00E676"/>
-                </a:solidFill>
-                <a:latin typeface="Trebuchet MS"/>
+                  <a:srgbClr val="000000"/>
+                </a:solidFill>
+                <a:latin typeface="Georgia"/>
               </a:defRPr>
             </a:pPr>
             <a:r>
@@ -10225,11 +10138,11 @@
             <a:avLst/>
           </a:prstGeom>
           <a:solidFill>
-            <a:srgbClr val="1E2235"/>
+            <a:srgbClr val="F8FAFC"/>
           </a:solidFill>
-          <a:ln w="19050">
+          <a:ln w="12700">
             <a:solidFill>
-              <a:srgbClr val="3A405A"/>
+              <a:srgbClr val="DCE0E6"/>
             </a:solidFill>
           </a:ln>
         </p:spPr>
@@ -10280,9 +10193,9 @@
             <a:pPr>
               <a:defRPr sz="1300" b="1">
                 <a:solidFill>
-                  <a:srgbClr val="FFFFFF"/>
-                </a:solidFill>
-                <a:latin typeface="Segoe UI"/>
+                  <a:srgbClr val="000000"/>
+                </a:solidFill>
+                <a:latin typeface="Calibri"/>
               </a:defRPr>
             </a:pPr>
             <a:r>
@@ -10296,9 +10209,9 @@
               </a:spcBef>
               <a:defRPr sz="850" b="1">
                 <a:solidFill>
-                  <a:srgbClr val="00E676"/>
-                </a:solidFill>
-                <a:latin typeface="Segoe UI"/>
+                  <a:srgbClr val="787878"/>
+                </a:solidFill>
+                <a:latin typeface="Calibri"/>
               </a:defRPr>
             </a:pPr>
             <a:r>
@@ -10332,9 +10245,9 @@
             <a:pPr algn="r">
               <a:defRPr sz="2200" b="1">
                 <a:solidFill>
-                  <a:srgbClr val="00E676"/>
-                </a:solidFill>
-                <a:latin typeface="Trebuchet MS"/>
+                  <a:srgbClr val="000000"/>
+                </a:solidFill>
+                <a:latin typeface="Georgia"/>
               </a:defRPr>
             </a:pPr>
             <a:r>
@@ -10358,11 +10271,11 @@
             <a:avLst/>
           </a:prstGeom>
           <a:solidFill>
-            <a:srgbClr val="1E2235"/>
+            <a:srgbClr val="F8FAFC"/>
           </a:solidFill>
-          <a:ln w="19050">
+          <a:ln w="12700">
             <a:solidFill>
-              <a:srgbClr val="3A405A"/>
+              <a:srgbClr val="DCE0E6"/>
             </a:solidFill>
           </a:ln>
         </p:spPr>
@@ -10413,9 +10326,9 @@
             <a:pPr>
               <a:defRPr sz="1300" b="1">
                 <a:solidFill>
-                  <a:srgbClr val="FFFFFF"/>
-                </a:solidFill>
-                <a:latin typeface="Segoe UI"/>
+                  <a:srgbClr val="000000"/>
+                </a:solidFill>
+                <a:latin typeface="Calibri"/>
               </a:defRPr>
             </a:pPr>
             <a:r>
@@ -10429,9 +10342,9 @@
               </a:spcBef>
               <a:defRPr sz="850" b="1">
                 <a:solidFill>
-                  <a:srgbClr val="00E676"/>
-                </a:solidFill>
-                <a:latin typeface="Segoe UI"/>
+                  <a:srgbClr val="787878"/>
+                </a:solidFill>
+                <a:latin typeface="Calibri"/>
               </a:defRPr>
             </a:pPr>
             <a:r>
@@ -10465,9 +10378,9 @@
             <a:pPr algn="r">
               <a:defRPr sz="2200" b="1">
                 <a:solidFill>
-                  <a:srgbClr val="FFFFFF"/>
-                </a:solidFill>
-                <a:latin typeface="Trebuchet MS"/>
+                  <a:srgbClr val="000000"/>
+                </a:solidFill>
+                <a:latin typeface="Georgia"/>
               </a:defRPr>
             </a:pPr>
             <a:r>
@@ -10490,7 +10403,7 @@
     <p:bg>
       <p:bgPr>
         <a:solidFill>
-          <a:srgbClr val="0B0E14"/>
+          <a:srgbClr val="FFFFFF"/>
         </a:solidFill>
         <a:effectLst/>
       </p:bgPr>
@@ -10525,11 +10438,11 @@
           <a:lstStyle/>
           <a:p>
             <a:pPr>
-              <a:defRPr sz="900" b="1">
-                <a:solidFill>
-                  <a:srgbClr val="00E5FF"/>
-                </a:solidFill>
-                <a:latin typeface="Trebuchet MS"/>
+              <a:defRPr sz="850" b="1">
+                <a:solidFill>
+                  <a:srgbClr val="787878"/>
+                </a:solidFill>
+                <a:latin typeface="Calibri"/>
               </a:defRPr>
             </a:pPr>
             <a:r>
@@ -10546,7 +10459,7 @@
         </p:nvSpPr>
         <p:spPr>
           <a:xfrm>
-            <a:off x="685800" y="594360"/>
+            <a:off x="685800" y="502920"/>
             <a:ext cx="10817352" cy="731520"/>
           </a:xfrm>
           <a:prstGeom prst="rect">
@@ -10561,11 +10474,11 @@
           <a:lstStyle/>
           <a:p>
             <a:pPr>
-              <a:defRPr sz="2800" b="1">
-                <a:solidFill>
-                  <a:srgbClr val="FFFFFF"/>
-                </a:solidFill>
-                <a:latin typeface="Trebuchet MS"/>
+              <a:defRPr sz="2600" b="1">
+                <a:solidFill>
+                  <a:srgbClr val="000000"/>
+                </a:solidFill>
+                <a:latin typeface="Georgia"/>
               </a:defRPr>
             </a:pPr>
             <a:r>
@@ -10582,14 +10495,14 @@
         </p:nvSpPr>
         <p:spPr>
           <a:xfrm>
-            <a:off x="685800" y="1280160"/>
-            <a:ext cx="10817352" cy="18288"/>
+            <a:off x="685800" y="1188720"/>
+            <a:ext cx="10817352" cy="13716"/>
           </a:xfrm>
           <a:prstGeom prst="rect">
             <a:avLst/>
           </a:prstGeom>
           <a:solidFill>
-            <a:srgbClr val="1E2235"/>
+            <a:srgbClr val="D2D2D2"/>
           </a:solidFill>
           <a:ln>
             <a:noFill/>
@@ -10642,9 +10555,9 @@
             <a:pPr>
               <a:defRPr sz="1600" b="1">
                 <a:solidFill>
-                  <a:srgbClr val="00E5FF"/>
-                </a:solidFill>
-                <a:latin typeface="Trebuchet MS"/>
+                  <a:srgbClr val="000000"/>
+                </a:solidFill>
+                <a:latin typeface="Georgia"/>
               </a:defRPr>
             </a:pPr>
             <a:r>
@@ -10661,9 +10574,9 @@
               </a:spcBef>
               <a:defRPr sz="1050">
                 <a:solidFill>
-                  <a:srgbClr val="B0BEC5"/>
-                </a:solidFill>
-                <a:latin typeface="Segoe UI"/>
+                  <a:srgbClr val="334155"/>
+                </a:solidFill>
+                <a:latin typeface="Calibri"/>
               </a:defRPr>
             </a:pPr>
             <a:r>
@@ -10729,7 +10642,7 @@
                           <a:solidFill>
                             <a:srgbClr val="FFFFFF"/>
                           </a:solidFill>
-                          <a:latin typeface="Trebuchet MS"/>
+                          <a:latin typeface="Georgia"/>
                         </a:defRPr>
                       </a:pPr>
                       <a:r>
@@ -10739,7 +10652,7 @@
                   </a:txBody>
                   <a:tcPr>
                     <a:solidFill>
-                      <a:srgbClr val="1E2235"/>
+                      <a:srgbClr val="282C37"/>
                     </a:solidFill>
                   </a:tcPr>
                 </a:tc>
@@ -10753,7 +10666,7 @@
                           <a:solidFill>
                             <a:srgbClr val="FFFFFF"/>
                           </a:solidFill>
-                          <a:latin typeface="Trebuchet MS"/>
+                          <a:latin typeface="Georgia"/>
                         </a:defRPr>
                       </a:pPr>
                       <a:r>
@@ -10763,7 +10676,7 @@
                   </a:txBody>
                   <a:tcPr>
                     <a:solidFill>
-                      <a:srgbClr val="1E2235"/>
+                      <a:srgbClr val="282C37"/>
                     </a:solidFill>
                   </a:tcPr>
                 </a:tc>
@@ -10777,7 +10690,7 @@
                           <a:solidFill>
                             <a:srgbClr val="FFFFFF"/>
                           </a:solidFill>
-                          <a:latin typeface="Trebuchet MS"/>
+                          <a:latin typeface="Georgia"/>
                         </a:defRPr>
                       </a:pPr>
                       <a:r>
@@ -10787,7 +10700,7 @@
                   </a:txBody>
                   <a:tcPr>
                     <a:solidFill>
-                      <a:srgbClr val="1E2235"/>
+                      <a:srgbClr val="282C37"/>
                     </a:solidFill>
                   </a:tcPr>
                 </a:tc>
@@ -10801,9 +10714,9 @@
                       <a:pPr algn="l">
                         <a:defRPr b="1" sz="1000">
                           <a:solidFill>
-                            <a:srgbClr val="FFFFFF"/>
+                            <a:srgbClr val="000000"/>
                           </a:solidFill>
-                          <a:latin typeface="Segoe UI"/>
+                          <a:latin typeface="Calibri"/>
                         </a:defRPr>
                       </a:pPr>
                       <a:r>
@@ -10813,7 +10726,7 @@
                   </a:txBody>
                   <a:tcPr>
                     <a:solidFill>
-                      <a:srgbClr val="141826"/>
+                      <a:srgbClr val="F5F7FA"/>
                     </a:solidFill>
                   </a:tcPr>
                 </a:tc>
@@ -10825,9 +10738,9 @@
                       <a:pPr algn="ctr">
                         <a:defRPr sz="1000">
                           <a:solidFill>
-                            <a:srgbClr val="00E5FF"/>
+                            <a:srgbClr val="334155"/>
                           </a:solidFill>
-                          <a:latin typeface="Segoe UI"/>
+                          <a:latin typeface="Calibri"/>
                         </a:defRPr>
                       </a:pPr>
                       <a:r>
@@ -10837,7 +10750,7 @@
                   </a:txBody>
                   <a:tcPr>
                     <a:solidFill>
-                      <a:srgbClr val="141826"/>
+                      <a:srgbClr val="F5F7FA"/>
                     </a:solidFill>
                   </a:tcPr>
                 </a:tc>
@@ -10849,9 +10762,9 @@
                       <a:pPr algn="ctr">
                         <a:defRPr sz="1000">
                           <a:solidFill>
-                            <a:srgbClr val="EF5350"/>
+                            <a:srgbClr val="334155"/>
                           </a:solidFill>
-                          <a:latin typeface="Segoe UI"/>
+                          <a:latin typeface="Calibri"/>
                         </a:defRPr>
                       </a:pPr>
                       <a:r>
@@ -10861,7 +10774,7 @@
                   </a:txBody>
                   <a:tcPr>
                     <a:solidFill>
-                      <a:srgbClr val="141826"/>
+                      <a:srgbClr val="F5F7FA"/>
                     </a:solidFill>
                   </a:tcPr>
                 </a:tc>
@@ -10875,9 +10788,9 @@
                       <a:pPr algn="l">
                         <a:defRPr b="1" sz="1000">
                           <a:solidFill>
-                            <a:srgbClr val="FFFFFF"/>
+                            <a:srgbClr val="000000"/>
                           </a:solidFill>
-                          <a:latin typeface="Segoe UI"/>
+                          <a:latin typeface="Calibri"/>
                         </a:defRPr>
                       </a:pPr>
                       <a:r>
@@ -10887,7 +10800,7 @@
                   </a:txBody>
                   <a:tcPr>
                     <a:solidFill>
-                      <a:srgbClr val="0B0E14"/>
+                      <a:srgbClr val="FFFFFF"/>
                     </a:solidFill>
                   </a:tcPr>
                 </a:tc>
@@ -10899,9 +10812,9 @@
                       <a:pPr algn="ctr">
                         <a:defRPr sz="1000">
                           <a:solidFill>
-                            <a:srgbClr val="00E5FF"/>
+                            <a:srgbClr val="334155"/>
                           </a:solidFill>
-                          <a:latin typeface="Segoe UI"/>
+                          <a:latin typeface="Calibri"/>
                         </a:defRPr>
                       </a:pPr>
                       <a:r>
@@ -10911,7 +10824,7 @@
                   </a:txBody>
                   <a:tcPr>
                     <a:solidFill>
-                      <a:srgbClr val="0B0E14"/>
+                      <a:srgbClr val="FFFFFF"/>
                     </a:solidFill>
                   </a:tcPr>
                 </a:tc>
@@ -10923,9 +10836,9 @@
                       <a:pPr algn="ctr">
                         <a:defRPr sz="1000">
                           <a:solidFill>
-                            <a:srgbClr val="EF5350"/>
+                            <a:srgbClr val="334155"/>
                           </a:solidFill>
-                          <a:latin typeface="Segoe UI"/>
+                          <a:latin typeface="Calibri"/>
                         </a:defRPr>
                       </a:pPr>
                       <a:r>
@@ -10935,7 +10848,7 @@
                   </a:txBody>
                   <a:tcPr>
                     <a:solidFill>
-                      <a:srgbClr val="0B0E14"/>
+                      <a:srgbClr val="FFFFFF"/>
                     </a:solidFill>
                   </a:tcPr>
                 </a:tc>
@@ -10949,9 +10862,9 @@
                       <a:pPr algn="l">
                         <a:defRPr b="1" sz="1000">
                           <a:solidFill>
-                            <a:srgbClr val="FFFFFF"/>
+                            <a:srgbClr val="000000"/>
                           </a:solidFill>
-                          <a:latin typeface="Segoe UI"/>
+                          <a:latin typeface="Calibri"/>
                         </a:defRPr>
                       </a:pPr>
                       <a:r>
@@ -10961,7 +10874,7 @@
                   </a:txBody>
                   <a:tcPr>
                     <a:solidFill>
-                      <a:srgbClr val="141826"/>
+                      <a:srgbClr val="F5F7FA"/>
                     </a:solidFill>
                   </a:tcPr>
                 </a:tc>
@@ -10973,9 +10886,9 @@
                       <a:pPr algn="ctr">
                         <a:defRPr sz="1000">
                           <a:solidFill>
-                            <a:srgbClr val="00E5FF"/>
+                            <a:srgbClr val="334155"/>
                           </a:solidFill>
-                          <a:latin typeface="Segoe UI"/>
+                          <a:latin typeface="Calibri"/>
                         </a:defRPr>
                       </a:pPr>
                       <a:r>
@@ -10985,7 +10898,7 @@
                   </a:txBody>
                   <a:tcPr>
                     <a:solidFill>
-                      <a:srgbClr val="141826"/>
+                      <a:srgbClr val="F5F7FA"/>
                     </a:solidFill>
                   </a:tcPr>
                 </a:tc>
@@ -10997,9 +10910,9 @@
                       <a:pPr algn="ctr">
                         <a:defRPr sz="1000">
                           <a:solidFill>
-                            <a:srgbClr val="EF5350"/>
+                            <a:srgbClr val="334155"/>
                           </a:solidFill>
-                          <a:latin typeface="Segoe UI"/>
+                          <a:latin typeface="Calibri"/>
                         </a:defRPr>
                       </a:pPr>
                       <a:r>
@@ -11009,7 +10922,7 @@
                   </a:txBody>
                   <a:tcPr>
                     <a:solidFill>
-                      <a:srgbClr val="141826"/>
+                      <a:srgbClr val="F5F7FA"/>
                     </a:solidFill>
                   </a:tcPr>
                 </a:tc>
@@ -11023,9 +10936,9 @@
                       <a:pPr algn="l">
                         <a:defRPr b="1" sz="1000">
                           <a:solidFill>
-                            <a:srgbClr val="FFFFFF"/>
+                            <a:srgbClr val="000000"/>
                           </a:solidFill>
-                          <a:latin typeface="Segoe UI"/>
+                          <a:latin typeface="Calibri"/>
                         </a:defRPr>
                       </a:pPr>
                       <a:r>
@@ -11035,7 +10948,7 @@
                   </a:txBody>
                   <a:tcPr>
                     <a:solidFill>
-                      <a:srgbClr val="0B0E14"/>
+                      <a:srgbClr val="FFFFFF"/>
                     </a:solidFill>
                   </a:tcPr>
                 </a:tc>
@@ -11047,9 +10960,9 @@
                       <a:pPr algn="ctr">
                         <a:defRPr sz="1000">
                           <a:solidFill>
-                            <a:srgbClr val="00E5FF"/>
+                            <a:srgbClr val="334155"/>
                           </a:solidFill>
-                          <a:latin typeface="Segoe UI"/>
+                          <a:latin typeface="Calibri"/>
                         </a:defRPr>
                       </a:pPr>
                       <a:r>
@@ -11059,7 +10972,7 @@
                   </a:txBody>
                   <a:tcPr>
                     <a:solidFill>
-                      <a:srgbClr val="0B0E14"/>
+                      <a:srgbClr val="FFFFFF"/>
                     </a:solidFill>
                   </a:tcPr>
                 </a:tc>
@@ -11071,9 +10984,9 @@
                       <a:pPr algn="ctr">
                         <a:defRPr sz="1000">
                           <a:solidFill>
-                            <a:srgbClr val="EF5350"/>
+                            <a:srgbClr val="334155"/>
                           </a:solidFill>
-                          <a:latin typeface="Segoe UI"/>
+                          <a:latin typeface="Calibri"/>
                         </a:defRPr>
                       </a:pPr>
                       <a:r>
@@ -11083,7 +10996,7 @@
                   </a:txBody>
                   <a:tcPr>
                     <a:solidFill>
-                      <a:srgbClr val="0B0E14"/>
+                      <a:srgbClr val="FFFFFF"/>
                     </a:solidFill>
                   </a:tcPr>
                 </a:tc>
@@ -11097,9 +11010,9 @@
                       <a:pPr algn="l">
                         <a:defRPr b="1" sz="1000">
                           <a:solidFill>
-                            <a:srgbClr val="FFFFFF"/>
+                            <a:srgbClr val="000000"/>
                           </a:solidFill>
-                          <a:latin typeface="Segoe UI"/>
+                          <a:latin typeface="Calibri"/>
                         </a:defRPr>
                       </a:pPr>
                       <a:r>
@@ -11109,7 +11022,7 @@
                   </a:txBody>
                   <a:tcPr>
                     <a:solidFill>
-                      <a:srgbClr val="141826"/>
+                      <a:srgbClr val="F5F7FA"/>
                     </a:solidFill>
                   </a:tcPr>
                 </a:tc>
@@ -11121,9 +11034,9 @@
                       <a:pPr algn="ctr">
                         <a:defRPr sz="1000">
                           <a:solidFill>
-                            <a:srgbClr val="00E5FF"/>
+                            <a:srgbClr val="334155"/>
                           </a:solidFill>
-                          <a:latin typeface="Segoe UI"/>
+                          <a:latin typeface="Calibri"/>
                         </a:defRPr>
                       </a:pPr>
                       <a:r>
@@ -11133,7 +11046,7 @@
                   </a:txBody>
                   <a:tcPr>
                     <a:solidFill>
-                      <a:srgbClr val="141826"/>
+                      <a:srgbClr val="F5F7FA"/>
                     </a:solidFill>
                   </a:tcPr>
                 </a:tc>
@@ -11145,9 +11058,9 @@
                       <a:pPr algn="ctr">
                         <a:defRPr sz="1000">
                           <a:solidFill>
-                            <a:srgbClr val="EF5350"/>
+                            <a:srgbClr val="334155"/>
                           </a:solidFill>
-                          <a:latin typeface="Segoe UI"/>
+                          <a:latin typeface="Calibri"/>
                         </a:defRPr>
                       </a:pPr>
                       <a:r>
@@ -11157,7 +11070,7 @@
                   </a:txBody>
                   <a:tcPr>
                     <a:solidFill>
-                      <a:srgbClr val="141826"/>
+                      <a:srgbClr val="F5F7FA"/>
                     </a:solidFill>
                   </a:tcPr>
                 </a:tc>
